--- a/comprehensive_demo.pptx
+++ b/comprehensive_demo.pptx
@@ -463,14 +463,14 @@
           </a:gradFill>
         </p:spPr>
         <p:txBody>
-          <a:bodyPr wrap="square" rtlCol="0" anchor="ctr">
-            <a:normAutofit/>
+          <a:bodyPr wrap="square" rtlCol="0" anchor="ctr" lIns="91440" tIns="45720" rIns="91440" bIns="45720">
+            <a:normAutofit fontScale="100000" lnSpcReduction="0"/>
           </a:bodyPr>
           <a:lstStyle/>
           <a:p>
-            <a:pPr algn="ctr"/>
-            <a:r>
-              <a:rPr lang="en-US" sz="3937" dirty="0">
+            <a:pPr algn="ctr" marL="0" marR="0" indent="0"/>
+            <a:r>
+              <a:rPr lang="en-US" sz="3649" dirty="0" smtClean="0">
                 <a:solidFill>
                   <a:srgbClr val="000000"/>
                 </a:solidFill>
@@ -507,14 +507,14 @@
           </a:gradFill>
         </p:spPr>
         <p:txBody>
-          <a:bodyPr wrap="square" rtlCol="0" anchor="ctr">
-            <a:normAutofit/>
+          <a:bodyPr wrap="square" rtlCol="0" anchor="ctr" lIns="91440" tIns="45720" rIns="91440" bIns="45720">
+            <a:normAutofit fontScale="100000" lnSpcReduction="0"/>
           </a:bodyPr>
           <a:lstStyle/>
           <a:p>
-            <a:pPr algn="ctr"/>
-            <a:r>
-              <a:rPr lang="en-US" sz="4400" dirty="0">
+            <a:pPr algn="ctr" marL="0" marR="0" indent="0"/>
+            <a:r>
+              <a:rPr lang="en-US" sz="4561" dirty="0" smtClean="0">
                 <a:solidFill>
                   <a:srgbClr val="000000"/>
                 </a:solidFill>
@@ -551,14 +551,14 @@
           </a:gradFill>
         </p:spPr>
         <p:txBody>
-          <a:bodyPr wrap="square" rtlCol="0" anchor="ctr">
-            <a:normAutofit/>
+          <a:bodyPr wrap="square" rtlCol="0" anchor="ctr" lIns="91440" tIns="45720" rIns="91440" bIns="45720">
+            <a:normAutofit fontScale="100000" lnSpcReduction="0"/>
           </a:bodyPr>
           <a:lstStyle/>
           <a:p>
-            <a:pPr algn="ctr"/>
-            <a:r>
-              <a:rPr lang="en-US" sz="4400" dirty="0">
+            <a:pPr algn="ctr" marL="0" marR="0" indent="0"/>
+            <a:r>
+              <a:rPr lang="en-US" sz="4561" dirty="0" smtClean="0">
                 <a:solidFill>
                   <a:srgbClr val="000000"/>
                 </a:solidFill>
@@ -598,14 +598,14 @@
           </a:gradFill>
         </p:spPr>
         <p:txBody>
-          <a:bodyPr wrap="square" rtlCol="0" anchor="ctr">
-            <a:normAutofit/>
+          <a:bodyPr wrap="square" rtlCol="0" anchor="ctr" lIns="91440" tIns="45720" rIns="91440" bIns="45720">
+            <a:normAutofit fontScale="100000" lnSpcReduction="0"/>
           </a:bodyPr>
           <a:lstStyle/>
           <a:p>
-            <a:pPr algn="ctr"/>
-            <a:r>
-              <a:rPr lang="en-US" sz="4400" dirty="0">
+            <a:pPr algn="ctr" marL="0" marR="0" indent="0"/>
+            <a:r>
+              <a:rPr lang="en-US" sz="5212" dirty="0" smtClean="0">
                 <a:solidFill>
                   <a:srgbClr val="000000"/>
                 </a:solidFill>
@@ -642,14 +642,14 @@
           </a:gradFill>
         </p:spPr>
         <p:txBody>
-          <a:bodyPr wrap="square" rtlCol="0" anchor="ctr">
-            <a:normAutofit/>
+          <a:bodyPr wrap="square" rtlCol="0" anchor="ctr" lIns="91440" tIns="45720" rIns="91440" bIns="45720">
+            <a:normAutofit fontScale="100000" lnSpcReduction="0"/>
           </a:bodyPr>
           <a:lstStyle/>
           <a:p>
-            <a:pPr algn="ctr"/>
-            <a:r>
-              <a:rPr lang="en-US" sz="3937" dirty="0">
+            <a:pPr algn="ctr" marL="0" marR="0" indent="0"/>
+            <a:r>
+              <a:rPr lang="en-US" sz="3649" dirty="0" smtClean="0">
                 <a:solidFill>
                   <a:srgbClr val="000000"/>
                 </a:solidFill>
@@ -740,14 +740,14 @@
           </a:solidFill>
         </p:spPr>
         <p:txBody>
-          <a:bodyPr wrap="square" rtlCol="0" anchor="ctr">
-            <a:normAutofit/>
+          <a:bodyPr wrap="square" rtlCol="0" anchor="ctr" lIns="91440" tIns="45720" rIns="91440" bIns="45720">
+            <a:normAutofit fontScale="100000" lnSpcReduction="0"/>
           </a:bodyPr>
           <a:lstStyle/>
           <a:p>
-            <a:pPr algn="ctr"/>
-            <a:r>
-              <a:rPr lang="en-US" sz="4294" dirty="0">
+            <a:pPr algn="ctr" marL="0" marR="0" indent="0"/>
+            <a:r>
+              <a:rPr lang="en-US" sz="4033" dirty="0" smtClean="0">
                 <a:solidFill>
                   <a:srgbClr val="FFFFFF"/>
                 </a:solidFill>
@@ -783,14 +783,14 @@
           </a:ln>
         </p:spPr>
         <p:txBody>
-          <a:bodyPr wrap="square" rtlCol="0" anchor="ctr">
-            <a:normAutofit/>
+          <a:bodyPr wrap="square" rtlCol="0" anchor="ctr" lIns="91440" tIns="45720" rIns="91440" bIns="45720">
+            <a:normAutofit fontScale="100000" lnSpcReduction="0"/>
           </a:bodyPr>
           <a:lstStyle/>
           <a:p>
-            <a:pPr algn="ctr"/>
-            <a:r>
-              <a:rPr lang="en-US" sz="2624" dirty="0">
+            <a:pPr algn="ctr" marL="0" marR="0" indent="0"/>
+            <a:r>
+              <a:rPr lang="en-US" sz="2432" dirty="0" smtClean="0">
                 <a:solidFill>
                   <a:srgbClr val="FFFFFF"/>
                 </a:solidFill>
@@ -826,14 +826,14 @@
           </a:ln>
         </p:spPr>
         <p:txBody>
-          <a:bodyPr wrap="square" rtlCol="0" anchor="ctr">
-            <a:normAutofit/>
+          <a:bodyPr wrap="square" rtlCol="0" anchor="ctr" lIns="91440" tIns="45720" rIns="91440" bIns="45720">
+            <a:normAutofit fontScale="100000" lnSpcReduction="0"/>
           </a:bodyPr>
           <a:lstStyle/>
           <a:p>
-            <a:pPr algn="ctr"/>
-            <a:r>
-              <a:rPr lang="en-US" sz="2624" dirty="0">
+            <a:pPr algn="ctr" marL="0" marR="0" indent="0"/>
+            <a:r>
+              <a:rPr lang="en-US" sz="2432" dirty="0" smtClean="0">
                 <a:solidFill>
                   <a:srgbClr val="000000"/>
                 </a:solidFill>
@@ -869,14 +869,14 @@
           </a:ln>
         </p:spPr>
         <p:txBody>
-          <a:bodyPr wrap="square" rtlCol="0" anchor="ctr">
-            <a:normAutofit/>
+          <a:bodyPr wrap="square" rtlCol="0" anchor="ctr" lIns="91440" tIns="45720" rIns="91440" bIns="45720">
+            <a:normAutofit fontScale="100000" lnSpcReduction="0"/>
           </a:bodyPr>
           <a:lstStyle/>
           <a:p>
-            <a:pPr algn="ctr"/>
-            <a:r>
-              <a:rPr lang="en-US" sz="2624" dirty="0">
+            <a:pPr algn="ctr" marL="0" marR="0" indent="0"/>
+            <a:r>
+              <a:rPr lang="en-US" sz="2432" dirty="0" smtClean="0">
                 <a:solidFill>
                   <a:srgbClr val="000000"/>
                 </a:solidFill>
@@ -967,14 +967,14 @@
           </a:solidFill>
         </p:spPr>
         <p:txBody>
-          <a:bodyPr wrap="square" rtlCol="0" anchor="ctr">
-            <a:normAutofit/>
+          <a:bodyPr wrap="square" rtlCol="0" anchor="ctr" lIns="91440" tIns="45720" rIns="91440" bIns="45720">
+            <a:normAutofit fontScale="100000" lnSpcReduction="0"/>
           </a:bodyPr>
           <a:lstStyle/>
           <a:p>
-            <a:pPr algn="ctr"/>
-            <a:r>
-              <a:rPr lang="en-US" sz="4400" dirty="0">
+            <a:pPr algn="ctr" marL="0" marR="0" indent="0"/>
+            <a:r>
+              <a:rPr lang="en-US" sz="4225" dirty="0" smtClean="0">
                 <a:solidFill>
                   <a:srgbClr val="FFFFFF"/>
                 </a:solidFill>
@@ -1003,14 +1003,14 @@
           </a:solidFill>
         </p:spPr>
         <p:txBody>
-          <a:bodyPr wrap="square" rtlCol="0" anchor="ctr">
-            <a:normAutofit/>
+          <a:bodyPr wrap="square" rtlCol="0" anchor="ctr" lIns="91440" tIns="45720" rIns="91440" bIns="45720">
+            <a:normAutofit fontScale="100000" lnSpcReduction="0"/>
           </a:bodyPr>
           <a:lstStyle/>
           <a:p>
-            <a:pPr algn="ctr"/>
-            <a:r>
-              <a:rPr lang="en-US" sz="4049" dirty="0">
+            <a:pPr algn="ctr" marL="0" marR="0" indent="0"/>
+            <a:r>
+              <a:rPr lang="en-US" sz="3638" dirty="0" smtClean="0">
                 <a:solidFill>
                   <a:srgbClr val="FFFFFF"/>
                 </a:solidFill>
@@ -1039,14 +1039,14 @@
           </a:solidFill>
         </p:spPr>
         <p:txBody>
-          <a:bodyPr wrap="square" rtlCol="0" anchor="ctr">
-            <a:normAutofit/>
+          <a:bodyPr wrap="square" rtlCol="0" anchor="ctr" lIns="91440" tIns="45720" rIns="91440" bIns="45720">
+            <a:normAutofit fontScale="100000" lnSpcReduction="0"/>
           </a:bodyPr>
           <a:lstStyle/>
           <a:p>
-            <a:pPr algn="ctr"/>
-            <a:r>
-              <a:rPr lang="en-US" sz="4400" dirty="0">
+            <a:pPr algn="ctr" marL="0" marR="0" indent="0"/>
+            <a:r>
+              <a:rPr lang="en-US" sz="4225" dirty="0" smtClean="0">
                 <a:solidFill>
                   <a:srgbClr val="FFFFFF"/>
                 </a:solidFill>
@@ -1075,14 +1075,14 @@
           </a:solidFill>
         </p:spPr>
         <p:txBody>
-          <a:bodyPr wrap="square" rtlCol="0" anchor="ctr">
-            <a:normAutofit/>
+          <a:bodyPr wrap="square" rtlCol="0" anchor="ctr" lIns="91440" tIns="45720" rIns="91440" bIns="45720">
+            <a:normAutofit fontScale="100000" lnSpcReduction="0"/>
           </a:bodyPr>
           <a:lstStyle/>
           <a:p>
-            <a:pPr algn="ctr"/>
-            <a:r>
-              <a:rPr lang="en-US" sz="4400" dirty="0">
+            <a:pPr algn="ctr" marL="0" marR="0" indent="0"/>
+            <a:r>
+              <a:rPr lang="en-US" sz="4225" dirty="0" smtClean="0">
                 <a:solidFill>
                   <a:srgbClr val="FFFFFF"/>
                 </a:solidFill>
@@ -1111,14 +1111,14 @@
           </a:solidFill>
         </p:spPr>
         <p:txBody>
-          <a:bodyPr wrap="square" rtlCol="0" anchor="ctr">
-            <a:normAutofit/>
+          <a:bodyPr wrap="square" rtlCol="0" anchor="ctr" lIns="91440" tIns="45720" rIns="91440" bIns="45720">
+            <a:normAutofit fontScale="100000" lnSpcReduction="0"/>
           </a:bodyPr>
           <a:lstStyle/>
           <a:p>
-            <a:pPr algn="ctr"/>
-            <a:r>
-              <a:rPr lang="en-US" sz="4400" dirty="0">
+            <a:pPr algn="ctr" marL="0" marR="0" indent="0"/>
+            <a:r>
+              <a:rPr lang="en-US" sz="4225" dirty="0" smtClean="0">
                 <a:solidFill>
                   <a:srgbClr val="FFFFFF"/>
                 </a:solidFill>
@@ -1147,14 +1147,14 @@
           </a:solidFill>
         </p:spPr>
         <p:txBody>
-          <a:bodyPr wrap="square" rtlCol="0" anchor="ctr">
-            <a:normAutofit/>
+          <a:bodyPr wrap="square" rtlCol="0" anchor="ctr" lIns="91440" tIns="45720" rIns="91440" bIns="45720">
+            <a:normAutofit fontScale="100000" lnSpcReduction="0"/>
           </a:bodyPr>
           <a:lstStyle/>
           <a:p>
-            <a:pPr algn="ctr"/>
-            <a:r>
-              <a:rPr lang="en-US" sz="4400" dirty="0">
+            <a:pPr algn="ctr" marL="0" marR="0" indent="0"/>
+            <a:r>
+              <a:rPr lang="en-US" sz="4225" dirty="0" smtClean="0">
                 <a:solidFill>
                   <a:srgbClr val="000000"/>
                 </a:solidFill>
@@ -2519,14 +2519,14 @@
           </a:solidFill>
         </p:spPr>
         <p:txBody>
-          <a:bodyPr wrap="square" rtlCol="0" anchor="ctr">
-            <a:normAutofit/>
+          <a:bodyPr wrap="square" rtlCol="0" anchor="ctr" lIns="91440" tIns="45720" rIns="91440" bIns="45720">
+            <a:normAutofit fontScale="100000" lnSpcReduction="0"/>
           </a:bodyPr>
           <a:lstStyle/>
           <a:p>
-            <a:pPr algn="ctr"/>
-            <a:r>
-              <a:rPr lang="en-US" sz="2004" dirty="0">
+            <a:pPr algn="ctr" marL="0" marR="0" indent="0"/>
+            <a:r>
+              <a:rPr lang="en-US" sz="1742" dirty="0" smtClean="0">
                 <a:solidFill>
                   <a:srgbClr val="FFFFFF"/>
                 </a:solidFill>
@@ -2579,14 +2579,14 @@
           </a:solidFill>
         </p:spPr>
         <p:txBody>
-          <a:bodyPr wrap="square" rtlCol="0" anchor="ctr">
-            <a:normAutofit/>
+          <a:bodyPr wrap="square" rtlCol="0" anchor="ctr" lIns="91440" tIns="45720" rIns="91440" bIns="45720">
+            <a:normAutofit fontScale="100000" lnSpcReduction="0"/>
           </a:bodyPr>
           <a:lstStyle/>
           <a:p>
-            <a:pPr algn="ctr"/>
-            <a:r>
-              <a:rPr lang="en-US" sz="2449" dirty="0">
+            <a:pPr algn="ctr" marL="0" marR="0" indent="0"/>
+            <a:r>
+              <a:rPr lang="en-US" sz="2129" dirty="0" smtClean="0">
                 <a:solidFill>
                   <a:srgbClr val="000000"/>
                 </a:solidFill>
@@ -2639,14 +2639,14 @@
           </a:solidFill>
         </p:spPr>
         <p:txBody>
-          <a:bodyPr wrap="square" rtlCol="0" anchor="ctr">
-            <a:normAutofit/>
+          <a:bodyPr wrap="square" rtlCol="0" anchor="ctr" lIns="91440" tIns="45720" rIns="91440" bIns="45720">
+            <a:normAutofit fontScale="100000" lnSpcReduction="0"/>
           </a:bodyPr>
           <a:lstStyle/>
           <a:p>
-            <a:pPr algn="ctr"/>
-            <a:r>
-              <a:rPr lang="en-US" sz="2204" dirty="0">
+            <a:pPr algn="ctr" marL="0" marR="0" indent="0"/>
+            <a:r>
+              <a:rPr lang="en-US" sz="1916" dirty="0" smtClean="0">
                 <a:solidFill>
                   <a:srgbClr val="000000"/>
                 </a:solidFill>
@@ -2699,14 +2699,14 @@
           </a:solidFill>
         </p:spPr>
         <p:txBody>
-          <a:bodyPr wrap="square" rtlCol="0" anchor="ctr">
-            <a:normAutofit/>
+          <a:bodyPr wrap="square" rtlCol="0" anchor="ctr" lIns="91440" tIns="45720" rIns="91440" bIns="45720">
+            <a:normAutofit fontScale="100000" lnSpcReduction="0"/>
           </a:bodyPr>
           <a:lstStyle/>
           <a:p>
-            <a:pPr algn="ctr"/>
-            <a:r>
-              <a:rPr lang="en-US" sz="2449" dirty="0">
+            <a:pPr algn="ctr" marL="0" marR="0" indent="0"/>
+            <a:r>
+              <a:rPr lang="en-US" sz="2129" dirty="0" smtClean="0">
                 <a:solidFill>
                   <a:srgbClr val="000000"/>
                 </a:solidFill>
@@ -2797,14 +2797,14 @@
           </a:solidFill>
         </p:spPr>
         <p:txBody>
-          <a:bodyPr wrap="square" rtlCol="0" anchor="ctr">
-            <a:normAutofit/>
+          <a:bodyPr wrap="square" rtlCol="0" anchor="ctr" lIns="91440" tIns="45720" rIns="91440" bIns="45720">
+            <a:normAutofit fontScale="100000" lnSpcReduction="0"/>
           </a:bodyPr>
           <a:lstStyle/>
           <a:p>
-            <a:pPr algn="ctr"/>
-            <a:r>
-              <a:rPr lang="en-US" sz="3779" dirty="0">
+            <a:pPr algn="ctr" marL="0" marR="0" indent="0"/>
+            <a:r>
+              <a:rPr lang="en-US" sz="2856" dirty="0" smtClean="0">
                 <a:solidFill>
                   <a:srgbClr val="FFFFFF"/>
                 </a:solidFill>
@@ -2881,14 +2881,14 @@
           </a:solidFill>
         </p:spPr>
         <p:txBody>
-          <a:bodyPr wrap="square" rtlCol="0" anchor="ctr">
-            <a:normAutofit/>
+          <a:bodyPr wrap="square" rtlCol="0" anchor="ctr" lIns="91440" tIns="45720" rIns="91440" bIns="45720">
+            <a:normAutofit fontScale="100000" lnSpcReduction="0"/>
           </a:bodyPr>
           <a:lstStyle/>
           <a:p>
-            <a:pPr algn="ctr"/>
-            <a:r>
-              <a:rPr lang="en-US" sz="3149" dirty="0">
+            <a:pPr algn="ctr" marL="0" marR="0" indent="0"/>
+            <a:r>
+              <a:rPr lang="en-US" sz="2171" dirty="0" smtClean="0">
                 <a:solidFill>
                   <a:srgbClr val="FFFFFF"/>
                 </a:solidFill>
@@ -2917,14 +2917,14 @@
           </a:solidFill>
         </p:spPr>
         <p:txBody>
-          <a:bodyPr wrap="square" rtlCol="0" anchor="ctr">
-            <a:normAutofit/>
+          <a:bodyPr wrap="square" rtlCol="0" anchor="ctr" lIns="91440" tIns="45720" rIns="91440" bIns="45720">
+            <a:normAutofit fontScale="100000" lnSpcReduction="0"/>
           </a:bodyPr>
           <a:lstStyle/>
           <a:p>
-            <a:pPr algn="ctr"/>
-            <a:r>
-              <a:rPr lang="en-US" sz="3149" dirty="0">
+            <a:pPr algn="ctr" marL="0" marR="0" indent="0"/>
+            <a:r>
+              <a:rPr lang="en-US" sz="2171" dirty="0" smtClean="0">
                 <a:solidFill>
                   <a:srgbClr val="FFFFFF"/>
                 </a:solidFill>
@@ -2953,14 +2953,14 @@
           </a:solidFill>
         </p:spPr>
         <p:txBody>
-          <a:bodyPr wrap="square" rtlCol="0" anchor="ctr">
-            <a:normAutofit/>
+          <a:bodyPr wrap="square" rtlCol="0" anchor="ctr" lIns="91440" tIns="45720" rIns="91440" bIns="45720">
+            <a:normAutofit fontScale="100000" lnSpcReduction="0"/>
           </a:bodyPr>
           <a:lstStyle/>
           <a:p>
-            <a:pPr algn="ctr"/>
-            <a:r>
-              <a:rPr lang="en-US" sz="3149" dirty="0">
+            <a:pPr algn="ctr" marL="0" marR="0" indent="0"/>
+            <a:r>
+              <a:rPr lang="en-US" sz="2171" dirty="0" smtClean="0">
                 <a:solidFill>
                   <a:srgbClr val="FFFFFF"/>
                 </a:solidFill>
@@ -3061,14 +3061,14 @@
           </a:solidFill>
         </p:spPr>
         <p:txBody>
-          <a:bodyPr wrap="square" rtlCol="0" anchor="ctr">
-            <a:normAutofit/>
+          <a:bodyPr wrap="square" rtlCol="0" anchor="ctr" lIns="91440" tIns="45720" rIns="91440" bIns="45720">
+            <a:normAutofit fontScale="100000" lnSpcReduction="0"/>
           </a:bodyPr>
           <a:lstStyle/>
           <a:p>
-            <a:pPr algn="ctr"/>
-            <a:r>
-              <a:rPr lang="en-US" sz="1717" dirty="0">
+            <a:pPr algn="ctr" marL="0" marR="0" indent="0"/>
+            <a:r>
+              <a:rPr lang="en-US" sz="1456" dirty="0" smtClean="0">
                 <a:solidFill>
                   <a:srgbClr val="000000"/>
                 </a:solidFill>
@@ -3097,14 +3097,14 @@
           </a:solidFill>
         </p:spPr>
         <p:txBody>
-          <a:bodyPr wrap="square" rtlCol="0" anchor="ctr">
-            <a:normAutofit/>
+          <a:bodyPr wrap="square" rtlCol="0" anchor="ctr" lIns="91440" tIns="45720" rIns="91440" bIns="45720">
+            <a:normAutofit fontScale="100000" lnSpcReduction="0"/>
           </a:bodyPr>
           <a:lstStyle/>
           <a:p>
-            <a:pPr algn="ctr"/>
-            <a:r>
-              <a:rPr lang="en-US" sz="2519" dirty="0">
+            <a:pPr algn="ctr" marL="0" marR="0" indent="0"/>
+            <a:r>
+              <a:rPr lang="en-US" sz="1486" dirty="0" smtClean="0">
                 <a:solidFill>
                   <a:srgbClr val="000000"/>
                 </a:solidFill>
@@ -3195,14 +3195,14 @@
           </a:solidFill>
         </p:spPr>
         <p:txBody>
-          <a:bodyPr wrap="square" rtlCol="0" anchor="t">
-            <a:normAutofit/>
+          <a:bodyPr wrap="square" rtlCol="0" anchor="t" lIns="91440" tIns="45720" rIns="91440" bIns="45720">
+            <a:normAutofit fontScale="100000" lnSpcReduction="0"/>
           </a:bodyPr>
           <a:lstStyle/>
           <a:p>
-            <a:pPr algn="l"/>
-            <a:r>
-              <a:rPr lang="en-US" sz="2362" dirty="0">
+            <a:pPr algn="l" marL="0" marR="0" indent="0"/>
+            <a:r>
+              <a:rPr lang="en-US" sz="2254" dirty="0" smtClean="0">
                 <a:solidFill>
                   <a:srgbClr val="FFFFFF"/>
                 </a:solidFill>
@@ -3233,14 +3233,14 @@
           </a:solidFill>
         </p:spPr>
         <p:txBody>
-          <a:bodyPr wrap="square" rtlCol="0" anchor="t">
-            <a:normAutofit/>
+          <a:bodyPr wrap="square" rtlCol="0" anchor="t" lIns="91440" tIns="45720" rIns="91440" bIns="45720">
+            <a:normAutofit fontScale="100000" lnSpcReduction="0"/>
           </a:bodyPr>
           <a:lstStyle/>
           <a:p>
-            <a:pPr algn="l"/>
-            <a:r>
-              <a:rPr lang="en-US" sz="2362" dirty="0">
+            <a:pPr algn="l" marL="0" marR="0" indent="0"/>
+            <a:r>
+              <a:rPr lang="en-US" sz="2254" dirty="0" smtClean="0">
                 <a:solidFill>
                   <a:srgbClr val="000000"/>
                 </a:solidFill>
@@ -3271,14 +3271,14 @@
           </a:solidFill>
         </p:spPr>
         <p:txBody>
-          <a:bodyPr wrap="square" rtlCol="0" anchor="t">
-            <a:normAutofit/>
+          <a:bodyPr wrap="square" rtlCol="0" anchor="t" lIns="91440" tIns="45720" rIns="91440" bIns="45720">
+            <a:normAutofit fontScale="100000" lnSpcReduction="0"/>
           </a:bodyPr>
           <a:lstStyle/>
           <a:p>
-            <a:pPr algn="l"/>
-            <a:r>
-              <a:rPr lang="en-US" sz="2362" dirty="0">
+            <a:pPr algn="l" marL="0" marR="0" indent="0"/>
+            <a:r>
+              <a:rPr lang="en-US" sz="2254" dirty="0" smtClean="0">
                 <a:solidFill>
                   <a:srgbClr val="000000"/>
                 </a:solidFill>
@@ -3309,14 +3309,14 @@
           </a:solidFill>
         </p:spPr>
         <p:txBody>
-          <a:bodyPr wrap="square" rtlCol="0" anchor="t">
-            <a:normAutofit/>
+          <a:bodyPr wrap="square" rtlCol="0" anchor="t" lIns="91440" tIns="45720" rIns="91440" bIns="45720">
+            <a:normAutofit fontScale="100000" lnSpcReduction="0"/>
           </a:bodyPr>
           <a:lstStyle/>
           <a:p>
-            <a:pPr algn="l"/>
-            <a:r>
-              <a:rPr lang="en-US" sz="2362" dirty="0">
+            <a:pPr algn="l" marL="0" marR="0" indent="0"/>
+            <a:r>
+              <a:rPr lang="en-US" sz="2254" dirty="0" smtClean="0">
                 <a:solidFill>
                   <a:srgbClr val="000000"/>
                 </a:solidFill>
@@ -3505,14 +3505,14 @@
           </a:solidFill>
         </p:spPr>
         <p:txBody>
-          <a:bodyPr wrap="square" rtlCol="0" anchor="ctr">
-            <a:normAutofit/>
+          <a:bodyPr wrap="square" rtlCol="0" anchor="ctr" lIns="91440" tIns="45720" rIns="91440" bIns="45720">
+            <a:normAutofit fontScale="100000" lnSpcReduction="0"/>
           </a:bodyPr>
           <a:lstStyle/>
           <a:p>
-            <a:pPr algn="ctr"/>
-            <a:r>
-              <a:rPr lang="en-US" sz="2999" dirty="0">
+            <a:pPr algn="ctr" marL="0" marR="0" indent="0"/>
+            <a:r>
+              <a:rPr lang="en-US" sz="2380" dirty="0" smtClean="0">
                 <a:solidFill>
                   <a:srgbClr val="FFFFFF"/>
                 </a:solidFill>
@@ -3541,14 +3541,14 @@
           </a:solidFill>
         </p:spPr>
         <p:txBody>
-          <a:bodyPr wrap="square" rtlCol="0" anchor="ctr">
-            <a:normAutofit/>
+          <a:bodyPr wrap="square" rtlCol="0" anchor="ctr" lIns="91440" tIns="45720" rIns="91440" bIns="45720">
+            <a:normAutofit fontScale="100000" lnSpcReduction="0"/>
           </a:bodyPr>
           <a:lstStyle/>
           <a:p>
-            <a:pPr algn="ctr"/>
-            <a:r>
-              <a:rPr lang="en-US" sz="3242" dirty="0">
+            <a:pPr algn="ctr" marL="0" marR="0" indent="0"/>
+            <a:r>
+              <a:rPr lang="en-US" sz="2380" dirty="0" smtClean="0">
                 <a:solidFill>
                   <a:srgbClr val="000000"/>
                 </a:solidFill>
@@ -3577,14 +3577,14 @@
           </a:solidFill>
         </p:spPr>
         <p:txBody>
-          <a:bodyPr wrap="square" rtlCol="0" anchor="ctr">
-            <a:normAutofit/>
+          <a:bodyPr wrap="square" rtlCol="0" anchor="ctr" lIns="91440" tIns="45720" rIns="91440" bIns="45720">
+            <a:normAutofit fontScale="100000" lnSpcReduction="0"/>
           </a:bodyPr>
           <a:lstStyle/>
           <a:p>
-            <a:pPr algn="ctr"/>
-            <a:r>
-              <a:rPr lang="en-US" sz="2952" dirty="0">
+            <a:pPr algn="ctr" marL="0" marR="0" indent="0"/>
+            <a:r>
+              <a:rPr lang="en-US" sz="2380" dirty="0" smtClean="0">
                 <a:solidFill>
                   <a:srgbClr val="000000"/>
                 </a:solidFill>
@@ -3613,14 +3613,14 @@
           </a:solidFill>
         </p:spPr>
         <p:txBody>
-          <a:bodyPr wrap="square" rtlCol="0" anchor="ctr">
-            <a:normAutofit/>
+          <a:bodyPr wrap="square" rtlCol="0" anchor="ctr" lIns="91440" tIns="45720" rIns="91440" bIns="45720">
+            <a:normAutofit fontScale="100000" lnSpcReduction="0"/>
           </a:bodyPr>
           <a:lstStyle/>
           <a:p>
-            <a:pPr algn="ctr"/>
-            <a:r>
-              <a:rPr lang="en-US" sz="2715" dirty="0">
+            <a:pPr algn="ctr" marL="0" marR="0" indent="0"/>
+            <a:r>
+              <a:rPr lang="en-US" sz="2615" dirty="0" smtClean="0">
                 <a:solidFill>
                   <a:srgbClr val="000000"/>
                 </a:solidFill>
@@ -3649,14 +3649,14 @@
           </a:solidFill>
         </p:spPr>
         <p:txBody>
-          <a:bodyPr wrap="square" rtlCol="0" anchor="ctr">
-            <a:normAutofit/>
+          <a:bodyPr wrap="square" rtlCol="0" anchor="ctr" lIns="91440" tIns="45720" rIns="91440" bIns="45720">
+            <a:normAutofit fontScale="100000" lnSpcReduction="0"/>
           </a:bodyPr>
           <a:lstStyle/>
           <a:p>
-            <a:pPr algn="ctr"/>
-            <a:r>
-              <a:rPr lang="en-US" sz="3499" dirty="0">
+            <a:pPr algn="ctr" marL="0" marR="0" indent="0"/>
+            <a:r>
+              <a:rPr lang="en-US" sz="3339" dirty="0" smtClean="0">
                 <a:solidFill>
                   <a:srgbClr val="FFFFFF"/>
                 </a:solidFill>
@@ -3809,14 +3809,14 @@
           </a:solidFill>
         </p:spPr>
         <p:txBody>
-          <a:bodyPr wrap="square" rtlCol="0" anchor="ctr">
-            <a:normAutofit/>
+          <a:bodyPr wrap="square" rtlCol="0" anchor="ctr" lIns="91440" tIns="45720" rIns="91440" bIns="45720">
+            <a:normAutofit fontScale="100000" lnSpcReduction="0"/>
           </a:bodyPr>
           <a:lstStyle/>
           <a:p>
-            <a:pPr algn="ctr"/>
-            <a:r>
-              <a:rPr lang="en-US" sz="4400" dirty="0">
+            <a:pPr algn="ctr" marL="0" marR="0" indent="0"/>
+            <a:r>
+              <a:rPr lang="en-US" sz="7200" dirty="0" smtClean="0">
                 <a:solidFill>
                   <a:srgbClr val="FFFFFF"/>
                 </a:solidFill>
@@ -3845,14 +3845,14 @@
           </a:solidFill>
         </p:spPr>
         <p:txBody>
-          <a:bodyPr wrap="square" rtlCol="0" anchor="ctr">
-            <a:normAutofit/>
+          <a:bodyPr wrap="square" rtlCol="0" anchor="ctr" lIns="91440" tIns="45720" rIns="91440" bIns="45720">
+            <a:normAutofit fontScale="100000" lnSpcReduction="0"/>
           </a:bodyPr>
           <a:lstStyle/>
           <a:p>
-            <a:pPr algn="ctr"/>
-            <a:r>
-              <a:rPr lang="en-US" sz="4400" dirty="0">
+            <a:pPr algn="ctr" marL="0" marR="0" indent="0"/>
+            <a:r>
+              <a:rPr lang="en-US" sz="6337" dirty="0" smtClean="0">
                 <a:solidFill>
                   <a:srgbClr val="000000"/>
                 </a:solidFill>
@@ -3881,14 +3881,14 @@
           </a:solidFill>
         </p:spPr>
         <p:txBody>
-          <a:bodyPr wrap="square" rtlCol="0" anchor="ctr">
-            <a:normAutofit/>
+          <a:bodyPr wrap="square" rtlCol="0" anchor="ctr" lIns="91440" tIns="45720" rIns="91440" bIns="45720">
+            <a:normAutofit fontScale="100000" lnSpcReduction="0"/>
           </a:bodyPr>
           <a:lstStyle/>
           <a:p>
-            <a:pPr algn="ctr"/>
-            <a:r>
-              <a:rPr lang="en-US" sz="4294" dirty="0">
+            <a:pPr algn="ctr" marL="0" marR="0" indent="0"/>
+            <a:r>
+              <a:rPr lang="en-US" sz="4033" dirty="0" smtClean="0">
                 <a:solidFill>
                   <a:srgbClr val="000000"/>
                 </a:solidFill>
@@ -3917,14 +3917,14 @@
           </a:solidFill>
         </p:spPr>
         <p:txBody>
-          <a:bodyPr wrap="square" rtlCol="0" anchor="ctr">
-            <a:normAutofit/>
+          <a:bodyPr wrap="square" rtlCol="0" anchor="ctr" lIns="91440" tIns="45720" rIns="91440" bIns="45720">
+            <a:normAutofit fontScale="100000" lnSpcReduction="0"/>
           </a:bodyPr>
           <a:lstStyle/>
           <a:p>
-            <a:pPr algn="ctr"/>
-            <a:r>
-              <a:rPr lang="en-US" sz="4199" dirty="0">
+            <a:pPr algn="ctr" marL="0" marR="0" indent="0"/>
+            <a:r>
+              <a:rPr lang="en-US" sz="3719" dirty="0" smtClean="0">
                 <a:solidFill>
                   <a:srgbClr val="000000"/>
                 </a:solidFill>
@@ -4408,14 +4408,14 @@
           </a:solidFill>
         </p:spPr>
         <p:txBody>
-          <a:bodyPr wrap="square" rtlCol="0" anchor="t">
-            <a:normAutofit/>
+          <a:bodyPr wrap="square" rtlCol="0" anchor="t" lIns="91440" tIns="45720" rIns="91440" bIns="45720">
+            <a:normAutofit fontScale="100000" lnSpcReduction="0"/>
           </a:bodyPr>
           <a:lstStyle/>
           <a:p>
-            <a:pPr algn="l"/>
-            <a:r>
-              <a:rPr lang="en-US" sz="1944" dirty="0">
+            <a:pPr algn="l" marL="0" marR="0" indent="0"/>
+            <a:r>
+              <a:rPr lang="en-US" sz="1800" dirty="0" smtClean="0">
                 <a:solidFill>
                   <a:srgbClr val="FFFFFF"/>
                 </a:solidFill>
@@ -4446,14 +4446,14 @@
           </a:solidFill>
         </p:spPr>
         <p:txBody>
-          <a:bodyPr wrap="square" rtlCol="0" anchor="t">
-            <a:normAutofit/>
+          <a:bodyPr wrap="square" rtlCol="0" anchor="t" lIns="91440" tIns="45720" rIns="91440" bIns="45720">
+            <a:normAutofit fontScale="100000" lnSpcReduction="0"/>
           </a:bodyPr>
           <a:lstStyle/>
           <a:p>
-            <a:pPr algn="l"/>
-            <a:r>
-              <a:rPr lang="en-US" sz="1944" dirty="0">
+            <a:pPr algn="l" marL="0" marR="0" indent="0"/>
+            <a:r>
+              <a:rPr lang="en-US" sz="1800" dirty="0" smtClean="0">
                 <a:solidFill>
                   <a:srgbClr val="000000"/>
                 </a:solidFill>
@@ -4484,14 +4484,14 @@
           </a:solidFill>
         </p:spPr>
         <p:txBody>
-          <a:bodyPr wrap="square" rtlCol="0" anchor="t">
-            <a:normAutofit/>
+          <a:bodyPr wrap="square" rtlCol="0" anchor="t" lIns="91440" tIns="45720" rIns="91440" bIns="45720">
+            <a:normAutofit fontScale="100000" lnSpcReduction="0"/>
           </a:bodyPr>
           <a:lstStyle/>
           <a:p>
-            <a:pPr algn="l"/>
-            <a:r>
-              <a:rPr lang="en-US" sz="1944" dirty="0">
+            <a:pPr algn="l" marL="0" marR="0" indent="0"/>
+            <a:r>
+              <a:rPr lang="en-US" sz="1800" dirty="0" smtClean="0">
                 <a:solidFill>
                   <a:srgbClr val="000000"/>
                 </a:solidFill>
@@ -4522,14 +4522,14 @@
           </a:solidFill>
         </p:spPr>
         <p:txBody>
-          <a:bodyPr wrap="square" rtlCol="0" anchor="t">
-            <a:normAutofit/>
+          <a:bodyPr wrap="square" rtlCol="0" anchor="t" lIns="91440" tIns="45720" rIns="91440" bIns="45720">
+            <a:normAutofit fontScale="100000" lnSpcReduction="0"/>
           </a:bodyPr>
           <a:lstStyle/>
           <a:p>
-            <a:pPr algn="l"/>
-            <a:r>
-              <a:rPr lang="en-US" sz="1944" dirty="0">
+            <a:pPr algn="l" marL="0" marR="0" indent="0"/>
+            <a:r>
+              <a:rPr lang="en-US" sz="1800" dirty="0" smtClean="0">
                 <a:solidFill>
                   <a:srgbClr val="000000"/>
                 </a:solidFill>
@@ -5911,14 +5911,14 @@
           </a:solidFill>
         </p:spPr>
         <p:txBody>
-          <a:bodyPr wrap="square" rtlCol="0" anchor="ctr">
-            <a:normAutofit/>
+          <a:bodyPr wrap="square" rtlCol="0" anchor="ctr" lIns="91440" tIns="45720" rIns="91440" bIns="45720">
+            <a:normAutofit fontScale="100000" lnSpcReduction="0"/>
           </a:bodyPr>
           <a:lstStyle/>
           <a:p>
-            <a:pPr algn="ctr"/>
-            <a:r>
-              <a:rPr lang="en-US" sz="3149" dirty="0">
+            <a:pPr algn="ctr" marL="0" marR="0" indent="0"/>
+            <a:r>
+              <a:rPr lang="en-US" sz="2829" dirty="0" smtClean="0">
                 <a:solidFill>
                   <a:srgbClr val="FFFFFF"/>
                 </a:solidFill>
@@ -5947,14 +5947,14 @@
           </a:solidFill>
         </p:spPr>
         <p:txBody>
-          <a:bodyPr wrap="square" rtlCol="0" anchor="ctr">
-            <a:normAutofit/>
+          <a:bodyPr wrap="square" rtlCol="0" anchor="ctr" lIns="91440" tIns="45720" rIns="91440" bIns="45720">
+            <a:normAutofit fontScale="100000" lnSpcReduction="0"/>
           </a:bodyPr>
           <a:lstStyle/>
           <a:p>
-            <a:pPr algn="ctr"/>
-            <a:r>
-              <a:rPr lang="en-US" sz="4400" dirty="0">
+            <a:pPr algn="ctr" marL="0" marR="0" indent="0"/>
+            <a:r>
+              <a:rPr lang="en-US" sz="4225" dirty="0" smtClean="0">
                 <a:solidFill>
                   <a:srgbClr val="FFFFFF"/>
                 </a:solidFill>
@@ -5983,14 +5983,14 @@
           </a:solidFill>
         </p:spPr>
         <p:txBody>
-          <a:bodyPr wrap="square" rtlCol="0" anchor="ctr">
-            <a:normAutofit/>
+          <a:bodyPr wrap="square" rtlCol="0" anchor="ctr" lIns="91440" tIns="45720" rIns="91440" bIns="45720">
+            <a:normAutofit fontScale="100000" lnSpcReduction="0"/>
           </a:bodyPr>
           <a:lstStyle/>
           <a:p>
-            <a:pPr algn="ctr"/>
-            <a:r>
-              <a:rPr lang="en-US" sz="4049" dirty="0">
+            <a:pPr algn="ctr" marL="0" marR="0" indent="0"/>
+            <a:r>
+              <a:rPr lang="en-US" sz="3638" dirty="0" smtClean="0">
                 <a:solidFill>
                   <a:srgbClr val="FFFFFF"/>
                 </a:solidFill>
@@ -6019,14 +6019,14 @@
           </a:solidFill>
         </p:spPr>
         <p:txBody>
-          <a:bodyPr wrap="square" rtlCol="0" anchor="ctr">
-            <a:normAutofit/>
+          <a:bodyPr wrap="square" rtlCol="0" anchor="ctr" lIns="91440" tIns="45720" rIns="91440" bIns="45720">
+            <a:normAutofit fontScale="100000" lnSpcReduction="0"/>
           </a:bodyPr>
           <a:lstStyle/>
           <a:p>
-            <a:pPr algn="ctr"/>
-            <a:r>
-              <a:rPr lang="en-US" sz="4400" dirty="0">
+            <a:pPr algn="ctr" marL="0" marR="0" indent="0"/>
+            <a:r>
+              <a:rPr lang="en-US" sz="4225" dirty="0" smtClean="0">
                 <a:solidFill>
                   <a:srgbClr val="000000"/>
                 </a:solidFill>
@@ -6055,14 +6055,14 @@
           </a:solidFill>
         </p:spPr>
         <p:txBody>
-          <a:bodyPr wrap="square" rtlCol="0" anchor="ctr">
-            <a:normAutofit/>
+          <a:bodyPr wrap="square" rtlCol="0" anchor="ctr" lIns="91440" tIns="45720" rIns="91440" bIns="45720">
+            <a:normAutofit fontScale="100000" lnSpcReduction="0"/>
           </a:bodyPr>
           <a:lstStyle/>
           <a:p>
-            <a:pPr algn="ctr"/>
-            <a:r>
-              <a:rPr lang="en-US" sz="4400" dirty="0">
+            <a:pPr algn="ctr" marL="0" marR="0" indent="0"/>
+            <a:r>
+              <a:rPr lang="en-US" sz="4225" dirty="0" smtClean="0">
                 <a:solidFill>
                   <a:srgbClr val="FFFFFF"/>
                 </a:solidFill>
@@ -6091,14 +6091,14 @@
           </a:solidFill>
         </p:spPr>
         <p:txBody>
-          <a:bodyPr wrap="square" rtlCol="0" anchor="ctr">
-            <a:normAutofit/>
+          <a:bodyPr wrap="square" rtlCol="0" anchor="ctr" lIns="91440" tIns="45720" rIns="91440" bIns="45720">
+            <a:normAutofit fontScale="100000" lnSpcReduction="0"/>
           </a:bodyPr>
           <a:lstStyle/>
           <a:p>
-            <a:pPr algn="ctr"/>
-            <a:r>
-              <a:rPr lang="en-US" sz="4400" dirty="0">
+            <a:pPr algn="ctr" marL="0" marR="0" indent="0"/>
+            <a:r>
+              <a:rPr lang="en-US" sz="4225" dirty="0" smtClean="0">
                 <a:solidFill>
                   <a:srgbClr val="FFFFFF"/>
                 </a:solidFill>
@@ -6127,14 +6127,14 @@
           </a:solidFill>
         </p:spPr>
         <p:txBody>
-          <a:bodyPr wrap="square" rtlCol="0" anchor="ctr">
-            <a:normAutofit/>
+          <a:bodyPr wrap="square" rtlCol="0" anchor="ctr" lIns="91440" tIns="45720" rIns="91440" bIns="45720">
+            <a:normAutofit fontScale="100000" lnSpcReduction="0"/>
           </a:bodyPr>
           <a:lstStyle/>
           <a:p>
-            <a:pPr algn="ctr"/>
-            <a:r>
-              <a:rPr lang="en-US" sz="4400" dirty="0">
+            <a:pPr algn="ctr" marL="0" marR="0" indent="0"/>
+            <a:r>
+              <a:rPr lang="en-US" sz="4225" dirty="0" smtClean="0">
                 <a:solidFill>
                   <a:srgbClr val="FFFFFF"/>
                 </a:solidFill>
@@ -6225,14 +6225,14 @@
           </a:solidFill>
         </p:spPr>
         <p:txBody>
-          <a:bodyPr wrap="square" rtlCol="0" anchor="ctr">
-            <a:normAutofit/>
+          <a:bodyPr wrap="square" rtlCol="0" anchor="ctr" lIns="91440" tIns="45720" rIns="91440" bIns="45720">
+            <a:normAutofit fontScale="100000" lnSpcReduction="0"/>
           </a:bodyPr>
           <a:lstStyle/>
           <a:p>
-            <a:pPr algn="ctr"/>
-            <a:r>
-              <a:rPr lang="en-US" sz="3779" dirty="0">
+            <a:pPr algn="ctr" marL="0" marR="0" indent="0"/>
+            <a:r>
+              <a:rPr lang="en-US" sz="2856" dirty="0" smtClean="0">
                 <a:solidFill>
                   <a:srgbClr val="FFFFFF"/>
                 </a:solidFill>
@@ -6261,14 +6261,14 @@
           </a:solidFill>
         </p:spPr>
         <p:txBody>
-          <a:bodyPr wrap="square" rtlCol="0" anchor="ctr">
-            <a:normAutofit/>
+          <a:bodyPr wrap="square" rtlCol="0" anchor="ctr" lIns="91440" tIns="45720" rIns="91440" bIns="45720">
+            <a:normAutofit fontScale="100000" lnSpcReduction="0"/>
           </a:bodyPr>
           <a:lstStyle/>
           <a:p>
-            <a:pPr algn="ctr"/>
-            <a:r>
-              <a:rPr lang="en-US" sz="3149" dirty="0">
+            <a:pPr algn="ctr" marL="0" marR="0" indent="0"/>
+            <a:r>
+              <a:rPr lang="en-US" sz="2669" dirty="0" smtClean="0">
                 <a:solidFill>
                   <a:srgbClr val="FFFFFF"/>
                 </a:solidFill>
@@ -6297,14 +6297,14 @@
           </a:solidFill>
         </p:spPr>
         <p:txBody>
-          <a:bodyPr wrap="square" rtlCol="0" anchor="ctr">
-            <a:normAutofit/>
+          <a:bodyPr wrap="square" rtlCol="0" anchor="ctr" lIns="91440" tIns="45720" rIns="91440" bIns="45720">
+            <a:normAutofit fontScale="100000" lnSpcReduction="0"/>
           </a:bodyPr>
           <a:lstStyle/>
           <a:p>
-            <a:pPr algn="ctr"/>
-            <a:r>
-              <a:rPr lang="en-US" sz="2699" dirty="0">
+            <a:pPr algn="ctr" marL="0" marR="0" indent="0"/>
+            <a:r>
+              <a:rPr lang="en-US" sz="2288" dirty="0" smtClean="0">
                 <a:solidFill>
                   <a:srgbClr val="000000"/>
                 </a:solidFill>
@@ -6333,14 +6333,14 @@
           </a:solidFill>
         </p:spPr>
         <p:txBody>
-          <a:bodyPr wrap="square" rtlCol="0" anchor="ctr">
-            <a:normAutofit/>
+          <a:bodyPr wrap="square" rtlCol="0" anchor="ctr" lIns="91440" tIns="45720" rIns="91440" bIns="45720">
+            <a:normAutofit fontScale="100000" lnSpcReduction="0"/>
           </a:bodyPr>
           <a:lstStyle/>
           <a:p>
-            <a:pPr algn="ctr"/>
-            <a:r>
-              <a:rPr lang="en-US" sz="2362" dirty="0">
+            <a:pPr algn="ctr" marL="0" marR="0" indent="0"/>
+            <a:r>
+              <a:rPr lang="en-US" sz="2002" dirty="0" smtClean="0">
                 <a:solidFill>
                   <a:srgbClr val="000000"/>
                 </a:solidFill>
@@ -6369,14 +6369,14 @@
           </a:solidFill>
         </p:spPr>
         <p:txBody>
-          <a:bodyPr wrap="square" rtlCol="0" anchor="ctr">
-            <a:normAutofit/>
+          <a:bodyPr wrap="square" rtlCol="0" anchor="ctr" lIns="91440" tIns="45720" rIns="91440" bIns="45720">
+            <a:normAutofit fontScale="100000" lnSpcReduction="0"/>
           </a:bodyPr>
           <a:lstStyle/>
           <a:p>
-            <a:pPr algn="ctr"/>
-            <a:r>
-              <a:rPr lang="en-US" sz="2362" dirty="0">
+            <a:pPr algn="ctr" marL="0" marR="0" indent="0"/>
+            <a:r>
+              <a:rPr lang="en-US" sz="2002" dirty="0" smtClean="0">
                 <a:solidFill>
                   <a:srgbClr val="FFFFFF"/>
                 </a:solidFill>
@@ -6405,14 +6405,14 @@
           </a:solidFill>
         </p:spPr>
         <p:txBody>
-          <a:bodyPr wrap="square" rtlCol="0" anchor="ctr">
-            <a:normAutofit/>
+          <a:bodyPr wrap="square" rtlCol="0" anchor="ctr" lIns="91440" tIns="45720" rIns="91440" bIns="45720">
+            <a:normAutofit fontScale="100000" lnSpcReduction="0"/>
           </a:bodyPr>
           <a:lstStyle/>
           <a:p>
-            <a:pPr algn="ctr"/>
-            <a:r>
-              <a:rPr lang="en-US" sz="3149" dirty="0">
+            <a:pPr algn="ctr" marL="0" marR="0" indent="0"/>
+            <a:r>
+              <a:rPr lang="en-US" sz="2669" dirty="0" smtClean="0">
                 <a:solidFill>
                   <a:srgbClr val="FFFFFF"/>
                 </a:solidFill>
@@ -6441,14 +6441,14 @@
           </a:solidFill>
         </p:spPr>
         <p:txBody>
-          <a:bodyPr wrap="square" rtlCol="0" anchor="ctr">
-            <a:normAutofit/>
+          <a:bodyPr wrap="square" rtlCol="0" anchor="ctr" lIns="91440" tIns="45720" rIns="91440" bIns="45720">
+            <a:normAutofit fontScale="100000" lnSpcReduction="0"/>
           </a:bodyPr>
           <a:lstStyle/>
           <a:p>
-            <a:pPr algn="ctr"/>
-            <a:r>
-              <a:rPr lang="en-US" sz="2699" dirty="0">
+            <a:pPr algn="ctr" marL="0" marR="0" indent="0"/>
+            <a:r>
+              <a:rPr lang="en-US" sz="2288" dirty="0" smtClean="0">
                 <a:solidFill>
                   <a:srgbClr val="FFFFFF"/>
                 </a:solidFill>
@@ -6477,14 +6477,14 @@
           </a:solidFill>
         </p:spPr>
         <p:txBody>
-          <a:bodyPr wrap="square" rtlCol="0" anchor="ctr">
-            <a:normAutofit/>
+          <a:bodyPr wrap="square" rtlCol="0" anchor="ctr" lIns="91440" tIns="45720" rIns="91440" bIns="45720">
+            <a:normAutofit fontScale="100000" lnSpcReduction="0"/>
           </a:bodyPr>
           <a:lstStyle/>
           <a:p>
-            <a:pPr algn="ctr"/>
-            <a:r>
-              <a:rPr lang="en-US" sz="3779" dirty="0">
+            <a:pPr algn="ctr" marL="0" marR="0" indent="0"/>
+            <a:r>
+              <a:rPr lang="en-US" sz="2856" dirty="0" smtClean="0">
                 <a:solidFill>
                   <a:srgbClr val="FFFFFF"/>
                 </a:solidFill>
@@ -6513,14 +6513,14 @@
           </a:solidFill>
         </p:spPr>
         <p:txBody>
-          <a:bodyPr wrap="square" rtlCol="0" anchor="ctr">
-            <a:normAutofit/>
+          <a:bodyPr wrap="square" rtlCol="0" anchor="ctr" lIns="91440" tIns="45720" rIns="91440" bIns="45720">
+            <a:normAutofit fontScale="100000" lnSpcReduction="0"/>
           </a:bodyPr>
           <a:lstStyle/>
           <a:p>
-            <a:pPr algn="ctr"/>
-            <a:r>
-              <a:rPr lang="en-US" sz="2362" dirty="0">
+            <a:pPr algn="ctr" marL="0" marR="0" indent="0"/>
+            <a:r>
+              <a:rPr lang="en-US" sz="2002" dirty="0" smtClean="0">
                 <a:solidFill>
                   <a:srgbClr val="FFFFFF"/>
                 </a:solidFill>
@@ -6549,14 +6549,14 @@
           </a:solidFill>
         </p:spPr>
         <p:txBody>
-          <a:bodyPr wrap="square" rtlCol="0" anchor="ctr">
-            <a:normAutofit/>
+          <a:bodyPr wrap="square" rtlCol="0" anchor="ctr" lIns="91440" tIns="45720" rIns="91440" bIns="45720">
+            <a:normAutofit fontScale="100000" lnSpcReduction="0"/>
           </a:bodyPr>
           <a:lstStyle/>
           <a:p>
-            <a:pPr algn="ctr"/>
-            <a:r>
-              <a:rPr lang="en-US" sz="3149" dirty="0">
+            <a:pPr algn="ctr" marL="0" marR="0" indent="0"/>
+            <a:r>
+              <a:rPr lang="en-US" sz="2669" dirty="0" smtClean="0">
                 <a:solidFill>
                   <a:srgbClr val="FFFFFF"/>
                 </a:solidFill>
@@ -7403,14 +7403,14 @@
           </a:solidFill>
         </p:spPr>
         <p:txBody>
-          <a:bodyPr wrap="square" rtlCol="0" anchor="ctr">
-            <a:normAutofit/>
+          <a:bodyPr wrap="square" rtlCol="0" anchor="ctr" lIns="91440" tIns="45720" rIns="91440" bIns="45720">
+            <a:normAutofit fontScale="100000" lnSpcReduction="0"/>
           </a:bodyPr>
           <a:lstStyle/>
           <a:p>
-            <a:pPr algn="ctr"/>
-            <a:r>
-              <a:rPr lang="en-US" sz="1874" dirty="0">
+            <a:pPr algn="ctr" marL="0" marR="0" indent="0"/>
+            <a:r>
+              <a:rPr lang="en-US" sz="1737" dirty="0" smtClean="0">
                 <a:solidFill>
                   <a:srgbClr val="FFFFFF"/>
                 </a:solidFill>
@@ -7439,14 +7439,14 @@
           </a:solidFill>
         </p:spPr>
         <p:txBody>
-          <a:bodyPr wrap="square" rtlCol="0" anchor="ctr">
-            <a:normAutofit/>
+          <a:bodyPr wrap="square" rtlCol="0" anchor="ctr" lIns="91440" tIns="45720" rIns="91440" bIns="45720">
+            <a:normAutofit fontScale="100000" lnSpcReduction="0"/>
           </a:bodyPr>
           <a:lstStyle/>
           <a:p>
-            <a:pPr algn="ctr"/>
-            <a:r>
-              <a:rPr lang="en-US" sz="2460" dirty="0">
+            <a:pPr algn="ctr" marL="0" marR="0" indent="0"/>
+            <a:r>
+              <a:rPr lang="en-US" sz="2280" dirty="0" smtClean="0">
                 <a:solidFill>
                   <a:srgbClr val="000000"/>
                 </a:solidFill>
@@ -7475,14 +7475,14 @@
           </a:solidFill>
         </p:spPr>
         <p:txBody>
-          <a:bodyPr wrap="square" rtlCol="0" anchor="ctr">
-            <a:normAutofit/>
+          <a:bodyPr wrap="square" rtlCol="0" anchor="ctr" lIns="91440" tIns="45720" rIns="91440" bIns="45720">
+            <a:normAutofit fontScale="100000" lnSpcReduction="0"/>
           </a:bodyPr>
           <a:lstStyle/>
           <a:p>
-            <a:pPr algn="ctr"/>
-            <a:r>
-              <a:rPr lang="en-US" sz="2187" dirty="0">
+            <a:pPr algn="ctr" marL="0" marR="0" indent="0"/>
+            <a:r>
+              <a:rPr lang="en-US" sz="2027" dirty="0" smtClean="0">
                 <a:solidFill>
                   <a:srgbClr val="000000"/>
                 </a:solidFill>
@@ -7827,14 +7827,14 @@
           </a:solidFill>
         </p:spPr>
         <p:txBody>
-          <a:bodyPr wrap="square" rtlCol="0" anchor="ctr">
-            <a:normAutofit/>
+          <a:bodyPr wrap="square" rtlCol="0" anchor="ctr" lIns="91440" tIns="45720" rIns="91440" bIns="45720">
+            <a:normAutofit fontScale="100000" lnSpcReduction="0"/>
           </a:bodyPr>
           <a:lstStyle/>
           <a:p>
-            <a:pPr algn="ctr"/>
-            <a:r>
-              <a:rPr lang="en-US" sz="1889" dirty="0">
+            <a:pPr algn="ctr" marL="0" marR="0" indent="0"/>
+            <a:r>
+              <a:rPr lang="en-US" sz="869" dirty="0" smtClean="0">
                 <a:solidFill>
                   <a:srgbClr val="000000"/>
                 </a:solidFill>
@@ -7865,14 +7865,14 @@
           </a:ln>
         </p:spPr>
         <p:txBody>
-          <a:bodyPr wrap="square" rtlCol="0" anchor="ctr">
-            <a:normAutofit/>
+          <a:bodyPr wrap="square" rtlCol="0" anchor="ctr" lIns="91440" tIns="45720" rIns="91440" bIns="45720">
+            <a:normAutofit fontScale="100000" lnSpcReduction="0"/>
           </a:bodyPr>
           <a:lstStyle/>
           <a:p>
-            <a:pPr algn="ctr"/>
-            <a:r>
-              <a:rPr lang="en-US" sz="4049" dirty="0">
+            <a:pPr algn="ctr" marL="0" marR="0" indent="0"/>
+            <a:r>
+              <a:rPr lang="en-US" sz="3638" dirty="0" smtClean="0">
                 <a:solidFill>
                   <a:srgbClr val="000000"/>
                 </a:solidFill>
@@ -7903,14 +7903,14 @@
           </a:ln>
         </p:spPr>
         <p:txBody>
-          <a:bodyPr wrap="square" rtlCol="0" anchor="ctr">
-            <a:normAutofit/>
+          <a:bodyPr wrap="square" rtlCol="0" anchor="ctr" lIns="91440" tIns="45720" rIns="91440" bIns="45720">
+            <a:normAutofit fontScale="100000" lnSpcReduction="0"/>
           </a:bodyPr>
           <a:lstStyle/>
           <a:p>
-            <a:pPr algn="ctr"/>
-            <a:r>
-              <a:rPr lang="en-US" sz="4049" dirty="0">
+            <a:pPr algn="ctr" marL="0" marR="0" indent="0"/>
+            <a:r>
+              <a:rPr lang="en-US" sz="3638" dirty="0" smtClean="0">
                 <a:solidFill>
                   <a:srgbClr val="000000"/>
                 </a:solidFill>
@@ -7941,14 +7941,14 @@
           </a:ln>
         </p:spPr>
         <p:txBody>
-          <a:bodyPr wrap="square" rtlCol="0" anchor="ctr">
-            <a:normAutofit/>
+          <a:bodyPr wrap="square" rtlCol="0" anchor="ctr" lIns="91440" tIns="45720" rIns="91440" bIns="45720">
+            <a:normAutofit fontScale="100000" lnSpcReduction="0"/>
           </a:bodyPr>
           <a:lstStyle/>
           <a:p>
-            <a:pPr algn="ctr"/>
-            <a:r>
-              <a:rPr lang="en-US" sz="4049" dirty="0">
+            <a:pPr algn="ctr" marL="0" marR="0" indent="0"/>
+            <a:r>
+              <a:rPr lang="en-US" sz="3638" dirty="0" smtClean="0">
                 <a:solidFill>
                   <a:srgbClr val="000000"/>
                 </a:solidFill>
@@ -7979,14 +7979,14 @@
           </a:ln>
         </p:spPr>
         <p:txBody>
-          <a:bodyPr wrap="square" rtlCol="0" anchor="ctr">
-            <a:normAutofit/>
+          <a:bodyPr wrap="square" rtlCol="0" anchor="ctr" lIns="91440" tIns="45720" rIns="91440" bIns="45720">
+            <a:normAutofit fontScale="100000" lnSpcReduction="0"/>
           </a:bodyPr>
           <a:lstStyle/>
           <a:p>
-            <a:pPr algn="ctr"/>
-            <a:r>
-              <a:rPr lang="en-US" sz="4049" dirty="0">
+            <a:pPr algn="ctr" marL="0" marR="0" indent="0"/>
+            <a:r>
+              <a:rPr lang="en-US" sz="3638" dirty="0" smtClean="0">
                 <a:solidFill>
                   <a:srgbClr val="000000"/>
                 </a:solidFill>
@@ -8017,14 +8017,14 @@
           </a:ln>
         </p:spPr>
         <p:txBody>
-          <a:bodyPr wrap="square" rtlCol="0" anchor="ctr">
-            <a:normAutofit/>
+          <a:bodyPr wrap="square" rtlCol="0" anchor="ctr" lIns="91440" tIns="45720" rIns="91440" bIns="45720">
+            <a:normAutofit fontScale="100000" lnSpcReduction="0"/>
           </a:bodyPr>
           <a:lstStyle/>
           <a:p>
-            <a:pPr algn="ctr"/>
-            <a:r>
-              <a:rPr lang="en-US" sz="4049" dirty="0">
+            <a:pPr algn="ctr" marL="0" marR="0" indent="0"/>
+            <a:r>
+              <a:rPr lang="en-US" sz="3638" dirty="0" smtClean="0">
                 <a:solidFill>
                   <a:srgbClr val="000000"/>
                 </a:solidFill>
@@ -8055,14 +8055,14 @@
           </a:ln>
         </p:spPr>
         <p:txBody>
-          <a:bodyPr wrap="square" rtlCol="0" anchor="ctr">
-            <a:normAutofit/>
+          <a:bodyPr wrap="square" rtlCol="0" anchor="ctr" lIns="91440" tIns="45720" rIns="91440" bIns="45720">
+            <a:normAutofit fontScale="100000" lnSpcReduction="0"/>
           </a:bodyPr>
           <a:lstStyle/>
           <a:p>
-            <a:pPr algn="ctr"/>
-            <a:r>
-              <a:rPr lang="en-US" sz="4049" dirty="0">
+            <a:pPr algn="ctr" marL="0" marR="0" indent="0"/>
+            <a:r>
+              <a:rPr lang="en-US" sz="3638" dirty="0" smtClean="0">
                 <a:solidFill>
                   <a:srgbClr val="000000"/>
                 </a:solidFill>
@@ -8091,14 +8091,14 @@
           </a:solidFill>
         </p:spPr>
         <p:txBody>
-          <a:bodyPr wrap="square" rtlCol="0" anchor="ctr">
-            <a:normAutofit/>
+          <a:bodyPr wrap="square" rtlCol="0" anchor="ctr" lIns="91440" tIns="45720" rIns="91440" bIns="45720">
+            <a:normAutofit fontScale="100000" lnSpcReduction="0"/>
           </a:bodyPr>
           <a:lstStyle/>
           <a:p>
-            <a:pPr algn="ctr"/>
-            <a:r>
-              <a:rPr lang="en-US" sz="1889" dirty="0">
+            <a:pPr algn="ctr" marL="0" marR="0" indent="0"/>
+            <a:r>
+              <a:rPr lang="en-US" sz="724" dirty="0" smtClean="0">
                 <a:solidFill>
                   <a:srgbClr val="000000"/>
                 </a:solidFill>
@@ -8530,14 +8530,14 @@
           </a:solidFill>
         </p:spPr>
         <p:txBody>
-          <a:bodyPr wrap="square" rtlCol="0" anchor="ctr">
-            <a:normAutofit/>
+          <a:bodyPr wrap="square" rtlCol="0" anchor="ctr" lIns="91440" tIns="45720" rIns="91440" bIns="45720">
+            <a:normAutofit fontScale="100000" lnSpcReduction="0"/>
           </a:bodyPr>
           <a:lstStyle/>
           <a:p>
-            <a:pPr algn="ctr"/>
-            <a:r>
-              <a:rPr lang="en-US" sz="1259" dirty="0">
+            <a:pPr algn="ctr" marL="0" marR="0" indent="0"/>
+            <a:r>
+              <a:rPr lang="en-US" sz="1144" dirty="0" smtClean="0">
                 <a:solidFill>
                   <a:srgbClr val="FFFFFF"/>
                 </a:solidFill>
@@ -8566,14 +8566,14 @@
           </a:solidFill>
         </p:spPr>
         <p:txBody>
-          <a:bodyPr wrap="square" rtlCol="0" anchor="ctr">
-            <a:normAutofit/>
+          <a:bodyPr wrap="square" rtlCol="0" anchor="ctr" lIns="91440" tIns="45720" rIns="91440" bIns="45720">
+            <a:normAutofit fontScale="100000" lnSpcReduction="0"/>
           </a:bodyPr>
           <a:lstStyle/>
           <a:p>
-            <a:pPr algn="ctr"/>
-            <a:r>
-              <a:rPr lang="en-US" sz="1574" dirty="0">
+            <a:pPr algn="ctr" marL="0" marR="0" indent="0"/>
+            <a:r>
+              <a:rPr lang="en-US" sz="1430" dirty="0" smtClean="0">
                 <a:solidFill>
                   <a:srgbClr val="000000"/>
                 </a:solidFill>
@@ -8602,14 +8602,14 @@
           </a:solidFill>
         </p:spPr>
         <p:txBody>
-          <a:bodyPr wrap="square" rtlCol="0" anchor="ctr">
-            <a:normAutofit/>
+          <a:bodyPr wrap="square" rtlCol="0" anchor="ctr" lIns="91440" tIns="45720" rIns="91440" bIns="45720">
+            <a:normAutofit fontScale="100000" lnSpcReduction="0"/>
           </a:bodyPr>
           <a:lstStyle/>
           <a:p>
-            <a:pPr algn="ctr"/>
-            <a:r>
-              <a:rPr lang="en-US" sz="1574" dirty="0">
+            <a:pPr algn="ctr" marL="0" marR="0" indent="0"/>
+            <a:r>
+              <a:rPr lang="en-US" sz="1430" dirty="0" smtClean="0">
                 <a:solidFill>
                   <a:srgbClr val="000000"/>
                 </a:solidFill>
@@ -8638,14 +8638,14 @@
           </a:solidFill>
         </p:spPr>
         <p:txBody>
-          <a:bodyPr wrap="square" rtlCol="0" anchor="ctr">
-            <a:normAutofit/>
+          <a:bodyPr wrap="square" rtlCol="0" anchor="ctr" lIns="91440" tIns="45720" rIns="91440" bIns="45720">
+            <a:normAutofit fontScale="100000" lnSpcReduction="0"/>
           </a:bodyPr>
           <a:lstStyle/>
           <a:p>
-            <a:pPr algn="ctr"/>
-            <a:r>
-              <a:rPr lang="en-US" sz="1852" dirty="0">
+            <a:pPr algn="ctr" marL="0" marR="0" indent="0"/>
+            <a:r>
+              <a:rPr lang="en-US" sz="1486" dirty="0" smtClean="0">
                 <a:solidFill>
                   <a:srgbClr val="000000"/>
                 </a:solidFill>
@@ -9425,14 +9425,14 @@
           </a:solidFill>
         </p:spPr>
         <p:txBody>
-          <a:bodyPr wrap="square" rtlCol="0" anchor="ctr">
-            <a:normAutofit/>
+          <a:bodyPr wrap="square" rtlCol="0" anchor="ctr" lIns="91440" tIns="45720" rIns="91440" bIns="45720">
+            <a:normAutofit fontScale="100000" lnSpcReduction="0"/>
           </a:bodyPr>
           <a:lstStyle/>
           <a:p>
-            <a:pPr algn="ctr"/>
-            <a:r>
-              <a:rPr lang="en-US" sz="3499" dirty="0">
+            <a:pPr algn="ctr" marL="0" marR="0" indent="0"/>
+            <a:r>
+              <a:rPr lang="en-US" sz="3179" dirty="0" smtClean="0">
                 <a:solidFill>
                   <a:srgbClr val="FFFFFF"/>
                 </a:solidFill>
@@ -9461,14 +9461,14 @@
           </a:solidFill>
         </p:spPr>
         <p:txBody>
-          <a:bodyPr wrap="square" rtlCol="0" anchor="ctr">
-            <a:normAutofit/>
+          <a:bodyPr wrap="square" rtlCol="0" anchor="ctr" lIns="91440" tIns="45720" rIns="91440" bIns="45720">
+            <a:normAutofit fontScale="100000" lnSpcReduction="0"/>
           </a:bodyPr>
           <a:lstStyle/>
           <a:p>
-            <a:pPr algn="ctr"/>
-            <a:r>
-              <a:rPr lang="en-US" sz="4400" dirty="0">
+            <a:pPr algn="ctr" marL="0" marR="0" indent="0"/>
+            <a:r>
+              <a:rPr lang="en-US" sz="4088" dirty="0" smtClean="0">
                 <a:solidFill>
                   <a:srgbClr val="000000"/>
                 </a:solidFill>
@@ -9497,14 +9497,14 @@
           </a:solidFill>
         </p:spPr>
         <p:txBody>
-          <a:bodyPr wrap="square" rtlCol="0" anchor="ctr">
-            <a:normAutofit/>
+          <a:bodyPr wrap="square" rtlCol="0" anchor="ctr" lIns="91440" tIns="45720" rIns="91440" bIns="45720">
+            <a:normAutofit fontScale="100000" lnSpcReduction="0"/>
           </a:bodyPr>
           <a:lstStyle/>
           <a:p>
-            <a:pPr algn="ctr"/>
-            <a:r>
-              <a:rPr lang="en-US" sz="4400" dirty="0">
+            <a:pPr algn="ctr" marL="0" marR="0" indent="0"/>
+            <a:r>
+              <a:rPr lang="en-US" sz="4088" dirty="0" smtClean="0">
                 <a:solidFill>
                   <a:srgbClr val="FFFFFF"/>
                 </a:solidFill>
@@ -9533,14 +9533,14 @@
           </a:solidFill>
         </p:spPr>
         <p:txBody>
-          <a:bodyPr wrap="square" rtlCol="0" anchor="ctr">
-            <a:normAutofit/>
+          <a:bodyPr wrap="square" rtlCol="0" anchor="ctr" lIns="91440" tIns="45720" rIns="91440" bIns="45720">
+            <a:normAutofit fontScale="100000" lnSpcReduction="0"/>
           </a:bodyPr>
           <a:lstStyle/>
           <a:p>
-            <a:pPr algn="ctr"/>
-            <a:r>
-              <a:rPr lang="en-US" sz="2952" dirty="0">
+            <a:pPr algn="ctr" marL="0" marR="0" indent="0"/>
+            <a:r>
+              <a:rPr lang="en-US" sz="2592" dirty="0" smtClean="0">
                 <a:solidFill>
                   <a:srgbClr val="FFFFFF"/>
                 </a:solidFill>
@@ -9569,14 +9569,14 @@
           </a:solidFill>
         </p:spPr>
         <p:txBody>
-          <a:bodyPr wrap="square" rtlCol="0" anchor="ctr">
-            <a:normAutofit/>
+          <a:bodyPr wrap="square" rtlCol="0" anchor="ctr" lIns="91440" tIns="45720" rIns="91440" bIns="45720">
+            <a:normAutofit fontScale="100000" lnSpcReduction="0"/>
           </a:bodyPr>
           <a:lstStyle/>
           <a:p>
-            <a:pPr algn="ctr"/>
-            <a:r>
-              <a:rPr lang="en-US" sz="3374" dirty="0">
+            <a:pPr algn="ctr" marL="0" marR="0" indent="0"/>
+            <a:r>
+              <a:rPr lang="en-US" sz="2963" dirty="0" smtClean="0">
                 <a:solidFill>
                   <a:srgbClr val="000000"/>
                 </a:solidFill>

--- a/comprehensive_demo.pptx
+++ b/comprehensive_demo.pptx
@@ -451,8 +451,8 @@
         </p:nvSpPr>
         <p:spPr>
           <a:xfrm>
-            <a:off x="500000" y="1600000"/>
-            <a:ext cx="2500000" cy="1200000"/>
+            <a:off x="457200" y="1600200"/>
+            <a:ext cx="2468880" cy="1188720"/>
           </a:xfrm>
           <a:prstGeom prst="rect">
             <a:avLst/>
@@ -477,7 +477,7 @@
           <a:p>
             <a:pPr algn="ctr" marL="0" marR="0" indent="0"/>
             <a:r>
-              <a:rPr lang="en-US" sz="3649" dirty="0" smtClean="0">
+              <a:rPr lang="en-US" sz="3600" dirty="0" smtClean="0">
                 <a:solidFill>
                   <a:srgbClr val="000000"/>
                 </a:solidFill>
@@ -495,8 +495,8 @@
         </p:nvSpPr>
         <p:spPr>
           <a:xfrm>
-            <a:off x="3200000" y="1600000"/>
-            <a:ext cx="2500000" cy="1200000"/>
+            <a:off x="3200400" y="1600200"/>
+            <a:ext cx="2468880" cy="1188720"/>
           </a:xfrm>
           <a:prstGeom prst="rect">
             <a:avLst/>
@@ -521,7 +521,7 @@
           <a:p>
             <a:pPr algn="ctr" marL="0" marR="0" indent="0"/>
             <a:r>
-              <a:rPr lang="en-US" sz="4561" dirty="0" smtClean="0">
+              <a:rPr lang="en-US" sz="4500" dirty="0" smtClean="0">
                 <a:solidFill>
                   <a:srgbClr val="000000"/>
                 </a:solidFill>
@@ -539,8 +539,8 @@
         </p:nvSpPr>
         <p:spPr>
           <a:xfrm>
-            <a:off x="5900000" y="1600000"/>
-            <a:ext cx="2500000" cy="1200000"/>
+            <a:off x="5943600" y="1600200"/>
+            <a:ext cx="2468880" cy="1188720"/>
           </a:xfrm>
           <a:prstGeom prst="roundRect">
             <a:avLst/>
@@ -565,7 +565,7 @@
           <a:p>
             <a:pPr algn="ctr" marL="0" marR="0" indent="0"/>
             <a:r>
-              <a:rPr lang="en-US" sz="4561" dirty="0" smtClean="0">
+              <a:rPr lang="en-US" sz="4500" dirty="0" smtClean="0">
                 <a:solidFill>
                   <a:srgbClr val="000000"/>
                 </a:solidFill>
@@ -583,8 +583,8 @@
         </p:nvSpPr>
         <p:spPr>
           <a:xfrm>
-            <a:off x="1800000" y="3200000"/>
-            <a:ext cx="2500000" cy="1200000"/>
+            <a:off x="1828800" y="3200400"/>
+            <a:ext cx="2468880" cy="1188720"/>
           </a:xfrm>
           <a:prstGeom prst="ellipse">
             <a:avLst/>
@@ -612,7 +612,7 @@
           <a:p>
             <a:pPr algn="ctr" marL="0" marR="0" indent="0"/>
             <a:r>
-              <a:rPr lang="en-US" sz="5212" dirty="0" smtClean="0">
+              <a:rPr lang="en-US" sz="5142" dirty="0" smtClean="0">
                 <a:solidFill>
                   <a:srgbClr val="000000"/>
                 </a:solidFill>
@@ -630,8 +630,8 @@
         </p:nvSpPr>
         <p:spPr>
           <a:xfrm>
-            <a:off x="4800000" y="3200000"/>
-            <a:ext cx="2500000" cy="1200000"/>
+            <a:off x="4754880" y="3200400"/>
+            <a:ext cx="2468880" cy="1188720"/>
           </a:xfrm>
           <a:prstGeom prst="roundRect">
             <a:avLst/>
@@ -656,7 +656,7 @@
           <a:p>
             <a:pPr algn="ctr" marL="0" marR="0" indent="0"/>
             <a:r>
-              <a:rPr lang="en-US" sz="3649" dirty="0" smtClean="0">
+              <a:rPr lang="en-US" sz="3600" dirty="0" smtClean="0">
                 <a:solidFill>
                   <a:srgbClr val="000000"/>
                 </a:solidFill>
@@ -736,8 +736,8 @@
         </p:nvSpPr>
         <p:spPr>
           <a:xfrm>
-            <a:off x="1000000" y="1800000"/>
-            <a:ext cx="3000000" cy="2000000"/>
+            <a:off x="1005840" y="1828800"/>
+            <a:ext cx="3017520" cy="2011680"/>
           </a:xfrm>
           <a:prstGeom prst="rect">
             <a:avLst/>
@@ -754,7 +754,7 @@
           <a:p>
             <a:pPr algn="ctr" marL="0" marR="0" indent="0"/>
             <a:r>
-              <a:rPr lang="en-US" sz="4033" dirty="0" smtClean="0">
+              <a:rPr lang="en-US" sz="4058" dirty="0" smtClean="0">
                 <a:solidFill>
                   <a:srgbClr val="FFFFFF"/>
                 </a:solidFill>
@@ -772,8 +772,8 @@
         </p:nvSpPr>
         <p:spPr>
           <a:xfrm>
-            <a:off x="2000000" y="2200000"/>
-            <a:ext cx="2500000" cy="1500000"/>
+            <a:off x="2011680" y="2194560"/>
+            <a:ext cx="2468880" cy="1463040"/>
           </a:xfrm>
           <a:prstGeom prst="rect">
             <a:avLst/>
@@ -797,7 +797,7 @@
           <a:p>
             <a:pPr algn="ctr" marL="0" marR="0" indent="0"/>
             <a:r>
-              <a:rPr lang="en-US" sz="2432" dirty="0" smtClean="0">
+              <a:rPr lang="en-US" sz="2400" dirty="0" smtClean="0">
                 <a:solidFill>
                   <a:srgbClr val="FFFFFF"/>
                 </a:solidFill>
@@ -815,8 +815,8 @@
         </p:nvSpPr>
         <p:spPr>
           <a:xfrm>
-            <a:off x="4500000" y="1800000"/>
-            <a:ext cx="2500000" cy="2000000"/>
+            <a:off x="4480560" y="1828800"/>
+            <a:ext cx="2468880" cy="2011680"/>
           </a:xfrm>
           <a:prstGeom prst="ellipse">
             <a:avLst/>
@@ -840,7 +840,7 @@
           <a:p>
             <a:pPr algn="ctr" marL="0" marR="0" indent="0"/>
             <a:r>
-              <a:rPr lang="en-US" sz="2432" dirty="0" smtClean="0">
+              <a:rPr lang="en-US" sz="2400" dirty="0" smtClean="0">
                 <a:solidFill>
                   <a:srgbClr val="000000"/>
                 </a:solidFill>
@@ -858,8 +858,8 @@
         </p:nvSpPr>
         <p:spPr>
           <a:xfrm>
-            <a:off x="5500000" y="2500000"/>
-            <a:ext cx="2500000" cy="1500000"/>
+            <a:off x="5486400" y="2468880"/>
+            <a:ext cx="2468880" cy="1463040"/>
           </a:xfrm>
           <a:prstGeom prst="roundRect">
             <a:avLst/>
@@ -883,7 +883,7 @@
           <a:p>
             <a:pPr algn="ctr" marL="0" marR="0" indent="0"/>
             <a:r>
-              <a:rPr lang="en-US" sz="2432" dirty="0" smtClean="0">
+              <a:rPr lang="en-US" sz="2400" dirty="0" smtClean="0">
                 <a:solidFill>
                   <a:srgbClr val="000000"/>
                 </a:solidFill>
@@ -963,8 +963,8 @@
         </p:nvSpPr>
         <p:spPr>
           <a:xfrm>
-            <a:off x="500000" y="1800000"/>
-            <a:ext cx="1800000" cy="800000"/>
+            <a:off x="457200" y="1828800"/>
+            <a:ext cx="1828800" cy="822960"/>
           </a:xfrm>
           <a:prstGeom prst="roundRect">
             <a:avLst/>
@@ -981,7 +981,7 @@
           <a:p>
             <a:pPr algn="ctr" marL="0" marR="0" indent="0"/>
             <a:r>
-              <a:rPr lang="en-US" sz="4225" dirty="0" smtClean="0">
+              <a:rPr lang="en-US" sz="4382" dirty="0" smtClean="0">
                 <a:solidFill>
                   <a:srgbClr val="FFFFFF"/>
                 </a:solidFill>
@@ -999,8 +999,8 @@
         </p:nvSpPr>
         <p:spPr>
           <a:xfrm>
-            <a:off x="3500000" y="1800000"/>
-            <a:ext cx="1800000" cy="800000"/>
+            <a:off x="3474720" y="1828800"/>
+            <a:ext cx="1828800" cy="822960"/>
           </a:xfrm>
           <a:prstGeom prst="roundRect">
             <a:avLst/>
@@ -1017,7 +1017,7 @@
           <a:p>
             <a:pPr algn="ctr" marL="0" marR="0" indent="0"/>
             <a:r>
-              <a:rPr lang="en-US" sz="3638" dirty="0" smtClean="0">
+              <a:rPr lang="en-US" sz="3702" dirty="0" smtClean="0">
                 <a:solidFill>
                   <a:srgbClr val="FFFFFF"/>
                 </a:solidFill>
@@ -1035,8 +1035,8 @@
         </p:nvSpPr>
         <p:spPr>
           <a:xfrm>
-            <a:off x="6500000" y="1800000"/>
-            <a:ext cx="1800000" cy="800000"/>
+            <a:off x="6492240" y="1828800"/>
+            <a:ext cx="1828800" cy="822960"/>
           </a:xfrm>
           <a:prstGeom prst="roundRect">
             <a:avLst/>
@@ -1053,7 +1053,7 @@
           <a:p>
             <a:pPr algn="ctr" marL="0" marR="0" indent="0"/>
             <a:r>
-              <a:rPr lang="en-US" sz="4225" dirty="0" smtClean="0">
+              <a:rPr lang="en-US" sz="4382" dirty="0" smtClean="0">
                 <a:solidFill>
                   <a:srgbClr val="FFFFFF"/>
                 </a:solidFill>
@@ -1071,8 +1071,8 @@
         </p:nvSpPr>
         <p:spPr>
           <a:xfrm>
-            <a:off x="1000000" y="3200000"/>
-            <a:ext cx="1500000" cy="800000"/>
+            <a:off x="1005840" y="3200400"/>
+            <a:ext cx="1463040" cy="822960"/>
           </a:xfrm>
           <a:prstGeom prst="ellipse">
             <a:avLst/>
@@ -1089,7 +1089,7 @@
           <a:p>
             <a:pPr algn="ctr" marL="0" marR="0" indent="0"/>
             <a:r>
-              <a:rPr lang="en-US" sz="4225" dirty="0" smtClean="0">
+              <a:rPr lang="en-US" sz="4382" dirty="0" smtClean="0">
                 <a:solidFill>
                   <a:srgbClr val="FFFFFF"/>
                 </a:solidFill>
@@ -1107,8 +1107,8 @@
         </p:nvSpPr>
         <p:spPr>
           <a:xfrm>
-            <a:off x="4000000" y="3200000"/>
-            <a:ext cx="1500000" cy="800000"/>
+            <a:off x="4023360" y="3200400"/>
+            <a:ext cx="1463040" cy="822960"/>
           </a:xfrm>
           <a:prstGeom prst="ellipse">
             <a:avLst/>
@@ -1125,7 +1125,7 @@
           <a:p>
             <a:pPr algn="ctr" marL="0" marR="0" indent="0"/>
             <a:r>
-              <a:rPr lang="en-US" sz="4225" dirty="0" smtClean="0">
+              <a:rPr lang="en-US" sz="4382" dirty="0" smtClean="0">
                 <a:solidFill>
                   <a:srgbClr val="FFFFFF"/>
                 </a:solidFill>
@@ -1143,8 +1143,8 @@
         </p:nvSpPr>
         <p:spPr>
           <a:xfrm>
-            <a:off x="7000000" y="3200000"/>
-            <a:ext cx="1500000" cy="800000"/>
+            <a:off x="7040880" y="3200400"/>
+            <a:ext cx="1463040" cy="822960"/>
           </a:xfrm>
           <a:prstGeom prst="ellipse">
             <a:avLst/>
@@ -1161,7 +1161,7 @@
           <a:p>
             <a:pPr algn="ctr" marL="0" marR="0" indent="0"/>
             <a:r>
-              <a:rPr lang="en-US" sz="4225" dirty="0" smtClean="0">
+              <a:rPr lang="en-US" sz="4382" dirty="0" smtClean="0">
                 <a:solidFill>
                   <a:srgbClr val="000000"/>
                 </a:solidFill>
@@ -1346,8 +1346,8 @@
         </p:blipFill>
         <p:spPr>
           <a:xfrm>
-            <a:off x="500000" y="1500000"/>
-            <a:ext cx="2000000" cy="2000000"/>
+            <a:off x="457200" y="1463040"/>
+            <a:ext cx="2011680" cy="2011680"/>
           </a:xfrm>
           <a:prstGeom prst="rect">
             <a:avLst/>
@@ -1377,8 +1377,8 @@
         </p:blipFill>
         <p:spPr>
           <a:xfrm>
-            <a:off x="3200000" y="1500000"/>
-            <a:ext cx="2500000" cy="1800000"/>
+            <a:off x="3200400" y="1463040"/>
+            <a:ext cx="2468880" cy="1828800"/>
           </a:xfrm>
           <a:prstGeom prst="rect">
             <a:avLst/>
@@ -1408,8 +1408,8 @@
         </p:blipFill>
         <p:spPr>
           <a:xfrm>
-            <a:off x="6200000" y="1500000"/>
-            <a:ext cx="2300000" cy="1800000"/>
+            <a:off x="6217920" y="1463040"/>
+            <a:ext cx="2286000" cy="1828800"/>
           </a:xfrm>
           <a:prstGeom prst="rect">
             <a:avLst/>
@@ -1501,8 +1501,8 @@
         </p:blipFill>
         <p:spPr>
           <a:xfrm>
-            <a:off x="800000" y="1200000"/>
-            <a:ext cx="2200000" cy="2200000"/>
+            <a:off x="822960" y="1188720"/>
+            <a:ext cx="2194560" cy="2194560"/>
           </a:xfrm>
           <a:prstGeom prst="rect">
             <a:avLst/>
@@ -1528,8 +1528,8 @@
         </p:blipFill>
         <p:spPr>
           <a:xfrm>
-            <a:off x="3500000" y="1200000"/>
-            <a:ext cx="2800000" cy="2000000"/>
+            <a:off x="3474720" y="1188720"/>
+            <a:ext cx="2834640" cy="2011680"/>
           </a:xfrm>
           <a:prstGeom prst="rect">
             <a:avLst/>
@@ -1555,8 +1555,8 @@
         </p:blipFill>
         <p:spPr>
           <a:xfrm>
-            <a:off x="6500000" y="1200000"/>
-            <a:ext cx="2400000" cy="2000000"/>
+            <a:off x="6492240" y="1188720"/>
+            <a:ext cx="2377440" cy="2011680"/>
           </a:xfrm>
           <a:prstGeom prst="rect">
             <a:avLst/>
@@ -1645,8 +1645,8 @@
         </p:blipFill>
         <p:spPr>
           <a:xfrm>
-            <a:off x="1200000" y="1800000"/>
-            <a:ext cx="1800000" cy="1800000"/>
+            <a:off x="1188720" y="1828800"/>
+            <a:ext cx="1828800" cy="1828800"/>
           </a:xfrm>
           <a:prstGeom prst="rect">
             <a:avLst/>
@@ -1670,8 +1670,8 @@
         </p:blipFill>
         <p:spPr>
           <a:xfrm>
-            <a:off x="3500000" y="1800000"/>
-            <a:ext cx="3500000" cy="1500000"/>
+            <a:off x="3474720" y="1828800"/>
+            <a:ext cx="3474720" cy="1463040"/>
           </a:xfrm>
           <a:prstGeom prst="rect">
             <a:avLst/>
@@ -1695,8 +1695,8 @@
         </p:blipFill>
         <p:spPr>
           <a:xfrm>
-            <a:off x="7200000" y="1800000"/>
-            <a:ext cx="2000000" cy="2000000"/>
+            <a:off x="7223760" y="1828800"/>
+            <a:ext cx="2011680" cy="2011680"/>
           </a:xfrm>
           <a:prstGeom prst="rect">
             <a:avLst/>
@@ -1781,8 +1781,8 @@
         </p:blipFill>
         <p:spPr>
           <a:xfrm>
-            <a:off x="900000" y="1400000"/>
-            <a:ext cx="2200000" cy="2200000"/>
+            <a:off x="914400" y="1371600"/>
+            <a:ext cx="2194560" cy="2194560"/>
           </a:xfrm>
           <a:prstGeom prst="rect">
             <a:avLst/>
@@ -1812,8 +1812,8 @@
         </p:blipFill>
         <p:spPr>
           <a:xfrm>
-            <a:off x="3600000" y="1400000"/>
-            <a:ext cx="2600000" cy="1900000"/>
+            <a:off x="3657600" y="1371600"/>
+            <a:ext cx="2651760" cy="1920240"/>
           </a:xfrm>
           <a:prstGeom prst="rect">
             <a:avLst/>
@@ -1843,8 +1843,8 @@
         </p:blipFill>
         <p:spPr>
           <a:xfrm>
-            <a:off x="6600000" y="1400000"/>
-            <a:ext cx="2300000" cy="1900000"/>
+            <a:off x="6583680" y="1371600"/>
+            <a:ext cx="2286000" cy="1920240"/>
           </a:xfrm>
           <a:prstGeom prst="rect">
             <a:avLst/>
@@ -1936,8 +1936,8 @@
         </p:blipFill>
         <p:spPr>
           <a:xfrm>
-            <a:off x="900000" y="1400000"/>
-            <a:ext cx="2200000" cy="2200000"/>
+            <a:off x="914400" y="1371600"/>
+            <a:ext cx="2194560" cy="2194560"/>
           </a:xfrm>
           <a:prstGeom prst="rect">
             <a:avLst/>
@@ -1963,8 +1963,8 @@
         </p:blipFill>
         <p:spPr>
           <a:xfrm>
-            <a:off x="3600000" y="1400000"/>
-            <a:ext cx="2600000" cy="1900000"/>
+            <a:off x="3657600" y="1371600"/>
+            <a:ext cx="2651760" cy="1920240"/>
           </a:xfrm>
           <a:prstGeom prst="rect">
             <a:avLst/>
@@ -1990,8 +1990,8 @@
         </p:blipFill>
         <p:spPr>
           <a:xfrm>
-            <a:off x="6600000" y="1400000"/>
-            <a:ext cx="2300000" cy="1900000"/>
+            <a:off x="6583680" y="1371600"/>
+            <a:ext cx="2286000" cy="1920240"/>
           </a:xfrm>
           <a:prstGeom prst="rect">
             <a:avLst/>
@@ -2079,8 +2079,8 @@
         </p:blipFill>
         <p:spPr>
           <a:xfrm>
-            <a:off x="900000" y="1400000"/>
-            <a:ext cx="2200000" cy="2200000"/>
+            <a:off x="914400" y="1371600"/>
+            <a:ext cx="2194560" cy="2194560"/>
           </a:xfrm>
           <a:prstGeom prst="rect">
             <a:avLst/>
@@ -2110,8 +2110,8 @@
         </p:blipFill>
         <p:spPr>
           <a:xfrm>
-            <a:off x="3600000" y="1400000"/>
-            <a:ext cx="2600000" cy="1900000"/>
+            <a:off x="3657600" y="1371600"/>
+            <a:ext cx="2651760" cy="1920240"/>
           </a:xfrm>
           <a:prstGeom prst="rect">
             <a:avLst/>
@@ -2141,8 +2141,8 @@
         </p:blipFill>
         <p:spPr>
           <a:xfrm>
-            <a:off x="6600000" y="1400000"/>
-            <a:ext cx="2300000" cy="1900000"/>
+            <a:off x="6583680" y="1371600"/>
+            <a:ext cx="2286000" cy="1920240"/>
           </a:xfrm>
           <a:prstGeom prst="rect">
             <a:avLst/>
@@ -2234,8 +2234,8 @@
         </p:blipFill>
         <p:spPr>
           <a:xfrm>
-            <a:off x="900000" y="1400000"/>
-            <a:ext cx="2200000" cy="2200000"/>
+            <a:off x="914400" y="1371600"/>
+            <a:ext cx="2194560" cy="2194560"/>
           </a:xfrm>
           <a:prstGeom prst="rect">
             <a:avLst/>
@@ -2261,8 +2261,8 @@
         </p:blipFill>
         <p:spPr>
           <a:xfrm>
-            <a:off x="3600000" y="1400000"/>
-            <a:ext cx="2600000" cy="1900000"/>
+            <a:off x="3657600" y="1371600"/>
+            <a:ext cx="2651760" cy="1920240"/>
           </a:xfrm>
           <a:prstGeom prst="rect">
             <a:avLst/>
@@ -2288,8 +2288,8 @@
         </p:blipFill>
         <p:spPr>
           <a:xfrm>
-            <a:off x="6600000" y="1400000"/>
-            <a:ext cx="2300000" cy="1900000"/>
+            <a:off x="6583680" y="1371600"/>
+            <a:ext cx="2286000" cy="1920240"/>
           </a:xfrm>
           <a:prstGeom prst="rect">
             <a:avLst/>
@@ -2439,8 +2439,8 @@
         </p:blipFill>
         <p:spPr>
           <a:xfrm>
-            <a:off x="900000" y="1400000"/>
-            <a:ext cx="2200000" cy="2200000"/>
+            <a:off x="914400" y="1371600"/>
+            <a:ext cx="2194560" cy="2194560"/>
           </a:xfrm>
           <a:prstGeom prst="rect">
             <a:avLst/>
@@ -2471,8 +2471,8 @@
         </p:blipFill>
         <p:spPr>
           <a:xfrm>
-            <a:off x="3600000" y="1400000"/>
-            <a:ext cx="2600000" cy="1900000"/>
+            <a:off x="3657600" y="1371600"/>
+            <a:ext cx="2651760" cy="1920240"/>
           </a:xfrm>
           <a:prstGeom prst="rect">
             <a:avLst/>
@@ -2503,8 +2503,8 @@
         </p:blipFill>
         <p:spPr>
           <a:xfrm>
-            <a:off x="6600000" y="1400000"/>
-            <a:ext cx="2300000" cy="1900000"/>
+            <a:off x="6583680" y="1371600"/>
+            <a:ext cx="2286000" cy="1920240"/>
           </a:xfrm>
           <a:prstGeom prst="rect">
             <a:avLst/>
@@ -3599,8 +3599,8 @@
         </p:nvSpPr>
         <p:spPr>
           <a:xfrm>
-            <a:off x="300000" y="2000000"/>
-            <a:ext cx="1400000" cy="800000"/>
+            <a:off x="274320" y="2011680"/>
+            <a:ext cx="1371600" cy="822960"/>
           </a:xfrm>
           <a:prstGeom prst="roundRect">
             <a:avLst/>
@@ -3617,7 +3617,7 @@
           <a:p>
             <a:pPr algn="ctr" marL="0" marR="0" indent="0"/>
             <a:r>
-              <a:rPr lang="en-US" sz="1742" dirty="0" smtClean="0">
+              <a:rPr lang="en-US" sz="1701" dirty="0" smtClean="0">
                 <a:solidFill>
                   <a:srgbClr val="FFFFFF"/>
                 </a:solidFill>
@@ -3635,8 +3635,8 @@
         </p:nvSpPr>
         <p:spPr>
           <a:xfrm>
-            <a:off x="1800000" y="2200000"/>
-            <a:ext cx="400000" cy="400000"/>
+            <a:off x="1828800" y="2194560"/>
+            <a:ext cx="365760" cy="365760"/>
           </a:xfrm>
           <a:prstGeom prst="rightArrow">
             <a:avLst/>
@@ -3659,8 +3659,8 @@
         </p:nvSpPr>
         <p:spPr>
           <a:xfrm>
-            <a:off x="2300000" y="2000000"/>
-            <a:ext cx="1400000" cy="800000"/>
+            <a:off x="2286000" y="2011680"/>
+            <a:ext cx="1371600" cy="822960"/>
           </a:xfrm>
           <a:prstGeom prst="roundRect">
             <a:avLst/>
@@ -3677,7 +3677,7 @@
           <a:p>
             <a:pPr algn="ctr" marL="0" marR="0" indent="0"/>
             <a:r>
-              <a:rPr lang="en-US" sz="2129" dirty="0" smtClean="0">
+              <a:rPr lang="en-US" sz="2079" dirty="0" smtClean="0">
                 <a:solidFill>
                   <a:srgbClr val="000000"/>
                 </a:solidFill>
@@ -3695,8 +3695,8 @@
         </p:nvSpPr>
         <p:spPr>
           <a:xfrm>
-            <a:off x="3800000" y="2200000"/>
-            <a:ext cx="400000" cy="400000"/>
+            <a:off x="3840480" y="2194560"/>
+            <a:ext cx="365760" cy="365760"/>
           </a:xfrm>
           <a:prstGeom prst="rightArrow">
             <a:avLst/>
@@ -3719,8 +3719,8 @@
         </p:nvSpPr>
         <p:spPr>
           <a:xfrm>
-            <a:off x="4300000" y="2000000"/>
-            <a:ext cx="1400000" cy="800000"/>
+            <a:off x="4297680" y="2011680"/>
+            <a:ext cx="1371600" cy="822960"/>
           </a:xfrm>
           <a:prstGeom prst="roundRect">
             <a:avLst/>
@@ -3737,7 +3737,7 @@
           <a:p>
             <a:pPr algn="ctr" marL="0" marR="0" indent="0"/>
             <a:r>
-              <a:rPr lang="en-US" sz="1916" dirty="0" smtClean="0">
+              <a:rPr lang="en-US" sz="1872" dirty="0" smtClean="0">
                 <a:solidFill>
                   <a:srgbClr val="000000"/>
                 </a:solidFill>
@@ -3755,8 +3755,8 @@
         </p:nvSpPr>
         <p:spPr>
           <a:xfrm>
-            <a:off x="5800000" y="2200000"/>
-            <a:ext cx="400000" cy="400000"/>
+            <a:off x="5760720" y="2194560"/>
+            <a:ext cx="365760" cy="365760"/>
           </a:xfrm>
           <a:prstGeom prst="rightArrow">
             <a:avLst/>
@@ -3779,8 +3779,8 @@
         </p:nvSpPr>
         <p:spPr>
           <a:xfrm>
-            <a:off x="6300000" y="2000000"/>
-            <a:ext cx="1400000" cy="800000"/>
+            <a:off x="6309360" y="2011680"/>
+            <a:ext cx="1371600" cy="822960"/>
           </a:xfrm>
           <a:prstGeom prst="roundRect">
             <a:avLst/>
@@ -3797,7 +3797,7 @@
           <a:p>
             <a:pPr algn="ctr" marL="0" marR="0" indent="0"/>
             <a:r>
-              <a:rPr lang="en-US" sz="2129" dirty="0" smtClean="0">
+              <a:rPr lang="en-US" sz="2079" dirty="0" smtClean="0">
                 <a:solidFill>
                   <a:srgbClr val="000000"/>
                 </a:solidFill>
@@ -3877,8 +3877,8 @@
         </p:nvSpPr>
         <p:spPr>
           <a:xfrm>
-            <a:off x="3500000" y="1400000"/>
-            <a:ext cx="2000000" cy="600000"/>
+            <a:off x="3474720" y="1371600"/>
+            <a:ext cx="2011680" cy="640080"/>
           </a:xfrm>
           <a:prstGeom prst="roundRect">
             <a:avLst/>
@@ -3895,7 +3895,7 @@
           <a:p>
             <a:pPr algn="ctr" marL="0" marR="0" indent="0"/>
             <a:r>
-              <a:rPr lang="en-US" sz="2856" dirty="0" smtClean="0">
+              <a:rPr lang="en-US" sz="3130" dirty="0" smtClean="0">
                 <a:solidFill>
                   <a:srgbClr val="FFFFFF"/>
                 </a:solidFill>
@@ -3913,8 +3913,8 @@
         </p:nvSpPr>
         <p:spPr>
           <a:xfrm>
-            <a:off x="4450000" y="2000000"/>
-            <a:ext cx="100000" cy="400000"/>
+            <a:off x="4480560" y="2011680"/>
+            <a:ext cx="91440" cy="365760"/>
           </a:xfrm>
           <a:prstGeom prst="rect">
             <a:avLst/>
@@ -3937,8 +3937,8 @@
         </p:nvSpPr>
         <p:spPr>
           <a:xfrm>
-            <a:off x="1950000" y="2400000"/>
-            <a:ext cx="5100000" cy="50000"/>
+            <a:off x="1920240" y="2377440"/>
+            <a:ext cx="5120640" cy="45720"/>
           </a:xfrm>
           <a:prstGeom prst="rect">
             <a:avLst/>
@@ -3961,8 +3961,8 @@
         </p:nvSpPr>
         <p:spPr>
           <a:xfrm>
-            <a:off x="1000000" y="2600000"/>
-            <a:ext cx="1800000" cy="500000"/>
+            <a:off x="1005840" y="2560320"/>
+            <a:ext cx="1828800" cy="457200"/>
           </a:xfrm>
           <a:prstGeom prst="roundRect">
             <a:avLst/>
@@ -3979,7 +3979,7 @@
           <a:p>
             <a:pPr algn="ctr" marL="0" marR="0" indent="0"/>
             <a:r>
-              <a:rPr lang="en-US" sz="2171" dirty="0" smtClean="0">
+              <a:rPr lang="en-US" sz="1878" dirty="0" smtClean="0">
                 <a:solidFill>
                   <a:srgbClr val="FFFFFF"/>
                 </a:solidFill>
@@ -3997,8 +3997,8 @@
         </p:nvSpPr>
         <p:spPr>
           <a:xfrm>
-            <a:off x="3600000" y="2600000"/>
-            <a:ext cx="1800000" cy="500000"/>
+            <a:off x="3566160" y="2560320"/>
+            <a:ext cx="1828800" cy="457200"/>
           </a:xfrm>
           <a:prstGeom prst="roundRect">
             <a:avLst/>
@@ -4015,7 +4015,7 @@
           <a:p>
             <a:pPr algn="ctr" marL="0" marR="0" indent="0"/>
             <a:r>
-              <a:rPr lang="en-US" sz="2171" dirty="0" smtClean="0">
+              <a:rPr lang="en-US" sz="1878" dirty="0" smtClean="0">
                 <a:solidFill>
                   <a:srgbClr val="FFFFFF"/>
                 </a:solidFill>
@@ -4033,8 +4033,8 @@
         </p:nvSpPr>
         <p:spPr>
           <a:xfrm>
-            <a:off x="6200000" y="2600000"/>
-            <a:ext cx="1800000" cy="500000"/>
+            <a:off x="6217920" y="2560320"/>
+            <a:ext cx="1828800" cy="457200"/>
           </a:xfrm>
           <a:prstGeom prst="roundRect">
             <a:avLst/>
@@ -4051,7 +4051,7 @@
           <a:p>
             <a:pPr algn="ctr" marL="0" marR="0" indent="0"/>
             <a:r>
-              <a:rPr lang="en-US" sz="2171" dirty="0" smtClean="0">
+              <a:rPr lang="en-US" sz="1878" dirty="0" smtClean="0">
                 <a:solidFill>
                   <a:srgbClr val="FFFFFF"/>
                 </a:solidFill>
@@ -4069,8 +4069,8 @@
         </p:nvSpPr>
         <p:spPr>
           <a:xfrm>
-            <a:off x="1850000" y="2450000"/>
-            <a:ext cx="50000" cy="150000"/>
+            <a:off x="1828800" y="2468880"/>
+            <a:ext cx="45720" cy="146304"/>
           </a:xfrm>
           <a:prstGeom prst="rect">
             <a:avLst/>
@@ -4093,8 +4093,8 @@
         </p:nvSpPr>
         <p:spPr>
           <a:xfrm>
-            <a:off x="4450000" y="2450000"/>
-            <a:ext cx="50000" cy="150000"/>
+            <a:off x="4480560" y="2468880"/>
+            <a:ext cx="45720" cy="146304"/>
           </a:xfrm>
           <a:prstGeom prst="rect">
             <a:avLst/>
@@ -4117,8 +4117,8 @@
         </p:nvSpPr>
         <p:spPr>
           <a:xfrm>
-            <a:off x="7050000" y="2450000"/>
-            <a:ext cx="50000" cy="150000"/>
+            <a:off x="7040880" y="2468880"/>
+            <a:ext cx="45720" cy="146304"/>
           </a:xfrm>
           <a:prstGeom prst="rect">
             <a:avLst/>
@@ -4141,8 +4141,8 @@
         </p:nvSpPr>
         <p:spPr>
           <a:xfrm>
-            <a:off x="500000" y="3300000"/>
-            <a:ext cx="1200000" cy="400000"/>
+            <a:off x="457200" y="3291840"/>
+            <a:ext cx="1188720" cy="365760"/>
           </a:xfrm>
           <a:prstGeom prst="rect">
             <a:avLst/>
@@ -4159,7 +4159,7 @@
           <a:p>
             <a:pPr algn="ctr" marL="0" marR="0" indent="0"/>
             <a:r>
-              <a:rPr lang="en-US" sz="1456" dirty="0" smtClean="0">
+              <a:rPr lang="en-US" sz="1252" dirty="0" smtClean="0">
                 <a:solidFill>
                   <a:srgbClr val="000000"/>
                 </a:solidFill>
@@ -4177,8 +4177,8 @@
         </p:nvSpPr>
         <p:spPr>
           <a:xfrm>
-            <a:off x="1800000" y="3300000"/>
-            <a:ext cx="1200000" cy="400000"/>
+            <a:off x="1828800" y="3291840"/>
+            <a:ext cx="1188720" cy="365760"/>
           </a:xfrm>
           <a:prstGeom prst="rect">
             <a:avLst/>
@@ -4195,7 +4195,7 @@
           <a:p>
             <a:pPr algn="ctr" marL="0" marR="0" indent="0"/>
             <a:r>
-              <a:rPr lang="en-US" sz="1486" dirty="0" smtClean="0">
+              <a:rPr lang="en-US" sz="1252" dirty="0" smtClean="0">
                 <a:solidFill>
                   <a:srgbClr val="000000"/>
                 </a:solidFill>
@@ -4275,8 +4275,8 @@
         </p:nvSpPr>
         <p:spPr>
           <a:xfrm>
-            <a:off x="1500000" y="1600000"/>
-            <a:ext cx="2500000" cy="1500000"/>
+            <a:off x="1463040" y="1600200"/>
+            <a:ext cx="2468880" cy="1463040"/>
           </a:xfrm>
           <a:prstGeom prst="roundRect">
             <a:avLst/>
@@ -4293,7 +4293,7 @@
           <a:p>
             <a:pPr algn="l" marL="0" marR="0" indent="0"/>
             <a:r>
-              <a:rPr lang="en-US" sz="2254" dirty="0" smtClean="0">
+              <a:rPr lang="en-US" sz="2191" dirty="0" smtClean="0">
                 <a:solidFill>
                   <a:srgbClr val="FFFFFF"/>
                 </a:solidFill>
@@ -4313,8 +4313,8 @@
         </p:nvSpPr>
         <p:spPr>
           <a:xfrm>
-            <a:off x="4500000" y="1600000"/>
-            <a:ext cx="2500000" cy="1500000"/>
+            <a:off x="4480560" y="1600200"/>
+            <a:ext cx="2468880" cy="1463040"/>
           </a:xfrm>
           <a:prstGeom prst="roundRect">
             <a:avLst/>
@@ -4331,7 +4331,7 @@
           <a:p>
             <a:pPr algn="l" marL="0" marR="0" indent="0"/>
             <a:r>
-              <a:rPr lang="en-US" sz="2254" dirty="0" smtClean="0">
+              <a:rPr lang="en-US" sz="2191" dirty="0" smtClean="0">
                 <a:solidFill>
                   <a:srgbClr val="000000"/>
                 </a:solidFill>
@@ -4351,8 +4351,8 @@
         </p:nvSpPr>
         <p:spPr>
           <a:xfrm>
-            <a:off x="4500000" y="3300000"/>
-            <a:ext cx="2500000" cy="1500000"/>
+            <a:off x="4480560" y="3291840"/>
+            <a:ext cx="2468880" cy="1463040"/>
           </a:xfrm>
           <a:prstGeom prst="roundRect">
             <a:avLst/>
@@ -4369,7 +4369,7 @@
           <a:p>
             <a:pPr algn="l" marL="0" marR="0" indent="0"/>
             <a:r>
-              <a:rPr lang="en-US" sz="2254" dirty="0" smtClean="0">
+              <a:rPr lang="en-US" sz="2191" dirty="0" smtClean="0">
                 <a:solidFill>
                   <a:srgbClr val="000000"/>
                 </a:solidFill>
@@ -4389,8 +4389,8 @@
         </p:nvSpPr>
         <p:spPr>
           <a:xfrm>
-            <a:off x="1500000" y="3300000"/>
-            <a:ext cx="2500000" cy="1500000"/>
+            <a:off x="1463040" y="3291840"/>
+            <a:ext cx="2468880" cy="1463040"/>
           </a:xfrm>
           <a:prstGeom prst="roundRect">
             <a:avLst/>
@@ -4407,7 +4407,7 @@
           <a:p>
             <a:pPr algn="l" marL="0" marR="0" indent="0"/>
             <a:r>
-              <a:rPr lang="en-US" sz="2254" dirty="0" smtClean="0">
+              <a:rPr lang="en-US" sz="2191" dirty="0" smtClean="0">
                 <a:solidFill>
                   <a:srgbClr val="000000"/>
                 </a:solidFill>
@@ -4427,8 +4427,8 @@
         </p:nvSpPr>
         <p:spPr>
           <a:xfrm>
-            <a:off x="4100000" y="2100000"/>
-            <a:ext cx="300000" cy="300000"/>
+            <a:off x="4114800" y="2103120"/>
+            <a:ext cx="274320" cy="274320"/>
           </a:xfrm>
           <a:prstGeom prst="rightArrow">
             <a:avLst/>
@@ -4451,8 +4451,8 @@
         </p:nvSpPr>
         <p:spPr>
           <a:xfrm>
-            <a:off x="5600000" y="3200000"/>
-            <a:ext cx="300000" cy="200000"/>
+            <a:off x="5577840" y="3200400"/>
+            <a:ext cx="274320" cy="182880"/>
           </a:xfrm>
           <a:prstGeom prst="downArrow">
             <a:avLst/>
@@ -4475,8 +4475,8 @@
         </p:nvSpPr>
         <p:spPr>
           <a:xfrm>
-            <a:off x="4100000" y="3800000"/>
-            <a:ext cx="300000" cy="300000"/>
+            <a:off x="4114800" y="3840480"/>
+            <a:ext cx="274320" cy="274320"/>
           </a:xfrm>
           <a:prstGeom prst="leftArrow">
             <a:avLst/>
@@ -4499,8 +4499,8 @@
         </p:nvSpPr>
         <p:spPr>
           <a:xfrm>
-            <a:off x="2600000" y="3200000"/>
-            <a:ext cx="300000" cy="200000"/>
+            <a:off x="2560320" y="3200400"/>
+            <a:ext cx="274320" cy="182880"/>
           </a:xfrm>
           <a:prstGeom prst="upArrow">
             <a:avLst/>
@@ -4585,8 +4585,8 @@
         </p:nvSpPr>
         <p:spPr>
           <a:xfrm>
-            <a:off x="500000" y="4000000"/>
-            <a:ext cx="8000000" cy="600000"/>
+            <a:off x="457200" y="4023360"/>
+            <a:ext cx="7955279" cy="640080"/>
           </a:xfrm>
           <a:prstGeom prst="trapezoid">
             <a:avLst/>
@@ -4603,7 +4603,7 @@
           <a:p>
             <a:pPr algn="ctr" marL="0" marR="0" indent="0"/>
             <a:r>
-              <a:rPr lang="en-US" sz="2380" dirty="0" smtClean="0">
+              <a:rPr lang="en-US" sz="2608" dirty="0" smtClean="0">
                 <a:solidFill>
                   <a:srgbClr val="FFFFFF"/>
                 </a:solidFill>
@@ -4621,8 +4621,8 @@
         </p:nvSpPr>
         <p:spPr>
           <a:xfrm>
-            <a:off x="1000000" y="3400000"/>
-            <a:ext cx="7000000" cy="600000"/>
+            <a:off x="1005840" y="3383280"/>
+            <a:ext cx="7040880" cy="640080"/>
           </a:xfrm>
           <a:prstGeom prst="trapezoid">
             <a:avLst/>
@@ -4639,7 +4639,7 @@
           <a:p>
             <a:pPr algn="ctr" marL="0" marR="0" indent="0"/>
             <a:r>
-              <a:rPr lang="en-US" sz="2380" dirty="0" smtClean="0">
+              <a:rPr lang="en-US" sz="2608" dirty="0" smtClean="0">
                 <a:solidFill>
                   <a:srgbClr val="000000"/>
                 </a:solidFill>
@@ -4657,8 +4657,8 @@
         </p:nvSpPr>
         <p:spPr>
           <a:xfrm>
-            <a:off x="1500000" y="2800000"/>
-            <a:ext cx="6000000" cy="600000"/>
+            <a:off x="1463040" y="2834640"/>
+            <a:ext cx="6035040" cy="640080"/>
           </a:xfrm>
           <a:prstGeom prst="trapezoid">
             <a:avLst/>
@@ -4675,7 +4675,7 @@
           <a:p>
             <a:pPr algn="ctr" marL="0" marR="0" indent="0"/>
             <a:r>
-              <a:rPr lang="en-US" sz="2380" dirty="0" smtClean="0">
+              <a:rPr lang="en-US" sz="2608" dirty="0" smtClean="0">
                 <a:solidFill>
                   <a:srgbClr val="000000"/>
                 </a:solidFill>
@@ -4693,8 +4693,8 @@
         </p:nvSpPr>
         <p:spPr>
           <a:xfrm>
-            <a:off x="2000000" y="2200000"/>
-            <a:ext cx="5000000" cy="600000"/>
+            <a:off x="2011680" y="2194560"/>
+            <a:ext cx="5029200" cy="640080"/>
           </a:xfrm>
           <a:prstGeom prst="trapezoid">
             <a:avLst/>
@@ -4711,7 +4711,7 @@
           <a:p>
             <a:pPr algn="ctr" marL="0" marR="0" indent="0"/>
             <a:r>
-              <a:rPr lang="en-US" sz="2615" dirty="0" smtClean="0">
+              <a:rPr lang="en-US" sz="2631" dirty="0" smtClean="0">
                 <a:solidFill>
                   <a:srgbClr val="000000"/>
                 </a:solidFill>
@@ -4729,8 +4729,8 @@
         </p:nvSpPr>
         <p:spPr>
           <a:xfrm>
-            <a:off x="2500000" y="1500000"/>
-            <a:ext cx="4000000" cy="700000"/>
+            <a:off x="2468880" y="1463040"/>
+            <a:ext cx="4023360" cy="731520"/>
           </a:xfrm>
           <a:prstGeom prst="triangle">
             <a:avLst/>
@@ -4747,7 +4747,7 @@
           <a:p>
             <a:pPr algn="ctr" marL="0" marR="0" indent="0"/>
             <a:r>
-              <a:rPr lang="en-US" sz="3339" dirty="0" smtClean="0">
+              <a:rPr lang="en-US" sz="3360" dirty="0" smtClean="0">
                 <a:solidFill>
                   <a:srgbClr val="FFFFFF"/>
                 </a:solidFill>
@@ -4827,8 +4827,8 @@
         </p:nvSpPr>
         <p:spPr>
           <a:xfrm>
-            <a:off x="1500000" y="1800000"/>
-            <a:ext cx="3000000" cy="3000000"/>
+            <a:off x="1463040" y="1828800"/>
+            <a:ext cx="3017520" cy="3017520"/>
           </a:xfrm>
           <a:prstGeom prst="ellipse">
             <a:avLst/>
@@ -4863,8 +4863,8 @@
         </p:nvSpPr>
         <p:spPr>
           <a:xfrm>
-            <a:off x="3500000" y="1800000"/>
-            <a:ext cx="3000000" cy="3000000"/>
+            <a:off x="3474720" y="1828800"/>
+            <a:ext cx="3017520" cy="3017520"/>
           </a:xfrm>
           <a:prstGeom prst="ellipse">
             <a:avLst/>
@@ -4881,7 +4881,7 @@
           <a:p>
             <a:pPr algn="ctr" marL="0" marR="0" indent="0"/>
             <a:r>
-              <a:rPr lang="en-US" sz="6337" dirty="0" smtClean="0">
+              <a:rPr lang="en-US" sz="6377" dirty="0" smtClean="0">
                 <a:solidFill>
                   <a:srgbClr val="000000"/>
                 </a:solidFill>
@@ -4899,8 +4899,8 @@
         </p:nvSpPr>
         <p:spPr>
           <a:xfrm>
-            <a:off x="2500000" y="3200000"/>
-            <a:ext cx="3000000" cy="3000000"/>
+            <a:off x="2468880" y="3200400"/>
+            <a:ext cx="3017520" cy="3017520"/>
           </a:xfrm>
           <a:prstGeom prst="ellipse">
             <a:avLst/>
@@ -4917,7 +4917,7 @@
           <a:p>
             <a:pPr algn="ctr" marL="0" marR="0" indent="0"/>
             <a:r>
-              <a:rPr lang="en-US" sz="4033" dirty="0" smtClean="0">
+              <a:rPr lang="en-US" sz="4058" dirty="0" smtClean="0">
                 <a:solidFill>
                   <a:srgbClr val="000000"/>
                 </a:solidFill>
@@ -4935,8 +4935,8 @@
         </p:nvSpPr>
         <p:spPr>
           <a:xfrm>
-            <a:off x="3200000" y="2800000"/>
-            <a:ext cx="1600000" cy="800000"/>
+            <a:off x="3200400" y="2834640"/>
+            <a:ext cx="1600200" cy="822960"/>
           </a:xfrm>
           <a:prstGeom prst="ellipse">
             <a:avLst/>
@@ -6929,8 +6929,8 @@
         </p:nvSpPr>
         <p:spPr>
           <a:xfrm>
-            <a:off x="500000" y="1600000"/>
-            <a:ext cx="1800000" cy="800000"/>
+            <a:off x="457200" y="1600200"/>
+            <a:ext cx="1828800" cy="822960"/>
           </a:xfrm>
           <a:prstGeom prst="rect">
             <a:avLst/>
@@ -6947,7 +6947,7 @@
           <a:p>
             <a:pPr algn="ctr" marL="0" marR="0" indent="0"/>
             <a:r>
-              <a:rPr lang="en-US" sz="2829" dirty="0" smtClean="0">
+              <a:rPr lang="en-US" sz="2879" dirty="0" smtClean="0">
                 <a:solidFill>
                   <a:srgbClr val="FFFFFF"/>
                 </a:solidFill>
@@ -6965,8 +6965,8 @@
         </p:nvSpPr>
         <p:spPr>
           <a:xfrm>
-            <a:off x="2500000" y="1600000"/>
-            <a:ext cx="1800000" cy="800000"/>
+            <a:off x="2468880" y="1600200"/>
+            <a:ext cx="1828800" cy="822960"/>
           </a:xfrm>
           <a:prstGeom prst="rect">
             <a:avLst/>
@@ -6983,7 +6983,7 @@
           <a:p>
             <a:pPr algn="ctr" marL="0" marR="0" indent="0"/>
             <a:r>
-              <a:rPr lang="en-US" sz="4225" dirty="0" smtClean="0">
+              <a:rPr lang="en-US" sz="4320" dirty="0" smtClean="0">
                 <a:solidFill>
                   <a:srgbClr val="FFFFFF"/>
                 </a:solidFill>
@@ -7001,8 +7001,8 @@
         </p:nvSpPr>
         <p:spPr>
           <a:xfrm>
-            <a:off x="4500000" y="1600000"/>
-            <a:ext cx="1800000" cy="800000"/>
+            <a:off x="4480560" y="1600200"/>
+            <a:ext cx="1828800" cy="822960"/>
           </a:xfrm>
           <a:prstGeom prst="rect">
             <a:avLst/>
@@ -7019,7 +7019,7 @@
           <a:p>
             <a:pPr algn="ctr" marL="0" marR="0" indent="0"/>
             <a:r>
-              <a:rPr lang="en-US" sz="3638" dirty="0" smtClean="0">
+              <a:rPr lang="en-US" sz="3702" dirty="0" smtClean="0">
                 <a:solidFill>
                   <a:srgbClr val="FFFFFF"/>
                 </a:solidFill>
@@ -7037,8 +7037,8 @@
         </p:nvSpPr>
         <p:spPr>
           <a:xfrm>
-            <a:off x="6500000" y="1600000"/>
-            <a:ext cx="1800000" cy="800000"/>
+            <a:off x="6492240" y="1600200"/>
+            <a:ext cx="1828800" cy="822960"/>
           </a:xfrm>
           <a:prstGeom prst="rect">
             <a:avLst/>
@@ -7055,7 +7055,7 @@
           <a:p>
             <a:pPr algn="ctr" marL="0" marR="0" indent="0"/>
             <a:r>
-              <a:rPr lang="en-US" sz="4225" dirty="0" smtClean="0">
+              <a:rPr lang="en-US" sz="4382" dirty="0" smtClean="0">
                 <a:solidFill>
                   <a:srgbClr val="000000"/>
                 </a:solidFill>
@@ -7073,8 +7073,8 @@
         </p:nvSpPr>
         <p:spPr>
           <a:xfrm>
-            <a:off x="500000" y="2700000"/>
-            <a:ext cx="1800000" cy="800000"/>
+            <a:off x="457200" y="2743200"/>
+            <a:ext cx="1828800" cy="822960"/>
           </a:xfrm>
           <a:prstGeom prst="rect">
             <a:avLst/>
@@ -7091,7 +7091,7 @@
           <a:p>
             <a:pPr algn="ctr" marL="0" marR="0" indent="0"/>
             <a:r>
-              <a:rPr lang="en-US" sz="4225" dirty="0" smtClean="0">
+              <a:rPr lang="en-US" sz="4320" dirty="0" smtClean="0">
                 <a:solidFill>
                   <a:srgbClr val="FFFFFF"/>
                 </a:solidFill>
@@ -7109,8 +7109,8 @@
         </p:nvSpPr>
         <p:spPr>
           <a:xfrm>
-            <a:off x="2500000" y="2700000"/>
-            <a:ext cx="1800000" cy="800000"/>
+            <a:off x="2468880" y="2743200"/>
+            <a:ext cx="1828800" cy="822960"/>
           </a:xfrm>
           <a:prstGeom prst="rect">
             <a:avLst/>
@@ -7127,7 +7127,7 @@
           <a:p>
             <a:pPr algn="ctr" marL="0" marR="0" indent="0"/>
             <a:r>
-              <a:rPr lang="en-US" sz="4225" dirty="0" smtClean="0">
+              <a:rPr lang="en-US" sz="4382" dirty="0" smtClean="0">
                 <a:solidFill>
                   <a:srgbClr val="FFFFFF"/>
                 </a:solidFill>
@@ -7145,8 +7145,8 @@
         </p:nvSpPr>
         <p:spPr>
           <a:xfrm>
-            <a:off x="4500000" y="2700000"/>
-            <a:ext cx="1800000" cy="800000"/>
+            <a:off x="4480560" y="2743200"/>
+            <a:ext cx="1828800" cy="822960"/>
           </a:xfrm>
           <a:prstGeom prst="rect">
             <a:avLst/>
@@ -7163,7 +7163,7 @@
           <a:p>
             <a:pPr algn="ctr" marL="0" marR="0" indent="0"/>
             <a:r>
-              <a:rPr lang="en-US" sz="4225" dirty="0" smtClean="0">
+              <a:rPr lang="en-US" sz="4320" dirty="0" smtClean="0">
                 <a:solidFill>
                   <a:srgbClr val="FFFFFF"/>
                 </a:solidFill>
@@ -7243,8 +7243,8 @@
         </p:nvSpPr>
         <p:spPr>
           <a:xfrm>
-            <a:off x="500000" y="1600000"/>
-            <a:ext cx="1200000" cy="600000"/>
+            <a:off x="457200" y="1600200"/>
+            <a:ext cx="1188720" cy="640080"/>
           </a:xfrm>
           <a:prstGeom prst="rect">
             <a:avLst/>
@@ -7261,7 +7261,7 @@
           <a:p>
             <a:pPr algn="ctr" marL="0" marR="0" indent="0"/>
             <a:r>
-              <a:rPr lang="en-US" sz="2856" dirty="0" smtClean="0">
+              <a:rPr lang="en-US" sz="3130" dirty="0" smtClean="0">
                 <a:solidFill>
                   <a:srgbClr val="FFFFFF"/>
                 </a:solidFill>
@@ -7279,8 +7279,8 @@
         </p:nvSpPr>
         <p:spPr>
           <a:xfrm>
-            <a:off x="1900000" y="1600000"/>
-            <a:ext cx="1200000" cy="600000"/>
+            <a:off x="1920240" y="1600200"/>
+            <a:ext cx="1188720" cy="640080"/>
           </a:xfrm>
           <a:prstGeom prst="rect">
             <a:avLst/>
@@ -7297,7 +7297,7 @@
           <a:p>
             <a:pPr algn="ctr" marL="0" marR="0" indent="0"/>
             <a:r>
-              <a:rPr lang="en-US" sz="2669" dirty="0" smtClean="0">
+              <a:rPr lang="en-US" sz="2640" dirty="0" smtClean="0">
                 <a:solidFill>
                   <a:srgbClr val="FFFFFF"/>
                 </a:solidFill>
@@ -7315,8 +7315,8 @@
         </p:nvSpPr>
         <p:spPr>
           <a:xfrm>
-            <a:off x="3300000" y="1600000"/>
-            <a:ext cx="1200000" cy="600000"/>
+            <a:off x="3291840" y="1600200"/>
+            <a:ext cx="1188720" cy="640080"/>
           </a:xfrm>
           <a:prstGeom prst="rect">
             <a:avLst/>
@@ -7333,7 +7333,7 @@
           <a:p>
             <a:pPr algn="ctr" marL="0" marR="0" indent="0"/>
             <a:r>
-              <a:rPr lang="en-US" sz="2288" dirty="0" smtClean="0">
+              <a:rPr lang="en-US" sz="2262" dirty="0" smtClean="0">
                 <a:solidFill>
                   <a:srgbClr val="000000"/>
                 </a:solidFill>
@@ -7351,8 +7351,8 @@
         </p:nvSpPr>
         <p:spPr>
           <a:xfrm>
-            <a:off x="4700000" y="1600000"/>
-            <a:ext cx="1200000" cy="600000"/>
+            <a:off x="4663440" y="1600200"/>
+            <a:ext cx="1188720" cy="640080"/>
           </a:xfrm>
           <a:prstGeom prst="rect">
             <a:avLst/>
@@ -7369,7 +7369,7 @@
           <a:p>
             <a:pPr algn="ctr" marL="0" marR="0" indent="0"/>
             <a:r>
-              <a:rPr lang="en-US" sz="2002" dirty="0" smtClean="0">
+              <a:rPr lang="en-US" sz="1980" dirty="0" smtClean="0">
                 <a:solidFill>
                   <a:srgbClr val="000000"/>
                 </a:solidFill>
@@ -7387,8 +7387,8 @@
         </p:nvSpPr>
         <p:spPr>
           <a:xfrm>
-            <a:off x="6100000" y="1600000"/>
-            <a:ext cx="1200000" cy="600000"/>
+            <a:off x="6126480" y="1600200"/>
+            <a:ext cx="1188720" cy="640080"/>
           </a:xfrm>
           <a:prstGeom prst="rect">
             <a:avLst/>
@@ -7405,7 +7405,7 @@
           <a:p>
             <a:pPr algn="ctr" marL="0" marR="0" indent="0"/>
             <a:r>
-              <a:rPr lang="en-US" sz="2002" dirty="0" smtClean="0">
+              <a:rPr lang="en-US" sz="1980" dirty="0" smtClean="0">
                 <a:solidFill>
                   <a:srgbClr val="FFFFFF"/>
                 </a:solidFill>
@@ -7423,8 +7423,8 @@
         </p:nvSpPr>
         <p:spPr>
           <a:xfrm>
-            <a:off x="500000" y="2500000"/>
-            <a:ext cx="1200000" cy="600000"/>
+            <a:off x="457200" y="2468880"/>
+            <a:ext cx="1188720" cy="640080"/>
           </a:xfrm>
           <a:prstGeom prst="rect">
             <a:avLst/>
@@ -7441,7 +7441,7 @@
           <a:p>
             <a:pPr algn="ctr" marL="0" marR="0" indent="0"/>
             <a:r>
-              <a:rPr lang="en-US" sz="2669" dirty="0" smtClean="0">
+              <a:rPr lang="en-US" sz="2640" dirty="0" smtClean="0">
                 <a:solidFill>
                   <a:srgbClr val="FFFFFF"/>
                 </a:solidFill>
@@ -7459,8 +7459,8 @@
         </p:nvSpPr>
         <p:spPr>
           <a:xfrm>
-            <a:off x="1900000" y="2500000"/>
-            <a:ext cx="1200000" cy="600000"/>
+            <a:off x="1920240" y="2468880"/>
+            <a:ext cx="1188720" cy="640080"/>
           </a:xfrm>
           <a:prstGeom prst="rect">
             <a:avLst/>
@@ -7477,7 +7477,7 @@
           <a:p>
             <a:pPr algn="ctr" marL="0" marR="0" indent="0"/>
             <a:r>
-              <a:rPr lang="en-US" sz="2288" dirty="0" smtClean="0">
+              <a:rPr lang="en-US" sz="2262" dirty="0" smtClean="0">
                 <a:solidFill>
                   <a:srgbClr val="FFFFFF"/>
                 </a:solidFill>
@@ -7495,8 +7495,8 @@
         </p:nvSpPr>
         <p:spPr>
           <a:xfrm>
-            <a:off x="3300000" y="2500000"/>
-            <a:ext cx="1200000" cy="600000"/>
+            <a:off x="3291840" y="2468880"/>
+            <a:ext cx="1188720" cy="640080"/>
           </a:xfrm>
           <a:prstGeom prst="rect">
             <a:avLst/>
@@ -7513,7 +7513,7 @@
           <a:p>
             <a:pPr algn="ctr" marL="0" marR="0" indent="0"/>
             <a:r>
-              <a:rPr lang="en-US" sz="2856" dirty="0" smtClean="0">
+              <a:rPr lang="en-US" sz="3130" dirty="0" smtClean="0">
                 <a:solidFill>
                   <a:srgbClr val="FFFFFF"/>
                 </a:solidFill>
@@ -7531,8 +7531,8 @@
         </p:nvSpPr>
         <p:spPr>
           <a:xfrm>
-            <a:off x="4700000" y="2500000"/>
-            <a:ext cx="1200000" cy="600000"/>
+            <a:off x="4663440" y="2468880"/>
+            <a:ext cx="1188720" cy="640080"/>
           </a:xfrm>
           <a:prstGeom prst="rect">
             <a:avLst/>
@@ -7549,7 +7549,7 @@
           <a:p>
             <a:pPr algn="ctr" marL="0" marR="0" indent="0"/>
             <a:r>
-              <a:rPr lang="en-US" sz="2002" dirty="0" smtClean="0">
+              <a:rPr lang="en-US" sz="1980" dirty="0" smtClean="0">
                 <a:solidFill>
                   <a:srgbClr val="FFFFFF"/>
                 </a:solidFill>
@@ -7567,8 +7567,8 @@
         </p:nvSpPr>
         <p:spPr>
           <a:xfrm>
-            <a:off x="6100000" y="2500000"/>
-            <a:ext cx="1200000" cy="600000"/>
+            <a:off x="6126480" y="2468880"/>
+            <a:ext cx="1188720" cy="640080"/>
           </a:xfrm>
           <a:prstGeom prst="rect">
             <a:avLst/>
@@ -7585,7 +7585,7 @@
           <a:p>
             <a:pPr algn="ctr" marL="0" marR="0" indent="0"/>
             <a:r>
-              <a:rPr lang="en-US" sz="2669" dirty="0" smtClean="0">
+              <a:rPr lang="en-US" sz="2640" dirty="0" smtClean="0">
                 <a:solidFill>
                   <a:srgbClr val="FFFFFF"/>
                 </a:solidFill>
@@ -8531,8 +8531,8 @@
         </p:nvSpPr>
         <p:spPr>
           <a:xfrm>
-            <a:off x="300000" y="4200000"/>
-            <a:ext cx="2500000" cy="600000"/>
+            <a:off x="274320" y="4206240"/>
+            <a:ext cx="2468880" cy="640080"/>
           </a:xfrm>
           <a:prstGeom prst="roundRect">
             <a:avLst/>
@@ -8549,7 +8549,7 @@
           <a:p>
             <a:pPr algn="ctr" marL="0" marR="0" indent="0"/>
             <a:r>
-              <a:rPr lang="en-US" sz="1737" dirty="0" smtClean="0">
+              <a:rPr lang="en-US" sz="1714" dirty="0" smtClean="0">
                 <a:solidFill>
                   <a:srgbClr val="FFFFFF"/>
                 </a:solidFill>
@@ -8567,8 +8567,8 @@
         </p:nvSpPr>
         <p:spPr>
           <a:xfrm>
-            <a:off x="3100000" y="4200000"/>
-            <a:ext cx="2500000" cy="600000"/>
+            <a:off x="3108960" y="4206240"/>
+            <a:ext cx="2468880" cy="640080"/>
           </a:xfrm>
           <a:prstGeom prst="roundRect">
             <a:avLst/>
@@ -8585,7 +8585,7 @@
           <a:p>
             <a:pPr algn="ctr" marL="0" marR="0" indent="0"/>
             <a:r>
-              <a:rPr lang="en-US" sz="2280" dirty="0" smtClean="0">
+              <a:rPr lang="en-US" sz="2250" dirty="0" smtClean="0">
                 <a:solidFill>
                   <a:srgbClr val="000000"/>
                 </a:solidFill>
@@ -8603,8 +8603,8 @@
         </p:nvSpPr>
         <p:spPr>
           <a:xfrm>
-            <a:off x="5900000" y="4200000"/>
-            <a:ext cx="2500000" cy="600000"/>
+            <a:off x="5943600" y="4206240"/>
+            <a:ext cx="2468880" cy="640080"/>
           </a:xfrm>
           <a:prstGeom prst="roundRect">
             <a:avLst/>
@@ -8621,7 +8621,7 @@
           <a:p>
             <a:pPr algn="ctr" marL="0" marR="0" indent="0"/>
             <a:r>
-              <a:rPr lang="en-US" sz="2027" dirty="0" smtClean="0">
+              <a:rPr lang="en-US" sz="2000" dirty="0" smtClean="0">
                 <a:solidFill>
                   <a:srgbClr val="000000"/>
                 </a:solidFill>
@@ -8955,8 +8955,8 @@
         </p:nvSpPr>
         <p:spPr>
           <a:xfrm>
-            <a:off x="300000" y="1500000"/>
-            <a:ext cx="4200000" cy="300000"/>
+            <a:off x="274320" y="1463040"/>
+            <a:ext cx="4206240" cy="274320"/>
           </a:xfrm>
           <a:prstGeom prst="rect">
             <a:avLst/>
@@ -8991,8 +8991,8 @@
         </p:nvSpPr>
         <p:spPr>
           <a:xfrm>
-            <a:off x="400000" y="2000000"/>
-            <a:ext cx="1800000" cy="1100000"/>
+            <a:off x="365760" y="2011680"/>
+            <a:ext cx="1828800" cy="1097280"/>
           </a:xfrm>
           <a:prstGeom prst="rect">
             <a:avLst/>
@@ -9011,7 +9011,7 @@
           <a:p>
             <a:pPr algn="ctr" marL="0" marR="0" indent="0"/>
             <a:r>
-              <a:rPr lang="en-US" sz="3638" dirty="0" smtClean="0">
+              <a:rPr lang="en-US" sz="3702" dirty="0" smtClean="0">
                 <a:solidFill>
                   <a:srgbClr val="000000"/>
                 </a:solidFill>
@@ -9029,8 +9029,8 @@
         </p:nvSpPr>
         <p:spPr>
           <a:xfrm>
-            <a:off x="2500000" y="2000000"/>
-            <a:ext cx="1800000" cy="1100000"/>
+            <a:off x="2468880" y="2011680"/>
+            <a:ext cx="1828800" cy="1097280"/>
           </a:xfrm>
           <a:prstGeom prst="rect">
             <a:avLst/>
@@ -9049,7 +9049,7 @@
           <a:p>
             <a:pPr algn="ctr" marL="0" marR="0" indent="0"/>
             <a:r>
-              <a:rPr lang="en-US" sz="3638" dirty="0" smtClean="0">
+              <a:rPr lang="en-US" sz="3702" dirty="0" smtClean="0">
                 <a:solidFill>
                   <a:srgbClr val="000000"/>
                 </a:solidFill>
@@ -9067,8 +9067,8 @@
         </p:nvSpPr>
         <p:spPr>
           <a:xfrm>
-            <a:off x="400000" y="3200000"/>
-            <a:ext cx="1800000" cy="1100000"/>
+            <a:off x="365760" y="3200400"/>
+            <a:ext cx="1828800" cy="1097280"/>
           </a:xfrm>
           <a:prstGeom prst="rect">
             <a:avLst/>
@@ -9087,7 +9087,7 @@
           <a:p>
             <a:pPr algn="ctr" marL="0" marR="0" indent="0"/>
             <a:r>
-              <a:rPr lang="en-US" sz="3638" dirty="0" smtClean="0">
+              <a:rPr lang="en-US" sz="3702" dirty="0" smtClean="0">
                 <a:solidFill>
                   <a:srgbClr val="000000"/>
                 </a:solidFill>
@@ -9105,8 +9105,8 @@
         </p:nvSpPr>
         <p:spPr>
           <a:xfrm>
-            <a:off x="2500000" y="3200000"/>
-            <a:ext cx="1800000" cy="1100000"/>
+            <a:off x="2468880" y="3200400"/>
+            <a:ext cx="1828800" cy="1097280"/>
           </a:xfrm>
           <a:prstGeom prst="rect">
             <a:avLst/>
@@ -9125,7 +9125,7 @@
           <a:p>
             <a:pPr algn="ctr" marL="0" marR="0" indent="0"/>
             <a:r>
-              <a:rPr lang="en-US" sz="3638" dirty="0" smtClean="0">
+              <a:rPr lang="en-US" sz="3702" dirty="0" smtClean="0">
                 <a:solidFill>
                   <a:srgbClr val="000000"/>
                 </a:solidFill>
@@ -9143,8 +9143,8 @@
         </p:nvSpPr>
         <p:spPr>
           <a:xfrm>
-            <a:off x="400000" y="4400000"/>
-            <a:ext cx="1800000" cy="1100000"/>
+            <a:off x="365760" y="4389120"/>
+            <a:ext cx="1828800" cy="1097280"/>
           </a:xfrm>
           <a:prstGeom prst="rect">
             <a:avLst/>
@@ -9163,7 +9163,7 @@
           <a:p>
             <a:pPr algn="ctr" marL="0" marR="0" indent="0"/>
             <a:r>
-              <a:rPr lang="en-US" sz="3638" dirty="0" smtClean="0">
+              <a:rPr lang="en-US" sz="3702" dirty="0" smtClean="0">
                 <a:solidFill>
                   <a:srgbClr val="000000"/>
                 </a:solidFill>
@@ -9181,8 +9181,8 @@
         </p:nvSpPr>
         <p:spPr>
           <a:xfrm>
-            <a:off x="2500000" y="4400000"/>
-            <a:ext cx="1800000" cy="1100000"/>
+            <a:off x="2468880" y="4389120"/>
+            <a:ext cx="1828800" cy="1097280"/>
           </a:xfrm>
           <a:prstGeom prst="rect">
             <a:avLst/>
@@ -9201,7 +9201,7 @@
           <a:p>
             <a:pPr algn="ctr" marL="0" marR="0" indent="0"/>
             <a:r>
-              <a:rPr lang="en-US" sz="3638" dirty="0" smtClean="0">
+              <a:rPr lang="en-US" sz="3702" dirty="0" smtClean="0">
                 <a:solidFill>
                   <a:srgbClr val="000000"/>
                 </a:solidFill>
@@ -9219,8 +9219,8 @@
         </p:nvSpPr>
         <p:spPr>
           <a:xfrm>
-            <a:off x="300000" y="5600000"/>
-            <a:ext cx="4200000" cy="300000"/>
+            <a:off x="274320" y="5577840"/>
+            <a:ext cx="4206240" cy="274320"/>
           </a:xfrm>
           <a:prstGeom prst="rect">
             <a:avLst/>
@@ -9658,8 +9658,8 @@
         </p:nvSpPr>
         <p:spPr>
           <a:xfrm>
-            <a:off x="300000" y="4400000"/>
-            <a:ext cx="2000000" cy="400000"/>
+            <a:off x="274320" y="4389120"/>
+            <a:ext cx="2011680" cy="365760"/>
           </a:xfrm>
           <a:prstGeom prst="roundRect">
             <a:avLst/>
@@ -9676,7 +9676,7 @@
           <a:p>
             <a:pPr algn="ctr" marL="0" marR="0" indent="0"/>
             <a:r>
-              <a:rPr lang="en-US" sz="1144" dirty="0" smtClean="0">
+              <a:rPr lang="en-US" sz="1152" dirty="0" smtClean="0">
                 <a:solidFill>
                   <a:srgbClr val="FFFFFF"/>
                 </a:solidFill>
@@ -9694,8 +9694,8 @@
         </p:nvSpPr>
         <p:spPr>
           <a:xfrm>
-            <a:off x="2500000" y="4400000"/>
-            <a:ext cx="2000000" cy="400000"/>
+            <a:off x="2468880" y="4389120"/>
+            <a:ext cx="2011680" cy="365760"/>
           </a:xfrm>
           <a:prstGeom prst="roundRect">
             <a:avLst/>
@@ -9712,7 +9712,7 @@
           <a:p>
             <a:pPr algn="ctr" marL="0" marR="0" indent="0"/>
             <a:r>
-              <a:rPr lang="en-US" sz="1430" dirty="0" smtClean="0">
+              <a:rPr lang="en-US" sz="1252" dirty="0" smtClean="0">
                 <a:solidFill>
                   <a:srgbClr val="000000"/>
                 </a:solidFill>
@@ -9730,8 +9730,8 @@
         </p:nvSpPr>
         <p:spPr>
           <a:xfrm>
-            <a:off x="4700000" y="4400000"/>
-            <a:ext cx="2000000" cy="400000"/>
+            <a:off x="4663440" y="4389120"/>
+            <a:ext cx="2011680" cy="365760"/>
           </a:xfrm>
           <a:prstGeom prst="roundRect">
             <a:avLst/>
@@ -9748,7 +9748,7 @@
           <a:p>
             <a:pPr algn="ctr" marL="0" marR="0" indent="0"/>
             <a:r>
-              <a:rPr lang="en-US" sz="1430" dirty="0" smtClean="0">
+              <a:rPr lang="en-US" sz="1252" dirty="0" smtClean="0">
                 <a:solidFill>
                   <a:srgbClr val="000000"/>
                 </a:solidFill>
@@ -9766,8 +9766,8 @@
         </p:nvSpPr>
         <p:spPr>
           <a:xfrm>
-            <a:off x="6900000" y="4400000"/>
-            <a:ext cx="2000000" cy="400000"/>
+            <a:off x="6858000" y="4389120"/>
+            <a:ext cx="2011680" cy="365760"/>
           </a:xfrm>
           <a:prstGeom prst="roundRect">
             <a:avLst/>
@@ -9784,7 +9784,7 @@
           <a:p>
             <a:pPr algn="ctr" marL="0" marR="0" indent="0"/>
             <a:r>
-              <a:rPr lang="en-US" sz="1486" dirty="0" smtClean="0">
+              <a:rPr lang="en-US" sz="1252" dirty="0" smtClean="0">
                 <a:solidFill>
                   <a:srgbClr val="000000"/>
                 </a:solidFill>
@@ -10443,8 +10443,8 @@
         </p:nvSpPr>
         <p:spPr>
           <a:xfrm>
-            <a:off x="500000" y="1600000"/>
-            <a:ext cx="2000000" cy="1000000"/>
+            <a:off x="457200" y="1600200"/>
+            <a:ext cx="2011680" cy="1005840"/>
           </a:xfrm>
           <a:prstGeom prst="rect">
             <a:avLst/>
@@ -10461,7 +10461,7 @@
           <a:p>
             <a:pPr algn="ctr" marL="0" marR="0" indent="0"/>
             <a:r>
-              <a:rPr lang="en-US" sz="3179" dirty="0" smtClean="0">
+              <a:rPr lang="en-US" sz="3200" dirty="0" smtClean="0">
                 <a:solidFill>
                   <a:srgbClr val="FFFFFF"/>
                 </a:solidFill>
@@ -10479,8 +10479,8 @@
         </p:nvSpPr>
         <p:spPr>
           <a:xfrm>
-            <a:off x="3000000" y="1600000"/>
-            <a:ext cx="2000000" cy="1000000"/>
+            <a:off x="3017520" y="1600200"/>
+            <a:ext cx="2011680" cy="1005840"/>
           </a:xfrm>
           <a:prstGeom prst="ellipse">
             <a:avLst/>
@@ -10497,7 +10497,7 @@
           <a:p>
             <a:pPr algn="ctr" marL="0" marR="0" indent="0"/>
             <a:r>
-              <a:rPr lang="en-US" sz="4088" dirty="0" smtClean="0">
+              <a:rPr lang="en-US" sz="4114" dirty="0" smtClean="0">
                 <a:solidFill>
                   <a:srgbClr val="000000"/>
                 </a:solidFill>
@@ -10515,8 +10515,8 @@
         </p:nvSpPr>
         <p:spPr>
           <a:xfrm>
-            <a:off x="5500000" y="1600000"/>
-            <a:ext cx="2000000" cy="1000000"/>
+            <a:off x="5486400" y="1600200"/>
+            <a:ext cx="2011680" cy="1005840"/>
           </a:xfrm>
           <a:prstGeom prst="roundRect">
             <a:avLst/>
@@ -10533,7 +10533,7 @@
           <a:p>
             <a:pPr algn="ctr" marL="0" marR="0" indent="0"/>
             <a:r>
-              <a:rPr lang="en-US" sz="4088" dirty="0" smtClean="0">
+              <a:rPr lang="en-US" sz="4114" dirty="0" smtClean="0">
                 <a:solidFill>
                   <a:srgbClr val="FFFFFF"/>
                 </a:solidFill>
@@ -10551,8 +10551,8 @@
         </p:nvSpPr>
         <p:spPr>
           <a:xfrm>
-            <a:off x="1500000" y="3000000"/>
-            <a:ext cx="1500000" cy="1200000"/>
+            <a:off x="1463040" y="3017520"/>
+            <a:ext cx="1463040" cy="1188720"/>
           </a:xfrm>
           <a:prstGeom prst="triangle">
             <a:avLst/>
@@ -10569,7 +10569,7 @@
           <a:p>
             <a:pPr algn="ctr" marL="0" marR="0" indent="0"/>
             <a:r>
-              <a:rPr lang="en-US" sz="2592" dirty="0" smtClean="0">
+              <a:rPr lang="en-US" sz="2520" dirty="0" smtClean="0">
                 <a:solidFill>
                   <a:srgbClr val="FFFFFF"/>
                 </a:solidFill>
@@ -10587,8 +10587,8 @@
         </p:nvSpPr>
         <p:spPr>
           <a:xfrm>
-            <a:off x="4000000" y="3000000"/>
-            <a:ext cx="1500000" cy="1200000"/>
+            <a:off x="4023360" y="3017520"/>
+            <a:ext cx="1463040" cy="1188720"/>
           </a:xfrm>
           <a:prstGeom prst="diamond">
             <a:avLst/>
@@ -10605,7 +10605,7 @@
           <a:p>
             <a:pPr algn="ctr" marL="0" marR="0" indent="0"/>
             <a:r>
-              <a:rPr lang="en-US" sz="2963" dirty="0" smtClean="0">
+              <a:rPr lang="en-US" sz="2880" dirty="0" smtClean="0">
                 <a:solidFill>
                   <a:srgbClr val="000000"/>
                 </a:solidFill>

--- a/comprehensive_demo.pptx
+++ b/comprehensive_demo.pptx
@@ -779,9 +779,7 @@
             <a:avLst/>
           </a:prstGeom>
           <a:solidFill>
-            <a:srgbClr val="F44336">
-              <a:alpha val="75000"/>
-            </a:srgbClr>
+            <a:srgbClr val="F44336"/>
           </a:solidFill>
           <a:ln w="25400">
             <a:solidFill>
@@ -822,9 +820,7 @@
             <a:avLst/>
           </a:prstGeom>
           <a:solidFill>
-            <a:srgbClr val="4CAF50">
-              <a:alpha val="50000"/>
-            </a:srgbClr>
+            <a:srgbClr val="4CAF50"/>
           </a:solidFill>
           <a:ln w="25400">
             <a:solidFill>
@@ -865,9 +861,7 @@
             <a:avLst/>
           </a:prstGeom>
           <a:solidFill>
-            <a:srgbClr val="FF9800">
-              <a:alpha val="25000"/>
-            </a:srgbClr>
+            <a:srgbClr val="FF9800"/>
           </a:solidFill>
           <a:ln w="25400">
             <a:solidFill>

--- a/comprehensive_demo.pptx
+++ b/comprehensive_demo.pptx
@@ -2598,7 +2598,7 @@
               <a:tr h="400000">
                 <a:tc>
                   <a:txBody>
-                    <a:bodyPr/>
+                    <a:bodyPr wrap="square"/>
                     <a:lstStyle/>
                     <a:p>
                       <a:r>
@@ -2619,7 +2619,7 @@
                 </a:tc>
                 <a:tc>
                   <a:txBody>
-                    <a:bodyPr/>
+                    <a:bodyPr wrap="square"/>
                     <a:lstStyle/>
                     <a:p>
                       <a:r>
@@ -2636,7 +2636,7 @@
                 </a:tc>
                 <a:tc>
                   <a:txBody>
-                    <a:bodyPr/>
+                    <a:bodyPr wrap="square"/>
                     <a:lstStyle/>
                     <a:p>
                       <a:r>
@@ -2653,7 +2653,7 @@
                 </a:tc>
                 <a:tc>
                   <a:txBody>
-                    <a:bodyPr/>
+                    <a:bodyPr wrap="square"/>
                     <a:lstStyle/>
                     <a:p>
                       <a:r>
@@ -2672,7 +2672,7 @@
               <a:tr h="400000">
                 <a:tc>
                   <a:txBody>
-                    <a:bodyPr/>
+                    <a:bodyPr wrap="square"/>
                     <a:lstStyle/>
                     <a:p>
                       <a:r>
@@ -2693,7 +2693,7 @@
                 </a:tc>
                 <a:tc>
                   <a:txBody>
-                    <a:bodyPr/>
+                    <a:bodyPr wrap="square"/>
                     <a:lstStyle/>
                     <a:p>
                       <a:r>
@@ -2714,7 +2714,7 @@
                 </a:tc>
                 <a:tc>
                   <a:txBody>
-                    <a:bodyPr/>
+                    <a:bodyPr wrap="square"/>
                     <a:lstStyle/>
                     <a:p>
                       <a:r>
@@ -2735,7 +2735,7 @@
                 </a:tc>
                 <a:tc>
                   <a:txBody>
-                    <a:bodyPr/>
+                    <a:bodyPr wrap="square"/>
                     <a:lstStyle/>
                     <a:p>
                       <a:r>
@@ -2758,9 +2758,9 @@
               <a:tr h="400000">
                 <a:tc>
                   <a:txBody>
-                    <a:bodyPr/>
-                    <a:lstStyle/>
-                    <a:p>
+                    <a:bodyPr wrap="square"/>
+                    <a:lstStyle/>
+                    <a:p algn="l">
                       <a:r>
                         <a:rPr lang="en-US" dirty="0">
                           <a:solidFill>
@@ -2775,9 +2775,9 @@
                 </a:tc>
                 <a:tc>
                   <a:txBody>
-                    <a:bodyPr/>
-                    <a:lstStyle/>
-                    <a:p>
+                    <a:bodyPr wrap="square"/>
+                    <a:lstStyle/>
+                    <a:p algn="r">
                       <a:r>
                         <a:rPr lang="en-US" dirty="0">
                           <a:solidFill>
@@ -2792,9 +2792,9 @@
                 </a:tc>
                 <a:tc>
                   <a:txBody>
-                    <a:bodyPr/>
-                    <a:lstStyle/>
-                    <a:p>
+                    <a:bodyPr wrap="square"/>
+                    <a:lstStyle/>
+                    <a:p algn="r">
                       <a:r>
                         <a:rPr lang="en-US" dirty="0">
                           <a:solidFill>
@@ -2809,9 +2809,9 @@
                 </a:tc>
                 <a:tc>
                   <a:txBody>
-                    <a:bodyPr/>
-                    <a:lstStyle/>
-                    <a:p>
+                    <a:bodyPr wrap="square"/>
+                    <a:lstStyle/>
+                    <a:p algn="r">
                       <a:r>
                         <a:rPr lang="en-US" dirty="0" b="1">
                           <a:solidFill>
@@ -2828,9 +2828,9 @@
               <a:tr h="400000">
                 <a:tc>
                   <a:txBody>
-                    <a:bodyPr/>
-                    <a:lstStyle/>
-                    <a:p>
+                    <a:bodyPr wrap="square"/>
+                    <a:lstStyle/>
+                    <a:p algn="l">
                       <a:r>
                         <a:rPr lang="en-US" dirty="0">
                           <a:solidFill>
@@ -2845,9 +2845,9 @@
                 </a:tc>
                 <a:tc>
                   <a:txBody>
-                    <a:bodyPr/>
-                    <a:lstStyle/>
-                    <a:p>
+                    <a:bodyPr wrap="square"/>
+                    <a:lstStyle/>
+                    <a:p algn="r">
                       <a:r>
                         <a:rPr lang="en-US" dirty="0">
                           <a:solidFill>
@@ -2862,9 +2862,9 @@
                 </a:tc>
                 <a:tc>
                   <a:txBody>
-                    <a:bodyPr/>
-                    <a:lstStyle/>
-                    <a:p>
+                    <a:bodyPr wrap="square"/>
+                    <a:lstStyle/>
+                    <a:p algn="r">
                       <a:r>
                         <a:rPr lang="en-US" dirty="0">
                           <a:solidFill>
@@ -2879,9 +2879,9 @@
                 </a:tc>
                 <a:tc>
                   <a:txBody>
-                    <a:bodyPr/>
-                    <a:lstStyle/>
-                    <a:p>
+                    <a:bodyPr wrap="square"/>
+                    <a:lstStyle/>
+                    <a:p algn="r">
                       <a:r>
                         <a:rPr lang="en-US" dirty="0" b="1">
                           <a:solidFill>
@@ -2898,9 +2898,9 @@
               <a:tr h="400000">
                 <a:tc>
                   <a:txBody>
-                    <a:bodyPr/>
-                    <a:lstStyle/>
-                    <a:p>
+                    <a:bodyPr wrap="square"/>
+                    <a:lstStyle/>
+                    <a:p algn="l">
                       <a:r>
                         <a:rPr lang="en-US" dirty="0" b="1">
                           <a:solidFill>
@@ -2919,9 +2919,9 @@
                 </a:tc>
                 <a:tc>
                   <a:txBody>
-                    <a:bodyPr/>
-                    <a:lstStyle/>
-                    <a:p>
+                    <a:bodyPr wrap="square"/>
+                    <a:lstStyle/>
+                    <a:p algn="r">
                       <a:r>
                         <a:rPr lang="en-US" dirty="0" b="1">
                           <a:solidFill>
@@ -2940,9 +2940,9 @@
                 </a:tc>
                 <a:tc>
                   <a:txBody>
-                    <a:bodyPr/>
-                    <a:lstStyle/>
-                    <a:p>
+                    <a:bodyPr wrap="square"/>
+                    <a:lstStyle/>
+                    <a:p algn="r">
                       <a:r>
                         <a:rPr lang="en-US" dirty="0" b="1">
                           <a:solidFill>
@@ -2961,9 +2961,9 @@
                 </a:tc>
                 <a:tc>
                   <a:txBody>
-                    <a:bodyPr/>
-                    <a:lstStyle/>
-                    <a:p>
+                    <a:bodyPr wrap="square"/>
+                    <a:lstStyle/>
+                    <a:p algn="r">
                       <a:r>
                         <a:rPr lang="en-US" dirty="0" b="1">
                           <a:solidFill>
@@ -3070,7 +3070,7 @@
               <a:tr h="400000">
                 <a:tc>
                   <a:txBody>
-                    <a:bodyPr/>
+                    <a:bodyPr wrap="square"/>
                     <a:lstStyle/>
                     <a:p>
                       <a:r>
@@ -3091,7 +3091,7 @@
                 </a:tc>
                 <a:tc>
                   <a:txBody>
-                    <a:bodyPr/>
+                    <a:bodyPr wrap="square"/>
                     <a:lstStyle/>
                     <a:p>
                       <a:r>
@@ -3112,7 +3112,7 @@
                 </a:tc>
                 <a:tc>
                   <a:txBody>
-                    <a:bodyPr/>
+                    <a:bodyPr wrap="square"/>
                     <a:lstStyle/>
                     <a:p>
                       <a:r>
@@ -3133,7 +3133,7 @@
                 </a:tc>
                 <a:tc>
                   <a:txBody>
-                    <a:bodyPr/>
+                    <a:bodyPr wrap="square"/>
                     <a:lstStyle/>
                     <a:p>
                       <a:r>
@@ -3156,7 +3156,7 @@
               <a:tr h="400000">
                 <a:tc>
                   <a:txBody>
-                    <a:bodyPr/>
+                    <a:bodyPr wrap="square"/>
                     <a:lstStyle/>
                     <a:p>
                       <a:r>
@@ -3173,7 +3173,7 @@
                 </a:tc>
                 <a:tc>
                   <a:txBody>
-                    <a:bodyPr/>
+                    <a:bodyPr wrap="square"/>
                     <a:lstStyle/>
                     <a:p>
                       <a:r>
@@ -3190,7 +3190,7 @@
                 </a:tc>
                 <a:tc>
                   <a:txBody>
-                    <a:bodyPr/>
+                    <a:bodyPr wrap="square"/>
                     <a:lstStyle/>
                     <a:p>
                       <a:r>
@@ -3207,7 +3207,7 @@
                 </a:tc>
                 <a:tc>
                   <a:txBody>
-                    <a:bodyPr/>
+                    <a:bodyPr wrap="square"/>
                     <a:lstStyle/>
                     <a:p>
                       <a:r>
@@ -3226,7 +3226,7 @@
               <a:tr h="400000">
                 <a:tc>
                   <a:txBody>
-                    <a:bodyPr/>
+                    <a:bodyPr wrap="square"/>
                     <a:lstStyle/>
                     <a:p>
                       <a:r>
@@ -3243,7 +3243,7 @@
                 </a:tc>
                 <a:tc>
                   <a:txBody>
-                    <a:bodyPr/>
+                    <a:bodyPr wrap="square"/>
                     <a:lstStyle/>
                     <a:p>
                       <a:r>
@@ -3260,7 +3260,7 @@
                 </a:tc>
                 <a:tc>
                   <a:txBody>
-                    <a:bodyPr/>
+                    <a:bodyPr wrap="square"/>
                     <a:lstStyle/>
                     <a:p>
                       <a:r>
@@ -3277,7 +3277,7 @@
                 </a:tc>
                 <a:tc>
                   <a:txBody>
-                    <a:bodyPr/>
+                    <a:bodyPr wrap="square"/>
                     <a:lstStyle/>
                     <a:p>
                       <a:r>
@@ -3296,7 +3296,7 @@
               <a:tr h="400000">
                 <a:tc>
                   <a:txBody>
-                    <a:bodyPr/>
+                    <a:bodyPr wrap="square"/>
                     <a:lstStyle/>
                     <a:p>
                       <a:r>
@@ -3313,7 +3313,7 @@
                 </a:tc>
                 <a:tc>
                   <a:txBody>
-                    <a:bodyPr/>
+                    <a:bodyPr wrap="square"/>
                     <a:lstStyle/>
                     <a:p>
                       <a:r>
@@ -3330,7 +3330,7 @@
                 </a:tc>
                 <a:tc>
                   <a:txBody>
-                    <a:bodyPr/>
+                    <a:bodyPr wrap="square"/>
                     <a:lstStyle/>
                     <a:p>
                       <a:r>
@@ -3347,7 +3347,7 @@
                 </a:tc>
                 <a:tc>
                   <a:txBody>
-                    <a:bodyPr/>
+                    <a:bodyPr wrap="square"/>
                     <a:lstStyle/>
                     <a:p>
                       <a:r>
@@ -3366,7 +3366,7 @@
               <a:tr h="400000">
                 <a:tc>
                   <a:txBody>
-                    <a:bodyPr/>
+                    <a:bodyPr wrap="square"/>
                     <a:lstStyle/>
                     <a:p>
                       <a:r>
@@ -3383,7 +3383,7 @@
                 </a:tc>
                 <a:tc>
                   <a:txBody>
-                    <a:bodyPr/>
+                    <a:bodyPr wrap="square"/>
                     <a:lstStyle/>
                     <a:p>
                       <a:r>
@@ -3400,7 +3400,7 @@
                 </a:tc>
                 <a:tc>
                   <a:txBody>
-                    <a:bodyPr/>
+                    <a:bodyPr wrap="square"/>
                     <a:lstStyle/>
                     <a:p>
                       <a:r>
@@ -3417,7 +3417,7 @@
                 </a:tc>
                 <a:tc>
                   <a:txBody>
-                    <a:bodyPr/>
+                    <a:bodyPr wrap="square"/>
                     <a:lstStyle/>
                     <a:p>
                       <a:r>
@@ -3436,7 +3436,7 @@
               <a:tr h="400000">
                 <a:tc>
                   <a:txBody>
-                    <a:bodyPr/>
+                    <a:bodyPr wrap="square"/>
                     <a:lstStyle/>
                     <a:p>
                       <a:r>
@@ -3457,7 +3457,7 @@
                 </a:tc>
                 <a:tc>
                   <a:txBody>
-                    <a:bodyPr/>
+                    <a:bodyPr wrap="square"/>
                     <a:lstStyle/>
                     <a:p>
                       <a:r>
@@ -3478,7 +3478,7 @@
                 </a:tc>
                 <a:tc>
                   <a:txBody>
-                    <a:bodyPr/>
+                    <a:bodyPr wrap="square"/>
                     <a:lstStyle/>
                     <a:p>
                       <a:r>
@@ -3499,7 +3499,7 @@
                 </a:tc>
                 <a:tc>
                   <a:txBody>
-                    <a:bodyPr/>
+                    <a:bodyPr wrap="square"/>
                     <a:lstStyle/>
                     <a:p>
                       <a:r>
@@ -5043,7 +5043,7 @@
               <a:tr h="400000">
                 <a:tc>
                   <a:txBody>
-                    <a:bodyPr/>
+                    <a:bodyPr wrap="square"/>
                     <a:lstStyle/>
                     <a:p>
                       <a:r>
@@ -5064,7 +5064,7 @@
                 </a:tc>
                 <a:tc>
                   <a:txBody>
-                    <a:bodyPr/>
+                    <a:bodyPr wrap="square"/>
                     <a:lstStyle/>
                     <a:p>
                       <a:r>
@@ -5085,7 +5085,7 @@
                 </a:tc>
                 <a:tc>
                   <a:txBody>
-                    <a:bodyPr/>
+                    <a:bodyPr wrap="square"/>
                     <a:lstStyle/>
                     <a:p>
                       <a:r>
@@ -5106,7 +5106,7 @@
                 </a:tc>
                 <a:tc>
                   <a:txBody>
-                    <a:bodyPr/>
+                    <a:bodyPr wrap="square"/>
                     <a:lstStyle/>
                     <a:p>
                       <a:r>
@@ -5127,7 +5127,7 @@
                 </a:tc>
                 <a:tc>
                   <a:txBody>
-                    <a:bodyPr/>
+                    <a:bodyPr wrap="square"/>
                     <a:lstStyle/>
                     <a:p>
                       <a:r>
@@ -5150,7 +5150,7 @@
               <a:tr h="400000">
                 <a:tc>
                   <a:txBody>
-                    <a:bodyPr/>
+                    <a:bodyPr wrap="square"/>
                     <a:lstStyle/>
                     <a:p>
                       <a:r>
@@ -5172,7 +5172,7 @@
                 </a:tc>
                 <a:tc>
                   <a:txBody>
-                    <a:bodyPr/>
+                    <a:bodyPr wrap="square"/>
                     <a:lstStyle/>
                     <a:p>
                       <a:r>
@@ -5194,7 +5194,7 @@
                 </a:tc>
                 <a:tc>
                   <a:txBody>
-                    <a:bodyPr/>
+                    <a:bodyPr wrap="square"/>
                     <a:lstStyle/>
                     <a:p>
                       <a:r>
@@ -5216,7 +5216,7 @@
                 </a:tc>
                 <a:tc>
                   <a:txBody>
-                    <a:bodyPr/>
+                    <a:bodyPr wrap="square"/>
                     <a:lstStyle/>
                     <a:p>
                       <a:r>
@@ -5238,7 +5238,7 @@
                 </a:tc>
                 <a:tc>
                   <a:txBody>
-                    <a:bodyPr/>
+                    <a:bodyPr wrap="square"/>
                     <a:lstStyle/>
                     <a:p>
                       <a:r>
@@ -5262,7 +5262,7 @@
               <a:tr h="400000">
                 <a:tc>
                   <a:txBody>
-                    <a:bodyPr/>
+                    <a:bodyPr wrap="square"/>
                     <a:lstStyle/>
                     <a:p>
                       <a:r>
@@ -5279,7 +5279,7 @@
                 </a:tc>
                 <a:tc>
                   <a:txBody>
-                    <a:bodyPr/>
+                    <a:bodyPr wrap="square"/>
                     <a:lstStyle/>
                     <a:p>
                       <a:r>
@@ -5296,7 +5296,7 @@
                 </a:tc>
                 <a:tc>
                   <a:txBody>
-                    <a:bodyPr/>
+                    <a:bodyPr wrap="square"/>
                     <a:lstStyle/>
                     <a:p>
                       <a:r>
@@ -5313,7 +5313,7 @@
                 </a:tc>
                 <a:tc>
                   <a:txBody>
-                    <a:bodyPr/>
+                    <a:bodyPr wrap="square"/>
                     <a:lstStyle/>
                     <a:p>
                       <a:r>
@@ -5330,7 +5330,7 @@
                 </a:tc>
                 <a:tc>
                   <a:txBody>
-                    <a:bodyPr/>
+                    <a:bodyPr wrap="square"/>
                     <a:lstStyle/>
                     <a:p>
                       <a:r>
@@ -8058,7 +8058,7 @@
               <a:tr h="400000">
                 <a:tc>
                   <a:txBody>
-                    <a:bodyPr/>
+                    <a:bodyPr wrap="square"/>
                     <a:lstStyle/>
                     <a:p>
                       <a:r>
@@ -8079,7 +8079,7 @@
                 </a:tc>
                 <a:tc>
                   <a:txBody>
-                    <a:bodyPr/>
+                    <a:bodyPr wrap="square"/>
                     <a:lstStyle/>
                     <a:p>
                       <a:r>
@@ -8100,7 +8100,7 @@
                 </a:tc>
                 <a:tc>
                   <a:txBody>
-                    <a:bodyPr/>
+                    <a:bodyPr wrap="square"/>
                     <a:lstStyle/>
                     <a:p>
                       <a:r>
@@ -8121,7 +8121,7 @@
                 </a:tc>
                 <a:tc>
                   <a:txBody>
-                    <a:bodyPr/>
+                    <a:bodyPr wrap="square"/>
                     <a:lstStyle/>
                     <a:p>
                       <a:r>
@@ -8144,7 +8144,7 @@
               <a:tr h="400000">
                 <a:tc>
                   <a:txBody>
-                    <a:bodyPr/>
+                    <a:bodyPr wrap="square"/>
                     <a:lstStyle/>
                     <a:p>
                       <a:r>
@@ -8161,7 +8161,7 @@
                 </a:tc>
                 <a:tc>
                   <a:txBody>
-                    <a:bodyPr/>
+                    <a:bodyPr wrap="square"/>
                     <a:lstStyle/>
                     <a:p>
                       <a:r>
@@ -8174,7 +8174,7 @@
                 </a:tc>
                 <a:tc>
                   <a:txBody>
-                    <a:bodyPr/>
+                    <a:bodyPr wrap="square"/>
                     <a:lstStyle/>
                     <a:p>
                       <a:r>
@@ -8191,7 +8191,7 @@
                 </a:tc>
                 <a:tc>
                   <a:txBody>
-                    <a:bodyPr/>
+                    <a:bodyPr wrap="square"/>
                     <a:lstStyle/>
                     <a:p>
                       <a:r>
@@ -8206,7 +8206,7 @@
               <a:tr h="400000">
                 <a:tc>
                   <a:txBody>
-                    <a:bodyPr/>
+                    <a:bodyPr wrap="square"/>
                     <a:lstStyle/>
                     <a:p>
                       <a:r>
@@ -8223,7 +8223,7 @@
                 </a:tc>
                 <a:tc>
                   <a:txBody>
-                    <a:bodyPr/>
+                    <a:bodyPr wrap="square"/>
                     <a:lstStyle/>
                     <a:p>
                       <a:r>
@@ -8236,7 +8236,7 @@
                 </a:tc>
                 <a:tc>
                   <a:txBody>
-                    <a:bodyPr/>
+                    <a:bodyPr wrap="square"/>
                     <a:lstStyle/>
                     <a:p>
                       <a:r>
@@ -8253,7 +8253,7 @@
                 </a:tc>
                 <a:tc>
                   <a:txBody>
-                    <a:bodyPr/>
+                    <a:bodyPr wrap="square"/>
                     <a:lstStyle/>
                     <a:p>
                       <a:r>
@@ -8268,7 +8268,7 @@
               <a:tr h="400000">
                 <a:tc>
                   <a:txBody>
-                    <a:bodyPr/>
+                    <a:bodyPr wrap="square"/>
                     <a:lstStyle/>
                     <a:p>
                       <a:r>
@@ -8285,7 +8285,7 @@
                 </a:tc>
                 <a:tc>
                   <a:txBody>
-                    <a:bodyPr/>
+                    <a:bodyPr wrap="square"/>
                     <a:lstStyle/>
                     <a:p>
                       <a:r>
@@ -8298,7 +8298,7 @@
                 </a:tc>
                 <a:tc>
                   <a:txBody>
-                    <a:bodyPr/>
+                    <a:bodyPr wrap="square"/>
                     <a:lstStyle/>
                     <a:p>
                       <a:r>
@@ -8311,7 +8311,7 @@
                 </a:tc>
                 <a:tc>
                   <a:txBody>
-                    <a:bodyPr/>
+                    <a:bodyPr wrap="square"/>
                     <a:lstStyle/>
                     <a:p>
                       <a:r>
@@ -8330,7 +8330,7 @@
               <a:tr h="400000">
                 <a:tc>
                   <a:txBody>
-                    <a:bodyPr/>
+                    <a:bodyPr wrap="square"/>
                     <a:lstStyle/>
                     <a:p>
                       <a:r>
@@ -8347,7 +8347,7 @@
                 </a:tc>
                 <a:tc>
                   <a:txBody>
-                    <a:bodyPr/>
+                    <a:bodyPr wrap="square"/>
                     <a:lstStyle/>
                     <a:p>
                       <a:r>
@@ -8360,7 +8360,7 @@
                 </a:tc>
                 <a:tc>
                   <a:txBody>
-                    <a:bodyPr/>
+                    <a:bodyPr wrap="square"/>
                     <a:lstStyle/>
                     <a:p>
                       <a:r>
@@ -8373,7 +8373,7 @@
                 </a:tc>
                 <a:tc>
                   <a:txBody>
-                    <a:bodyPr/>
+                    <a:bodyPr wrap="square"/>
                     <a:lstStyle/>
                     <a:p>
                       <a:r>
@@ -8388,7 +8388,7 @@
               <a:tr h="400000">
                 <a:tc>
                   <a:txBody>
-                    <a:bodyPr/>
+                    <a:bodyPr wrap="square"/>
                     <a:lstStyle/>
                     <a:p>
                       <a:r>
@@ -8405,7 +8405,7 @@
                 </a:tc>
                 <a:tc>
                   <a:txBody>
-                    <a:bodyPr/>
+                    <a:bodyPr wrap="square"/>
                     <a:lstStyle/>
                     <a:p>
                       <a:r>
@@ -8418,7 +8418,7 @@
                 </a:tc>
                 <a:tc>
                   <a:txBody>
-                    <a:bodyPr/>
+                    <a:bodyPr wrap="square"/>
                     <a:lstStyle/>
                     <a:p>
                       <a:r>
@@ -8431,7 +8431,7 @@
                 </a:tc>
                 <a:tc>
                   <a:txBody>
-                    <a:bodyPr/>
+                    <a:bodyPr wrap="square"/>
                     <a:lstStyle/>
                     <a:p>
                       <a:r>
@@ -8446,7 +8446,7 @@
               <a:tr h="400000">
                 <a:tc>
                   <a:txBody>
-                    <a:bodyPr/>
+                    <a:bodyPr wrap="square"/>
                     <a:lstStyle/>
                     <a:p>
                       <a:r>
@@ -8463,7 +8463,7 @@
                 </a:tc>
                 <a:tc>
                   <a:txBody>
-                    <a:bodyPr/>
+                    <a:bodyPr wrap="square"/>
                     <a:lstStyle/>
                     <a:p>
                       <a:r>
@@ -8480,7 +8480,7 @@
                 </a:tc>
                 <a:tc>
                   <a:txBody>
-                    <a:bodyPr/>
+                    <a:bodyPr wrap="square"/>
                     <a:lstStyle/>
                     <a:p>
                       <a:r>
@@ -8497,7 +8497,7 @@
                 </a:tc>
                 <a:tc>
                   <a:txBody>
-                    <a:bodyPr/>
+                    <a:bodyPr wrap="square"/>
                     <a:lstStyle/>
                     <a:p>
                       <a:r>
@@ -8708,7 +8708,7 @@
               <a:tr h="400000">
                 <a:tc>
                   <a:txBody>
-                    <a:bodyPr/>
+                    <a:bodyPr wrap="square"/>
                     <a:lstStyle/>
                     <a:p>
                       <a:r>
@@ -8729,7 +8729,7 @@
                 </a:tc>
                 <a:tc>
                   <a:txBody>
-                    <a:bodyPr/>
+                    <a:bodyPr wrap="square"/>
                     <a:lstStyle/>
                     <a:p>
                       <a:r>
@@ -8748,7 +8748,7 @@
               <a:tr h="400000">
                 <a:tc>
                   <a:txBody>
-                    <a:bodyPr/>
+                    <a:bodyPr wrap="square"/>
                     <a:lstStyle/>
                     <a:p>
                       <a:r>
@@ -8765,7 +8765,7 @@
                 </a:tc>
                 <a:tc>
                   <a:txBody>
-                    <a:bodyPr/>
+                    <a:bodyPr wrap="square"/>
                     <a:lstStyle/>
                     <a:p>
                       <a:r>
@@ -8780,7 +8780,7 @@
               <a:tr h="400000">
                 <a:tc>
                   <a:txBody>
-                    <a:bodyPr/>
+                    <a:bodyPr wrap="square"/>
                     <a:lstStyle/>
                     <a:p>
                       <a:r>
@@ -8797,7 +8797,7 @@
                 </a:tc>
                 <a:tc>
                   <a:txBody>
-                    <a:bodyPr/>
+                    <a:bodyPr wrap="square"/>
                     <a:lstStyle/>
                     <a:p>
                       <a:r>
@@ -8812,7 +8812,7 @@
               <a:tr h="400000">
                 <a:tc>
                   <a:txBody>
-                    <a:bodyPr/>
+                    <a:bodyPr wrap="square"/>
                     <a:lstStyle/>
                     <a:p>
                       <a:r>
@@ -8829,7 +8829,7 @@
                 </a:tc>
                 <a:tc>
                   <a:txBody>
-                    <a:bodyPr/>
+                    <a:bodyPr wrap="square"/>
                     <a:lstStyle/>
                     <a:p>
                       <a:r>
@@ -8844,7 +8844,7 @@
               <a:tr h="400000">
                 <a:tc>
                   <a:txBody>
-                    <a:bodyPr/>
+                    <a:bodyPr wrap="square"/>
                     <a:lstStyle/>
                     <a:p>
                       <a:r>
@@ -8861,7 +8861,7 @@
                 </a:tc>
                 <a:tc>
                   <a:txBody>
-                    <a:bodyPr/>
+                    <a:bodyPr wrap="square"/>
                     <a:lstStyle/>
                     <a:p>
                       <a:r>
@@ -8876,7 +8876,7 @@
               <a:tr h="400000">
                 <a:tc>
                   <a:txBody>
-                    <a:bodyPr/>
+                    <a:bodyPr wrap="square"/>
                     <a:lstStyle/>
                     <a:p>
                       <a:r>
@@ -8893,7 +8893,7 @@
                 </a:tc>
                 <a:tc>
                   <a:txBody>
-                    <a:bodyPr/>
+                    <a:bodyPr wrap="square"/>
                     <a:lstStyle/>
                     <a:p>
                       <a:r>
@@ -8908,7 +8908,7 @@
               <a:tr h="400000">
                 <a:tc>
                   <a:txBody>
-                    <a:bodyPr/>
+                    <a:bodyPr wrap="square"/>
                     <a:lstStyle/>
                     <a:p>
                       <a:r>
@@ -8925,7 +8925,7 @@
                 </a:tc>
                 <a:tc>
                   <a:txBody>
-                    <a:bodyPr/>
+                    <a:bodyPr wrap="square"/>
                     <a:lstStyle/>
                     <a:p>
                       <a:r>
@@ -9326,7 +9326,7 @@
               <a:tr h="400000">
                 <a:tc gridSpan="4">
                   <a:txBody>
-                    <a:bodyPr/>
+                    <a:bodyPr wrap="square"/>
                     <a:lstStyle/>
                     <a:p>
                       <a:r>
@@ -9373,7 +9373,7 @@
               <a:tr h="400000">
                 <a:tc rowSpan="2">
                   <a:txBody>
-                    <a:bodyPr/>
+                    <a:bodyPr wrap="square"/>
                     <a:lstStyle/>
                     <a:p>
                       <a:r>
@@ -9394,7 +9394,7 @@
                 </a:tc>
                 <a:tc>
                   <a:txBody>
-                    <a:bodyPr/>
+                    <a:bodyPr wrap="square"/>
                     <a:lstStyle/>
                     <a:p>
                       <a:r>
@@ -9411,9 +9411,9 @@
                 </a:tc>
                 <a:tc>
                   <a:txBody>
-                    <a:bodyPr/>
-                    <a:lstStyle/>
-                    <a:p>
+                    <a:bodyPr wrap="square"/>
+                    <a:lstStyle/>
+                    <a:p algn="r">
                       <a:r>
                         <a:rPr lang="en-US" dirty="0">
                           <a:solidFill>
@@ -9428,9 +9428,9 @@
                 </a:tc>
                 <a:tc>
                   <a:txBody>
-                    <a:bodyPr/>
-                    <a:lstStyle/>
-                    <a:p>
+                    <a:bodyPr wrap="square"/>
+                    <a:lstStyle/>
+                    <a:p algn="r">
                       <a:r>
                         <a:rPr lang="en-US" dirty="0" b="1">
                           <a:solidFill>
@@ -9455,7 +9455,7 @@
                 </a:tc>
                 <a:tc>
                   <a:txBody>
-                    <a:bodyPr/>
+                    <a:bodyPr wrap="square"/>
                     <a:lstStyle/>
                     <a:p>
                       <a:r>
@@ -9472,9 +9472,9 @@
                 </a:tc>
                 <a:tc>
                   <a:txBody>
-                    <a:bodyPr/>
-                    <a:lstStyle/>
-                    <a:p>
+                    <a:bodyPr wrap="square"/>
+                    <a:lstStyle/>
+                    <a:p algn="r">
                       <a:r>
                         <a:rPr lang="en-US" dirty="0">
                           <a:solidFill>
@@ -9489,9 +9489,9 @@
                 </a:tc>
                 <a:tc>
                   <a:txBody>
-                    <a:bodyPr/>
-                    <a:lstStyle/>
-                    <a:p>
+                    <a:bodyPr wrap="square"/>
+                    <a:lstStyle/>
+                    <a:p algn="r">
                       <a:r>
                         <a:rPr lang="en-US" dirty="0" b="1">
                           <a:solidFill>
@@ -9508,7 +9508,7 @@
               <a:tr h="400000">
                 <a:tc rowSpan="2">
                   <a:txBody>
-                    <a:bodyPr/>
+                    <a:bodyPr wrap="square"/>
                     <a:lstStyle/>
                     <a:p>
                       <a:r>
@@ -9529,7 +9529,7 @@
                 </a:tc>
                 <a:tc>
                   <a:txBody>
-                    <a:bodyPr/>
+                    <a:bodyPr wrap="square"/>
                     <a:lstStyle/>
                     <a:p>
                       <a:r>
@@ -9546,9 +9546,9 @@
                 </a:tc>
                 <a:tc>
                   <a:txBody>
-                    <a:bodyPr/>
-                    <a:lstStyle/>
-                    <a:p>
+                    <a:bodyPr wrap="square"/>
+                    <a:lstStyle/>
+                    <a:p algn="r">
                       <a:r>
                         <a:rPr lang="en-US" dirty="0">
                           <a:solidFill>
@@ -9563,9 +9563,9 @@
                 </a:tc>
                 <a:tc>
                   <a:txBody>
-                    <a:bodyPr/>
-                    <a:lstStyle/>
-                    <a:p>
+                    <a:bodyPr wrap="square"/>
+                    <a:lstStyle/>
+                    <a:p algn="r">
                       <a:r>
                         <a:rPr lang="en-US" dirty="0" b="1">
                           <a:solidFill>
@@ -9590,7 +9590,7 @@
                 </a:tc>
                 <a:tc>
                   <a:txBody>
-                    <a:bodyPr/>
+                    <a:bodyPr wrap="square"/>
                     <a:lstStyle/>
                     <a:p>
                       <a:r>
@@ -9607,9 +9607,9 @@
                 </a:tc>
                 <a:tc>
                   <a:txBody>
-                    <a:bodyPr/>
-                    <a:lstStyle/>
-                    <a:p>
+                    <a:bodyPr wrap="square"/>
+                    <a:lstStyle/>
+                    <a:p algn="r">
                       <a:r>
                         <a:rPr lang="en-US" dirty="0">
                           <a:solidFill>
@@ -9624,9 +9624,9 @@
                 </a:tc>
                 <a:tc>
                   <a:txBody>
-                    <a:bodyPr/>
-                    <a:lstStyle/>
-                    <a:p>
+                    <a:bodyPr wrap="square"/>
+                    <a:lstStyle/>
+                    <a:p algn="r">
                       <a:r>
                         <a:rPr lang="en-US" dirty="0" b="1">
                           <a:solidFill>
@@ -10060,7 +10060,7 @@
               <a:tr h="400000">
                 <a:tc>
                   <a:txBody>
-                    <a:bodyPr/>
+                    <a:bodyPr wrap="square"/>
                     <a:lstStyle/>
                     <a:p>
                       <a:r>
@@ -10077,7 +10077,7 @@
                 </a:tc>
                 <a:tc>
                   <a:txBody>
-                    <a:bodyPr/>
+                    <a:bodyPr wrap="square"/>
                     <a:lstStyle/>
                     <a:p>
                       <a:r>
@@ -10094,7 +10094,7 @@
                 </a:tc>
                 <a:tc>
                   <a:txBody>
-                    <a:bodyPr/>
+                    <a:bodyPr wrap="square"/>
                     <a:lstStyle/>
                     <a:p>
                       <a:r>
@@ -10113,7 +10113,7 @@
               <a:tr h="400000">
                 <a:tc>
                   <a:txBody>
-                    <a:bodyPr/>
+                    <a:bodyPr wrap="square"/>
                     <a:lstStyle/>
                     <a:p>
                       <a:r>
@@ -10126,7 +10126,7 @@
                 </a:tc>
                 <a:tc>
                   <a:txBody>
-                    <a:bodyPr/>
+                    <a:bodyPr wrap="square"/>
                     <a:lstStyle/>
                     <a:p>
                       <a:r>
@@ -10139,7 +10139,7 @@
                 </a:tc>
                 <a:tc>
                   <a:txBody>
-                    <a:bodyPr/>
+                    <a:bodyPr wrap="square"/>
                     <a:lstStyle/>
                     <a:p>
                       <a:r>
@@ -10158,7 +10158,7 @@
               <a:tr h="400000">
                 <a:tc>
                   <a:txBody>
-                    <a:bodyPr/>
+                    <a:bodyPr wrap="square"/>
                     <a:lstStyle/>
                     <a:p>
                       <a:r>
@@ -10175,7 +10175,7 @@
                 </a:tc>
                 <a:tc>
                   <a:txBody>
-                    <a:bodyPr/>
+                    <a:bodyPr wrap="square"/>
                     <a:lstStyle/>
                     <a:p>
                       <a:r>
@@ -10192,7 +10192,7 @@
                 </a:tc>
                 <a:tc>
                   <a:txBody>
-                    <a:bodyPr/>
+                    <a:bodyPr wrap="square"/>
                     <a:lstStyle/>
                     <a:p>
                       <a:r>
@@ -10211,7 +10211,7 @@
               <a:tr h="400000">
                 <a:tc>
                   <a:txBody>
-                    <a:bodyPr/>
+                    <a:bodyPr wrap="square"/>
                     <a:lstStyle/>
                     <a:p>
                       <a:r>
@@ -10224,7 +10224,7 @@
                 </a:tc>
                 <a:tc>
                   <a:txBody>
-                    <a:bodyPr/>
+                    <a:bodyPr wrap="square"/>
                     <a:lstStyle/>
                     <a:p>
                       <a:r>
@@ -10237,7 +10237,7 @@
                 </a:tc>
                 <a:tc>
                   <a:txBody>
-                    <a:bodyPr/>
+                    <a:bodyPr wrap="square"/>
                     <a:lstStyle/>
                     <a:p>
                       <a:r>
@@ -10620,12 +10620,12 @@
 <file path=ppt/theme/theme1.xml><?xml version="1.0" encoding="utf-8"?>
 <a:theme xmlns:a="http://schemas.openxmlformats.org/drawingml/2006/main" name="Office Theme">
   <a:themeElements>
-    <a:clrScheme name="Office">
+    <a:clrScheme name="Office Theme">
       <a:dk1>
-        <a:sysClr val="windowText" lastClr="000000"/>
+        <a:srgbClr val="000000"/>
       </a:dk1>
       <a:lt1>
-        <a:sysClr val="window" lastClr="FFFFFF"/>
+        <a:srgbClr val="FFFFFF"/>
       </a:lt1>
       <a:dk2>
         <a:srgbClr val="1F497D"/>
@@ -10660,7 +10660,7 @@
     </a:clrScheme>
     <a:fontScheme name="Office">
       <a:majorFont>
-        <a:latin typeface="Calibri"/>
+        <a:latin typeface="Calibri Light"/>
         <a:ea typeface=""/>
         <a:cs typeface=""/>
       </a:majorFont>

--- a/comprehensive_demo.pptx
+++ b/comprehensive_demo.pptx
@@ -1,10 +1,17 @@
 
 <file path=ppt/presentation.xml><?xml version="1.0" encoding="utf-8"?>
-<p:presentation xmlns:a="http://schemas.openxmlformats.org/drawingml/2006/main" xmlns:r="http://schemas.openxmlformats.org/officeDocument/2006/relationships" xmlns:p="http://schemas.openxmlformats.org/presentationml/2006/main" saveSubsetFonts="1">
+<p:presentation xmlns:a="http://schemas.openxmlformats.org/drawingml/2006/main" xmlns:r="http://schemas.openxmlformats.org/officeDocument/2006/relationships" xmlns:p="http://schemas.openxmlformats.org/presentationml/2006/main" saveSubsetFonts="1" autoCompressPictures="0">
   <p:sldMasterIdLst>
     <p:sldMasterId id="2147483648" r:id="rId1"/>
   </p:sldMasterIdLst>
+  <p:notesMasterIdLst>
+    <p:notesMasterId r:id="rId46"/>
+  </p:notesMasterIdLst>
+  <p:handoutMasterIdLst>
+    <p:handoutMasterId r:id="rId47"/>
+  </p:handoutMasterIdLst>
   <p:sldIdLst>
+    <p:sldId id="256" r:id="rId2"/>
     <p:sldId id="257" r:id="rId3"/>
     <p:sldId id="258" r:id="rId4"/>
     <p:sldId id="259" r:id="rId5"/>
@@ -48,16 +55,234 @@
     <p:sldId id="297" r:id="rId43"/>
     <p:sldId id="298" r:id="rId44"/>
     <p:sldId id="299" r:id="rId45"/>
-    <p:sldId id="300" r:id="rId46"/>
   </p:sldIdLst>
   <p:sldSz cx="9144000" cy="6858000" type="screen4x3"/>
   <p:notesSz cx="6858000" cy="9144000"/>
+  <p:defaultTextStyle>
+    <a:defPPr>
+      <a:defRPr lang="en-US"/>
+    </a:defPPr>
+    <a:lvl1pPr marL="0" algn="l" defTabSz="457200" rtl="0" eaLnBrk="1" latinLnBrk="0" hangingPunct="1">
+      <a:defRPr sz="1800" kern="1200">
+        <a:solidFill>
+          <a:schemeClr val="tx1"/>
+        </a:solidFill>
+        <a:latin typeface="+mn-lt"/>
+        <a:ea typeface="+mn-ea"/>
+        <a:cs typeface="+mn-cs"/>
+      </a:defRPr>
+    </a:lvl1pPr>
+    <a:lvl2pPr marL="457200" algn="l" defTabSz="457200" rtl="0" eaLnBrk="1" latinLnBrk="0" hangingPunct="1">
+      <a:defRPr sz="1800" kern="1200">
+        <a:solidFill>
+          <a:schemeClr val="tx1"/>
+        </a:solidFill>
+        <a:latin typeface="+mn-lt"/>
+        <a:ea typeface="+mn-ea"/>
+        <a:cs typeface="+mn-cs"/>
+      </a:defRPr>
+    </a:lvl2pPr>
+    <a:lvl3pPr marL="914400" algn="l" defTabSz="457200" rtl="0" eaLnBrk="1" latinLnBrk="0" hangingPunct="1">
+      <a:defRPr sz="1800" kern="1200">
+        <a:solidFill>
+          <a:schemeClr val="tx1"/>
+        </a:solidFill>
+        <a:latin typeface="+mn-lt"/>
+        <a:ea typeface="+mn-ea"/>
+        <a:cs typeface="+mn-cs"/>
+      </a:defRPr>
+    </a:lvl3pPr>
+    <a:lvl4pPr marL="1371600" algn="l" defTabSz="457200" rtl="0" eaLnBrk="1" latinLnBrk="0" hangingPunct="1">
+      <a:defRPr sz="1800" kern="1200">
+        <a:solidFill>
+          <a:schemeClr val="tx1"/>
+        </a:solidFill>
+        <a:latin typeface="+mn-lt"/>
+        <a:ea typeface="+mn-ea"/>
+        <a:cs typeface="+mn-cs"/>
+      </a:defRPr>
+    </a:lvl4pPr>
+    <a:lvl5pPr marL="1828800" algn="l" defTabSz="457200" rtl="0" eaLnBrk="1" latinLnBrk="0" hangingPunct="1">
+      <a:defRPr sz="1800" kern="1200">
+        <a:solidFill>
+          <a:schemeClr val="tx1"/>
+        </a:solidFill>
+        <a:latin typeface="+mn-lt"/>
+        <a:ea typeface="+mn-ea"/>
+        <a:cs typeface="+mn-cs"/>
+      </a:defRPr>
+    </a:lvl5pPr>
+    <a:lvl6pPr marL="2286000" algn="l" defTabSz="457200" rtl="0" eaLnBrk="1" latinLnBrk="0" hangingPunct="1">
+      <a:defRPr sz="1800" kern="1200">
+        <a:solidFill>
+          <a:schemeClr val="tx1"/>
+        </a:solidFill>
+        <a:latin typeface="+mn-lt"/>
+        <a:ea typeface="+mn-ea"/>
+        <a:cs typeface="+mn-cs"/>
+      </a:defRPr>
+    </a:lvl6pPr>
+    <a:lvl7pPr marL="2743200" algn="l" defTabSz="457200" rtl="0" eaLnBrk="1" latinLnBrk="0" hangingPunct="1">
+      <a:defRPr sz="1800" kern="1200">
+        <a:solidFill>
+          <a:schemeClr val="tx1"/>
+        </a:solidFill>
+        <a:latin typeface="+mn-lt"/>
+        <a:ea typeface="+mn-ea"/>
+        <a:cs typeface="+mn-cs"/>
+      </a:defRPr>
+    </a:lvl7pPr>
+    <a:lvl8pPr marL="3200400" algn="l" defTabSz="457200" rtl="0" eaLnBrk="1" latinLnBrk="0" hangingPunct="1">
+      <a:defRPr sz="1800" kern="1200">
+        <a:solidFill>
+          <a:schemeClr val="tx1"/>
+        </a:solidFill>
+        <a:latin typeface="+mn-lt"/>
+        <a:ea typeface="+mn-ea"/>
+        <a:cs typeface="+mn-cs"/>
+      </a:defRPr>
+    </a:lvl8pPr>
+    <a:lvl9pPr marL="3657600" algn="l" defTabSz="457200" rtl="0" eaLnBrk="1" latinLnBrk="0" hangingPunct="1">
+      <a:defRPr sz="1800" kern="1200">
+        <a:solidFill>
+          <a:schemeClr val="tx1"/>
+        </a:solidFill>
+        <a:latin typeface="+mn-lt"/>
+        <a:ea typeface="+mn-ea"/>
+        <a:cs typeface="+mn-cs"/>
+      </a:defRPr>
+    </a:lvl9pPr>
+  </p:defaultTextStyle>
+  <p:extLst>
+    <p:ext uri="{EFAFB233-063F-42B5-8137-9DF3F51BA10A}">
+      <p15:sldGuideLst xmlns:p15="http://schemas.microsoft.com/office/powerpoint/2012/main"/>
+    </p:ext>
+  </p:extLst>
 </p:presentation>
+</file>
+
+<file path=ppt/handoutMasters/handoutMaster1.xml><?xml version="1.0" encoding="utf-8"?>
+<p:handoutMaster xmlns:a="http://schemas.openxmlformats.org/drawingml/2006/main" xmlns:r="http://schemas.openxmlformats.org/officeDocument/2006/relationships" xmlns:p="http://schemas.openxmlformats.org/presentationml/2006/main">
+  <p:cSld>
+    <p:bg>
+      <p:bgRef idx="1001">
+        <a:schemeClr val="bg1"/>
+      </p:bgRef>
+    </p:bg>
+    <p:spTree>
+      <p:nvGrpSpPr>
+        <p:cNvPr id="1" name=""/>
+        <p:cNvGrpSpPr/>
+        <p:nvPr/>
+      </p:nvGrpSpPr>
+      <p:grpSpPr>
+        <a:xfrm>
+          <a:off x="0" y="0"/>
+          <a:ext cx="0" cy="0"/>
+          <a:chOff x="0" y="0"/>
+          <a:chExt cx="0" cy="0"/>
+        </a:xfrm>
+      </p:grpSpPr>
+      <p:sp>
+        <p:nvSpPr>
+          <p:cNvPr id="2" name="Header"/>
+          <p:cNvSpPr>
+            <a:spLocks noGrp="1"/>
+          </p:cNvSpPr>
+          <p:nvPr>
+            <p:ph type="hdr"/>
+          </p:nvPr>
+        </p:nvSpPr>
+        <p:spPr/>
+        <p:txBody>
+          <a:bodyPr/>
+          <a:lstStyle/>
+          <a:p>
+            <a:r>
+              <a:t>Q1 2025 Strategy Review</a:t>
+            </a:r>
+          </a:p>
+        </p:txBody>
+      </p:sp>
+      <p:sp>
+        <p:nvSpPr>
+          <p:cNvPr id="3" name="Footer"/>
+          <p:cNvSpPr>
+            <a:spLocks noGrp="1"/>
+          </p:cNvSpPr>
+          <p:nvPr>
+            <p:ph type="ftr"/>
+          </p:nvPr>
+        </p:nvSpPr>
+        <p:spPr/>
+        <p:txBody>
+          <a:bodyPr/>
+          <a:lstStyle/>
+          <a:p>
+            <a:r>
+              <a:t>Confidential - Internal Use Only</a:t>
+            </a:r>
+          </a:p>
+        </p:txBody>
+      </p:sp>
+      <p:sp>
+        <p:nvSpPr>
+          <p:cNvPr id="4" name="Date"/>
+          <p:cNvSpPr>
+            <a:spLocks noGrp="1"/>
+          </p:cNvSpPr>
+          <p:nvPr>
+            <p:ph type="dt"/>
+          </p:nvPr>
+        </p:nvSpPr>
+        <p:spPr/>
+        <p:txBody>
+          <a:bodyPr/>
+          <a:lstStyle/>
+          <a:p>
+            <a:fld id="{B6F15528-F159-4107-2D14-000000000000}" type="datetimeFigureOut">
+              <a:t/>
+            </a:fld>
+            <a:endParaRPr/>
+          </a:p>
+        </p:txBody>
+      </p:sp>
+      <p:sp>
+        <p:nvSpPr>
+          <p:cNvPr id="5" name="Slide Number"/>
+          <p:cNvSpPr>
+            <a:spLocks noGrp="1"/>
+          </p:cNvSpPr>
+          <p:nvPr>
+            <p:ph type="sldNum"/>
+          </p:nvPr>
+        </p:nvSpPr>
+        <p:spPr/>
+        <p:txBody>
+          <a:bodyPr/>
+          <a:lstStyle/>
+          <a:p>
+            <a:fld id="{B6F15528-F159-4107-2D14-000000000001}" type="slidenum">
+              <a:t>‹#›</a:t>
+            </a:fld>
+            <a:endParaRPr/>
+          </a:p>
+        </p:txBody>
+      </p:sp>
+    </p:spTree>
+  </p:cSld>
+  <p:clrMap bg1="lt1" tx1="dk1" bg2="lt2" tx2="dk2" accent1="accent1" accent2="accent2" accent3="accent3" accent4="accent4" accent5="accent5" accent6="accent6" hlink="hlink" folHlink="folHlink"/>
+</p:handoutMaster>
 </file>
 
 <file path=ppt/notesMasters/notesMaster1.xml><?xml version="1.0" encoding="utf-8"?>
 <p:notesMaster xmlns:a="http://schemas.openxmlformats.org/drawingml/2006/main" xmlns:r="http://schemas.openxmlformats.org/officeDocument/2006/relationships" xmlns:p="http://schemas.openxmlformats.org/presentationml/2006/main">
   <p:cSld>
+    <p:bg>
+      <p:bgRef idx="1001">
+        <a:schemeClr val="bg1"/>
+      </p:bgRef>
+    </p:bg>
     <p:spTree>
       <p:nvGrpSpPr>
         <p:cNvPr id="1" name=""/>
@@ -185,7 +410,7 @@
 </p:notesMaster>
 </file>
 
-<file path=ppt/notesSlides/notesSlide30.xml><?xml version="1.0" encoding="utf-8"?>
+<file path=ppt/notesSlides/notesSlide1.xml><?xml version="1.0" encoding="utf-8"?>
 <p:notes xmlns:a="http://schemas.openxmlformats.org/drawingml/2006/main" xmlns:r="http://schemas.openxmlformats.org/officeDocument/2006/relationships" xmlns:p="http://schemas.openxmlformats.org/presentationml/2006/main">
   <p:cSld>
     <p:spTree>
@@ -272,6 +497,362 @@
 </file>
 
 <file path=ppt/slideLayouts/slideLayout1.xml><?xml version="1.0" encoding="utf-8"?>
+<p:sldLayout xmlns:a="http://schemas.openxmlformats.org/drawingml/2006/main" xmlns:r="http://schemas.openxmlformats.org/officeDocument/2006/relationships" xmlns:p="http://schemas.openxmlformats.org/presentationml/2006/main" type="title" preserve="1">
+  <p:cSld name="Title Slide">
+    <p:spTree>
+      <p:nvGrpSpPr>
+        <p:cNvPr id="1" name=""/>
+        <p:cNvGrpSpPr/>
+        <p:nvPr/>
+      </p:nvGrpSpPr>
+      <p:grpSpPr>
+        <a:xfrm>
+          <a:off x="0" y="0"/>
+          <a:ext cx="0" cy="0"/>
+          <a:chOff x="0" y="0"/>
+          <a:chExt cx="0" cy="0"/>
+        </a:xfrm>
+      </p:grpSpPr>
+      <p:sp>
+        <p:nvSpPr>
+          <p:cNvPr id="2" name="Title"/>
+          <p:cNvSpPr>
+            <a:spLocks noGrp="1"/>
+          </p:cNvSpPr>
+          <p:nvPr>
+            <p:ph type="ctrTitle"/>
+          </p:nvPr>
+        </p:nvSpPr>
+        <p:spPr>
+          <a:xfrm>
+            <a:off x="1524000" y="1828800"/>
+            <a:ext cx="6096000" cy="1828800"/>
+          </a:xfrm>
+          <a:prstGeom prst="rect">
+            <a:avLst/>
+          </a:prstGeom>
+          <a:noFill/>
+        </p:spPr>
+        <p:txBody>
+          <a:bodyPr/>
+          <a:lstStyle/>
+          <a:p>
+            <a:endParaRPr lang="en-US"/>
+          </a:p>
+        </p:txBody>
+      </p:sp>
+      <p:sp>
+        <p:nvSpPr>
+          <p:cNvPr id="3" name="Subtitle"/>
+          <p:cNvSpPr>
+            <a:spLocks noGrp="1"/>
+          </p:cNvSpPr>
+          <p:nvPr>
+            <p:ph type="subTitle"/>
+          </p:nvPr>
+        </p:nvSpPr>
+        <p:spPr>
+          <a:xfrm>
+            <a:off x="1524000" y="3657600"/>
+            <a:ext cx="6096000" cy="914400"/>
+          </a:xfrm>
+          <a:prstGeom prst="rect">
+            <a:avLst/>
+          </a:prstGeom>
+          <a:noFill/>
+        </p:spPr>
+        <p:txBody>
+          <a:bodyPr/>
+          <a:lstStyle/>
+          <a:p>
+            <a:endParaRPr lang="en-US"/>
+          </a:p>
+        </p:txBody>
+      </p:sp>
+    </p:spTree>
+  </p:cSld>
+  <p:clrMapOvr>
+    <a:masterClrMapping/>
+  </p:clrMapOvr>
+  <p:hf/>
+</p:sldLayout>
+</file>
+
+<file path=ppt/slideLayouts/slideLayout2.xml><?xml version="1.0" encoding="utf-8"?>
+<p:sldLayout xmlns:a="http://schemas.openxmlformats.org/drawingml/2006/main" xmlns:r="http://schemas.openxmlformats.org/officeDocument/2006/relationships" xmlns:p="http://schemas.openxmlformats.org/presentationml/2006/main" type="obj" preserve="1">
+  <p:cSld name="Title and Content">
+    <p:spTree>
+      <p:nvGrpSpPr>
+        <p:cNvPr id="1" name=""/>
+        <p:cNvGrpSpPr/>
+        <p:nvPr/>
+      </p:nvGrpSpPr>
+      <p:grpSpPr>
+        <a:xfrm>
+          <a:off x="0" y="0"/>
+          <a:ext cx="0" cy="0"/>
+          <a:chOff x="0" y="0"/>
+          <a:chExt cx="0" cy="0"/>
+        </a:xfrm>
+      </p:grpSpPr>
+      <p:sp>
+        <p:nvSpPr>
+          <p:cNvPr id="2" name="Title"/>
+          <p:cNvSpPr>
+            <a:spLocks noGrp="1"/>
+          </p:cNvSpPr>
+          <p:nvPr>
+            <p:ph type="title"/>
+          </p:nvPr>
+        </p:nvSpPr>
+        <p:spPr>
+          <a:xfrm>
+            <a:off x="457200" y="274638"/>
+            <a:ext cx="8229600" cy="1143000"/>
+          </a:xfrm>
+          <a:prstGeom prst="rect">
+            <a:avLst/>
+          </a:prstGeom>
+          <a:noFill/>
+        </p:spPr>
+        <p:txBody>
+          <a:bodyPr/>
+          <a:lstStyle/>
+          <a:p>
+            <a:endParaRPr lang="en-US"/>
+          </a:p>
+        </p:txBody>
+      </p:sp>
+      <p:sp>
+        <p:nvSpPr>
+          <p:cNvPr id="3" name="Content"/>
+          <p:cNvSpPr>
+            <a:spLocks noGrp="1"/>
+          </p:cNvSpPr>
+          <p:nvPr>
+            <p:ph type="body" idx="1"/>
+          </p:nvPr>
+        </p:nvSpPr>
+        <p:spPr>
+          <a:xfrm>
+            <a:off x="457200" y="1600200"/>
+            <a:ext cx="8229600" cy="4525963"/>
+          </a:xfrm>
+          <a:prstGeom prst="rect">
+            <a:avLst/>
+          </a:prstGeom>
+          <a:noFill/>
+        </p:spPr>
+        <p:txBody>
+          <a:bodyPr/>
+          <a:lstStyle/>
+          <a:p>
+            <a:endParaRPr lang="en-US"/>
+          </a:p>
+        </p:txBody>
+      </p:sp>
+    </p:spTree>
+  </p:cSld>
+  <p:clrMapOvr>
+    <a:masterClrMapping/>
+  </p:clrMapOvr>
+  <p:hf/>
+</p:sldLayout>
+</file>
+
+<file path=ppt/slideLayouts/slideLayout3.xml><?xml version="1.0" encoding="utf-8"?>
+<p:sldLayout xmlns:a="http://schemas.openxmlformats.org/drawingml/2006/main" xmlns:r="http://schemas.openxmlformats.org/officeDocument/2006/relationships" xmlns:p="http://schemas.openxmlformats.org/presentationml/2006/main" type="twoObj" preserve="1">
+  <p:cSld name="Two Content">
+    <p:spTree>
+      <p:nvGrpSpPr>
+        <p:cNvPr id="1" name=""/>
+        <p:cNvGrpSpPr/>
+        <p:nvPr/>
+      </p:nvGrpSpPr>
+      <p:grpSpPr>
+        <a:xfrm>
+          <a:off x="0" y="0"/>
+          <a:ext cx="0" cy="0"/>
+          <a:chOff x="0" y="0"/>
+          <a:chExt cx="0" cy="0"/>
+        </a:xfrm>
+      </p:grpSpPr>
+      <p:sp>
+        <p:nvSpPr>
+          <p:cNvPr id="2" name="Title"/>
+          <p:cNvSpPr>
+            <a:spLocks noGrp="1"/>
+          </p:cNvSpPr>
+          <p:nvPr>
+            <p:ph type="title"/>
+          </p:nvPr>
+        </p:nvSpPr>
+        <p:spPr>
+          <a:xfrm>
+            <a:off x="457200" y="274638"/>
+            <a:ext cx="8229600" cy="1143000"/>
+          </a:xfrm>
+          <a:prstGeom prst="rect">
+            <a:avLst/>
+          </a:prstGeom>
+          <a:noFill/>
+        </p:spPr>
+        <p:txBody>
+          <a:bodyPr/>
+          <a:lstStyle/>
+          <a:p>
+            <a:endParaRPr lang="en-US"/>
+          </a:p>
+        </p:txBody>
+      </p:sp>
+      <p:sp>
+        <p:nvSpPr>
+          <p:cNvPr id="3" name="Content Left"/>
+          <p:cNvSpPr>
+            <a:spLocks noGrp="1"/>
+          </p:cNvSpPr>
+          <p:nvPr>
+            <p:ph type="body" idx="1"/>
+          </p:nvPr>
+        </p:nvSpPr>
+        <p:spPr>
+          <a:xfrm>
+            <a:off x="457200" y="1600200"/>
+            <a:ext cx="4025400" cy="4525963"/>
+          </a:xfrm>
+          <a:prstGeom prst="rect">
+            <a:avLst/>
+          </a:prstGeom>
+          <a:noFill/>
+        </p:spPr>
+        <p:txBody>
+          <a:bodyPr/>
+          <a:lstStyle/>
+          <a:p>
+            <a:endParaRPr lang="en-US"/>
+          </a:p>
+        </p:txBody>
+      </p:sp>
+      <p:sp>
+        <p:nvSpPr>
+          <p:cNvPr id="4" name="Content Right"/>
+          <p:cNvSpPr>
+            <a:spLocks noGrp="1"/>
+          </p:cNvSpPr>
+          <p:nvPr>
+            <p:ph type="body" idx="2"/>
+          </p:nvPr>
+        </p:nvSpPr>
+        <p:spPr>
+          <a:xfrm>
+            <a:off x="4661400" y="1600200"/>
+            <a:ext cx="4025400" cy="4525963"/>
+          </a:xfrm>
+          <a:prstGeom prst="rect">
+            <a:avLst/>
+          </a:prstGeom>
+          <a:noFill/>
+        </p:spPr>
+        <p:txBody>
+          <a:bodyPr/>
+          <a:lstStyle/>
+          <a:p>
+            <a:endParaRPr lang="en-US"/>
+          </a:p>
+        </p:txBody>
+      </p:sp>
+    </p:spTree>
+  </p:cSld>
+  <p:clrMapOvr>
+    <a:masterClrMapping/>
+  </p:clrMapOvr>
+  <p:hf/>
+</p:sldLayout>
+</file>
+
+<file path=ppt/slideLayouts/slideLayout4.xml><?xml version="1.0" encoding="utf-8"?>
+<p:sldLayout xmlns:a="http://schemas.openxmlformats.org/drawingml/2006/main" xmlns:r="http://schemas.openxmlformats.org/officeDocument/2006/relationships" xmlns:p="http://schemas.openxmlformats.org/presentationml/2006/main" type="secHead" preserve="1">
+  <p:cSld name="Section Header">
+    <p:spTree>
+      <p:nvGrpSpPr>
+        <p:cNvPr id="1" name=""/>
+        <p:cNvGrpSpPr/>
+        <p:nvPr/>
+      </p:nvGrpSpPr>
+      <p:grpSpPr>
+        <a:xfrm>
+          <a:off x="0" y="0"/>
+          <a:ext cx="0" cy="0"/>
+          <a:chOff x="0" y="0"/>
+          <a:chExt cx="0" cy="0"/>
+        </a:xfrm>
+      </p:grpSpPr>
+      <p:sp>
+        <p:nvSpPr>
+          <p:cNvPr id="2" name="Title"/>
+          <p:cNvSpPr>
+            <a:spLocks noGrp="1"/>
+          </p:cNvSpPr>
+          <p:nvPr>
+            <p:ph type="title"/>
+          </p:nvPr>
+        </p:nvSpPr>
+        <p:spPr>
+          <a:xfrm>
+            <a:off x="457200" y="1600200"/>
+            <a:ext cx="8229600" cy="1828800"/>
+          </a:xfrm>
+          <a:prstGeom prst="rect">
+            <a:avLst/>
+          </a:prstGeom>
+          <a:noFill/>
+        </p:spPr>
+        <p:txBody>
+          <a:bodyPr/>
+          <a:lstStyle/>
+          <a:p>
+            <a:endParaRPr lang="en-US"/>
+          </a:p>
+        </p:txBody>
+      </p:sp>
+      <p:sp>
+        <p:nvSpPr>
+          <p:cNvPr id="3" name="Subtitle"/>
+          <p:cNvSpPr>
+            <a:spLocks noGrp="1"/>
+          </p:cNvSpPr>
+          <p:nvPr>
+            <p:ph type="body" idx="1"/>
+          </p:nvPr>
+        </p:nvSpPr>
+        <p:spPr>
+          <a:xfrm>
+            <a:off x="457200" y="3657600"/>
+            <a:ext cx="8229600" cy="1371600"/>
+          </a:xfrm>
+          <a:prstGeom prst="rect">
+            <a:avLst/>
+          </a:prstGeom>
+          <a:noFill/>
+        </p:spPr>
+        <p:txBody>
+          <a:bodyPr/>
+          <a:lstStyle/>
+          <a:p>
+            <a:endParaRPr lang="en-US"/>
+          </a:p>
+        </p:txBody>
+      </p:sp>
+    </p:spTree>
+  </p:cSld>
+  <p:clrMapOvr>
+    <a:masterClrMapping/>
+  </p:clrMapOvr>
+  <p:hf/>
+</p:sldLayout>
+</file>
+
+<file path=ppt/slideLayouts/slideLayout5.xml><?xml version="1.0" encoding="utf-8"?>
 <p:sldLayout xmlns:a="http://schemas.openxmlformats.org/drawingml/2006/main" xmlns:r="http://schemas.openxmlformats.org/officeDocument/2006/relationships" xmlns:p="http://schemas.openxmlformats.org/presentationml/2006/main" type="blank" preserve="1">
   <p:cSld name="Blank">
     <p:spTree>
@@ -293,6 +874,143 @@
   <p:clrMapOvr>
     <a:masterClrMapping/>
   </p:clrMapOvr>
+  <p:hf/>
+</p:sldLayout>
+</file>
+
+<file path=ppt/slideLayouts/slideLayout6.xml><?xml version="1.0" encoding="utf-8"?>
+<p:sldLayout xmlns:a="http://schemas.openxmlformats.org/drawingml/2006/main" xmlns:r="http://schemas.openxmlformats.org/officeDocument/2006/relationships" xmlns:p="http://schemas.openxmlformats.org/presentationml/2006/main" type="titleOnly" preserve="1">
+  <p:cSld name="Title Only">
+    <p:spTree>
+      <p:nvGrpSpPr>
+        <p:cNvPr id="1" name=""/>
+        <p:cNvGrpSpPr/>
+        <p:nvPr/>
+      </p:nvGrpSpPr>
+      <p:grpSpPr>
+        <a:xfrm>
+          <a:off x="0" y="0"/>
+          <a:ext cx="0" cy="0"/>
+          <a:chOff x="0" y="0"/>
+          <a:chExt cx="0" cy="0"/>
+        </a:xfrm>
+      </p:grpSpPr>
+      <p:sp>
+        <p:nvSpPr>
+          <p:cNvPr id="2" name="Title"/>
+          <p:cNvSpPr>
+            <a:spLocks noGrp="1"/>
+          </p:cNvSpPr>
+          <p:nvPr>
+            <p:ph type="title"/>
+          </p:nvPr>
+        </p:nvSpPr>
+        <p:spPr>
+          <a:xfrm>
+            <a:off x="457200" y="274638"/>
+            <a:ext cx="8229600" cy="1143000"/>
+          </a:xfrm>
+          <a:prstGeom prst="rect">
+            <a:avLst/>
+          </a:prstGeom>
+          <a:noFill/>
+        </p:spPr>
+        <p:txBody>
+          <a:bodyPr/>
+          <a:lstStyle/>
+          <a:p>
+            <a:endParaRPr lang="en-US"/>
+          </a:p>
+        </p:txBody>
+      </p:sp>
+    </p:spTree>
+  </p:cSld>
+  <p:clrMapOvr>
+    <a:masterClrMapping/>
+  </p:clrMapOvr>
+  <p:hf/>
+</p:sldLayout>
+</file>
+
+<file path=ppt/slideLayouts/slideLayout7.xml><?xml version="1.0" encoding="utf-8"?>
+<p:sldLayout xmlns:a="http://schemas.openxmlformats.org/drawingml/2006/main" xmlns:r="http://schemas.openxmlformats.org/officeDocument/2006/relationships" xmlns:p="http://schemas.openxmlformats.org/presentationml/2006/main" type="obj" preserve="1">
+  <p:cSld name="Title and Big Content">
+    <p:spTree>
+      <p:nvGrpSpPr>
+        <p:cNvPr id="1" name=""/>
+        <p:cNvGrpSpPr/>
+        <p:nvPr/>
+      </p:nvGrpSpPr>
+      <p:grpSpPr>
+        <a:xfrm>
+          <a:off x="0" y="0"/>
+          <a:ext cx="0" cy="0"/>
+          <a:chOff x="0" y="0"/>
+          <a:chExt cx="0" cy="0"/>
+        </a:xfrm>
+      </p:grpSpPr>
+      <p:sp>
+        <p:nvSpPr>
+          <p:cNvPr id="2" name="Title"/>
+          <p:cNvSpPr>
+            <a:spLocks noGrp="1"/>
+          </p:cNvSpPr>
+          <p:nvPr>
+            <p:ph type="title"/>
+          </p:nvPr>
+        </p:nvSpPr>
+        <p:spPr>
+          <a:xfrm>
+            <a:off x="457200" y="274638"/>
+            <a:ext cx="8229600" cy="800000"/>
+          </a:xfrm>
+          <a:prstGeom prst="rect">
+            <a:avLst/>
+          </a:prstGeom>
+          <a:noFill/>
+        </p:spPr>
+        <p:txBody>
+          <a:bodyPr/>
+          <a:lstStyle/>
+          <a:p>
+            <a:endParaRPr lang="en-US"/>
+          </a:p>
+        </p:txBody>
+      </p:sp>
+      <p:sp>
+        <p:nvSpPr>
+          <p:cNvPr id="3" name="Content"/>
+          <p:cNvSpPr>
+            <a:spLocks noGrp="1"/>
+          </p:cNvSpPr>
+          <p:nvPr>
+            <p:ph type="body" idx="1"/>
+          </p:nvPr>
+        </p:nvSpPr>
+        <p:spPr>
+          <a:xfrm>
+            <a:off x="457200" y="1200000"/>
+            <a:ext cx="8229600" cy="5000000"/>
+          </a:xfrm>
+          <a:prstGeom prst="rect">
+            <a:avLst/>
+          </a:prstGeom>
+          <a:noFill/>
+        </p:spPr>
+        <p:txBody>
+          <a:bodyPr/>
+          <a:lstStyle/>
+          <a:p>
+            <a:endParaRPr lang="en-US"/>
+          </a:p>
+        </p:txBody>
+      </p:sp>
+    </p:spTree>
+  </p:cSld>
+  <p:clrMapOvr>
+    <a:masterClrMapping/>
+  </p:clrMapOvr>
+  <p:hf/>
 </p:sldLayout>
 </file>
 
@@ -318,12 +1036,391 @@
           <a:chExt cx="0" cy="0"/>
         </a:xfrm>
       </p:grpSpPr>
+      <p:sp>
+        <p:nvSpPr>
+          <p:cNvPr id="2" name="Header Placeholder"/>
+          <p:cNvSpPr>
+            <a:spLocks noGrp="1"/>
+          </p:cNvSpPr>
+          <p:nvPr>
+            <p:ph type="hdr"/>
+          </p:nvPr>
+        </p:nvSpPr>
+        <p:spPr>
+          <a:xfrm>
+            <a:off x="312420" y="213360"/>
+            <a:ext cx="8519760" cy="365125"/>
+          </a:xfrm>
+          <a:prstGeom prst="rect">
+            <a:avLst/>
+          </a:prstGeom>
+          <a:noFill/>
+        </p:spPr>
+        <p:txBody>
+          <a:bodyPr/>
+          <a:lstStyle/>
+          <a:p>
+            <a:endParaRPr lang="en-US"/>
+          </a:p>
+        </p:txBody>
+      </p:sp>
+      <p:sp>
+        <p:nvSpPr>
+          <p:cNvPr id="3" name="Footer Placeholder"/>
+          <p:cNvSpPr>
+            <a:spLocks noGrp="1"/>
+          </p:cNvSpPr>
+          <p:nvPr>
+            <p:ph type="ftr" sz="quarter"/>
+          </p:nvPr>
+        </p:nvSpPr>
+        <p:spPr>
+          <a:xfrm>
+            <a:off x="3124200" y="6356350"/>
+            <a:ext cx="2895600" cy="365125"/>
+          </a:xfrm>
+          <a:prstGeom prst="rect">
+            <a:avLst/>
+          </a:prstGeom>
+          <a:noFill/>
+        </p:spPr>
+        <p:txBody>
+          <a:bodyPr/>
+          <a:lstStyle/>
+          <a:p>
+            <a:r>
+              <a:rPr lang="en-US" sz="1200"/>
+              <a:t>Confidential - Internal Use Only</a:t>
+            </a:r>
+          </a:p>
+        </p:txBody>
+      </p:sp>
+      <p:sp>
+        <p:nvSpPr>
+          <p:cNvPr id="4" name="Date Placeholder"/>
+          <p:cNvSpPr>
+            <a:spLocks noGrp="1"/>
+          </p:cNvSpPr>
+          <p:nvPr>
+            <p:ph type="dt" sz="half"/>
+          </p:nvPr>
+        </p:nvSpPr>
+        <p:spPr>
+          <a:xfrm>
+            <a:off x="457200" y="6356350"/>
+            <a:ext cx="2133600" cy="365125"/>
+          </a:xfrm>
+          <a:prstGeom prst="rect">
+            <a:avLst/>
+          </a:prstGeom>
+          <a:noFill/>
+        </p:spPr>
+        <p:txBody>
+          <a:bodyPr/>
+          <a:lstStyle/>
+          <a:p>
+            <a:fld id="{B6F15528-F159-4107-2D14-000000000000}" type="datetimeFigureOut">
+              <a:rPr lang="en-US" sz="1200"/>
+              <a:t>6/1/2026</a:t>
+            </a:fld>
+            <a:endParaRPr lang="en-US" sz="1200"/>
+          </a:p>
+        </p:txBody>
+      </p:sp>
+      <p:sp>
+        <p:nvSpPr>
+          <p:cNvPr id="5" name="Slide Number Placeholder"/>
+          <p:cNvSpPr>
+            <a:spLocks noGrp="1"/>
+          </p:cNvSpPr>
+          <p:nvPr>
+            <p:ph type="sldNum" sz="quarter"/>
+          </p:nvPr>
+        </p:nvSpPr>
+        <p:spPr>
+          <a:xfrm>
+            <a:off x="8610600" y="6356350"/>
+            <a:ext cx="533400" cy="365125"/>
+          </a:xfrm>
+          <a:prstGeom prst="rect">
+            <a:avLst/>
+          </a:prstGeom>
+          <a:noFill/>
+        </p:spPr>
+        <p:txBody>
+          <a:bodyPr/>
+          <a:lstStyle/>
+          <a:p>
+            <a:fld id="{B6F15528-F159-4107-2D14-000000000001}" type="slidenum">
+              <a:rPr lang="en-US" sz="1200"/>
+              <a:t>‹#›</a:t>
+            </a:fld>
+            <a:endParaRPr lang="en-US" sz="1200"/>
+          </a:p>
+        </p:txBody>
+      </p:sp>
     </p:spTree>
   </p:cSld>
   <p:clrMap bg1="lt1" tx1="dk1" bg2="lt2" tx2="dk2" accent1="accent1" accent2="accent2" accent3="accent3" accent4="accent4" accent5="accent5" accent6="accent6" hlink="hlink" folHlink="folHlink"/>
   <p:sldLayoutIdLst>
     <p:sldLayoutId id="2147483649" r:id="rId1"/>
+    <p:sldLayoutId id="2147483650" r:id="rId2"/>
+    <p:sldLayoutId id="2147483651" r:id="rId3"/>
+    <p:sldLayoutId id="2147483652" r:id="rId4"/>
+    <p:sldLayoutId id="2147483653" r:id="rId5"/>
+    <p:sldLayoutId id="2147483654" r:id="rId6"/>
+    <p:sldLayoutId id="2147483655" r:id="rId7"/>
   </p:sldLayoutIdLst>
+  <p:txStyles>
+    <p:titleStyle>
+      <a:lvl1pPr algn="ctr" defTabSz="457200" rtl="0" eaLnBrk="1" latinLnBrk="0" hangingPunct="1">
+        <a:spcBef>
+          <a:spcPct val="0"/>
+        </a:spcBef>
+        <a:buNone/>
+        <a:defRPr sz="4400" kern="1200">
+          <a:solidFill>
+            <a:schemeClr val="tx1"/>
+          </a:solidFill>
+          <a:latin typeface="+mj-lt"/>
+          <a:ea typeface="+mj-ea"/>
+          <a:cs typeface="+mj-cs"/>
+        </a:defRPr>
+      </a:lvl1pPr>
+    </p:titleStyle>
+    <p:bodyStyle>
+      <a:lvl1pPr marL="342900" indent="-342900" algn="l" defTabSz="457200" rtl="0" eaLnBrk="1" latinLnBrk="0" hangingPunct="1">
+        <a:spcBef>
+          <a:spcPct val="20000"/>
+        </a:spcBef>
+        <a:buFont typeface="Arial"/>
+        <a:buChar char="•"/>
+        <a:defRPr sz="3200" kern="1200">
+          <a:solidFill>
+            <a:schemeClr val="tx1"/>
+          </a:solidFill>
+          <a:latin typeface="+mn-lt"/>
+          <a:ea typeface="+mn-ea"/>
+          <a:cs typeface="+mn-cs"/>
+        </a:defRPr>
+      </a:lvl1pPr>
+      <a:lvl2pPr marL="742950" indent="-285750" algn="l" defTabSz="457200" rtl="0" eaLnBrk="1" latinLnBrk="0" hangingPunct="1">
+        <a:spcBef>
+          <a:spcPct val="20000"/>
+        </a:spcBef>
+        <a:buFont typeface="Arial"/>
+        <a:buChar char="–"/>
+        <a:defRPr sz="2800" kern="1200">
+          <a:solidFill>
+            <a:schemeClr val="tx1"/>
+          </a:solidFill>
+          <a:latin typeface="+mn-lt"/>
+          <a:ea typeface="+mn-ea"/>
+          <a:cs typeface="+mn-cs"/>
+        </a:defRPr>
+      </a:lvl2pPr>
+      <a:lvl3pPr marL="1143000" indent="-228600" algn="l" defTabSz="457200" rtl="0" eaLnBrk="1" latinLnBrk="0" hangingPunct="1">
+        <a:spcBef>
+          <a:spcPct val="20000"/>
+        </a:spcBef>
+        <a:buFont typeface="Arial"/>
+        <a:buChar char="•"/>
+        <a:defRPr sz="2400" kern="1200">
+          <a:solidFill>
+            <a:schemeClr val="tx1"/>
+          </a:solidFill>
+          <a:latin typeface="+mn-lt"/>
+          <a:ea typeface="+mn-ea"/>
+          <a:cs typeface="+mn-cs"/>
+        </a:defRPr>
+      </a:lvl3pPr>
+      <a:lvl4pPr marL="1600200" indent="-228600" algn="l" defTabSz="457200" rtl="0" eaLnBrk="1" latinLnBrk="0" hangingPunct="1">
+        <a:spcBef>
+          <a:spcPct val="20000"/>
+        </a:spcBef>
+        <a:buFont typeface="Arial"/>
+        <a:buChar char="–"/>
+        <a:defRPr sz="2000" kern="1200">
+          <a:solidFill>
+            <a:schemeClr val="tx1"/>
+          </a:solidFill>
+          <a:latin typeface="+mn-lt"/>
+          <a:ea typeface="+mn-ea"/>
+          <a:cs typeface="+mn-cs"/>
+        </a:defRPr>
+      </a:lvl4pPr>
+      <a:lvl5pPr marL="2057400" indent="-228600" algn="l" defTabSz="457200" rtl="0" eaLnBrk="1" latinLnBrk="0" hangingPunct="1">
+        <a:spcBef>
+          <a:spcPct val="20000"/>
+        </a:spcBef>
+        <a:buFont typeface="Arial"/>
+        <a:buChar char="»"/>
+        <a:defRPr sz="2000" kern="1200">
+          <a:solidFill>
+            <a:schemeClr val="tx1"/>
+          </a:solidFill>
+          <a:latin typeface="+mn-lt"/>
+          <a:ea typeface="+mn-ea"/>
+          <a:cs typeface="+mn-cs"/>
+        </a:defRPr>
+      </a:lvl5pPr>
+      <a:lvl6pPr marL="2514600" indent="-228600" algn="l" defTabSz="457200" rtl="0" eaLnBrk="1" latinLnBrk="0" hangingPunct="1">
+        <a:spcBef>
+          <a:spcPct val="20000"/>
+        </a:spcBef>
+        <a:buFont typeface="Arial"/>
+        <a:buChar char="•"/>
+        <a:defRPr sz="2000" kern="1200">
+          <a:solidFill>
+            <a:schemeClr val="tx1"/>
+          </a:solidFill>
+          <a:latin typeface="+mn-lt"/>
+          <a:ea typeface="+mn-ea"/>
+          <a:cs typeface="+mn-cs"/>
+        </a:defRPr>
+      </a:lvl6pPr>
+      <a:lvl7pPr marL="2971800" indent="-228600" algn="l" defTabSz="457200" rtl="0" eaLnBrk="1" latinLnBrk="0" hangingPunct="1">
+        <a:spcBef>
+          <a:spcPct val="20000"/>
+        </a:spcBef>
+        <a:buFont typeface="Arial"/>
+        <a:buChar char="•"/>
+        <a:defRPr sz="2000" kern="1200">
+          <a:solidFill>
+            <a:schemeClr val="tx1"/>
+          </a:solidFill>
+          <a:latin typeface="+mn-lt"/>
+          <a:ea typeface="+mn-ea"/>
+          <a:cs typeface="+mn-cs"/>
+        </a:defRPr>
+      </a:lvl7pPr>
+      <a:lvl8pPr marL="3429000" indent="-228600" algn="l" defTabSz="457200" rtl="0" eaLnBrk="1" latinLnBrk="0" hangingPunct="1">
+        <a:spcBef>
+          <a:spcPct val="20000"/>
+        </a:spcBef>
+        <a:buFont typeface="Arial"/>
+        <a:buChar char="•"/>
+        <a:defRPr sz="2000" kern="1200">
+          <a:solidFill>
+            <a:schemeClr val="tx1"/>
+          </a:solidFill>
+          <a:latin typeface="+mn-lt"/>
+          <a:ea typeface="+mn-ea"/>
+          <a:cs typeface="+mn-cs"/>
+        </a:defRPr>
+      </a:lvl8pPr>
+      <a:lvl9pPr marL="3886200" indent="-228600" algn="l" defTabSz="457200" rtl="0" eaLnBrk="1" latinLnBrk="0" hangingPunct="1">
+        <a:spcBef>
+          <a:spcPct val="20000"/>
+        </a:spcBef>
+        <a:buFont typeface="Arial"/>
+        <a:buChar char="•"/>
+        <a:defRPr sz="2000" kern="1200">
+          <a:solidFill>
+            <a:schemeClr val="tx1"/>
+          </a:solidFill>
+          <a:latin typeface="+mn-lt"/>
+          <a:ea typeface="+mn-ea"/>
+          <a:cs typeface="+mn-cs"/>
+        </a:defRPr>
+      </a:lvl9pPr>
+    </p:bodyStyle>
+    <p:otherStyle>
+      <a:defPPr>
+        <a:defRPr lang="en-US"/>
+      </a:defPPr>
+      <a:lvl1pPr marL="0" algn="l" defTabSz="457200" rtl="0" eaLnBrk="1" latinLnBrk="0" hangingPunct="1">
+        <a:defRPr sz="1800" kern="1200">
+          <a:solidFill>
+            <a:schemeClr val="tx1"/>
+          </a:solidFill>
+          <a:latin typeface="+mn-lt"/>
+          <a:ea typeface="+mn-ea"/>
+          <a:cs typeface="+mn-cs"/>
+        </a:defRPr>
+      </a:lvl1pPr>
+      <a:lvl2pPr marL="457200" algn="l" defTabSz="457200" rtl="0" eaLnBrk="1" latinLnBrk="0" hangingPunct="1">
+        <a:defRPr sz="1800" kern="1200">
+          <a:solidFill>
+            <a:schemeClr val="tx1"/>
+          </a:solidFill>
+          <a:latin typeface="+mn-lt"/>
+          <a:ea typeface="+mn-ea"/>
+          <a:cs typeface="+mn-cs"/>
+        </a:defRPr>
+      </a:lvl2pPr>
+      <a:lvl3pPr marL="914400" algn="l" defTabSz="457200" rtl="0" eaLnBrk="1" latinLnBrk="0" hangingPunct="1">
+        <a:defRPr sz="1800" kern="1200">
+          <a:solidFill>
+            <a:schemeClr val="tx1"/>
+          </a:solidFill>
+          <a:latin typeface="+mn-lt"/>
+          <a:ea typeface="+mn-ea"/>
+          <a:cs typeface="+mn-cs"/>
+        </a:defRPr>
+      </a:lvl3pPr>
+      <a:lvl4pPr marL="1371600" algn="l" defTabSz="457200" rtl="0" eaLnBrk="1" latinLnBrk="0" hangingPunct="1">
+        <a:defRPr sz="1800" kern="1200">
+          <a:solidFill>
+            <a:schemeClr val="tx1"/>
+          </a:solidFill>
+          <a:latin typeface="+mn-lt"/>
+          <a:ea typeface="+mn-ea"/>
+          <a:cs typeface="+mn-cs"/>
+        </a:defRPr>
+      </a:lvl4pPr>
+      <a:lvl5pPr marL="1828800" algn="l" defTabSz="457200" rtl="0" eaLnBrk="1" latinLnBrk="0" hangingPunct="1">
+        <a:defRPr sz="1800" kern="1200">
+          <a:solidFill>
+            <a:schemeClr val="tx1"/>
+          </a:solidFill>
+          <a:latin typeface="+mn-lt"/>
+          <a:ea typeface="+mn-ea"/>
+          <a:cs typeface="+mn-cs"/>
+        </a:defRPr>
+      </a:lvl5pPr>
+      <a:lvl6pPr marL="2286000" algn="l" defTabSz="457200" rtl="0" eaLnBrk="1" latinLnBrk="0" hangingPunct="1">
+        <a:defRPr sz="1800" kern="1200">
+          <a:solidFill>
+            <a:schemeClr val="tx1"/>
+          </a:solidFill>
+          <a:latin typeface="+mn-lt"/>
+          <a:ea typeface="+mn-ea"/>
+          <a:cs typeface="+mn-cs"/>
+        </a:defRPr>
+      </a:lvl6pPr>
+      <a:lvl7pPr marL="2743200" algn="l" defTabSz="457200" rtl="0" eaLnBrk="1" latinLnBrk="0" hangingPunct="1">
+        <a:defRPr sz="1800" kern="1200">
+          <a:solidFill>
+            <a:schemeClr val="tx1"/>
+          </a:solidFill>
+          <a:latin typeface="+mn-lt"/>
+          <a:ea typeface="+mn-ea"/>
+          <a:cs typeface="+mn-cs"/>
+        </a:defRPr>
+      </a:lvl7pPr>
+      <a:lvl8pPr marL="3200400" algn="l" defTabSz="457200" rtl="0" eaLnBrk="1" latinLnBrk="0" hangingPunct="1">
+        <a:defRPr sz="1800" kern="1200">
+          <a:solidFill>
+            <a:schemeClr val="tx1"/>
+          </a:solidFill>
+          <a:latin typeface="+mn-lt"/>
+          <a:ea typeface="+mn-ea"/>
+          <a:cs typeface="+mn-cs"/>
+        </a:defRPr>
+      </a:lvl8pPr>
+      <a:lvl9pPr marL="3657600" algn="l" defTabSz="457200" rtl="0" eaLnBrk="1" latinLnBrk="0" hangingPunct="1">
+        <a:defRPr sz="1800" kern="1200">
+          <a:solidFill>
+            <a:schemeClr val="tx1"/>
+          </a:solidFill>
+          <a:latin typeface="+mn-lt"/>
+          <a:ea typeface="+mn-ea"/>
+          <a:cs typeface="+mn-cs"/>
+        </a:defRPr>
+      </a:lvl9pPr>
+    </p:otherStyle>
+  </p:txStyles>
 </p:sldMaster>
 </file>
 
@@ -471,13 +1568,13 @@
         </p:spPr>
         <p:txBody>
           <a:bodyPr wrap="square" rtlCol="0" anchor="ctr" lIns="91440" tIns="45720" rIns="91440" bIns="45720">
-            <a:normAutofit fontScale="100000" lnSpcReduction="0"/>
+            <a:normAutofit/>
           </a:bodyPr>
           <a:lstStyle/>
           <a:p>
             <a:pPr algn="ctr" marL="0" marR="0" indent="0"/>
             <a:r>
-              <a:rPr lang="en-US" sz="3600" dirty="0" smtClean="0">
+              <a:rPr lang="en-US" sz="3600" dirty="0">
                 <a:solidFill>
                   <a:srgbClr val="000000"/>
                 </a:solidFill>
@@ -515,13 +1612,13 @@
         </p:spPr>
         <p:txBody>
           <a:bodyPr wrap="square" rtlCol="0" anchor="ctr" lIns="91440" tIns="45720" rIns="91440" bIns="45720">
-            <a:normAutofit fontScale="100000" lnSpcReduction="0"/>
+            <a:normAutofit/>
           </a:bodyPr>
           <a:lstStyle/>
           <a:p>
             <a:pPr algn="ctr" marL="0" marR="0" indent="0"/>
             <a:r>
-              <a:rPr lang="en-US" sz="4500" dirty="0" smtClean="0">
+              <a:rPr lang="en-US" sz="4500" dirty="0">
                 <a:solidFill>
                   <a:srgbClr val="000000"/>
                 </a:solidFill>
@@ -559,13 +1656,13 @@
         </p:spPr>
         <p:txBody>
           <a:bodyPr wrap="square" rtlCol="0" anchor="ctr" lIns="91440" tIns="45720" rIns="91440" bIns="45720">
-            <a:normAutofit fontScale="100000" lnSpcReduction="0"/>
+            <a:normAutofit/>
           </a:bodyPr>
           <a:lstStyle/>
           <a:p>
             <a:pPr algn="ctr" marL="0" marR="0" indent="0"/>
             <a:r>
-              <a:rPr lang="en-US" sz="4500" dirty="0" smtClean="0">
+              <a:rPr lang="en-US" sz="4500" dirty="0">
                 <a:solidFill>
                   <a:srgbClr val="000000"/>
                 </a:solidFill>
@@ -606,13 +1703,13 @@
         </p:spPr>
         <p:txBody>
           <a:bodyPr wrap="square" rtlCol="0" anchor="ctr" lIns="91440" tIns="45720" rIns="91440" bIns="45720">
-            <a:normAutofit fontScale="100000" lnSpcReduction="0"/>
+            <a:normAutofit/>
           </a:bodyPr>
           <a:lstStyle/>
           <a:p>
             <a:pPr algn="ctr" marL="0" marR="0" indent="0"/>
             <a:r>
-              <a:rPr lang="en-US" sz="5142" dirty="0" smtClean="0">
+              <a:rPr lang="en-US" sz="5142" dirty="0">
                 <a:solidFill>
                   <a:srgbClr val="000000"/>
                 </a:solidFill>
@@ -650,13 +1747,13 @@
         </p:spPr>
         <p:txBody>
           <a:bodyPr wrap="square" rtlCol="0" anchor="ctr" lIns="91440" tIns="45720" rIns="91440" bIns="45720">
-            <a:normAutofit fontScale="100000" lnSpcReduction="0"/>
+            <a:normAutofit/>
           </a:bodyPr>
           <a:lstStyle/>
           <a:p>
             <a:pPr algn="ctr" marL="0" marR="0" indent="0"/>
             <a:r>
-              <a:rPr lang="en-US" sz="3600" dirty="0" smtClean="0">
+              <a:rPr lang="en-US" sz="3600" dirty="0">
                 <a:solidFill>
                   <a:srgbClr val="000000"/>
                 </a:solidFill>
@@ -748,13 +1845,13 @@
         </p:spPr>
         <p:txBody>
           <a:bodyPr wrap="square" rtlCol="0" anchor="ctr" lIns="91440" tIns="45720" rIns="91440" bIns="45720">
-            <a:normAutofit fontScale="100000" lnSpcReduction="0"/>
+            <a:normAutofit/>
           </a:bodyPr>
           <a:lstStyle/>
           <a:p>
             <a:pPr algn="ctr" marL="0" marR="0" indent="0"/>
             <a:r>
-              <a:rPr lang="en-US" sz="4058" dirty="0" smtClean="0">
+              <a:rPr lang="en-US" sz="4058" dirty="0">
                 <a:solidFill>
                   <a:srgbClr val="FFFFFF"/>
                 </a:solidFill>
@@ -789,13 +1886,13 @@
         </p:spPr>
         <p:txBody>
           <a:bodyPr wrap="square" rtlCol="0" anchor="ctr" lIns="91440" tIns="45720" rIns="91440" bIns="45720">
-            <a:normAutofit fontScale="100000" lnSpcReduction="0"/>
+            <a:normAutofit/>
           </a:bodyPr>
           <a:lstStyle/>
           <a:p>
             <a:pPr algn="ctr" marL="0" marR="0" indent="0"/>
             <a:r>
-              <a:rPr lang="en-US" sz="2400" dirty="0" smtClean="0">
+              <a:rPr lang="en-US" sz="2400" dirty="0">
                 <a:solidFill>
                   <a:srgbClr val="FFFFFF"/>
                 </a:solidFill>
@@ -830,13 +1927,13 @@
         </p:spPr>
         <p:txBody>
           <a:bodyPr wrap="square" rtlCol="0" anchor="ctr" lIns="91440" tIns="45720" rIns="91440" bIns="45720">
-            <a:normAutofit fontScale="100000" lnSpcReduction="0"/>
+            <a:normAutofit/>
           </a:bodyPr>
           <a:lstStyle/>
           <a:p>
             <a:pPr algn="ctr" marL="0" marR="0" indent="0"/>
             <a:r>
-              <a:rPr lang="en-US" sz="2400" dirty="0" smtClean="0">
+              <a:rPr lang="en-US" sz="2400" dirty="0">
                 <a:solidFill>
                   <a:srgbClr val="000000"/>
                 </a:solidFill>
@@ -871,13 +1968,13 @@
         </p:spPr>
         <p:txBody>
           <a:bodyPr wrap="square" rtlCol="0" anchor="ctr" lIns="91440" tIns="45720" rIns="91440" bIns="45720">
-            <a:normAutofit fontScale="100000" lnSpcReduction="0"/>
+            <a:normAutofit/>
           </a:bodyPr>
           <a:lstStyle/>
           <a:p>
             <a:pPr algn="ctr" marL="0" marR="0" indent="0"/>
             <a:r>
-              <a:rPr lang="en-US" sz="2400" dirty="0" smtClean="0">
+              <a:rPr lang="en-US" sz="2400" dirty="0">
                 <a:solidFill>
                   <a:srgbClr val="000000"/>
                 </a:solidFill>
@@ -969,13 +2066,13 @@
         </p:spPr>
         <p:txBody>
           <a:bodyPr wrap="square" rtlCol="0" anchor="ctr" lIns="91440" tIns="45720" rIns="91440" bIns="45720">
-            <a:normAutofit fontScale="100000" lnSpcReduction="0"/>
+            <a:normAutofit/>
           </a:bodyPr>
           <a:lstStyle/>
           <a:p>
             <a:pPr algn="ctr" marL="0" marR="0" indent="0"/>
             <a:r>
-              <a:rPr lang="en-US" sz="4382" dirty="0" smtClean="0">
+              <a:rPr lang="en-US" sz="4382" dirty="0">
                 <a:solidFill>
                   <a:srgbClr val="FFFFFF"/>
                 </a:solidFill>
@@ -1005,13 +2102,13 @@
         </p:spPr>
         <p:txBody>
           <a:bodyPr wrap="square" rtlCol="0" anchor="ctr" lIns="91440" tIns="45720" rIns="91440" bIns="45720">
-            <a:normAutofit fontScale="100000" lnSpcReduction="0"/>
+            <a:normAutofit/>
           </a:bodyPr>
           <a:lstStyle/>
           <a:p>
             <a:pPr algn="ctr" marL="0" marR="0" indent="0"/>
             <a:r>
-              <a:rPr lang="en-US" sz="3702" dirty="0" smtClean="0">
+              <a:rPr lang="en-US" sz="3702" dirty="0">
                 <a:solidFill>
                   <a:srgbClr val="FFFFFF"/>
                 </a:solidFill>
@@ -1041,13 +2138,13 @@
         </p:spPr>
         <p:txBody>
           <a:bodyPr wrap="square" rtlCol="0" anchor="ctr" lIns="91440" tIns="45720" rIns="91440" bIns="45720">
-            <a:normAutofit fontScale="100000" lnSpcReduction="0"/>
+            <a:normAutofit/>
           </a:bodyPr>
           <a:lstStyle/>
           <a:p>
             <a:pPr algn="ctr" marL="0" marR="0" indent="0"/>
             <a:r>
-              <a:rPr lang="en-US" sz="4382" dirty="0" smtClean="0">
+              <a:rPr lang="en-US" sz="4382" dirty="0">
                 <a:solidFill>
                   <a:srgbClr val="FFFFFF"/>
                 </a:solidFill>
@@ -1077,13 +2174,13 @@
         </p:spPr>
         <p:txBody>
           <a:bodyPr wrap="square" rtlCol="0" anchor="ctr" lIns="91440" tIns="45720" rIns="91440" bIns="45720">
-            <a:normAutofit fontScale="100000" lnSpcReduction="0"/>
+            <a:normAutofit/>
           </a:bodyPr>
           <a:lstStyle/>
           <a:p>
             <a:pPr algn="ctr" marL="0" marR="0" indent="0"/>
             <a:r>
-              <a:rPr lang="en-US" sz="4382" dirty="0" smtClean="0">
+              <a:rPr lang="en-US" sz="4382" dirty="0">
                 <a:solidFill>
                   <a:srgbClr val="FFFFFF"/>
                 </a:solidFill>
@@ -1113,13 +2210,13 @@
         </p:spPr>
         <p:txBody>
           <a:bodyPr wrap="square" rtlCol="0" anchor="ctr" lIns="91440" tIns="45720" rIns="91440" bIns="45720">
-            <a:normAutofit fontScale="100000" lnSpcReduction="0"/>
+            <a:normAutofit/>
           </a:bodyPr>
           <a:lstStyle/>
           <a:p>
             <a:pPr algn="ctr" marL="0" marR="0" indent="0"/>
             <a:r>
-              <a:rPr lang="en-US" sz="4382" dirty="0" smtClean="0">
+              <a:rPr lang="en-US" sz="4382" dirty="0">
                 <a:solidFill>
                   <a:srgbClr val="FFFFFF"/>
                 </a:solidFill>
@@ -1149,13 +2246,13 @@
         </p:spPr>
         <p:txBody>
           <a:bodyPr wrap="square" rtlCol="0" anchor="ctr" lIns="91440" tIns="45720" rIns="91440" bIns="45720">
-            <a:normAutofit fontScale="100000" lnSpcReduction="0"/>
+            <a:normAutofit/>
           </a:bodyPr>
           <a:lstStyle/>
           <a:p>
             <a:pPr algn="ctr" marL="0" marR="0" indent="0"/>
             <a:r>
-              <a:rPr lang="en-US" sz="4382" dirty="0" smtClean="0">
+              <a:rPr lang="en-US" sz="4382" dirty="0">
                 <a:solidFill>
                   <a:srgbClr val="000000"/>
                 </a:solidFill>
@@ -1502,7 +2599,7 @@
             <a:avLst/>
           </a:prstGeom>
           <a:effectLst>
-            <a:reflection blurRad="6350" stA="50000" endA="300" endPos="35000" dist="0" dir="5400000" sy="-100000" algn="bl" rotWithShape="0"/>
+            <a:reflection blurRad="6350" stA="50000" endA="300" endPos="35000" dir="5400000" sy="-100000" algn="bl" rotWithShape="0"/>
           </a:effectLst>
         </p:spPr>
       </p:pic>
@@ -1529,7 +2626,7 @@
             <a:avLst/>
           </a:prstGeom>
           <a:effectLst>
-            <a:reflection blurRad="6350" stA="50000" endA="300" endPos="35000" dist="0" dir="5400000" sy="-100000" algn="bl" rotWithShape="0"/>
+            <a:reflection blurRad="6350" stA="50000" endA="300" endPos="35000" dir="5400000" sy="-100000" algn="bl" rotWithShape="0"/>
           </a:effectLst>
         </p:spPr>
       </p:pic>
@@ -1556,7 +2653,7 @@
             <a:avLst/>
           </a:prstGeom>
           <a:effectLst>
-            <a:reflection blurRad="6350" stA="50000" endA="300" endPos="35000" dist="0" dir="5400000" sy="-100000" algn="bl" rotWithShape="0"/>
+            <a:reflection blurRad="6350" stA="50000" endA="300" endPos="35000" dir="5400000" sy="-100000" algn="bl" rotWithShape="0"/>
           </a:effectLst>
         </p:spPr>
       </p:pic>
@@ -1657,7 +2754,7 @@
         </p:nvPicPr>
         <p:blipFill>
           <a:blip r:embed="rId3"/>
-          <a:srcRect l="0" t="20000" r="0" b="20000"/>
+          <a:srcRect t="20000" b="20000"/>
           <a:stretch>
             <a:fillRect/>
           </a:stretch>
@@ -1682,7 +2779,7 @@
         </p:nvPicPr>
         <p:blipFill>
           <a:blip r:embed="rId4"/>
-          <a:srcRect l="15000" t="0" r="15000" b="0"/>
+          <a:srcRect l="15000" r="15000"/>
           <a:stretch>
             <a:fillRect/>
           </a:stretch>
@@ -2235,7 +3332,7 @@
             <a:avLst/>
           </a:prstGeom>
           <a:effectLst>
-            <a:blur rad="38100" grow="1"/>
+            <a:blur rad="38100"/>
           </a:effectLst>
         </p:spPr>
       </p:pic>
@@ -2262,7 +3359,7 @@
             <a:avLst/>
           </a:prstGeom>
           <a:effectLst>
-            <a:blur rad="38100" grow="1"/>
+            <a:blur rad="38100"/>
           </a:effectLst>
         </p:spPr>
       </p:pic>
@@ -2289,7 +3386,7 @@
             <a:avLst/>
           </a:prstGeom>
           <a:effectLst>
-            <a:blur rad="38100" grow="1"/>
+            <a:blur rad="38100"/>
           </a:effectLst>
         </p:spPr>
       </p:pic>
@@ -2445,7 +3542,7 @@
                 <a:alpha val="40000"/>
               </a:srgbClr>
             </a:outerShdw>
-            <a:reflection blurRad="6350" stA="50000" endA="300" endPos="35000" dist="0" dir="5400000" sy="-100000" algn="bl" rotWithShape="0"/>
+            <a:reflection blurRad="6350" stA="50000" endA="300" endPos="35000" dir="5400000" sy="-100000" algn="bl" rotWithShape="0"/>
           </a:effectLst>
         </p:spPr>
       </p:pic>
@@ -2477,7 +3574,7 @@
                 <a:alpha val="40000"/>
               </a:srgbClr>
             </a:outerShdw>
-            <a:reflection blurRad="6350" stA="50000" endA="300" endPos="35000" dist="0" dir="5400000" sy="-100000" algn="bl" rotWithShape="0"/>
+            <a:reflection blurRad="6350" stA="50000" endA="300" endPos="35000" dir="5400000" sy="-100000" algn="bl" rotWithShape="0"/>
           </a:effectLst>
         </p:spPr>
       </p:pic>
@@ -2509,7 +3606,7 @@
                 <a:alpha val="40000"/>
               </a:srgbClr>
             </a:outerShdw>
-            <a:reflection blurRad="6350" stA="50000" endA="300" endPos="35000" dist="0" dir="5400000" sy="-100000" algn="bl" rotWithShape="0"/>
+            <a:reflection blurRad="6350" stA="50000" endA="300" endPos="35000" dir="5400000" sy="-100000" algn="bl" rotWithShape="0"/>
           </a:effectLst>
         </p:spPr>
       </p:pic>
@@ -2590,15 +3687,39 @@
             <a:tbl>
               <a:tblPr firstRow="1" bandRow="1"/>
               <a:tblGrid>
-                <a:gridCol w="2000000"/>
-                <a:gridCol w="2000000"/>
-                <a:gridCol w="2000000"/>
-                <a:gridCol w="2000000"/>
+                <a:gridCol w="2000000">
+                  <a:extLst>
+                    <a:ext uri="{9D8B030D-6E8A-4147-A177-3AD203B41FA5}">
+                      <a16:colId xmlns:a16="http://schemas.microsoft.com/office/drawing/2014/main" val="20000"/>
+                    </a:ext>
+                  </a:extLst>
+                </a:gridCol>
+                <a:gridCol w="2000000">
+                  <a:extLst>
+                    <a:ext uri="{9D8B030D-6E8A-4147-A177-3AD203B41FA5}">
+                      <a16:colId xmlns:a16="http://schemas.microsoft.com/office/drawing/2014/main" val="20001"/>
+                    </a:ext>
+                  </a:extLst>
+                </a:gridCol>
+                <a:gridCol w="2000000">
+                  <a:extLst>
+                    <a:ext uri="{9D8B030D-6E8A-4147-A177-3AD203B41FA5}">
+                      <a16:colId xmlns:a16="http://schemas.microsoft.com/office/drawing/2014/main" val="20002"/>
+                    </a:ext>
+                  </a:extLst>
+                </a:gridCol>
+                <a:gridCol w="2000000">
+                  <a:extLst>
+                    <a:ext uri="{9D8B030D-6E8A-4147-A177-3AD203B41FA5}">
+                      <a16:colId xmlns:a16="http://schemas.microsoft.com/office/drawing/2014/main" val="20003"/>
+                    </a:ext>
+                  </a:extLst>
+                </a:gridCol>
               </a:tblGrid>
               <a:tr h="400000">
                 <a:tc>
                   <a:txBody>
-                    <a:bodyPr wrap="square"/>
+                    <a:bodyPr/>
                     <a:lstStyle/>
                     <a:p>
                       <a:r>
@@ -2619,13 +3740,10 @@
                 </a:tc>
                 <a:tc>
                   <a:txBody>
-                    <a:bodyPr wrap="square"/>
-                    <a:lstStyle/>
-                    <a:p>
-                      <a:r>
-                        <a:rPr lang="en-US" dirty="0"/>
-                        <a:t/>
-                      </a:r>
+                    <a:bodyPr/>
+                    <a:lstStyle/>
+                    <a:p>
+                      <a:endParaRPr lang="en-US"/>
                     </a:p>
                   </a:txBody>
                   <a:tcPr>
@@ -2636,13 +3754,10 @@
                 </a:tc>
                 <a:tc>
                   <a:txBody>
-                    <a:bodyPr wrap="square"/>
-                    <a:lstStyle/>
-                    <a:p>
-                      <a:r>
-                        <a:rPr lang="en-US" dirty="0"/>
-                        <a:t/>
-                      </a:r>
+                    <a:bodyPr/>
+                    <a:lstStyle/>
+                    <a:p>
+                      <a:endParaRPr lang="en-US"/>
                     </a:p>
                   </a:txBody>
                   <a:tcPr>
@@ -2653,13 +3768,10 @@
                 </a:tc>
                 <a:tc>
                   <a:txBody>
-                    <a:bodyPr wrap="square"/>
-                    <a:lstStyle/>
-                    <a:p>
-                      <a:r>
-                        <a:rPr lang="en-US" dirty="0"/>
-                        <a:t/>
-                      </a:r>
+                    <a:bodyPr/>
+                    <a:lstStyle/>
+                    <a:p>
+                      <a:endParaRPr lang="en-US"/>
                     </a:p>
                   </a:txBody>
                   <a:tcPr>
@@ -2668,11 +3780,16 @@
                     </a:solidFill>
                   </a:tcPr>
                 </a:tc>
+                <a:extLst>
+                  <a:ext uri="{0D108BD9-81ED-4DB2-BD59-A6C34878D82A}">
+                    <a16:rowId xmlns:a16="http://schemas.microsoft.com/office/drawing/2014/main" val="10000"/>
+                  </a:ext>
+                </a:extLst>
               </a:tr>
               <a:tr h="400000">
                 <a:tc>
                   <a:txBody>
-                    <a:bodyPr wrap="square"/>
+                    <a:bodyPr/>
                     <a:lstStyle/>
                     <a:p>
                       <a:r>
@@ -2693,7 +3810,7 @@
                 </a:tc>
                 <a:tc>
                   <a:txBody>
-                    <a:bodyPr wrap="square"/>
+                    <a:bodyPr/>
                     <a:lstStyle/>
                     <a:p>
                       <a:r>
@@ -2714,7 +3831,7 @@
                 </a:tc>
                 <a:tc>
                   <a:txBody>
-                    <a:bodyPr wrap="square"/>
+                    <a:bodyPr/>
                     <a:lstStyle/>
                     <a:p>
                       <a:r>
@@ -2735,7 +3852,7 @@
                 </a:tc>
                 <a:tc>
                   <a:txBody>
-                    <a:bodyPr wrap="square"/>
+                    <a:bodyPr/>
                     <a:lstStyle/>
                     <a:p>
                       <a:r>
@@ -2754,13 +3871,19 @@
                     </a:solidFill>
                   </a:tcPr>
                 </a:tc>
+                <a:extLst>
+                  <a:ext uri="{0D108BD9-81ED-4DB2-BD59-A6C34878D82A}">
+                    <a16:rowId xmlns:a16="http://schemas.microsoft.com/office/drawing/2014/main" val="10001"/>
+                  </a:ext>
+                </a:extLst>
               </a:tr>
               <a:tr h="400000">
                 <a:tc>
                   <a:txBody>
-                    <a:bodyPr wrap="square"/>
-                    <a:lstStyle/>
-                    <a:p algn="l">
+                    <a:bodyPr/>
+                    <a:lstStyle/>
+                    <a:p>
+                      <a:pPr algn="l"/>
                       <a:r>
                         <a:rPr lang="en-US" dirty="0">
                           <a:solidFill>
@@ -2775,9 +3898,10 @@
                 </a:tc>
                 <a:tc>
                   <a:txBody>
-                    <a:bodyPr wrap="square"/>
-                    <a:lstStyle/>
-                    <a:p algn="r">
+                    <a:bodyPr/>
+                    <a:lstStyle/>
+                    <a:p>
+                      <a:pPr algn="r"/>
                       <a:r>
                         <a:rPr lang="en-US" dirty="0">
                           <a:solidFill>
@@ -2792,9 +3916,10 @@
                 </a:tc>
                 <a:tc>
                   <a:txBody>
-                    <a:bodyPr wrap="square"/>
-                    <a:lstStyle/>
-                    <a:p algn="r">
+                    <a:bodyPr/>
+                    <a:lstStyle/>
+                    <a:p>
+                      <a:pPr algn="r"/>
                       <a:r>
                         <a:rPr lang="en-US" dirty="0">
                           <a:solidFill>
@@ -2809,9 +3934,10 @@
                 </a:tc>
                 <a:tc>
                   <a:txBody>
-                    <a:bodyPr wrap="square"/>
-                    <a:lstStyle/>
-                    <a:p algn="r">
+                    <a:bodyPr/>
+                    <a:lstStyle/>
+                    <a:p>
+                      <a:pPr algn="r"/>
                       <a:r>
                         <a:rPr lang="en-US" dirty="0" b="1">
                           <a:solidFill>
@@ -2824,13 +3950,19 @@
                   </a:txBody>
                   <a:tcPr/>
                 </a:tc>
+                <a:extLst>
+                  <a:ext uri="{0D108BD9-81ED-4DB2-BD59-A6C34878D82A}">
+                    <a16:rowId xmlns:a16="http://schemas.microsoft.com/office/drawing/2014/main" val="10002"/>
+                  </a:ext>
+                </a:extLst>
               </a:tr>
               <a:tr h="400000">
                 <a:tc>
                   <a:txBody>
-                    <a:bodyPr wrap="square"/>
-                    <a:lstStyle/>
-                    <a:p algn="l">
+                    <a:bodyPr/>
+                    <a:lstStyle/>
+                    <a:p>
+                      <a:pPr algn="l"/>
                       <a:r>
                         <a:rPr lang="en-US" dirty="0">
                           <a:solidFill>
@@ -2845,9 +3977,10 @@
                 </a:tc>
                 <a:tc>
                   <a:txBody>
-                    <a:bodyPr wrap="square"/>
-                    <a:lstStyle/>
-                    <a:p algn="r">
+                    <a:bodyPr/>
+                    <a:lstStyle/>
+                    <a:p>
+                      <a:pPr algn="r"/>
                       <a:r>
                         <a:rPr lang="en-US" dirty="0">
                           <a:solidFill>
@@ -2862,9 +3995,10 @@
                 </a:tc>
                 <a:tc>
                   <a:txBody>
-                    <a:bodyPr wrap="square"/>
-                    <a:lstStyle/>
-                    <a:p algn="r">
+                    <a:bodyPr/>
+                    <a:lstStyle/>
+                    <a:p>
+                      <a:pPr algn="r"/>
                       <a:r>
                         <a:rPr lang="en-US" dirty="0">
                           <a:solidFill>
@@ -2879,9 +4013,10 @@
                 </a:tc>
                 <a:tc>
                   <a:txBody>
-                    <a:bodyPr wrap="square"/>
-                    <a:lstStyle/>
-                    <a:p algn="r">
+                    <a:bodyPr/>
+                    <a:lstStyle/>
+                    <a:p>
+                      <a:pPr algn="r"/>
                       <a:r>
                         <a:rPr lang="en-US" dirty="0" b="1">
                           <a:solidFill>
@@ -2894,13 +4029,19 @@
                   </a:txBody>
                   <a:tcPr/>
                 </a:tc>
+                <a:extLst>
+                  <a:ext uri="{0D108BD9-81ED-4DB2-BD59-A6C34878D82A}">
+                    <a16:rowId xmlns:a16="http://schemas.microsoft.com/office/drawing/2014/main" val="10003"/>
+                  </a:ext>
+                </a:extLst>
               </a:tr>
               <a:tr h="400000">
                 <a:tc>
                   <a:txBody>
-                    <a:bodyPr wrap="square"/>
-                    <a:lstStyle/>
-                    <a:p algn="l">
+                    <a:bodyPr/>
+                    <a:lstStyle/>
+                    <a:p>
+                      <a:pPr algn="l"/>
                       <a:r>
                         <a:rPr lang="en-US" dirty="0" b="1">
                           <a:solidFill>
@@ -2919,9 +4060,10 @@
                 </a:tc>
                 <a:tc>
                   <a:txBody>
-                    <a:bodyPr wrap="square"/>
-                    <a:lstStyle/>
-                    <a:p algn="r">
+                    <a:bodyPr/>
+                    <a:lstStyle/>
+                    <a:p>
+                      <a:pPr algn="r"/>
                       <a:r>
                         <a:rPr lang="en-US" dirty="0" b="1">
                           <a:solidFill>
@@ -2940,9 +4082,10 @@
                 </a:tc>
                 <a:tc>
                   <a:txBody>
-                    <a:bodyPr wrap="square"/>
-                    <a:lstStyle/>
-                    <a:p algn="r">
+                    <a:bodyPr/>
+                    <a:lstStyle/>
+                    <a:p>
+                      <a:pPr algn="r"/>
                       <a:r>
                         <a:rPr lang="en-US" dirty="0" b="1">
                           <a:solidFill>
@@ -2961,9 +4104,10 @@
                 </a:tc>
                 <a:tc>
                   <a:txBody>
-                    <a:bodyPr wrap="square"/>
-                    <a:lstStyle/>
-                    <a:p algn="r">
+                    <a:bodyPr/>
+                    <a:lstStyle/>
+                    <a:p>
+                      <a:pPr algn="r"/>
                       <a:r>
                         <a:rPr lang="en-US" dirty="0" b="1">
                           <a:solidFill>
@@ -2980,6 +4124,11 @@
                     </a:solidFill>
                   </a:tcPr>
                 </a:tc>
+                <a:extLst>
+                  <a:ext uri="{0D108BD9-81ED-4DB2-BD59-A6C34878D82A}">
+                    <a16:rowId xmlns:a16="http://schemas.microsoft.com/office/drawing/2014/main" val="10004"/>
+                  </a:ext>
+                </a:extLst>
               </a:tr>
             </a:tbl>
           </a:graphicData>
@@ -3062,15 +4211,39 @@
             <a:tbl>
               <a:tblPr firstRow="1" bandRow="1"/>
               <a:tblGrid>
-                <a:gridCol w="2000000"/>
-                <a:gridCol w="1500000"/>
-                <a:gridCol w="1500000"/>
-                <a:gridCol w="1500000"/>
+                <a:gridCol w="2000000">
+                  <a:extLst>
+                    <a:ext uri="{9D8B030D-6E8A-4147-A177-3AD203B41FA5}">
+                      <a16:colId xmlns:a16="http://schemas.microsoft.com/office/drawing/2014/main" val="20000"/>
+                    </a:ext>
+                  </a:extLst>
+                </a:gridCol>
+                <a:gridCol w="1500000">
+                  <a:extLst>
+                    <a:ext uri="{9D8B030D-6E8A-4147-A177-3AD203B41FA5}">
+                      <a16:colId xmlns:a16="http://schemas.microsoft.com/office/drawing/2014/main" val="20001"/>
+                    </a:ext>
+                  </a:extLst>
+                </a:gridCol>
+                <a:gridCol w="1500000">
+                  <a:extLst>
+                    <a:ext uri="{9D8B030D-6E8A-4147-A177-3AD203B41FA5}">
+                      <a16:colId xmlns:a16="http://schemas.microsoft.com/office/drawing/2014/main" val="20002"/>
+                    </a:ext>
+                  </a:extLst>
+                </a:gridCol>
+                <a:gridCol w="1500000">
+                  <a:extLst>
+                    <a:ext uri="{9D8B030D-6E8A-4147-A177-3AD203B41FA5}">
+                      <a16:colId xmlns:a16="http://schemas.microsoft.com/office/drawing/2014/main" val="20003"/>
+                    </a:ext>
+                  </a:extLst>
+                </a:gridCol>
               </a:tblGrid>
               <a:tr h="400000">
                 <a:tc>
                   <a:txBody>
-                    <a:bodyPr wrap="square"/>
+                    <a:bodyPr/>
                     <a:lstStyle/>
                     <a:p>
                       <a:r>
@@ -3091,7 +4264,7 @@
                 </a:tc>
                 <a:tc>
                   <a:txBody>
-                    <a:bodyPr wrap="square"/>
+                    <a:bodyPr/>
                     <a:lstStyle/>
                     <a:p>
                       <a:r>
@@ -3112,7 +4285,7 @@
                 </a:tc>
                 <a:tc>
                   <a:txBody>
-                    <a:bodyPr wrap="square"/>
+                    <a:bodyPr/>
                     <a:lstStyle/>
                     <a:p>
                       <a:r>
@@ -3133,7 +4306,7 @@
                 </a:tc>
                 <a:tc>
                   <a:txBody>
-                    <a:bodyPr wrap="square"/>
+                    <a:bodyPr/>
                     <a:lstStyle/>
                     <a:p>
                       <a:r>
@@ -3152,11 +4325,16 @@
                     </a:solidFill>
                   </a:tcPr>
                 </a:tc>
+                <a:extLst>
+                  <a:ext uri="{0D108BD9-81ED-4DB2-BD59-A6C34878D82A}">
+                    <a16:rowId xmlns:a16="http://schemas.microsoft.com/office/drawing/2014/main" val="10000"/>
+                  </a:ext>
+                </a:extLst>
               </a:tr>
               <a:tr h="400000">
                 <a:tc>
                   <a:txBody>
-                    <a:bodyPr wrap="square"/>
+                    <a:bodyPr/>
                     <a:lstStyle/>
                     <a:p>
                       <a:r>
@@ -3173,7 +4351,7 @@
                 </a:tc>
                 <a:tc>
                   <a:txBody>
-                    <a:bodyPr wrap="square"/>
+                    <a:bodyPr/>
                     <a:lstStyle/>
                     <a:p>
                       <a:r>
@@ -3190,7 +4368,7 @@
                 </a:tc>
                 <a:tc>
                   <a:txBody>
-                    <a:bodyPr wrap="square"/>
+                    <a:bodyPr/>
                     <a:lstStyle/>
                     <a:p>
                       <a:r>
@@ -3207,7 +4385,7 @@
                 </a:tc>
                 <a:tc>
                   <a:txBody>
-                    <a:bodyPr wrap="square"/>
+                    <a:bodyPr/>
                     <a:lstStyle/>
                     <a:p>
                       <a:r>
@@ -3222,11 +4400,16 @@
                   </a:txBody>
                   <a:tcPr/>
                 </a:tc>
+                <a:extLst>
+                  <a:ext uri="{0D108BD9-81ED-4DB2-BD59-A6C34878D82A}">
+                    <a16:rowId xmlns:a16="http://schemas.microsoft.com/office/drawing/2014/main" val="10001"/>
+                  </a:ext>
+                </a:extLst>
               </a:tr>
               <a:tr h="400000">
                 <a:tc>
                   <a:txBody>
-                    <a:bodyPr wrap="square"/>
+                    <a:bodyPr/>
                     <a:lstStyle/>
                     <a:p>
                       <a:r>
@@ -3243,7 +4426,7 @@
                 </a:tc>
                 <a:tc>
                   <a:txBody>
-                    <a:bodyPr wrap="square"/>
+                    <a:bodyPr/>
                     <a:lstStyle/>
                     <a:p>
                       <a:r>
@@ -3260,7 +4443,7 @@
                 </a:tc>
                 <a:tc>
                   <a:txBody>
-                    <a:bodyPr wrap="square"/>
+                    <a:bodyPr/>
                     <a:lstStyle/>
                     <a:p>
                       <a:r>
@@ -3277,7 +4460,7 @@
                 </a:tc>
                 <a:tc>
                   <a:txBody>
-                    <a:bodyPr wrap="square"/>
+                    <a:bodyPr/>
                     <a:lstStyle/>
                     <a:p>
                       <a:r>
@@ -3292,11 +4475,16 @@
                   </a:txBody>
                   <a:tcPr/>
                 </a:tc>
+                <a:extLst>
+                  <a:ext uri="{0D108BD9-81ED-4DB2-BD59-A6C34878D82A}">
+                    <a16:rowId xmlns:a16="http://schemas.microsoft.com/office/drawing/2014/main" val="10002"/>
+                  </a:ext>
+                </a:extLst>
               </a:tr>
               <a:tr h="400000">
                 <a:tc>
                   <a:txBody>
-                    <a:bodyPr wrap="square"/>
+                    <a:bodyPr/>
                     <a:lstStyle/>
                     <a:p>
                       <a:r>
@@ -3313,7 +4501,7 @@
                 </a:tc>
                 <a:tc>
                   <a:txBody>
-                    <a:bodyPr wrap="square"/>
+                    <a:bodyPr/>
                     <a:lstStyle/>
                     <a:p>
                       <a:r>
@@ -3330,7 +4518,7 @@
                 </a:tc>
                 <a:tc>
                   <a:txBody>
-                    <a:bodyPr wrap="square"/>
+                    <a:bodyPr/>
                     <a:lstStyle/>
                     <a:p>
                       <a:r>
@@ -3347,7 +4535,7 @@
                 </a:tc>
                 <a:tc>
                   <a:txBody>
-                    <a:bodyPr wrap="square"/>
+                    <a:bodyPr/>
                     <a:lstStyle/>
                     <a:p>
                       <a:r>
@@ -3362,11 +4550,16 @@
                   </a:txBody>
                   <a:tcPr/>
                 </a:tc>
+                <a:extLst>
+                  <a:ext uri="{0D108BD9-81ED-4DB2-BD59-A6C34878D82A}">
+                    <a16:rowId xmlns:a16="http://schemas.microsoft.com/office/drawing/2014/main" val="10003"/>
+                  </a:ext>
+                </a:extLst>
               </a:tr>
               <a:tr h="400000">
                 <a:tc>
                   <a:txBody>
-                    <a:bodyPr wrap="square"/>
+                    <a:bodyPr/>
                     <a:lstStyle/>
                     <a:p>
                       <a:r>
@@ -3383,7 +4576,7 @@
                 </a:tc>
                 <a:tc>
                   <a:txBody>
-                    <a:bodyPr wrap="square"/>
+                    <a:bodyPr/>
                     <a:lstStyle/>
                     <a:p>
                       <a:r>
@@ -3400,7 +4593,7 @@
                 </a:tc>
                 <a:tc>
                   <a:txBody>
-                    <a:bodyPr wrap="square"/>
+                    <a:bodyPr/>
                     <a:lstStyle/>
                     <a:p>
                       <a:r>
@@ -3417,7 +4610,7 @@
                 </a:tc>
                 <a:tc>
                   <a:txBody>
-                    <a:bodyPr wrap="square"/>
+                    <a:bodyPr/>
                     <a:lstStyle/>
                     <a:p>
                       <a:r>
@@ -3432,11 +4625,16 @@
                   </a:txBody>
                   <a:tcPr/>
                 </a:tc>
+                <a:extLst>
+                  <a:ext uri="{0D108BD9-81ED-4DB2-BD59-A6C34878D82A}">
+                    <a16:rowId xmlns:a16="http://schemas.microsoft.com/office/drawing/2014/main" val="10004"/>
+                  </a:ext>
+                </a:extLst>
               </a:tr>
               <a:tr h="400000">
                 <a:tc>
                   <a:txBody>
-                    <a:bodyPr wrap="square"/>
+                    <a:bodyPr/>
                     <a:lstStyle/>
                     <a:p>
                       <a:r>
@@ -3457,7 +4655,7 @@
                 </a:tc>
                 <a:tc>
                   <a:txBody>
-                    <a:bodyPr wrap="square"/>
+                    <a:bodyPr/>
                     <a:lstStyle/>
                     <a:p>
                       <a:r>
@@ -3478,7 +4676,7 @@
                 </a:tc>
                 <a:tc>
                   <a:txBody>
-                    <a:bodyPr wrap="square"/>
+                    <a:bodyPr/>
                     <a:lstStyle/>
                     <a:p>
                       <a:r>
@@ -3499,7 +4697,7 @@
                 </a:tc>
                 <a:tc>
                   <a:txBody>
-                    <a:bodyPr wrap="square"/>
+                    <a:bodyPr/>
                     <a:lstStyle/>
                     <a:p>
                       <a:r>
@@ -3518,6 +4716,11 @@
                     </a:solidFill>
                   </a:tcPr>
                 </a:tc>
+                <a:extLst>
+                  <a:ext uri="{0D108BD9-81ED-4DB2-BD59-A6C34878D82A}">
+                    <a16:rowId xmlns:a16="http://schemas.microsoft.com/office/drawing/2014/main" val="10005"/>
+                  </a:ext>
+                </a:extLst>
               </a:tr>
             </a:tbl>
           </a:graphicData>
@@ -3605,13 +4808,13 @@
         </p:spPr>
         <p:txBody>
           <a:bodyPr wrap="square" rtlCol="0" anchor="ctr" lIns="91440" tIns="45720" rIns="91440" bIns="45720">
-            <a:normAutofit fontScale="100000" lnSpcReduction="0"/>
+            <a:normAutofit/>
           </a:bodyPr>
           <a:lstStyle/>
           <a:p>
             <a:pPr algn="ctr" marL="0" marR="0" indent="0"/>
             <a:r>
-              <a:rPr lang="en-US" sz="1701" dirty="0" smtClean="0">
+              <a:rPr lang="en-US" sz="1701" dirty="0">
                 <a:solidFill>
                   <a:srgbClr val="FFFFFF"/>
                 </a:solidFill>
@@ -3642,7 +4845,9 @@
         <p:txBody>
           <a:bodyPr/>
           <a:lstStyle/>
-          <a:p/>
+          <a:p>
+            <a:endParaRPr/>
+          </a:p>
         </p:txBody>
       </p:sp>
       <p:sp>
@@ -3665,13 +4870,13 @@
         </p:spPr>
         <p:txBody>
           <a:bodyPr wrap="square" rtlCol="0" anchor="ctr" lIns="91440" tIns="45720" rIns="91440" bIns="45720">
-            <a:normAutofit fontScale="100000" lnSpcReduction="0"/>
+            <a:normAutofit/>
           </a:bodyPr>
           <a:lstStyle/>
           <a:p>
             <a:pPr algn="ctr" marL="0" marR="0" indent="0"/>
             <a:r>
-              <a:rPr lang="en-US" sz="2079" dirty="0" smtClean="0">
+              <a:rPr lang="en-US" sz="2079" dirty="0">
                 <a:solidFill>
                   <a:srgbClr val="000000"/>
                 </a:solidFill>
@@ -3702,7 +4907,9 @@
         <p:txBody>
           <a:bodyPr/>
           <a:lstStyle/>
-          <a:p/>
+          <a:p>
+            <a:endParaRPr/>
+          </a:p>
         </p:txBody>
       </p:sp>
       <p:sp>
@@ -3725,13 +4932,13 @@
         </p:spPr>
         <p:txBody>
           <a:bodyPr wrap="square" rtlCol="0" anchor="ctr" lIns="91440" tIns="45720" rIns="91440" bIns="45720">
-            <a:normAutofit fontScale="100000" lnSpcReduction="0"/>
+            <a:normAutofit/>
           </a:bodyPr>
           <a:lstStyle/>
           <a:p>
             <a:pPr algn="ctr" marL="0" marR="0" indent="0"/>
             <a:r>
-              <a:rPr lang="en-US" sz="1872" dirty="0" smtClean="0">
+              <a:rPr lang="en-US" sz="1872" dirty="0">
                 <a:solidFill>
                   <a:srgbClr val="000000"/>
                 </a:solidFill>
@@ -3762,7 +4969,9 @@
         <p:txBody>
           <a:bodyPr/>
           <a:lstStyle/>
-          <a:p/>
+          <a:p>
+            <a:endParaRPr/>
+          </a:p>
         </p:txBody>
       </p:sp>
       <p:sp>
@@ -3785,13 +4994,13 @@
         </p:spPr>
         <p:txBody>
           <a:bodyPr wrap="square" rtlCol="0" anchor="ctr" lIns="91440" tIns="45720" rIns="91440" bIns="45720">
-            <a:normAutofit fontScale="100000" lnSpcReduction="0"/>
+            <a:normAutofit/>
           </a:bodyPr>
           <a:lstStyle/>
           <a:p>
             <a:pPr algn="ctr" marL="0" marR="0" indent="0"/>
             <a:r>
-              <a:rPr lang="en-US" sz="2079" dirty="0" smtClean="0">
+              <a:rPr lang="en-US" sz="2079" dirty="0">
                 <a:solidFill>
                   <a:srgbClr val="000000"/>
                 </a:solidFill>
@@ -3883,13 +5092,13 @@
         </p:spPr>
         <p:txBody>
           <a:bodyPr wrap="square" rtlCol="0" anchor="ctr" lIns="91440" tIns="45720" rIns="91440" bIns="45720">
-            <a:normAutofit fontScale="100000" lnSpcReduction="0"/>
+            <a:normAutofit/>
           </a:bodyPr>
           <a:lstStyle/>
           <a:p>
             <a:pPr algn="ctr" marL="0" marR="0" indent="0"/>
             <a:r>
-              <a:rPr lang="en-US" sz="3130" dirty="0" smtClean="0">
+              <a:rPr lang="en-US" sz="3130" dirty="0">
                 <a:solidFill>
                   <a:srgbClr val="FFFFFF"/>
                 </a:solidFill>
@@ -3920,7 +5129,9 @@
         <p:txBody>
           <a:bodyPr/>
           <a:lstStyle/>
-          <a:p/>
+          <a:p>
+            <a:endParaRPr/>
+          </a:p>
         </p:txBody>
       </p:sp>
       <p:sp>
@@ -3944,7 +5155,9 @@
         <p:txBody>
           <a:bodyPr/>
           <a:lstStyle/>
-          <a:p/>
+          <a:p>
+            <a:endParaRPr/>
+          </a:p>
         </p:txBody>
       </p:sp>
       <p:sp>
@@ -3967,13 +5180,13 @@
         </p:spPr>
         <p:txBody>
           <a:bodyPr wrap="square" rtlCol="0" anchor="ctr" lIns="91440" tIns="45720" rIns="91440" bIns="45720">
-            <a:normAutofit fontScale="100000" lnSpcReduction="0"/>
+            <a:normAutofit/>
           </a:bodyPr>
           <a:lstStyle/>
           <a:p>
             <a:pPr algn="ctr" marL="0" marR="0" indent="0"/>
             <a:r>
-              <a:rPr lang="en-US" sz="1878" dirty="0" smtClean="0">
+              <a:rPr lang="en-US" sz="1878" dirty="0">
                 <a:solidFill>
                   <a:srgbClr val="FFFFFF"/>
                 </a:solidFill>
@@ -4003,13 +5216,13 @@
         </p:spPr>
         <p:txBody>
           <a:bodyPr wrap="square" rtlCol="0" anchor="ctr" lIns="91440" tIns="45720" rIns="91440" bIns="45720">
-            <a:normAutofit fontScale="100000" lnSpcReduction="0"/>
+            <a:normAutofit/>
           </a:bodyPr>
           <a:lstStyle/>
           <a:p>
             <a:pPr algn="ctr" marL="0" marR="0" indent="0"/>
             <a:r>
-              <a:rPr lang="en-US" sz="1878" dirty="0" smtClean="0">
+              <a:rPr lang="en-US" sz="1878" dirty="0">
                 <a:solidFill>
                   <a:srgbClr val="FFFFFF"/>
                 </a:solidFill>
@@ -4039,13 +5252,13 @@
         </p:spPr>
         <p:txBody>
           <a:bodyPr wrap="square" rtlCol="0" anchor="ctr" lIns="91440" tIns="45720" rIns="91440" bIns="45720">
-            <a:normAutofit fontScale="100000" lnSpcReduction="0"/>
+            <a:normAutofit/>
           </a:bodyPr>
           <a:lstStyle/>
           <a:p>
             <a:pPr algn="ctr" marL="0" marR="0" indent="0"/>
             <a:r>
-              <a:rPr lang="en-US" sz="1878" dirty="0" smtClean="0">
+              <a:rPr lang="en-US" sz="1878" dirty="0">
                 <a:solidFill>
                   <a:srgbClr val="FFFFFF"/>
                 </a:solidFill>
@@ -4076,7 +5289,9 @@
         <p:txBody>
           <a:bodyPr/>
           <a:lstStyle/>
-          <a:p/>
+          <a:p>
+            <a:endParaRPr/>
+          </a:p>
         </p:txBody>
       </p:sp>
       <p:sp>
@@ -4100,7 +5315,9 @@
         <p:txBody>
           <a:bodyPr/>
           <a:lstStyle/>
-          <a:p/>
+          <a:p>
+            <a:endParaRPr/>
+          </a:p>
         </p:txBody>
       </p:sp>
       <p:sp>
@@ -4124,7 +5341,9 @@
         <p:txBody>
           <a:bodyPr/>
           <a:lstStyle/>
-          <a:p/>
+          <a:p>
+            <a:endParaRPr/>
+          </a:p>
         </p:txBody>
       </p:sp>
       <p:sp>
@@ -4147,13 +5366,13 @@
         </p:spPr>
         <p:txBody>
           <a:bodyPr wrap="square" rtlCol="0" anchor="ctr" lIns="91440" tIns="45720" rIns="91440" bIns="45720">
-            <a:normAutofit fontScale="100000" lnSpcReduction="0"/>
+            <a:normAutofit/>
           </a:bodyPr>
           <a:lstStyle/>
           <a:p>
             <a:pPr algn="ctr" marL="0" marR="0" indent="0"/>
             <a:r>
-              <a:rPr lang="en-US" sz="1252" dirty="0" smtClean="0">
+              <a:rPr lang="en-US" sz="1252" dirty="0">
                 <a:solidFill>
                   <a:srgbClr val="000000"/>
                 </a:solidFill>
@@ -4183,13 +5402,13 @@
         </p:spPr>
         <p:txBody>
           <a:bodyPr wrap="square" rtlCol="0" anchor="ctr" lIns="91440" tIns="45720" rIns="91440" bIns="45720">
-            <a:normAutofit fontScale="100000" lnSpcReduction="0"/>
+            <a:normAutofit/>
           </a:bodyPr>
           <a:lstStyle/>
           <a:p>
             <a:pPr algn="ctr" marL="0" marR="0" indent="0"/>
             <a:r>
-              <a:rPr lang="en-US" sz="1252" dirty="0" smtClean="0">
+              <a:rPr lang="en-US" sz="1252" dirty="0">
                 <a:solidFill>
                   <a:srgbClr val="000000"/>
                 </a:solidFill>
@@ -4281,13 +5500,13 @@
         </p:spPr>
         <p:txBody>
           <a:bodyPr wrap="square" rtlCol="0" anchor="t" lIns="91440" tIns="45720" rIns="91440" bIns="45720">
-            <a:normAutofit fontScale="100000" lnSpcReduction="0"/>
+            <a:normAutofit/>
           </a:bodyPr>
           <a:lstStyle/>
           <a:p>
             <a:pPr algn="l" marL="0" marR="0" indent="0"/>
             <a:r>
-              <a:rPr lang="en-US" sz="2191" dirty="0" smtClean="0">
+              <a:rPr lang="en-US" sz="2191" dirty="0">
                 <a:solidFill>
                   <a:srgbClr val="FFFFFF"/>
                 </a:solidFill>
@@ -4319,13 +5538,13 @@
         </p:spPr>
         <p:txBody>
           <a:bodyPr wrap="square" rtlCol="0" anchor="t" lIns="91440" tIns="45720" rIns="91440" bIns="45720">
-            <a:normAutofit fontScale="100000" lnSpcReduction="0"/>
+            <a:normAutofit/>
           </a:bodyPr>
           <a:lstStyle/>
           <a:p>
             <a:pPr algn="l" marL="0" marR="0" indent="0"/>
             <a:r>
-              <a:rPr lang="en-US" sz="2191" dirty="0" smtClean="0">
+              <a:rPr lang="en-US" sz="2191" dirty="0">
                 <a:solidFill>
                   <a:srgbClr val="000000"/>
                 </a:solidFill>
@@ -4357,13 +5576,13 @@
         </p:spPr>
         <p:txBody>
           <a:bodyPr wrap="square" rtlCol="0" anchor="t" lIns="91440" tIns="45720" rIns="91440" bIns="45720">
-            <a:normAutofit fontScale="100000" lnSpcReduction="0"/>
+            <a:normAutofit/>
           </a:bodyPr>
           <a:lstStyle/>
           <a:p>
             <a:pPr algn="l" marL="0" marR="0" indent="0"/>
             <a:r>
-              <a:rPr lang="en-US" sz="2191" dirty="0" smtClean="0">
+              <a:rPr lang="en-US" sz="2191" dirty="0">
                 <a:solidFill>
                   <a:srgbClr val="000000"/>
                 </a:solidFill>
@@ -4395,13 +5614,13 @@
         </p:spPr>
         <p:txBody>
           <a:bodyPr wrap="square" rtlCol="0" anchor="t" lIns="91440" tIns="45720" rIns="91440" bIns="45720">
-            <a:normAutofit fontScale="100000" lnSpcReduction="0"/>
+            <a:normAutofit/>
           </a:bodyPr>
           <a:lstStyle/>
           <a:p>
             <a:pPr algn="l" marL="0" marR="0" indent="0"/>
             <a:r>
-              <a:rPr lang="en-US" sz="2191" dirty="0" smtClean="0">
+              <a:rPr lang="en-US" sz="2191" dirty="0">
                 <a:solidFill>
                   <a:srgbClr val="000000"/>
                 </a:solidFill>
@@ -4434,7 +5653,9 @@
         <p:txBody>
           <a:bodyPr/>
           <a:lstStyle/>
-          <a:p/>
+          <a:p>
+            <a:endParaRPr/>
+          </a:p>
         </p:txBody>
       </p:sp>
       <p:sp>
@@ -4458,7 +5679,9 @@
         <p:txBody>
           <a:bodyPr/>
           <a:lstStyle/>
-          <a:p/>
+          <a:p>
+            <a:endParaRPr/>
+          </a:p>
         </p:txBody>
       </p:sp>
       <p:sp>
@@ -4482,7 +5705,9 @@
         <p:txBody>
           <a:bodyPr/>
           <a:lstStyle/>
-          <a:p/>
+          <a:p>
+            <a:endParaRPr/>
+          </a:p>
         </p:txBody>
       </p:sp>
       <p:sp>
@@ -4506,7 +5731,9 @@
         <p:txBody>
           <a:bodyPr/>
           <a:lstStyle/>
-          <a:p/>
+          <a:p>
+            <a:endParaRPr/>
+          </a:p>
         </p:txBody>
       </p:sp>
     </p:spTree>
@@ -4591,13 +5818,13 @@
         </p:spPr>
         <p:txBody>
           <a:bodyPr wrap="square" rtlCol="0" anchor="ctr" lIns="91440" tIns="45720" rIns="91440" bIns="45720">
-            <a:normAutofit fontScale="100000" lnSpcReduction="0"/>
+            <a:normAutofit/>
           </a:bodyPr>
           <a:lstStyle/>
           <a:p>
             <a:pPr algn="ctr" marL="0" marR="0" indent="0"/>
             <a:r>
-              <a:rPr lang="en-US" sz="2608" dirty="0" smtClean="0">
+              <a:rPr lang="en-US" sz="2608" dirty="0">
                 <a:solidFill>
                   <a:srgbClr val="FFFFFF"/>
                 </a:solidFill>
@@ -4627,13 +5854,13 @@
         </p:spPr>
         <p:txBody>
           <a:bodyPr wrap="square" rtlCol="0" anchor="ctr" lIns="91440" tIns="45720" rIns="91440" bIns="45720">
-            <a:normAutofit fontScale="100000" lnSpcReduction="0"/>
+            <a:normAutofit/>
           </a:bodyPr>
           <a:lstStyle/>
           <a:p>
             <a:pPr algn="ctr" marL="0" marR="0" indent="0"/>
             <a:r>
-              <a:rPr lang="en-US" sz="2608" dirty="0" smtClean="0">
+              <a:rPr lang="en-US" sz="2608" dirty="0">
                 <a:solidFill>
                   <a:srgbClr val="000000"/>
                 </a:solidFill>
@@ -4663,13 +5890,13 @@
         </p:spPr>
         <p:txBody>
           <a:bodyPr wrap="square" rtlCol="0" anchor="ctr" lIns="91440" tIns="45720" rIns="91440" bIns="45720">
-            <a:normAutofit fontScale="100000" lnSpcReduction="0"/>
+            <a:normAutofit/>
           </a:bodyPr>
           <a:lstStyle/>
           <a:p>
             <a:pPr algn="ctr" marL="0" marR="0" indent="0"/>
             <a:r>
-              <a:rPr lang="en-US" sz="2608" dirty="0" smtClean="0">
+              <a:rPr lang="en-US" sz="2608" dirty="0">
                 <a:solidFill>
                   <a:srgbClr val="000000"/>
                 </a:solidFill>
@@ -4699,13 +5926,13 @@
         </p:spPr>
         <p:txBody>
           <a:bodyPr wrap="square" rtlCol="0" anchor="ctr" lIns="91440" tIns="45720" rIns="91440" bIns="45720">
-            <a:normAutofit fontScale="100000" lnSpcReduction="0"/>
+            <a:normAutofit/>
           </a:bodyPr>
           <a:lstStyle/>
           <a:p>
             <a:pPr algn="ctr" marL="0" marR="0" indent="0"/>
             <a:r>
-              <a:rPr lang="en-US" sz="2631" dirty="0" smtClean="0">
+              <a:rPr lang="en-US" sz="2631" dirty="0">
                 <a:solidFill>
                   <a:srgbClr val="000000"/>
                 </a:solidFill>
@@ -4735,13 +5962,13 @@
         </p:spPr>
         <p:txBody>
           <a:bodyPr wrap="square" rtlCol="0" anchor="ctr" lIns="91440" tIns="45720" rIns="91440" bIns="45720">
-            <a:normAutofit fontScale="100000" lnSpcReduction="0"/>
+            <a:normAutofit/>
           </a:bodyPr>
           <a:lstStyle/>
           <a:p>
             <a:pPr algn="ctr" marL="0" marR="0" indent="0"/>
             <a:r>
-              <a:rPr lang="en-US" sz="3360" dirty="0" smtClean="0">
+              <a:rPr lang="en-US" sz="3360" dirty="0">
                 <a:solidFill>
                   <a:srgbClr val="FFFFFF"/>
                 </a:solidFill>
@@ -4833,13 +6060,13 @@
         </p:spPr>
         <p:txBody>
           <a:bodyPr wrap="square" rtlCol="0" anchor="ctr" lIns="91440" tIns="45720" rIns="91440" bIns="45720">
-            <a:normAutofit fontScale="100000" lnSpcReduction="0"/>
+            <a:normAutofit/>
           </a:bodyPr>
           <a:lstStyle/>
           <a:p>
             <a:pPr algn="ctr" marL="0" marR="0" indent="0"/>
             <a:r>
-              <a:rPr lang="en-US" sz="7200" dirty="0" smtClean="0">
+              <a:rPr lang="en-US" sz="7200" dirty="0">
                 <a:solidFill>
                   <a:srgbClr val="FFFFFF"/>
                 </a:solidFill>
@@ -4869,13 +6096,13 @@
         </p:spPr>
         <p:txBody>
           <a:bodyPr wrap="square" rtlCol="0" anchor="ctr" lIns="91440" tIns="45720" rIns="91440" bIns="45720">
-            <a:normAutofit fontScale="100000" lnSpcReduction="0"/>
+            <a:normAutofit/>
           </a:bodyPr>
           <a:lstStyle/>
           <a:p>
             <a:pPr algn="ctr" marL="0" marR="0" indent="0"/>
             <a:r>
-              <a:rPr lang="en-US" sz="6377" dirty="0" smtClean="0">
+              <a:rPr lang="en-US" sz="6377" dirty="0">
                 <a:solidFill>
                   <a:srgbClr val="000000"/>
                 </a:solidFill>
@@ -4905,13 +6132,13 @@
         </p:spPr>
         <p:txBody>
           <a:bodyPr wrap="square" rtlCol="0" anchor="ctr" lIns="91440" tIns="45720" rIns="91440" bIns="45720">
-            <a:normAutofit fontScale="100000" lnSpcReduction="0"/>
+            <a:normAutofit/>
           </a:bodyPr>
           <a:lstStyle/>
           <a:p>
             <a:pPr algn="ctr" marL="0" marR="0" indent="0"/>
             <a:r>
-              <a:rPr lang="en-US" sz="4058" dirty="0" smtClean="0">
+              <a:rPr lang="en-US" sz="4058" dirty="0">
                 <a:solidFill>
                   <a:srgbClr val="000000"/>
                 </a:solidFill>
@@ -4941,13 +6168,13 @@
         </p:spPr>
         <p:txBody>
           <a:bodyPr wrap="square" rtlCol="0" anchor="ctr" lIns="91440" tIns="45720" rIns="91440" bIns="45720">
-            <a:normAutofit fontScale="100000" lnSpcReduction="0"/>
+            <a:normAutofit/>
           </a:bodyPr>
           <a:lstStyle/>
           <a:p>
             <a:pPr algn="ctr" marL="0" marR="0" indent="0"/>
             <a:r>
-              <a:rPr lang="en-US" sz="3719" dirty="0" smtClean="0">
+              <a:rPr lang="en-US" sz="3719" dirty="0">
                 <a:solidFill>
                   <a:srgbClr val="000000"/>
                 </a:solidFill>
@@ -5034,16 +6261,46 @@
             <a:tbl>
               <a:tblPr firstRow="1" bandRow="1"/>
               <a:tblGrid>
-                <a:gridCol w="1500000"/>
-                <a:gridCol w="1500000"/>
-                <a:gridCol w="1500000"/>
-                <a:gridCol w="1500000"/>
-                <a:gridCol w="1500000"/>
+                <a:gridCol w="1500000">
+                  <a:extLst>
+                    <a:ext uri="{9D8B030D-6E8A-4147-A177-3AD203B41FA5}">
+                      <a16:colId xmlns:a16="http://schemas.microsoft.com/office/drawing/2014/main" val="20000"/>
+                    </a:ext>
+                  </a:extLst>
+                </a:gridCol>
+                <a:gridCol w="1500000">
+                  <a:extLst>
+                    <a:ext uri="{9D8B030D-6E8A-4147-A177-3AD203B41FA5}">
+                      <a16:colId xmlns:a16="http://schemas.microsoft.com/office/drawing/2014/main" val="20001"/>
+                    </a:ext>
+                  </a:extLst>
+                </a:gridCol>
+                <a:gridCol w="1500000">
+                  <a:extLst>
+                    <a:ext uri="{9D8B030D-6E8A-4147-A177-3AD203B41FA5}">
+                      <a16:colId xmlns:a16="http://schemas.microsoft.com/office/drawing/2014/main" val="20002"/>
+                    </a:ext>
+                  </a:extLst>
+                </a:gridCol>
+                <a:gridCol w="1500000">
+                  <a:extLst>
+                    <a:ext uri="{9D8B030D-6E8A-4147-A177-3AD203B41FA5}">
+                      <a16:colId xmlns:a16="http://schemas.microsoft.com/office/drawing/2014/main" val="20003"/>
+                    </a:ext>
+                  </a:extLst>
+                </a:gridCol>
+                <a:gridCol w="1500000">
+                  <a:extLst>
+                    <a:ext uri="{9D8B030D-6E8A-4147-A177-3AD203B41FA5}">
+                      <a16:colId xmlns:a16="http://schemas.microsoft.com/office/drawing/2014/main" val="20004"/>
+                    </a:ext>
+                  </a:extLst>
+                </a:gridCol>
               </a:tblGrid>
               <a:tr h="400000">
                 <a:tc>
                   <a:txBody>
-                    <a:bodyPr wrap="square"/>
+                    <a:bodyPr/>
                     <a:lstStyle/>
                     <a:p>
                       <a:r>
@@ -5064,7 +6321,7 @@
                 </a:tc>
                 <a:tc>
                   <a:txBody>
-                    <a:bodyPr wrap="square"/>
+                    <a:bodyPr/>
                     <a:lstStyle/>
                     <a:p>
                       <a:r>
@@ -5085,7 +6342,7 @@
                 </a:tc>
                 <a:tc>
                   <a:txBody>
-                    <a:bodyPr wrap="square"/>
+                    <a:bodyPr/>
                     <a:lstStyle/>
                     <a:p>
                       <a:r>
@@ -5106,7 +6363,7 @@
                 </a:tc>
                 <a:tc>
                   <a:txBody>
-                    <a:bodyPr wrap="square"/>
+                    <a:bodyPr/>
                     <a:lstStyle/>
                     <a:p>
                       <a:r>
@@ -5127,7 +6384,7 @@
                 </a:tc>
                 <a:tc>
                   <a:txBody>
-                    <a:bodyPr wrap="square"/>
+                    <a:bodyPr/>
                     <a:lstStyle/>
                     <a:p>
                       <a:r>
@@ -5146,11 +6403,16 @@
                     </a:solidFill>
                   </a:tcPr>
                 </a:tc>
+                <a:extLst>
+                  <a:ext uri="{0D108BD9-81ED-4DB2-BD59-A6C34878D82A}">
+                    <a16:rowId xmlns:a16="http://schemas.microsoft.com/office/drawing/2014/main" val="10000"/>
+                  </a:ext>
+                </a:extLst>
               </a:tr>
               <a:tr h="400000">
                 <a:tc>
                   <a:txBody>
-                    <a:bodyPr wrap="square"/>
+                    <a:bodyPr/>
                     <a:lstStyle/>
                     <a:p>
                       <a:r>
@@ -5172,7 +6434,7 @@
                 </a:tc>
                 <a:tc>
                   <a:txBody>
-                    <a:bodyPr wrap="square"/>
+                    <a:bodyPr/>
                     <a:lstStyle/>
                     <a:p>
                       <a:r>
@@ -5194,7 +6456,7 @@
                 </a:tc>
                 <a:tc>
                   <a:txBody>
-                    <a:bodyPr wrap="square"/>
+                    <a:bodyPr/>
                     <a:lstStyle/>
                     <a:p>
                       <a:r>
@@ -5216,7 +6478,7 @@
                 </a:tc>
                 <a:tc>
                   <a:txBody>
-                    <a:bodyPr wrap="square"/>
+                    <a:bodyPr/>
                     <a:lstStyle/>
                     <a:p>
                       <a:r>
@@ -5238,7 +6500,7 @@
                 </a:tc>
                 <a:tc>
                   <a:txBody>
-                    <a:bodyPr wrap="square"/>
+                    <a:bodyPr/>
                     <a:lstStyle/>
                     <a:p>
                       <a:r>
@@ -5258,11 +6520,16 @@
                     </a:solidFill>
                   </a:tcPr>
                 </a:tc>
+                <a:extLst>
+                  <a:ext uri="{0D108BD9-81ED-4DB2-BD59-A6C34878D82A}">
+                    <a16:rowId xmlns:a16="http://schemas.microsoft.com/office/drawing/2014/main" val="10001"/>
+                  </a:ext>
+                </a:extLst>
               </a:tr>
               <a:tr h="400000">
                 <a:tc>
                   <a:txBody>
-                    <a:bodyPr wrap="square"/>
+                    <a:bodyPr/>
                     <a:lstStyle/>
                     <a:p>
                       <a:r>
@@ -5279,7 +6546,7 @@
                 </a:tc>
                 <a:tc>
                   <a:txBody>
-                    <a:bodyPr wrap="square"/>
+                    <a:bodyPr/>
                     <a:lstStyle/>
                     <a:p>
                       <a:r>
@@ -5296,7 +6563,7 @@
                 </a:tc>
                 <a:tc>
                   <a:txBody>
-                    <a:bodyPr wrap="square"/>
+                    <a:bodyPr/>
                     <a:lstStyle/>
                     <a:p>
                       <a:r>
@@ -5313,7 +6580,7 @@
                 </a:tc>
                 <a:tc>
                   <a:txBody>
-                    <a:bodyPr wrap="square"/>
+                    <a:bodyPr/>
                     <a:lstStyle/>
                     <a:p>
                       <a:r>
@@ -5330,7 +6597,7 @@
                 </a:tc>
                 <a:tc>
                   <a:txBody>
-                    <a:bodyPr wrap="square"/>
+                    <a:bodyPr/>
                     <a:lstStyle/>
                     <a:p>
                       <a:r>
@@ -5345,6 +6612,11 @@
                   </a:txBody>
                   <a:tcPr/>
                 </a:tc>
+                <a:extLst>
+                  <a:ext uri="{0D108BD9-81ED-4DB2-BD59-A6C34878D82A}">
+                    <a16:rowId xmlns:a16="http://schemas.microsoft.com/office/drawing/2014/main" val="10002"/>
+                  </a:ext>
+                </a:extLst>
               </a:tr>
             </a:tbl>
           </a:graphicData>
@@ -5432,13 +6704,13 @@
         </p:spPr>
         <p:txBody>
           <a:bodyPr wrap="square" rtlCol="0" anchor="t" lIns="91440" tIns="45720" rIns="91440" bIns="45720">
-            <a:normAutofit fontScale="100000" lnSpcReduction="0"/>
+            <a:normAutofit/>
           </a:bodyPr>
           <a:lstStyle/>
           <a:p>
             <a:pPr algn="l" marL="0" marR="0" indent="0"/>
             <a:r>
-              <a:rPr lang="en-US" sz="1800" dirty="0" smtClean="0">
+              <a:rPr lang="en-US" sz="1800" dirty="0">
                 <a:solidFill>
                   <a:srgbClr val="FFFFFF"/>
                 </a:solidFill>
@@ -5470,13 +6742,13 @@
         </p:spPr>
         <p:txBody>
           <a:bodyPr wrap="square" rtlCol="0" anchor="t" lIns="91440" tIns="45720" rIns="91440" bIns="45720">
-            <a:normAutofit fontScale="100000" lnSpcReduction="0"/>
+            <a:normAutofit/>
           </a:bodyPr>
           <a:lstStyle/>
           <a:p>
             <a:pPr algn="l" marL="0" marR="0" indent="0"/>
             <a:r>
-              <a:rPr lang="en-US" sz="1800" dirty="0" smtClean="0">
+              <a:rPr lang="en-US" sz="1800" dirty="0">
                 <a:solidFill>
                   <a:srgbClr val="000000"/>
                 </a:solidFill>
@@ -5508,13 +6780,13 @@
         </p:spPr>
         <p:txBody>
           <a:bodyPr wrap="square" rtlCol="0" anchor="t" lIns="91440" tIns="45720" rIns="91440" bIns="45720">
-            <a:normAutofit fontScale="100000" lnSpcReduction="0"/>
+            <a:normAutofit/>
           </a:bodyPr>
           <a:lstStyle/>
           <a:p>
             <a:pPr algn="l" marL="0" marR="0" indent="0"/>
             <a:r>
-              <a:rPr lang="en-US" sz="1800" dirty="0" smtClean="0">
+              <a:rPr lang="en-US" sz="1800" dirty="0">
                 <a:solidFill>
                   <a:srgbClr val="000000"/>
                 </a:solidFill>
@@ -5546,13 +6818,13 @@
         </p:spPr>
         <p:txBody>
           <a:bodyPr wrap="square" rtlCol="0" anchor="t" lIns="91440" tIns="45720" rIns="91440" bIns="45720">
-            <a:normAutofit fontScale="100000" lnSpcReduction="0"/>
+            <a:normAutofit/>
           </a:bodyPr>
           <a:lstStyle/>
           <a:p>
             <a:pPr algn="l" marL="0" marR="0" indent="0"/>
             <a:r>
-              <a:rPr lang="en-US" sz="1800" dirty="0" smtClean="0">
+              <a:rPr lang="en-US" sz="1800" dirty="0">
                 <a:solidFill>
                   <a:srgbClr val="000000"/>
                 </a:solidFill>
@@ -5585,7 +6857,9 @@
         <p:txBody>
           <a:bodyPr/>
           <a:lstStyle/>
-          <a:p/>
+          <a:p>
+            <a:endParaRPr/>
+          </a:p>
         </p:txBody>
       </p:sp>
       <p:sp>
@@ -5609,7 +6883,9 @@
         <p:txBody>
           <a:bodyPr/>
           <a:lstStyle/>
-          <a:p/>
+          <a:p>
+            <a:endParaRPr/>
+          </a:p>
         </p:txBody>
       </p:sp>
       <p:sp>
@@ -5633,7 +6909,9 @@
         <p:txBody>
           <a:bodyPr/>
           <a:lstStyle/>
-          <a:p/>
+          <a:p>
+            <a:endParaRPr/>
+          </a:p>
         </p:txBody>
       </p:sp>
       <p:sp>
@@ -5657,7 +6935,9 @@
         <p:txBody>
           <a:bodyPr/>
           <a:lstStyle/>
-          <a:p/>
+          <a:p>
+            <a:endParaRPr/>
+          </a:p>
         </p:txBody>
       </p:sp>
     </p:spTree>
@@ -6935,13 +8215,13 @@
         </p:spPr>
         <p:txBody>
           <a:bodyPr wrap="square" rtlCol="0" anchor="ctr" lIns="91440" tIns="45720" rIns="91440" bIns="45720">
-            <a:normAutofit fontScale="100000" lnSpcReduction="0"/>
+            <a:normAutofit/>
           </a:bodyPr>
           <a:lstStyle/>
           <a:p>
             <a:pPr algn="ctr" marL="0" marR="0" indent="0"/>
             <a:r>
-              <a:rPr lang="en-US" sz="2879" dirty="0" smtClean="0">
+              <a:rPr lang="en-US" sz="2879" dirty="0">
                 <a:solidFill>
                   <a:srgbClr val="FFFFFF"/>
                 </a:solidFill>
@@ -6971,13 +8251,13 @@
         </p:spPr>
         <p:txBody>
           <a:bodyPr wrap="square" rtlCol="0" anchor="ctr" lIns="91440" tIns="45720" rIns="91440" bIns="45720">
-            <a:normAutofit fontScale="100000" lnSpcReduction="0"/>
+            <a:normAutofit/>
           </a:bodyPr>
           <a:lstStyle/>
           <a:p>
             <a:pPr algn="ctr" marL="0" marR="0" indent="0"/>
             <a:r>
-              <a:rPr lang="en-US" sz="4320" dirty="0" smtClean="0">
+              <a:rPr lang="en-US" sz="4320" dirty="0">
                 <a:solidFill>
                   <a:srgbClr val="FFFFFF"/>
                 </a:solidFill>
@@ -7007,13 +8287,13 @@
         </p:spPr>
         <p:txBody>
           <a:bodyPr wrap="square" rtlCol="0" anchor="ctr" lIns="91440" tIns="45720" rIns="91440" bIns="45720">
-            <a:normAutofit fontScale="100000" lnSpcReduction="0"/>
+            <a:normAutofit/>
           </a:bodyPr>
           <a:lstStyle/>
           <a:p>
             <a:pPr algn="ctr" marL="0" marR="0" indent="0"/>
             <a:r>
-              <a:rPr lang="en-US" sz="3702" dirty="0" smtClean="0">
+              <a:rPr lang="en-US" sz="3702" dirty="0">
                 <a:solidFill>
                   <a:srgbClr val="FFFFFF"/>
                 </a:solidFill>
@@ -7043,13 +8323,13 @@
         </p:spPr>
         <p:txBody>
           <a:bodyPr wrap="square" rtlCol="0" anchor="ctr" lIns="91440" tIns="45720" rIns="91440" bIns="45720">
-            <a:normAutofit fontScale="100000" lnSpcReduction="0"/>
+            <a:normAutofit/>
           </a:bodyPr>
           <a:lstStyle/>
           <a:p>
             <a:pPr algn="ctr" marL="0" marR="0" indent="0"/>
             <a:r>
-              <a:rPr lang="en-US" sz="4382" dirty="0" smtClean="0">
+              <a:rPr lang="en-US" sz="4382" dirty="0">
                 <a:solidFill>
                   <a:srgbClr val="000000"/>
                 </a:solidFill>
@@ -7079,13 +8359,13 @@
         </p:spPr>
         <p:txBody>
           <a:bodyPr wrap="square" rtlCol="0" anchor="ctr" lIns="91440" tIns="45720" rIns="91440" bIns="45720">
-            <a:normAutofit fontScale="100000" lnSpcReduction="0"/>
+            <a:normAutofit/>
           </a:bodyPr>
           <a:lstStyle/>
           <a:p>
             <a:pPr algn="ctr" marL="0" marR="0" indent="0"/>
             <a:r>
-              <a:rPr lang="en-US" sz="4320" dirty="0" smtClean="0">
+              <a:rPr lang="en-US" sz="4320" dirty="0">
                 <a:solidFill>
                   <a:srgbClr val="FFFFFF"/>
                 </a:solidFill>
@@ -7115,13 +8395,13 @@
         </p:spPr>
         <p:txBody>
           <a:bodyPr wrap="square" rtlCol="0" anchor="ctr" lIns="91440" tIns="45720" rIns="91440" bIns="45720">
-            <a:normAutofit fontScale="100000" lnSpcReduction="0"/>
+            <a:normAutofit/>
           </a:bodyPr>
           <a:lstStyle/>
           <a:p>
             <a:pPr algn="ctr" marL="0" marR="0" indent="0"/>
             <a:r>
-              <a:rPr lang="en-US" sz="4382" dirty="0" smtClean="0">
+              <a:rPr lang="en-US" sz="4382" dirty="0">
                 <a:solidFill>
                   <a:srgbClr val="FFFFFF"/>
                 </a:solidFill>
@@ -7151,13 +8431,13 @@
         </p:spPr>
         <p:txBody>
           <a:bodyPr wrap="square" rtlCol="0" anchor="ctr" lIns="91440" tIns="45720" rIns="91440" bIns="45720">
-            <a:normAutofit fontScale="100000" lnSpcReduction="0"/>
+            <a:normAutofit/>
           </a:bodyPr>
           <a:lstStyle/>
           <a:p>
             <a:pPr algn="ctr" marL="0" marR="0" indent="0"/>
             <a:r>
-              <a:rPr lang="en-US" sz="4320" dirty="0" smtClean="0">
+              <a:rPr lang="en-US" sz="4320" dirty="0">
                 <a:solidFill>
                   <a:srgbClr val="FFFFFF"/>
                 </a:solidFill>
@@ -7249,13 +8529,13 @@
         </p:spPr>
         <p:txBody>
           <a:bodyPr wrap="square" rtlCol="0" anchor="ctr" lIns="91440" tIns="45720" rIns="91440" bIns="45720">
-            <a:normAutofit fontScale="100000" lnSpcReduction="0"/>
+            <a:normAutofit/>
           </a:bodyPr>
           <a:lstStyle/>
           <a:p>
             <a:pPr algn="ctr" marL="0" marR="0" indent="0"/>
             <a:r>
-              <a:rPr lang="en-US" sz="3130" dirty="0" smtClean="0">
+              <a:rPr lang="en-US" sz="3130" dirty="0">
                 <a:solidFill>
                   <a:srgbClr val="FFFFFF"/>
                 </a:solidFill>
@@ -7285,13 +8565,13 @@
         </p:spPr>
         <p:txBody>
           <a:bodyPr wrap="square" rtlCol="0" anchor="ctr" lIns="91440" tIns="45720" rIns="91440" bIns="45720">
-            <a:normAutofit fontScale="100000" lnSpcReduction="0"/>
+            <a:normAutofit/>
           </a:bodyPr>
           <a:lstStyle/>
           <a:p>
             <a:pPr algn="ctr" marL="0" marR="0" indent="0"/>
             <a:r>
-              <a:rPr lang="en-US" sz="2640" dirty="0" smtClean="0">
+              <a:rPr lang="en-US" sz="2640" dirty="0">
                 <a:solidFill>
                   <a:srgbClr val="FFFFFF"/>
                 </a:solidFill>
@@ -7321,13 +8601,13 @@
         </p:spPr>
         <p:txBody>
           <a:bodyPr wrap="square" rtlCol="0" anchor="ctr" lIns="91440" tIns="45720" rIns="91440" bIns="45720">
-            <a:normAutofit fontScale="100000" lnSpcReduction="0"/>
+            <a:normAutofit/>
           </a:bodyPr>
           <a:lstStyle/>
           <a:p>
             <a:pPr algn="ctr" marL="0" marR="0" indent="0"/>
             <a:r>
-              <a:rPr lang="en-US" sz="2262" dirty="0" smtClean="0">
+              <a:rPr lang="en-US" sz="2262" dirty="0">
                 <a:solidFill>
                   <a:srgbClr val="000000"/>
                 </a:solidFill>
@@ -7357,13 +8637,13 @@
         </p:spPr>
         <p:txBody>
           <a:bodyPr wrap="square" rtlCol="0" anchor="ctr" lIns="91440" tIns="45720" rIns="91440" bIns="45720">
-            <a:normAutofit fontScale="100000" lnSpcReduction="0"/>
+            <a:normAutofit/>
           </a:bodyPr>
           <a:lstStyle/>
           <a:p>
             <a:pPr algn="ctr" marL="0" marR="0" indent="0"/>
             <a:r>
-              <a:rPr lang="en-US" sz="1980" dirty="0" smtClean="0">
+              <a:rPr lang="en-US" sz="1980" dirty="0">
                 <a:solidFill>
                   <a:srgbClr val="000000"/>
                 </a:solidFill>
@@ -7393,13 +8673,13 @@
         </p:spPr>
         <p:txBody>
           <a:bodyPr wrap="square" rtlCol="0" anchor="ctr" lIns="91440" tIns="45720" rIns="91440" bIns="45720">
-            <a:normAutofit fontScale="100000" lnSpcReduction="0"/>
+            <a:normAutofit/>
           </a:bodyPr>
           <a:lstStyle/>
           <a:p>
             <a:pPr algn="ctr" marL="0" marR="0" indent="0"/>
             <a:r>
-              <a:rPr lang="en-US" sz="1980" dirty="0" smtClean="0">
+              <a:rPr lang="en-US" sz="1980" dirty="0">
                 <a:solidFill>
                   <a:srgbClr val="FFFFFF"/>
                 </a:solidFill>
@@ -7429,13 +8709,13 @@
         </p:spPr>
         <p:txBody>
           <a:bodyPr wrap="square" rtlCol="0" anchor="ctr" lIns="91440" tIns="45720" rIns="91440" bIns="45720">
-            <a:normAutofit fontScale="100000" lnSpcReduction="0"/>
+            <a:normAutofit/>
           </a:bodyPr>
           <a:lstStyle/>
           <a:p>
             <a:pPr algn="ctr" marL="0" marR="0" indent="0"/>
             <a:r>
-              <a:rPr lang="en-US" sz="2640" dirty="0" smtClean="0">
+              <a:rPr lang="en-US" sz="2640" dirty="0">
                 <a:solidFill>
                   <a:srgbClr val="FFFFFF"/>
                 </a:solidFill>
@@ -7465,13 +8745,13 @@
         </p:spPr>
         <p:txBody>
           <a:bodyPr wrap="square" rtlCol="0" anchor="ctr" lIns="91440" tIns="45720" rIns="91440" bIns="45720">
-            <a:normAutofit fontScale="100000" lnSpcReduction="0"/>
+            <a:normAutofit/>
           </a:bodyPr>
           <a:lstStyle/>
           <a:p>
             <a:pPr algn="ctr" marL="0" marR="0" indent="0"/>
             <a:r>
-              <a:rPr lang="en-US" sz="2262" dirty="0" smtClean="0">
+              <a:rPr lang="en-US" sz="2262" dirty="0">
                 <a:solidFill>
                   <a:srgbClr val="FFFFFF"/>
                 </a:solidFill>
@@ -7501,13 +8781,13 @@
         </p:spPr>
         <p:txBody>
           <a:bodyPr wrap="square" rtlCol="0" anchor="ctr" lIns="91440" tIns="45720" rIns="91440" bIns="45720">
-            <a:normAutofit fontScale="100000" lnSpcReduction="0"/>
+            <a:normAutofit/>
           </a:bodyPr>
           <a:lstStyle/>
           <a:p>
             <a:pPr algn="ctr" marL="0" marR="0" indent="0"/>
             <a:r>
-              <a:rPr lang="en-US" sz="3130" dirty="0" smtClean="0">
+              <a:rPr lang="en-US" sz="3130" dirty="0">
                 <a:solidFill>
                   <a:srgbClr val="FFFFFF"/>
                 </a:solidFill>
@@ -7537,13 +8817,13 @@
         </p:spPr>
         <p:txBody>
           <a:bodyPr wrap="square" rtlCol="0" anchor="ctr" lIns="91440" tIns="45720" rIns="91440" bIns="45720">
-            <a:normAutofit fontScale="100000" lnSpcReduction="0"/>
+            <a:normAutofit/>
           </a:bodyPr>
           <a:lstStyle/>
           <a:p>
             <a:pPr algn="ctr" marL="0" marR="0" indent="0"/>
             <a:r>
-              <a:rPr lang="en-US" sz="1980" dirty="0" smtClean="0">
+              <a:rPr lang="en-US" sz="1980" dirty="0">
                 <a:solidFill>
                   <a:srgbClr val="FFFFFF"/>
                 </a:solidFill>
@@ -7573,13 +8853,13 @@
         </p:spPr>
         <p:txBody>
           <a:bodyPr wrap="square" rtlCol="0" anchor="ctr" lIns="91440" tIns="45720" rIns="91440" bIns="45720">
-            <a:normAutofit fontScale="100000" lnSpcReduction="0"/>
+            <a:normAutofit/>
           </a:bodyPr>
           <a:lstStyle/>
           <a:p>
             <a:pPr algn="ctr" marL="0" marR="0" indent="0"/>
             <a:r>
-              <a:rPr lang="en-US" sz="2640" dirty="0" smtClean="0">
+              <a:rPr lang="en-US" sz="2640" dirty="0">
                 <a:solidFill>
                   <a:srgbClr val="FFFFFF"/>
                 </a:solidFill>
@@ -8050,15 +9330,39 @@
             <a:tbl>
               <a:tblPr firstRow="1" bandRow="1"/>
               <a:tblGrid>
-                <a:gridCol w="2000000"/>
-                <a:gridCol w="2000000"/>
-                <a:gridCol w="2000000"/>
-                <a:gridCol w="2000000"/>
+                <a:gridCol w="2000000">
+                  <a:extLst>
+                    <a:ext uri="{9D8B030D-6E8A-4147-A177-3AD203B41FA5}">
+                      <a16:colId xmlns:a16="http://schemas.microsoft.com/office/drawing/2014/main" val="20000"/>
+                    </a:ext>
+                  </a:extLst>
+                </a:gridCol>
+                <a:gridCol w="2000000">
+                  <a:extLst>
+                    <a:ext uri="{9D8B030D-6E8A-4147-A177-3AD203B41FA5}">
+                      <a16:colId xmlns:a16="http://schemas.microsoft.com/office/drawing/2014/main" val="20001"/>
+                    </a:ext>
+                  </a:extLst>
+                </a:gridCol>
+                <a:gridCol w="2000000">
+                  <a:extLst>
+                    <a:ext uri="{9D8B030D-6E8A-4147-A177-3AD203B41FA5}">
+                      <a16:colId xmlns:a16="http://schemas.microsoft.com/office/drawing/2014/main" val="20002"/>
+                    </a:ext>
+                  </a:extLst>
+                </a:gridCol>
+                <a:gridCol w="2000000">
+                  <a:extLst>
+                    <a:ext uri="{9D8B030D-6E8A-4147-A177-3AD203B41FA5}">
+                      <a16:colId xmlns:a16="http://schemas.microsoft.com/office/drawing/2014/main" val="20003"/>
+                    </a:ext>
+                  </a:extLst>
+                </a:gridCol>
               </a:tblGrid>
               <a:tr h="400000">
                 <a:tc>
                   <a:txBody>
-                    <a:bodyPr wrap="square"/>
+                    <a:bodyPr/>
                     <a:lstStyle/>
                     <a:p>
                       <a:r>
@@ -8079,7 +9383,7 @@
                 </a:tc>
                 <a:tc>
                   <a:txBody>
-                    <a:bodyPr wrap="square"/>
+                    <a:bodyPr/>
                     <a:lstStyle/>
                     <a:p>
                       <a:r>
@@ -8100,7 +9404,7 @@
                 </a:tc>
                 <a:tc>
                   <a:txBody>
-                    <a:bodyPr wrap="square"/>
+                    <a:bodyPr/>
                     <a:lstStyle/>
                     <a:p>
                       <a:r>
@@ -8121,7 +9425,7 @@
                 </a:tc>
                 <a:tc>
                   <a:txBody>
-                    <a:bodyPr wrap="square"/>
+                    <a:bodyPr/>
                     <a:lstStyle/>
                     <a:p>
                       <a:r>
@@ -8140,11 +9444,16 @@
                     </a:solidFill>
                   </a:tcPr>
                 </a:tc>
+                <a:extLst>
+                  <a:ext uri="{0D108BD9-81ED-4DB2-BD59-A6C34878D82A}">
+                    <a16:rowId xmlns:a16="http://schemas.microsoft.com/office/drawing/2014/main" val="10000"/>
+                  </a:ext>
+                </a:extLst>
               </a:tr>
               <a:tr h="400000">
                 <a:tc>
                   <a:txBody>
-                    <a:bodyPr wrap="square"/>
+                    <a:bodyPr/>
                     <a:lstStyle/>
                     <a:p>
                       <a:r>
@@ -8161,7 +9470,7 @@
                 </a:tc>
                 <a:tc>
                   <a:txBody>
-                    <a:bodyPr wrap="square"/>
+                    <a:bodyPr/>
                     <a:lstStyle/>
                     <a:p>
                       <a:r>
@@ -8174,7 +9483,7 @@
                 </a:tc>
                 <a:tc>
                   <a:txBody>
-                    <a:bodyPr wrap="square"/>
+                    <a:bodyPr/>
                     <a:lstStyle/>
                     <a:p>
                       <a:r>
@@ -8191,7 +9500,7 @@
                 </a:tc>
                 <a:tc>
                   <a:txBody>
-                    <a:bodyPr wrap="square"/>
+                    <a:bodyPr/>
                     <a:lstStyle/>
                     <a:p>
                       <a:r>
@@ -8202,11 +9511,16 @@
                   </a:txBody>
                   <a:tcPr/>
                 </a:tc>
+                <a:extLst>
+                  <a:ext uri="{0D108BD9-81ED-4DB2-BD59-A6C34878D82A}">
+                    <a16:rowId xmlns:a16="http://schemas.microsoft.com/office/drawing/2014/main" val="10001"/>
+                  </a:ext>
+                </a:extLst>
               </a:tr>
               <a:tr h="400000">
                 <a:tc>
                   <a:txBody>
-                    <a:bodyPr wrap="square"/>
+                    <a:bodyPr/>
                     <a:lstStyle/>
                     <a:p>
                       <a:r>
@@ -8223,7 +9537,7 @@
                 </a:tc>
                 <a:tc>
                   <a:txBody>
-                    <a:bodyPr wrap="square"/>
+                    <a:bodyPr/>
                     <a:lstStyle/>
                     <a:p>
                       <a:r>
@@ -8236,7 +9550,7 @@
                 </a:tc>
                 <a:tc>
                   <a:txBody>
-                    <a:bodyPr wrap="square"/>
+                    <a:bodyPr/>
                     <a:lstStyle/>
                     <a:p>
                       <a:r>
@@ -8253,7 +9567,7 @@
                 </a:tc>
                 <a:tc>
                   <a:txBody>
-                    <a:bodyPr wrap="square"/>
+                    <a:bodyPr/>
                     <a:lstStyle/>
                     <a:p>
                       <a:r>
@@ -8264,11 +9578,16 @@
                   </a:txBody>
                   <a:tcPr/>
                 </a:tc>
+                <a:extLst>
+                  <a:ext uri="{0D108BD9-81ED-4DB2-BD59-A6C34878D82A}">
+                    <a16:rowId xmlns:a16="http://schemas.microsoft.com/office/drawing/2014/main" val="10002"/>
+                  </a:ext>
+                </a:extLst>
               </a:tr>
               <a:tr h="400000">
                 <a:tc>
                   <a:txBody>
-                    <a:bodyPr wrap="square"/>
+                    <a:bodyPr/>
                     <a:lstStyle/>
                     <a:p>
                       <a:r>
@@ -8285,7 +9604,7 @@
                 </a:tc>
                 <a:tc>
                   <a:txBody>
-                    <a:bodyPr wrap="square"/>
+                    <a:bodyPr/>
                     <a:lstStyle/>
                     <a:p>
                       <a:r>
@@ -8298,7 +9617,7 @@
                 </a:tc>
                 <a:tc>
                   <a:txBody>
-                    <a:bodyPr wrap="square"/>
+                    <a:bodyPr/>
                     <a:lstStyle/>
                     <a:p>
                       <a:r>
@@ -8311,7 +9630,7 @@
                 </a:tc>
                 <a:tc>
                   <a:txBody>
-                    <a:bodyPr wrap="square"/>
+                    <a:bodyPr/>
                     <a:lstStyle/>
                     <a:p>
                       <a:r>
@@ -8326,11 +9645,16 @@
                   </a:txBody>
                   <a:tcPr/>
                 </a:tc>
+                <a:extLst>
+                  <a:ext uri="{0D108BD9-81ED-4DB2-BD59-A6C34878D82A}">
+                    <a16:rowId xmlns:a16="http://schemas.microsoft.com/office/drawing/2014/main" val="10003"/>
+                  </a:ext>
+                </a:extLst>
               </a:tr>
               <a:tr h="400000">
                 <a:tc>
                   <a:txBody>
-                    <a:bodyPr wrap="square"/>
+                    <a:bodyPr/>
                     <a:lstStyle/>
                     <a:p>
                       <a:r>
@@ -8347,7 +9671,7 @@
                 </a:tc>
                 <a:tc>
                   <a:txBody>
-                    <a:bodyPr wrap="square"/>
+                    <a:bodyPr/>
                     <a:lstStyle/>
                     <a:p>
                       <a:r>
@@ -8360,7 +9684,7 @@
                 </a:tc>
                 <a:tc>
                   <a:txBody>
-                    <a:bodyPr wrap="square"/>
+                    <a:bodyPr/>
                     <a:lstStyle/>
                     <a:p>
                       <a:r>
@@ -8373,7 +9697,7 @@
                 </a:tc>
                 <a:tc>
                   <a:txBody>
-                    <a:bodyPr wrap="square"/>
+                    <a:bodyPr/>
                     <a:lstStyle/>
                     <a:p>
                       <a:r>
@@ -8384,11 +9708,16 @@
                   </a:txBody>
                   <a:tcPr/>
                 </a:tc>
+                <a:extLst>
+                  <a:ext uri="{0D108BD9-81ED-4DB2-BD59-A6C34878D82A}">
+                    <a16:rowId xmlns:a16="http://schemas.microsoft.com/office/drawing/2014/main" val="10004"/>
+                  </a:ext>
+                </a:extLst>
               </a:tr>
               <a:tr h="400000">
                 <a:tc>
                   <a:txBody>
-                    <a:bodyPr wrap="square"/>
+                    <a:bodyPr/>
                     <a:lstStyle/>
                     <a:p>
                       <a:r>
@@ -8405,7 +9734,7 @@
                 </a:tc>
                 <a:tc>
                   <a:txBody>
-                    <a:bodyPr wrap="square"/>
+                    <a:bodyPr/>
                     <a:lstStyle/>
                     <a:p>
                       <a:r>
@@ -8418,7 +9747,7 @@
                 </a:tc>
                 <a:tc>
                   <a:txBody>
-                    <a:bodyPr wrap="square"/>
+                    <a:bodyPr/>
                     <a:lstStyle/>
                     <a:p>
                       <a:r>
@@ -8431,7 +9760,7 @@
                 </a:tc>
                 <a:tc>
                   <a:txBody>
-                    <a:bodyPr wrap="square"/>
+                    <a:bodyPr/>
                     <a:lstStyle/>
                     <a:p>
                       <a:r>
@@ -8442,11 +9771,16 @@
                   </a:txBody>
                   <a:tcPr/>
                 </a:tc>
+                <a:extLst>
+                  <a:ext uri="{0D108BD9-81ED-4DB2-BD59-A6C34878D82A}">
+                    <a16:rowId xmlns:a16="http://schemas.microsoft.com/office/drawing/2014/main" val="10005"/>
+                  </a:ext>
+                </a:extLst>
               </a:tr>
               <a:tr h="400000">
                 <a:tc>
                   <a:txBody>
-                    <a:bodyPr wrap="square"/>
+                    <a:bodyPr/>
                     <a:lstStyle/>
                     <a:p>
                       <a:r>
@@ -8463,7 +9797,7 @@
                 </a:tc>
                 <a:tc>
                   <a:txBody>
-                    <a:bodyPr wrap="square"/>
+                    <a:bodyPr/>
                     <a:lstStyle/>
                     <a:p>
                       <a:r>
@@ -8480,7 +9814,7 @@
                 </a:tc>
                 <a:tc>
                   <a:txBody>
-                    <a:bodyPr wrap="square"/>
+                    <a:bodyPr/>
                     <a:lstStyle/>
                     <a:p>
                       <a:r>
@@ -8497,7 +9831,7 @@
                 </a:tc>
                 <a:tc>
                   <a:txBody>
-                    <a:bodyPr wrap="square"/>
+                    <a:bodyPr/>
                     <a:lstStyle/>
                     <a:p>
                       <a:r>
@@ -8512,6 +9846,11 @@
                   </a:txBody>
                   <a:tcPr/>
                 </a:tc>
+                <a:extLst>
+                  <a:ext uri="{0D108BD9-81ED-4DB2-BD59-A6C34878D82A}">
+                    <a16:rowId xmlns:a16="http://schemas.microsoft.com/office/drawing/2014/main" val="10006"/>
+                  </a:ext>
+                </a:extLst>
               </a:tr>
             </a:tbl>
           </a:graphicData>
@@ -8537,13 +9876,13 @@
         </p:spPr>
         <p:txBody>
           <a:bodyPr wrap="square" rtlCol="0" anchor="ctr" lIns="91440" tIns="45720" rIns="91440" bIns="45720">
-            <a:normAutofit fontScale="100000" lnSpcReduction="0"/>
+            <a:normAutofit/>
           </a:bodyPr>
           <a:lstStyle/>
           <a:p>
             <a:pPr algn="ctr" marL="0" marR="0" indent="0"/>
             <a:r>
-              <a:rPr lang="en-US" sz="1714" dirty="0" smtClean="0">
+              <a:rPr lang="en-US" sz="1714" dirty="0">
                 <a:solidFill>
                   <a:srgbClr val="FFFFFF"/>
                 </a:solidFill>
@@ -8573,13 +9912,13 @@
         </p:spPr>
         <p:txBody>
           <a:bodyPr wrap="square" rtlCol="0" anchor="ctr" lIns="91440" tIns="45720" rIns="91440" bIns="45720">
-            <a:normAutofit fontScale="100000" lnSpcReduction="0"/>
+            <a:normAutofit/>
           </a:bodyPr>
           <a:lstStyle/>
           <a:p>
             <a:pPr algn="ctr" marL="0" marR="0" indent="0"/>
             <a:r>
-              <a:rPr lang="en-US" sz="2250" dirty="0" smtClean="0">
+              <a:rPr lang="en-US" sz="2250" dirty="0">
                 <a:solidFill>
                   <a:srgbClr val="000000"/>
                 </a:solidFill>
@@ -8609,13 +9948,13 @@
         </p:spPr>
         <p:txBody>
           <a:bodyPr wrap="square" rtlCol="0" anchor="ctr" lIns="91440" tIns="45720" rIns="91440" bIns="45720">
-            <a:normAutofit fontScale="100000" lnSpcReduction="0"/>
+            <a:normAutofit/>
           </a:bodyPr>
           <a:lstStyle/>
           <a:p>
             <a:pPr algn="ctr" marL="0" marR="0" indent="0"/>
             <a:r>
-              <a:rPr lang="en-US" sz="2000" dirty="0" smtClean="0">
+              <a:rPr lang="en-US" sz="2000" dirty="0">
                 <a:solidFill>
                   <a:srgbClr val="000000"/>
                 </a:solidFill>
@@ -8702,13 +10041,25 @@
             <a:tbl>
               <a:tblPr firstRow="1" bandRow="1"/>
               <a:tblGrid>
-                <a:gridCol w="1800000"/>
-                <a:gridCol w="2000000"/>
+                <a:gridCol w="1800000">
+                  <a:extLst>
+                    <a:ext uri="{9D8B030D-6E8A-4147-A177-3AD203B41FA5}">
+                      <a16:colId xmlns:a16="http://schemas.microsoft.com/office/drawing/2014/main" val="20000"/>
+                    </a:ext>
+                  </a:extLst>
+                </a:gridCol>
+                <a:gridCol w="2000000">
+                  <a:extLst>
+                    <a:ext uri="{9D8B030D-6E8A-4147-A177-3AD203B41FA5}">
+                      <a16:colId xmlns:a16="http://schemas.microsoft.com/office/drawing/2014/main" val="20001"/>
+                    </a:ext>
+                  </a:extLst>
+                </a:gridCol>
               </a:tblGrid>
               <a:tr h="400000">
                 <a:tc>
                   <a:txBody>
-                    <a:bodyPr wrap="square"/>
+                    <a:bodyPr/>
                     <a:lstStyle/>
                     <a:p>
                       <a:r>
@@ -8729,13 +10080,10 @@
                 </a:tc>
                 <a:tc>
                   <a:txBody>
-                    <a:bodyPr wrap="square"/>
-                    <a:lstStyle/>
-                    <a:p>
-                      <a:r>
-                        <a:rPr lang="en-US" dirty="0"/>
-                        <a:t/>
-                      </a:r>
+                    <a:bodyPr/>
+                    <a:lstStyle/>
+                    <a:p>
+                      <a:endParaRPr lang="en-US"/>
                     </a:p>
                   </a:txBody>
                   <a:tcPr>
@@ -8744,11 +10092,16 @@
                     </a:solidFill>
                   </a:tcPr>
                 </a:tc>
+                <a:extLst>
+                  <a:ext uri="{0D108BD9-81ED-4DB2-BD59-A6C34878D82A}">
+                    <a16:rowId xmlns:a16="http://schemas.microsoft.com/office/drawing/2014/main" val="10000"/>
+                  </a:ext>
+                </a:extLst>
               </a:tr>
               <a:tr h="400000">
                 <a:tc>
                   <a:txBody>
-                    <a:bodyPr wrap="square"/>
+                    <a:bodyPr/>
                     <a:lstStyle/>
                     <a:p>
                       <a:r>
@@ -8765,7 +10118,7 @@
                 </a:tc>
                 <a:tc>
                   <a:txBody>
-                    <a:bodyPr wrap="square"/>
+                    <a:bodyPr/>
                     <a:lstStyle/>
                     <a:p>
                       <a:r>
@@ -8776,11 +10129,16 @@
                   </a:txBody>
                   <a:tcPr/>
                 </a:tc>
+                <a:extLst>
+                  <a:ext uri="{0D108BD9-81ED-4DB2-BD59-A6C34878D82A}">
+                    <a16:rowId xmlns:a16="http://schemas.microsoft.com/office/drawing/2014/main" val="10001"/>
+                  </a:ext>
+                </a:extLst>
               </a:tr>
               <a:tr h="400000">
                 <a:tc>
                   <a:txBody>
-                    <a:bodyPr wrap="square"/>
+                    <a:bodyPr/>
                     <a:lstStyle/>
                     <a:p>
                       <a:r>
@@ -8797,7 +10155,7 @@
                 </a:tc>
                 <a:tc>
                   <a:txBody>
-                    <a:bodyPr wrap="square"/>
+                    <a:bodyPr/>
                     <a:lstStyle/>
                     <a:p>
                       <a:r>
@@ -8808,11 +10166,16 @@
                   </a:txBody>
                   <a:tcPr/>
                 </a:tc>
+                <a:extLst>
+                  <a:ext uri="{0D108BD9-81ED-4DB2-BD59-A6C34878D82A}">
+                    <a16:rowId xmlns:a16="http://schemas.microsoft.com/office/drawing/2014/main" val="10002"/>
+                  </a:ext>
+                </a:extLst>
               </a:tr>
               <a:tr h="400000">
                 <a:tc>
                   <a:txBody>
-                    <a:bodyPr wrap="square"/>
+                    <a:bodyPr/>
                     <a:lstStyle/>
                     <a:p>
                       <a:r>
@@ -8829,7 +10192,7 @@
                 </a:tc>
                 <a:tc>
                   <a:txBody>
-                    <a:bodyPr wrap="square"/>
+                    <a:bodyPr/>
                     <a:lstStyle/>
                     <a:p>
                       <a:r>
@@ -8840,11 +10203,16 @@
                   </a:txBody>
                   <a:tcPr/>
                 </a:tc>
+                <a:extLst>
+                  <a:ext uri="{0D108BD9-81ED-4DB2-BD59-A6C34878D82A}">
+                    <a16:rowId xmlns:a16="http://schemas.microsoft.com/office/drawing/2014/main" val="10003"/>
+                  </a:ext>
+                </a:extLst>
               </a:tr>
               <a:tr h="400000">
                 <a:tc>
                   <a:txBody>
-                    <a:bodyPr wrap="square"/>
+                    <a:bodyPr/>
                     <a:lstStyle/>
                     <a:p>
                       <a:r>
@@ -8861,7 +10229,7 @@
                 </a:tc>
                 <a:tc>
                   <a:txBody>
-                    <a:bodyPr wrap="square"/>
+                    <a:bodyPr/>
                     <a:lstStyle/>
                     <a:p>
                       <a:r>
@@ -8872,11 +10240,16 @@
                   </a:txBody>
                   <a:tcPr/>
                 </a:tc>
+                <a:extLst>
+                  <a:ext uri="{0D108BD9-81ED-4DB2-BD59-A6C34878D82A}">
+                    <a16:rowId xmlns:a16="http://schemas.microsoft.com/office/drawing/2014/main" val="10004"/>
+                  </a:ext>
+                </a:extLst>
               </a:tr>
               <a:tr h="400000">
                 <a:tc>
                   <a:txBody>
-                    <a:bodyPr wrap="square"/>
+                    <a:bodyPr/>
                     <a:lstStyle/>
                     <a:p>
                       <a:r>
@@ -8893,7 +10266,7 @@
                 </a:tc>
                 <a:tc>
                   <a:txBody>
-                    <a:bodyPr wrap="square"/>
+                    <a:bodyPr/>
                     <a:lstStyle/>
                     <a:p>
                       <a:r>
@@ -8904,11 +10277,16 @@
                   </a:txBody>
                   <a:tcPr/>
                 </a:tc>
+                <a:extLst>
+                  <a:ext uri="{0D108BD9-81ED-4DB2-BD59-A6C34878D82A}">
+                    <a16:rowId xmlns:a16="http://schemas.microsoft.com/office/drawing/2014/main" val="10005"/>
+                  </a:ext>
+                </a:extLst>
               </a:tr>
               <a:tr h="400000">
                 <a:tc>
                   <a:txBody>
-                    <a:bodyPr wrap="square"/>
+                    <a:bodyPr/>
                     <a:lstStyle/>
                     <a:p>
                       <a:r>
@@ -8925,7 +10303,7 @@
                 </a:tc>
                 <a:tc>
                   <a:txBody>
-                    <a:bodyPr wrap="square"/>
+                    <a:bodyPr/>
                     <a:lstStyle/>
                     <a:p>
                       <a:r>
@@ -8936,6 +10314,11 @@
                   </a:txBody>
                   <a:tcPr/>
                 </a:tc>
+                <a:extLst>
+                  <a:ext uri="{0D108BD9-81ED-4DB2-BD59-A6C34878D82A}">
+                    <a16:rowId xmlns:a16="http://schemas.microsoft.com/office/drawing/2014/main" val="10006"/>
+                  </a:ext>
+                </a:extLst>
               </a:tr>
             </a:tbl>
           </a:graphicData>
@@ -8961,13 +10344,13 @@
         </p:spPr>
         <p:txBody>
           <a:bodyPr wrap="square" rtlCol="0" anchor="ctr" lIns="91440" tIns="45720" rIns="91440" bIns="45720">
-            <a:normAutofit fontScale="100000" lnSpcReduction="0"/>
+            <a:normAutofit/>
           </a:bodyPr>
           <a:lstStyle/>
           <a:p>
             <a:pPr algn="ctr" marL="0" marR="0" indent="0"/>
             <a:r>
-              <a:rPr lang="en-US" sz="869" dirty="0" smtClean="0">
+              <a:rPr lang="en-US" sz="869" dirty="0">
                 <a:solidFill>
                   <a:srgbClr val="000000"/>
                 </a:solidFill>
@@ -8999,13 +10382,13 @@
         </p:spPr>
         <p:txBody>
           <a:bodyPr wrap="square" rtlCol="0" anchor="ctr" lIns="91440" tIns="45720" rIns="91440" bIns="45720">
-            <a:normAutofit fontScale="100000" lnSpcReduction="0"/>
+            <a:normAutofit/>
           </a:bodyPr>
           <a:lstStyle/>
           <a:p>
             <a:pPr algn="ctr" marL="0" marR="0" indent="0"/>
             <a:r>
-              <a:rPr lang="en-US" sz="3702" dirty="0" smtClean="0">
+              <a:rPr lang="en-US" sz="3702" dirty="0">
                 <a:solidFill>
                   <a:srgbClr val="000000"/>
                 </a:solidFill>
@@ -9037,13 +10420,13 @@
         </p:spPr>
         <p:txBody>
           <a:bodyPr wrap="square" rtlCol="0" anchor="ctr" lIns="91440" tIns="45720" rIns="91440" bIns="45720">
-            <a:normAutofit fontScale="100000" lnSpcReduction="0"/>
+            <a:normAutofit/>
           </a:bodyPr>
           <a:lstStyle/>
           <a:p>
             <a:pPr algn="ctr" marL="0" marR="0" indent="0"/>
             <a:r>
-              <a:rPr lang="en-US" sz="3702" dirty="0" smtClean="0">
+              <a:rPr lang="en-US" sz="3702" dirty="0">
                 <a:solidFill>
                   <a:srgbClr val="000000"/>
                 </a:solidFill>
@@ -9075,13 +10458,13 @@
         </p:spPr>
         <p:txBody>
           <a:bodyPr wrap="square" rtlCol="0" anchor="ctr" lIns="91440" tIns="45720" rIns="91440" bIns="45720">
-            <a:normAutofit fontScale="100000" lnSpcReduction="0"/>
+            <a:normAutofit/>
           </a:bodyPr>
           <a:lstStyle/>
           <a:p>
             <a:pPr algn="ctr" marL="0" marR="0" indent="0"/>
             <a:r>
-              <a:rPr lang="en-US" sz="3702" dirty="0" smtClean="0">
+              <a:rPr lang="en-US" sz="3702" dirty="0">
                 <a:solidFill>
                   <a:srgbClr val="000000"/>
                 </a:solidFill>
@@ -9113,13 +10496,13 @@
         </p:spPr>
         <p:txBody>
           <a:bodyPr wrap="square" rtlCol="0" anchor="ctr" lIns="91440" tIns="45720" rIns="91440" bIns="45720">
-            <a:normAutofit fontScale="100000" lnSpcReduction="0"/>
+            <a:normAutofit/>
           </a:bodyPr>
           <a:lstStyle/>
           <a:p>
             <a:pPr algn="ctr" marL="0" marR="0" indent="0"/>
             <a:r>
-              <a:rPr lang="en-US" sz="3702" dirty="0" smtClean="0">
+              <a:rPr lang="en-US" sz="3702" dirty="0">
                 <a:solidFill>
                   <a:srgbClr val="000000"/>
                 </a:solidFill>
@@ -9151,13 +10534,13 @@
         </p:spPr>
         <p:txBody>
           <a:bodyPr wrap="square" rtlCol="0" anchor="ctr" lIns="91440" tIns="45720" rIns="91440" bIns="45720">
-            <a:normAutofit fontScale="100000" lnSpcReduction="0"/>
+            <a:normAutofit/>
           </a:bodyPr>
           <a:lstStyle/>
           <a:p>
             <a:pPr algn="ctr" marL="0" marR="0" indent="0"/>
             <a:r>
-              <a:rPr lang="en-US" sz="3702" dirty="0" smtClean="0">
+              <a:rPr lang="en-US" sz="3702" dirty="0">
                 <a:solidFill>
                   <a:srgbClr val="000000"/>
                 </a:solidFill>
@@ -9189,13 +10572,13 @@
         </p:spPr>
         <p:txBody>
           <a:bodyPr wrap="square" rtlCol="0" anchor="ctr" lIns="91440" tIns="45720" rIns="91440" bIns="45720">
-            <a:normAutofit fontScale="100000" lnSpcReduction="0"/>
+            <a:normAutofit/>
           </a:bodyPr>
           <a:lstStyle/>
           <a:p>
             <a:pPr algn="ctr" marL="0" marR="0" indent="0"/>
             <a:r>
-              <a:rPr lang="en-US" sz="3702" dirty="0" smtClean="0">
+              <a:rPr lang="en-US" sz="3702" dirty="0">
                 <a:solidFill>
                   <a:srgbClr val="000000"/>
                 </a:solidFill>
@@ -9225,13 +10608,13 @@
         </p:spPr>
         <p:txBody>
           <a:bodyPr wrap="square" rtlCol="0" anchor="ctr" lIns="91440" tIns="45720" rIns="91440" bIns="45720">
-            <a:normAutofit fontScale="100000" lnSpcReduction="0"/>
+            <a:normAutofit/>
           </a:bodyPr>
           <a:lstStyle/>
           <a:p>
             <a:pPr algn="ctr" marL="0" marR="0" indent="0"/>
             <a:r>
-              <a:rPr lang="en-US" sz="724" dirty="0" smtClean="0">
+              <a:rPr lang="en-US" sz="724" dirty="0">
                 <a:solidFill>
                   <a:srgbClr val="000000"/>
                 </a:solidFill>
@@ -9318,15 +10701,39 @@
             <a:tbl>
               <a:tblPr firstRow="1" bandRow="1"/>
               <a:tblGrid>
-                <a:gridCol w="1500000"/>
-                <a:gridCol w="2000000"/>
-                <a:gridCol w="2000000"/>
-                <a:gridCol w="2000000"/>
+                <a:gridCol w="1500000">
+                  <a:extLst>
+                    <a:ext uri="{9D8B030D-6E8A-4147-A177-3AD203B41FA5}">
+                      <a16:colId xmlns:a16="http://schemas.microsoft.com/office/drawing/2014/main" val="20000"/>
+                    </a:ext>
+                  </a:extLst>
+                </a:gridCol>
+                <a:gridCol w="2000000">
+                  <a:extLst>
+                    <a:ext uri="{9D8B030D-6E8A-4147-A177-3AD203B41FA5}">
+                      <a16:colId xmlns:a16="http://schemas.microsoft.com/office/drawing/2014/main" val="20001"/>
+                    </a:ext>
+                  </a:extLst>
+                </a:gridCol>
+                <a:gridCol w="2000000">
+                  <a:extLst>
+                    <a:ext uri="{9D8B030D-6E8A-4147-A177-3AD203B41FA5}">
+                      <a16:colId xmlns:a16="http://schemas.microsoft.com/office/drawing/2014/main" val="20002"/>
+                    </a:ext>
+                  </a:extLst>
+                </a:gridCol>
+                <a:gridCol w="2000000">
+                  <a:extLst>
+                    <a:ext uri="{9D8B030D-6E8A-4147-A177-3AD203B41FA5}">
+                      <a16:colId xmlns:a16="http://schemas.microsoft.com/office/drawing/2014/main" val="20003"/>
+                    </a:ext>
+                  </a:extLst>
+                </a:gridCol>
               </a:tblGrid>
               <a:tr h="400000">
                 <a:tc gridSpan="4">
                   <a:txBody>
-                    <a:bodyPr wrap="square"/>
+                    <a:bodyPr/>
                     <a:lstStyle/>
                     <a:p>
                       <a:r>
@@ -9349,7 +10756,9 @@
                   <a:txBody>
                     <a:bodyPr/>
                     <a:lstStyle/>
-                    <a:p/>
+                    <a:p>
+                      <a:endParaRPr/>
+                    </a:p>
                   </a:txBody>
                   <a:tcPr/>
                 </a:tc>
@@ -9357,7 +10766,9 @@
                   <a:txBody>
                     <a:bodyPr/>
                     <a:lstStyle/>
-                    <a:p/>
+                    <a:p>
+                      <a:endParaRPr/>
+                    </a:p>
                   </a:txBody>
                   <a:tcPr/>
                 </a:tc>
@@ -9365,15 +10776,22 @@
                   <a:txBody>
                     <a:bodyPr/>
                     <a:lstStyle/>
-                    <a:p/>
+                    <a:p>
+                      <a:endParaRPr/>
+                    </a:p>
                   </a:txBody>
                   <a:tcPr/>
                 </a:tc>
+                <a:extLst>
+                  <a:ext uri="{0D108BD9-81ED-4DB2-BD59-A6C34878D82A}">
+                    <a16:rowId xmlns:a16="http://schemas.microsoft.com/office/drawing/2014/main" val="10000"/>
+                  </a:ext>
+                </a:extLst>
               </a:tr>
               <a:tr h="400000">
                 <a:tc rowSpan="2">
                   <a:txBody>
-                    <a:bodyPr wrap="square"/>
+                    <a:bodyPr/>
                     <a:lstStyle/>
                     <a:p>
                       <a:r>
@@ -9394,7 +10812,7 @@
                 </a:tc>
                 <a:tc>
                   <a:txBody>
-                    <a:bodyPr wrap="square"/>
+                    <a:bodyPr/>
                     <a:lstStyle/>
                     <a:p>
                       <a:r>
@@ -9411,9 +10829,10 @@
                 </a:tc>
                 <a:tc>
                   <a:txBody>
-                    <a:bodyPr wrap="square"/>
-                    <a:lstStyle/>
-                    <a:p algn="r">
+                    <a:bodyPr/>
+                    <a:lstStyle/>
+                    <a:p>
+                      <a:pPr algn="r"/>
                       <a:r>
                         <a:rPr lang="en-US" dirty="0">
                           <a:solidFill>
@@ -9428,9 +10847,10 @@
                 </a:tc>
                 <a:tc>
                   <a:txBody>
-                    <a:bodyPr wrap="square"/>
-                    <a:lstStyle/>
-                    <a:p algn="r">
+                    <a:bodyPr/>
+                    <a:lstStyle/>
+                    <a:p>
+                      <a:pPr algn="r"/>
                       <a:r>
                         <a:rPr lang="en-US" dirty="0" b="1">
                           <a:solidFill>
@@ -9443,19 +10863,26 @@
                   </a:txBody>
                   <a:tcPr/>
                 </a:tc>
+                <a:extLst>
+                  <a:ext uri="{0D108BD9-81ED-4DB2-BD59-A6C34878D82A}">
+                    <a16:rowId xmlns:a16="http://schemas.microsoft.com/office/drawing/2014/main" val="10001"/>
+                  </a:ext>
+                </a:extLst>
               </a:tr>
               <a:tr h="400000">
                 <a:tc vMerge="1">
                   <a:txBody>
                     <a:bodyPr/>
                     <a:lstStyle/>
-                    <a:p/>
+                    <a:p>
+                      <a:endParaRPr/>
+                    </a:p>
                   </a:txBody>
                   <a:tcPr/>
                 </a:tc>
                 <a:tc>
                   <a:txBody>
-                    <a:bodyPr wrap="square"/>
+                    <a:bodyPr/>
                     <a:lstStyle/>
                     <a:p>
                       <a:r>
@@ -9472,9 +10899,10 @@
                 </a:tc>
                 <a:tc>
                   <a:txBody>
-                    <a:bodyPr wrap="square"/>
-                    <a:lstStyle/>
-                    <a:p algn="r">
+                    <a:bodyPr/>
+                    <a:lstStyle/>
+                    <a:p>
+                      <a:pPr algn="r"/>
                       <a:r>
                         <a:rPr lang="en-US" dirty="0">
                           <a:solidFill>
@@ -9489,9 +10917,10 @@
                 </a:tc>
                 <a:tc>
                   <a:txBody>
-                    <a:bodyPr wrap="square"/>
-                    <a:lstStyle/>
-                    <a:p algn="r">
+                    <a:bodyPr/>
+                    <a:lstStyle/>
+                    <a:p>
+                      <a:pPr algn="r"/>
                       <a:r>
                         <a:rPr lang="en-US" dirty="0" b="1">
                           <a:solidFill>
@@ -9504,11 +10933,16 @@
                   </a:txBody>
                   <a:tcPr/>
                 </a:tc>
+                <a:extLst>
+                  <a:ext uri="{0D108BD9-81ED-4DB2-BD59-A6C34878D82A}">
+                    <a16:rowId xmlns:a16="http://schemas.microsoft.com/office/drawing/2014/main" val="10002"/>
+                  </a:ext>
+                </a:extLst>
               </a:tr>
               <a:tr h="400000">
                 <a:tc rowSpan="2">
                   <a:txBody>
-                    <a:bodyPr wrap="square"/>
+                    <a:bodyPr/>
                     <a:lstStyle/>
                     <a:p>
                       <a:r>
@@ -9529,7 +10963,7 @@
                 </a:tc>
                 <a:tc>
                   <a:txBody>
-                    <a:bodyPr wrap="square"/>
+                    <a:bodyPr/>
                     <a:lstStyle/>
                     <a:p>
                       <a:r>
@@ -9546,9 +10980,10 @@
                 </a:tc>
                 <a:tc>
                   <a:txBody>
-                    <a:bodyPr wrap="square"/>
-                    <a:lstStyle/>
-                    <a:p algn="r">
+                    <a:bodyPr/>
+                    <a:lstStyle/>
+                    <a:p>
+                      <a:pPr algn="r"/>
                       <a:r>
                         <a:rPr lang="en-US" dirty="0">
                           <a:solidFill>
@@ -9563,9 +10998,10 @@
                 </a:tc>
                 <a:tc>
                   <a:txBody>
-                    <a:bodyPr wrap="square"/>
-                    <a:lstStyle/>
-                    <a:p algn="r">
+                    <a:bodyPr/>
+                    <a:lstStyle/>
+                    <a:p>
+                      <a:pPr algn="r"/>
                       <a:r>
                         <a:rPr lang="en-US" dirty="0" b="1">
                           <a:solidFill>
@@ -9578,19 +11014,26 @@
                   </a:txBody>
                   <a:tcPr/>
                 </a:tc>
+                <a:extLst>
+                  <a:ext uri="{0D108BD9-81ED-4DB2-BD59-A6C34878D82A}">
+                    <a16:rowId xmlns:a16="http://schemas.microsoft.com/office/drawing/2014/main" val="10003"/>
+                  </a:ext>
+                </a:extLst>
               </a:tr>
               <a:tr h="400000">
                 <a:tc vMerge="1">
                   <a:txBody>
                     <a:bodyPr/>
                     <a:lstStyle/>
-                    <a:p/>
+                    <a:p>
+                      <a:endParaRPr/>
+                    </a:p>
                   </a:txBody>
                   <a:tcPr/>
                 </a:tc>
                 <a:tc>
                   <a:txBody>
-                    <a:bodyPr wrap="square"/>
+                    <a:bodyPr/>
                     <a:lstStyle/>
                     <a:p>
                       <a:r>
@@ -9607,9 +11050,10 @@
                 </a:tc>
                 <a:tc>
                   <a:txBody>
-                    <a:bodyPr wrap="square"/>
-                    <a:lstStyle/>
-                    <a:p algn="r">
+                    <a:bodyPr/>
+                    <a:lstStyle/>
+                    <a:p>
+                      <a:pPr algn="r"/>
                       <a:r>
                         <a:rPr lang="en-US" dirty="0">
                           <a:solidFill>
@@ -9624,9 +11068,10 @@
                 </a:tc>
                 <a:tc>
                   <a:txBody>
-                    <a:bodyPr wrap="square"/>
-                    <a:lstStyle/>
-                    <a:p algn="r">
+                    <a:bodyPr/>
+                    <a:lstStyle/>
+                    <a:p>
+                      <a:pPr algn="r"/>
                       <a:r>
                         <a:rPr lang="en-US" dirty="0" b="1">
                           <a:solidFill>
@@ -9639,6 +11084,11 @@
                   </a:txBody>
                   <a:tcPr/>
                 </a:tc>
+                <a:extLst>
+                  <a:ext uri="{0D108BD9-81ED-4DB2-BD59-A6C34878D82A}">
+                    <a16:rowId xmlns:a16="http://schemas.microsoft.com/office/drawing/2014/main" val="10004"/>
+                  </a:ext>
+                </a:extLst>
               </a:tr>
             </a:tbl>
           </a:graphicData>
@@ -9664,13 +11114,13 @@
         </p:spPr>
         <p:txBody>
           <a:bodyPr wrap="square" rtlCol="0" anchor="ctr" lIns="91440" tIns="45720" rIns="91440" bIns="45720">
-            <a:normAutofit fontScale="100000" lnSpcReduction="0"/>
+            <a:normAutofit/>
           </a:bodyPr>
           <a:lstStyle/>
           <a:p>
             <a:pPr algn="ctr" marL="0" marR="0" indent="0"/>
             <a:r>
-              <a:rPr lang="en-US" sz="1152" dirty="0" smtClean="0">
+              <a:rPr lang="en-US" sz="1152" dirty="0">
                 <a:solidFill>
                   <a:srgbClr val="FFFFFF"/>
                 </a:solidFill>
@@ -9700,13 +11150,13 @@
         </p:spPr>
         <p:txBody>
           <a:bodyPr wrap="square" rtlCol="0" anchor="ctr" lIns="91440" tIns="45720" rIns="91440" bIns="45720">
-            <a:normAutofit fontScale="100000" lnSpcReduction="0"/>
+            <a:normAutofit/>
           </a:bodyPr>
           <a:lstStyle/>
           <a:p>
             <a:pPr algn="ctr" marL="0" marR="0" indent="0"/>
             <a:r>
-              <a:rPr lang="en-US" sz="1252" dirty="0" smtClean="0">
+              <a:rPr lang="en-US" sz="1252" dirty="0">
                 <a:solidFill>
                   <a:srgbClr val="000000"/>
                 </a:solidFill>
@@ -9736,13 +11186,13 @@
         </p:spPr>
         <p:txBody>
           <a:bodyPr wrap="square" rtlCol="0" anchor="ctr" lIns="91440" tIns="45720" rIns="91440" bIns="45720">
-            <a:normAutofit fontScale="100000" lnSpcReduction="0"/>
+            <a:normAutofit/>
           </a:bodyPr>
           <a:lstStyle/>
           <a:p>
             <a:pPr algn="ctr" marL="0" marR="0" indent="0"/>
             <a:r>
-              <a:rPr lang="en-US" sz="1252" dirty="0" smtClean="0">
+              <a:rPr lang="en-US" sz="1252" dirty="0">
                 <a:solidFill>
                   <a:srgbClr val="000000"/>
                 </a:solidFill>
@@ -9772,13 +11222,13 @@
         </p:spPr>
         <p:txBody>
           <a:bodyPr wrap="square" rtlCol="0" anchor="ctr" lIns="91440" tIns="45720" rIns="91440" bIns="45720">
-            <a:normAutofit fontScale="100000" lnSpcReduction="0"/>
+            <a:normAutofit/>
           </a:bodyPr>
           <a:lstStyle/>
           <a:p>
             <a:pPr algn="ctr" marL="0" marR="0" indent="0"/>
             <a:r>
-              <a:rPr lang="en-US" sz="1252" dirty="0" smtClean="0">
+              <a:rPr lang="en-US" sz="1252" dirty="0">
                 <a:solidFill>
                   <a:srgbClr val="000000"/>
                 </a:solidFill>
@@ -10053,14 +11503,32 @@
             <a:tbl>
               <a:tblPr firstRow="1" bandRow="1"/>
               <a:tblGrid>
-                <a:gridCol w="1500000"/>
-                <a:gridCol w="1500000"/>
-                <a:gridCol w="1500000"/>
+                <a:gridCol w="1500000">
+                  <a:extLst>
+                    <a:ext uri="{9D8B030D-6E8A-4147-A177-3AD203B41FA5}">
+                      <a16:colId xmlns:a16="http://schemas.microsoft.com/office/drawing/2014/main" val="20000"/>
+                    </a:ext>
+                  </a:extLst>
+                </a:gridCol>
+                <a:gridCol w="1500000">
+                  <a:extLst>
+                    <a:ext uri="{9D8B030D-6E8A-4147-A177-3AD203B41FA5}">
+                      <a16:colId xmlns:a16="http://schemas.microsoft.com/office/drawing/2014/main" val="20001"/>
+                    </a:ext>
+                  </a:extLst>
+                </a:gridCol>
+                <a:gridCol w="1500000">
+                  <a:extLst>
+                    <a:ext uri="{9D8B030D-6E8A-4147-A177-3AD203B41FA5}">
+                      <a16:colId xmlns:a16="http://schemas.microsoft.com/office/drawing/2014/main" val="20002"/>
+                    </a:ext>
+                  </a:extLst>
+                </a:gridCol>
               </a:tblGrid>
               <a:tr h="400000">
                 <a:tc>
                   <a:txBody>
-                    <a:bodyPr wrap="square"/>
+                    <a:bodyPr/>
                     <a:lstStyle/>
                     <a:p>
                       <a:r>
@@ -10077,7 +11545,7 @@
                 </a:tc>
                 <a:tc>
                   <a:txBody>
-                    <a:bodyPr wrap="square"/>
+                    <a:bodyPr/>
                     <a:lstStyle/>
                     <a:p>
                       <a:r>
@@ -10094,7 +11562,7 @@
                 </a:tc>
                 <a:tc>
                   <a:txBody>
-                    <a:bodyPr wrap="square"/>
+                    <a:bodyPr/>
                     <a:lstStyle/>
                     <a:p>
                       <a:r>
@@ -10109,11 +11577,16 @@
                     </a:solidFill>
                   </a:tcPr>
                 </a:tc>
+                <a:extLst>
+                  <a:ext uri="{0D108BD9-81ED-4DB2-BD59-A6C34878D82A}">
+                    <a16:rowId xmlns:a16="http://schemas.microsoft.com/office/drawing/2014/main" val="10000"/>
+                  </a:ext>
+                </a:extLst>
               </a:tr>
               <a:tr h="400000">
                 <a:tc>
                   <a:txBody>
-                    <a:bodyPr wrap="square"/>
+                    <a:bodyPr/>
                     <a:lstStyle/>
                     <a:p>
                       <a:r>
@@ -10126,7 +11599,7 @@
                 </a:tc>
                 <a:tc>
                   <a:txBody>
-                    <a:bodyPr wrap="square"/>
+                    <a:bodyPr/>
                     <a:lstStyle/>
                     <a:p>
                       <a:r>
@@ -10139,7 +11612,7 @@
                 </a:tc>
                 <a:tc>
                   <a:txBody>
-                    <a:bodyPr wrap="square"/>
+                    <a:bodyPr/>
                     <a:lstStyle/>
                     <a:p>
                       <a:r>
@@ -10154,11 +11627,16 @@
                     </a:solidFill>
                   </a:tcPr>
                 </a:tc>
+                <a:extLst>
+                  <a:ext uri="{0D108BD9-81ED-4DB2-BD59-A6C34878D82A}">
+                    <a16:rowId xmlns:a16="http://schemas.microsoft.com/office/drawing/2014/main" val="10001"/>
+                  </a:ext>
+                </a:extLst>
               </a:tr>
               <a:tr h="400000">
                 <a:tc>
                   <a:txBody>
-                    <a:bodyPr wrap="square"/>
+                    <a:bodyPr/>
                     <a:lstStyle/>
                     <a:p>
                       <a:r>
@@ -10175,7 +11653,7 @@
                 </a:tc>
                 <a:tc>
                   <a:txBody>
-                    <a:bodyPr wrap="square"/>
+                    <a:bodyPr/>
                     <a:lstStyle/>
                     <a:p>
                       <a:r>
@@ -10192,7 +11670,7 @@
                 </a:tc>
                 <a:tc>
                   <a:txBody>
-                    <a:bodyPr wrap="square"/>
+                    <a:bodyPr/>
                     <a:lstStyle/>
                     <a:p>
                       <a:r>
@@ -10207,11 +11685,16 @@
                     </a:solidFill>
                   </a:tcPr>
                 </a:tc>
+                <a:extLst>
+                  <a:ext uri="{0D108BD9-81ED-4DB2-BD59-A6C34878D82A}">
+                    <a16:rowId xmlns:a16="http://schemas.microsoft.com/office/drawing/2014/main" val="10002"/>
+                  </a:ext>
+                </a:extLst>
               </a:tr>
               <a:tr h="400000">
                 <a:tc>
                   <a:txBody>
-                    <a:bodyPr wrap="square"/>
+                    <a:bodyPr/>
                     <a:lstStyle/>
                     <a:p>
                       <a:r>
@@ -10224,7 +11707,7 @@
                 </a:tc>
                 <a:tc>
                   <a:txBody>
-                    <a:bodyPr wrap="square"/>
+                    <a:bodyPr/>
                     <a:lstStyle/>
                     <a:p>
                       <a:r>
@@ -10237,7 +11720,7 @@
                 </a:tc>
                 <a:tc>
                   <a:txBody>
-                    <a:bodyPr wrap="square"/>
+                    <a:bodyPr/>
                     <a:lstStyle/>
                     <a:p>
                       <a:r>
@@ -10252,6 +11735,11 @@
                     </a:solidFill>
                   </a:tcPr>
                 </a:tc>
+                <a:extLst>
+                  <a:ext uri="{0D108BD9-81ED-4DB2-BD59-A6C34878D82A}">
+                    <a16:rowId xmlns:a16="http://schemas.microsoft.com/office/drawing/2014/main" val="10003"/>
+                  </a:ext>
+                </a:extLst>
               </a:tr>
             </a:tbl>
           </a:graphicData>
@@ -10449,13 +11937,13 @@
         </p:spPr>
         <p:txBody>
           <a:bodyPr wrap="square" rtlCol="0" anchor="ctr" lIns="91440" tIns="45720" rIns="91440" bIns="45720">
-            <a:normAutofit fontScale="100000" lnSpcReduction="0"/>
+            <a:normAutofit/>
           </a:bodyPr>
           <a:lstStyle/>
           <a:p>
             <a:pPr algn="ctr" marL="0" marR="0" indent="0"/>
             <a:r>
-              <a:rPr lang="en-US" sz="3200" dirty="0" smtClean="0">
+              <a:rPr lang="en-US" sz="3200" dirty="0">
                 <a:solidFill>
                   <a:srgbClr val="FFFFFF"/>
                 </a:solidFill>
@@ -10485,13 +11973,13 @@
         </p:spPr>
         <p:txBody>
           <a:bodyPr wrap="square" rtlCol="0" anchor="ctr" lIns="91440" tIns="45720" rIns="91440" bIns="45720">
-            <a:normAutofit fontScale="100000" lnSpcReduction="0"/>
+            <a:normAutofit/>
           </a:bodyPr>
           <a:lstStyle/>
           <a:p>
             <a:pPr algn="ctr" marL="0" marR="0" indent="0"/>
             <a:r>
-              <a:rPr lang="en-US" sz="4114" dirty="0" smtClean="0">
+              <a:rPr lang="en-US" sz="4114" dirty="0">
                 <a:solidFill>
                   <a:srgbClr val="000000"/>
                 </a:solidFill>
@@ -10521,13 +12009,13 @@
         </p:spPr>
         <p:txBody>
           <a:bodyPr wrap="square" rtlCol="0" anchor="ctr" lIns="91440" tIns="45720" rIns="91440" bIns="45720">
-            <a:normAutofit fontScale="100000" lnSpcReduction="0"/>
+            <a:normAutofit/>
           </a:bodyPr>
           <a:lstStyle/>
           <a:p>
             <a:pPr algn="ctr" marL="0" marR="0" indent="0"/>
             <a:r>
-              <a:rPr lang="en-US" sz="4114" dirty="0" smtClean="0">
+              <a:rPr lang="en-US" sz="4114" dirty="0">
                 <a:solidFill>
                   <a:srgbClr val="FFFFFF"/>
                 </a:solidFill>
@@ -10557,13 +12045,13 @@
         </p:spPr>
         <p:txBody>
           <a:bodyPr wrap="square" rtlCol="0" anchor="ctr" lIns="91440" tIns="45720" rIns="91440" bIns="45720">
-            <a:normAutofit fontScale="100000" lnSpcReduction="0"/>
+            <a:normAutofit/>
           </a:bodyPr>
           <a:lstStyle/>
           <a:p>
             <a:pPr algn="ctr" marL="0" marR="0" indent="0"/>
             <a:r>
-              <a:rPr lang="en-US" sz="2520" dirty="0" smtClean="0">
+              <a:rPr lang="en-US" sz="2520" dirty="0">
                 <a:solidFill>
                   <a:srgbClr val="FFFFFF"/>
                 </a:solidFill>
@@ -10593,13 +12081,13 @@
         </p:spPr>
         <p:txBody>
           <a:bodyPr wrap="square" rtlCol="0" anchor="ctr" lIns="91440" tIns="45720" rIns="91440" bIns="45720">
-            <a:normAutofit fontScale="100000" lnSpcReduction="0"/>
+            <a:normAutofit/>
           </a:bodyPr>
           <a:lstStyle/>
           <a:p>
             <a:pPr algn="ctr" marL="0" marR="0" indent="0"/>
             <a:r>
-              <a:rPr lang="en-US" sz="2880" dirty="0" smtClean="0">
+              <a:rPr lang="en-US" sz="2880" dirty="0">
                 <a:solidFill>
                   <a:srgbClr val="000000"/>
                 </a:solidFill>
@@ -10620,12 +12108,12 @@
 <file path=ppt/theme/theme1.xml><?xml version="1.0" encoding="utf-8"?>
 <a:theme xmlns:a="http://schemas.openxmlformats.org/drawingml/2006/main" name="Office Theme">
   <a:themeElements>
-    <a:clrScheme name="Office Theme">
+    <a:clrScheme name="Office">
       <a:dk1>
-        <a:srgbClr val="000000"/>
+        <a:sysClr val="windowText" lastClr="000000"/>
       </a:dk1>
       <a:lt1>
-        <a:srgbClr val="FFFFFF"/>
+        <a:sysClr val="window" lastClr="FFFFFF"/>
       </a:lt1>
       <a:dk2>
         <a:srgbClr val="1F497D"/>
@@ -10660,14 +12148,74 @@
     </a:clrScheme>
     <a:fontScheme name="Office">
       <a:majorFont>
-        <a:latin typeface="Calibri Light"/>
+        <a:latin typeface="Calibri"/>
         <a:ea typeface=""/>
         <a:cs typeface=""/>
+        <a:font script="Jpan" typeface="ＭＳ Ｐゴシック"/>
+        <a:font script="Hang" typeface="맑은 고딕"/>
+        <a:font script="Hans" typeface="宋体"/>
+        <a:font script="Hant" typeface="新細明體"/>
+        <a:font script="Arab" typeface="Times New Roman"/>
+        <a:font script="Hebr" typeface="Times New Roman"/>
+        <a:font script="Thai" typeface="Angsana New"/>
+        <a:font script="Ethi" typeface="Nyala"/>
+        <a:font script="Beng" typeface="Vrinda"/>
+        <a:font script="Gujr" typeface="Shruti"/>
+        <a:font script="Khmr" typeface="MoolBoran"/>
+        <a:font script="Knda" typeface="Tunga"/>
+        <a:font script="Guru" typeface="Raavi"/>
+        <a:font script="Cans" typeface="Euphemia"/>
+        <a:font script="Cher" typeface="Plantagenet Cherokee"/>
+        <a:font script="Yiii" typeface="Microsoft Yi Baiti"/>
+        <a:font script="Tibt" typeface="Microsoft Himalaya"/>
+        <a:font script="Thaa" typeface="MV Boli"/>
+        <a:font script="Deva" typeface="Mangal"/>
+        <a:font script="Telu" typeface="Gautami"/>
+        <a:font script="Taml" typeface="Latha"/>
+        <a:font script="Syrc" typeface="Estrangelo Edessa"/>
+        <a:font script="Orya" typeface="Kalinga"/>
+        <a:font script="Mlym" typeface="Kartika"/>
+        <a:font script="Laoo" typeface="DokChampa"/>
+        <a:font script="Sinh" typeface="Iskoola Pota"/>
+        <a:font script="Mong" typeface="Mongolian Baiti"/>
+        <a:font script="Viet" typeface="Times New Roman"/>
+        <a:font script="Uigh" typeface="Microsoft Uighur"/>
+        <a:font script="Geor" typeface="Sylfaen"/>
       </a:majorFont>
       <a:minorFont>
         <a:latin typeface="Calibri"/>
         <a:ea typeface=""/>
         <a:cs typeface=""/>
+        <a:font script="Jpan" typeface="ＭＳ Ｐゴシック"/>
+        <a:font script="Hang" typeface="맑은 고딕"/>
+        <a:font script="Hans" typeface="宋体"/>
+        <a:font script="Hant" typeface="新細明體"/>
+        <a:font script="Arab" typeface="Arial"/>
+        <a:font script="Hebr" typeface="Arial"/>
+        <a:font script="Thai" typeface="Cordia New"/>
+        <a:font script="Ethi" typeface="Nyala"/>
+        <a:font script="Beng" typeface="Vrinda"/>
+        <a:font script="Gujr" typeface="Shruti"/>
+        <a:font script="Khmr" typeface="DaunPenh"/>
+        <a:font script="Knda" typeface="Tunga"/>
+        <a:font script="Guru" typeface="Raavi"/>
+        <a:font script="Cans" typeface="Euphemia"/>
+        <a:font script="Cher" typeface="Plantagenet Cherokee"/>
+        <a:font script="Yiii" typeface="Microsoft Yi Baiti"/>
+        <a:font script="Tibt" typeface="Microsoft Himalaya"/>
+        <a:font script="Thaa" typeface="MV Boli"/>
+        <a:font script="Deva" typeface="Mangal"/>
+        <a:font script="Telu" typeface="Gautami"/>
+        <a:font script="Taml" typeface="Latha"/>
+        <a:font script="Syrc" typeface="Estrangelo Edessa"/>
+        <a:font script="Orya" typeface="Kalinga"/>
+        <a:font script="Mlym" typeface="Kartika"/>
+        <a:font script="Laoo" typeface="DokChampa"/>
+        <a:font script="Sinh" typeface="Iskoola Pota"/>
+        <a:font script="Mong" typeface="Mongolian Baiti"/>
+        <a:font script="Viet" typeface="Arial"/>
+        <a:font script="Uigh" typeface="Microsoft Uighur"/>
+        <a:font script="Geor" typeface="Sylfaen"/>
       </a:minorFont>
     </a:fontScheme>
     <a:fmtScheme name="Office">
@@ -10702,20 +12250,16 @@
           <a:gsLst>
             <a:gs pos="0">
               <a:schemeClr val="phClr">
-                <a:shade val="51000"/>
-                <a:satMod val="130000"/>
-              </a:schemeClr>
-            </a:gs>
-            <a:gs pos="80000">
-              <a:schemeClr val="phClr">
-                <a:shade val="93000"/>
+                <a:tint val="100000"/>
+                <a:shade val="100000"/>
                 <a:satMod val="130000"/>
               </a:schemeClr>
             </a:gs>
             <a:gs pos="100000">
               <a:schemeClr val="phClr">
-                <a:shade val="94000"/>
-                <a:satMod val="135000"/>
+                <a:tint val="50000"/>
+                <a:shade val="100000"/>
+                <a:satMod val="350000"/>
               </a:schemeClr>
             </a:gs>
           </a:gsLst>
@@ -10747,13 +12291,42 @@
       </a:lnStyleLst>
       <a:effectStyleLst>
         <a:effectStyle>
-          <a:effectLst/>
+          <a:effectLst>
+            <a:outerShdw blurRad="40000" dist="20000" dir="5400000" rotWithShape="0">
+              <a:srgbClr val="000000">
+                <a:alpha val="38000"/>
+              </a:srgbClr>
+            </a:outerShdw>
+          </a:effectLst>
         </a:effectStyle>
         <a:effectStyle>
-          <a:effectLst/>
+          <a:effectLst>
+            <a:outerShdw blurRad="40000" dist="23000" dir="5400000" rotWithShape="0">
+              <a:srgbClr val="000000">
+                <a:alpha val="35000"/>
+              </a:srgbClr>
+            </a:outerShdw>
+          </a:effectLst>
         </a:effectStyle>
         <a:effectStyle>
-          <a:effectLst/>
+          <a:effectLst>
+            <a:outerShdw blurRad="40000" dist="23000" dir="5400000" rotWithShape="0">
+              <a:srgbClr val="000000">
+                <a:alpha val="35000"/>
+              </a:srgbClr>
+            </a:outerShdw>
+          </a:effectLst>
+          <a:scene3d>
+            <a:camera prst="orthographicFront">
+              <a:rot lat="0" lon="0" rev="0"/>
+            </a:camera>
+            <a:lightRig rig="threePt" dir="t">
+              <a:rot lat="0" lon="0" rev="1200000"/>
+            </a:lightRig>
+          </a:scene3d>
+          <a:sp3d>
+            <a:bevelT w="63500" h="25400"/>
+          </a:sp3d>
         </a:effectStyle>
       </a:effectStyleLst>
       <a:bgFillStyleLst>
@@ -10808,7 +12381,686 @@
       </a:bgFillStyleLst>
     </a:fmtScheme>
   </a:themeElements>
-  <a:objectDefaults/>
+  <a:objectDefaults>
+    <a:spDef>
+      <a:spPr/>
+      <a:bodyPr/>
+      <a:lstStyle/>
+      <a:style>
+        <a:lnRef idx="1">
+          <a:schemeClr val="accent1"/>
+        </a:lnRef>
+        <a:fillRef idx="3">
+          <a:schemeClr val="accent1"/>
+        </a:fillRef>
+        <a:effectRef idx="2">
+          <a:schemeClr val="accent1"/>
+        </a:effectRef>
+        <a:fontRef idx="minor">
+          <a:schemeClr val="lt1"/>
+        </a:fontRef>
+      </a:style>
+    </a:spDef>
+    <a:lnDef>
+      <a:spPr/>
+      <a:bodyPr/>
+      <a:lstStyle/>
+      <a:style>
+        <a:lnRef idx="2">
+          <a:schemeClr val="accent1"/>
+        </a:lnRef>
+        <a:fillRef idx="0">
+          <a:schemeClr val="accent1"/>
+        </a:fillRef>
+        <a:effectRef idx="1">
+          <a:schemeClr val="accent1"/>
+        </a:effectRef>
+        <a:fontRef idx="minor">
+          <a:schemeClr val="tx1"/>
+        </a:fontRef>
+      </a:style>
+    </a:lnDef>
+  </a:objectDefaults>
+  <a:extraClrSchemeLst/>
+</a:theme>
+</file>
+
+<file path=ppt/theme/theme2.xml><?xml version="1.0" encoding="utf-8"?>
+<a:theme xmlns:a="http://schemas.openxmlformats.org/drawingml/2006/main" name="Office Theme">
+  <a:themeElements>
+    <a:clrScheme name="Office">
+      <a:dk1>
+        <a:sysClr val="windowText" lastClr="000000"/>
+      </a:dk1>
+      <a:lt1>
+        <a:sysClr val="window" lastClr="FFFFFF"/>
+      </a:lt1>
+      <a:dk2>
+        <a:srgbClr val="1F497D"/>
+      </a:dk2>
+      <a:lt2>
+        <a:srgbClr val="EEECE1"/>
+      </a:lt2>
+      <a:accent1>
+        <a:srgbClr val="4F81BD"/>
+      </a:accent1>
+      <a:accent2>
+        <a:srgbClr val="C0504D"/>
+      </a:accent2>
+      <a:accent3>
+        <a:srgbClr val="9BBB59"/>
+      </a:accent3>
+      <a:accent4>
+        <a:srgbClr val="8064A2"/>
+      </a:accent4>
+      <a:accent5>
+        <a:srgbClr val="4BACC6"/>
+      </a:accent5>
+      <a:accent6>
+        <a:srgbClr val="F79646"/>
+      </a:accent6>
+      <a:hlink>
+        <a:srgbClr val="0000FF"/>
+      </a:hlink>
+      <a:folHlink>
+        <a:srgbClr val="800080"/>
+      </a:folHlink>
+    </a:clrScheme>
+    <a:fontScheme name="Office">
+      <a:majorFont>
+        <a:latin typeface="Calibri"/>
+        <a:ea typeface=""/>
+        <a:cs typeface=""/>
+        <a:font script="Jpan" typeface="ＭＳ Ｐゴシック"/>
+        <a:font script="Hang" typeface="맑은 고딕"/>
+        <a:font script="Hans" typeface="宋体"/>
+        <a:font script="Hant" typeface="新細明體"/>
+        <a:font script="Arab" typeface="Times New Roman"/>
+        <a:font script="Hebr" typeface="Times New Roman"/>
+        <a:font script="Thai" typeface="Angsana New"/>
+        <a:font script="Ethi" typeface="Nyala"/>
+        <a:font script="Beng" typeface="Vrinda"/>
+        <a:font script="Gujr" typeface="Shruti"/>
+        <a:font script="Khmr" typeface="MoolBoran"/>
+        <a:font script="Knda" typeface="Tunga"/>
+        <a:font script="Guru" typeface="Raavi"/>
+        <a:font script="Cans" typeface="Euphemia"/>
+        <a:font script="Cher" typeface="Plantagenet Cherokee"/>
+        <a:font script="Yiii" typeface="Microsoft Yi Baiti"/>
+        <a:font script="Tibt" typeface="Microsoft Himalaya"/>
+        <a:font script="Thaa" typeface="MV Boli"/>
+        <a:font script="Deva" typeface="Mangal"/>
+        <a:font script="Telu" typeface="Gautami"/>
+        <a:font script="Taml" typeface="Latha"/>
+        <a:font script="Syrc" typeface="Estrangelo Edessa"/>
+        <a:font script="Orya" typeface="Kalinga"/>
+        <a:font script="Mlym" typeface="Kartika"/>
+        <a:font script="Laoo" typeface="DokChampa"/>
+        <a:font script="Sinh" typeface="Iskoola Pota"/>
+        <a:font script="Mong" typeface="Mongolian Baiti"/>
+        <a:font script="Viet" typeface="Times New Roman"/>
+        <a:font script="Uigh" typeface="Microsoft Uighur"/>
+        <a:font script="Geor" typeface="Sylfaen"/>
+      </a:majorFont>
+      <a:minorFont>
+        <a:latin typeface="Calibri"/>
+        <a:ea typeface=""/>
+        <a:cs typeface=""/>
+        <a:font script="Jpan" typeface="ＭＳ Ｐゴシック"/>
+        <a:font script="Hang" typeface="맑은 고딕"/>
+        <a:font script="Hans" typeface="宋体"/>
+        <a:font script="Hant" typeface="新細明體"/>
+        <a:font script="Arab" typeface="Arial"/>
+        <a:font script="Hebr" typeface="Arial"/>
+        <a:font script="Thai" typeface="Cordia New"/>
+        <a:font script="Ethi" typeface="Nyala"/>
+        <a:font script="Beng" typeface="Vrinda"/>
+        <a:font script="Gujr" typeface="Shruti"/>
+        <a:font script="Khmr" typeface="DaunPenh"/>
+        <a:font script="Knda" typeface="Tunga"/>
+        <a:font script="Guru" typeface="Raavi"/>
+        <a:font script="Cans" typeface="Euphemia"/>
+        <a:font script="Cher" typeface="Plantagenet Cherokee"/>
+        <a:font script="Yiii" typeface="Microsoft Yi Baiti"/>
+        <a:font script="Tibt" typeface="Microsoft Himalaya"/>
+        <a:font script="Thaa" typeface="MV Boli"/>
+        <a:font script="Deva" typeface="Mangal"/>
+        <a:font script="Telu" typeface="Gautami"/>
+        <a:font script="Taml" typeface="Latha"/>
+        <a:font script="Syrc" typeface="Estrangelo Edessa"/>
+        <a:font script="Orya" typeface="Kalinga"/>
+        <a:font script="Mlym" typeface="Kartika"/>
+        <a:font script="Laoo" typeface="DokChampa"/>
+        <a:font script="Sinh" typeface="Iskoola Pota"/>
+        <a:font script="Mong" typeface="Mongolian Baiti"/>
+        <a:font script="Viet" typeface="Arial"/>
+        <a:font script="Uigh" typeface="Microsoft Uighur"/>
+        <a:font script="Geor" typeface="Sylfaen"/>
+      </a:minorFont>
+    </a:fontScheme>
+    <a:fmtScheme name="Office">
+      <a:fillStyleLst>
+        <a:solidFill>
+          <a:schemeClr val="phClr"/>
+        </a:solidFill>
+        <a:gradFill rotWithShape="1">
+          <a:gsLst>
+            <a:gs pos="0">
+              <a:schemeClr val="phClr">
+                <a:tint val="50000"/>
+                <a:satMod val="300000"/>
+              </a:schemeClr>
+            </a:gs>
+            <a:gs pos="35000">
+              <a:schemeClr val="phClr">
+                <a:tint val="37000"/>
+                <a:satMod val="300000"/>
+              </a:schemeClr>
+            </a:gs>
+            <a:gs pos="100000">
+              <a:schemeClr val="phClr">
+                <a:tint val="15000"/>
+                <a:satMod val="350000"/>
+              </a:schemeClr>
+            </a:gs>
+          </a:gsLst>
+          <a:lin ang="16200000" scaled="1"/>
+        </a:gradFill>
+        <a:gradFill rotWithShape="1">
+          <a:gsLst>
+            <a:gs pos="0">
+              <a:schemeClr val="phClr">
+                <a:tint val="100000"/>
+                <a:shade val="100000"/>
+                <a:satMod val="130000"/>
+              </a:schemeClr>
+            </a:gs>
+            <a:gs pos="100000">
+              <a:schemeClr val="phClr">
+                <a:tint val="50000"/>
+                <a:shade val="100000"/>
+                <a:satMod val="350000"/>
+              </a:schemeClr>
+            </a:gs>
+          </a:gsLst>
+          <a:lin ang="16200000" scaled="0"/>
+        </a:gradFill>
+      </a:fillStyleLst>
+      <a:lnStyleLst>
+        <a:ln w="9525" cap="flat" cmpd="sng" algn="ctr">
+          <a:solidFill>
+            <a:schemeClr val="phClr">
+              <a:shade val="95000"/>
+              <a:satMod val="105000"/>
+            </a:schemeClr>
+          </a:solidFill>
+          <a:prstDash val="solid"/>
+        </a:ln>
+        <a:ln w="25400" cap="flat" cmpd="sng" algn="ctr">
+          <a:solidFill>
+            <a:schemeClr val="phClr"/>
+          </a:solidFill>
+          <a:prstDash val="solid"/>
+        </a:ln>
+        <a:ln w="38100" cap="flat" cmpd="sng" algn="ctr">
+          <a:solidFill>
+            <a:schemeClr val="phClr"/>
+          </a:solidFill>
+          <a:prstDash val="solid"/>
+        </a:ln>
+      </a:lnStyleLst>
+      <a:effectStyleLst>
+        <a:effectStyle>
+          <a:effectLst>
+            <a:outerShdw blurRad="40000" dist="20000" dir="5400000" rotWithShape="0">
+              <a:srgbClr val="000000">
+                <a:alpha val="38000"/>
+              </a:srgbClr>
+            </a:outerShdw>
+          </a:effectLst>
+        </a:effectStyle>
+        <a:effectStyle>
+          <a:effectLst>
+            <a:outerShdw blurRad="40000" dist="23000" dir="5400000" rotWithShape="0">
+              <a:srgbClr val="000000">
+                <a:alpha val="35000"/>
+              </a:srgbClr>
+            </a:outerShdw>
+          </a:effectLst>
+        </a:effectStyle>
+        <a:effectStyle>
+          <a:effectLst>
+            <a:outerShdw blurRad="40000" dist="23000" dir="5400000" rotWithShape="0">
+              <a:srgbClr val="000000">
+                <a:alpha val="35000"/>
+              </a:srgbClr>
+            </a:outerShdw>
+          </a:effectLst>
+          <a:scene3d>
+            <a:camera prst="orthographicFront">
+              <a:rot lat="0" lon="0" rev="0"/>
+            </a:camera>
+            <a:lightRig rig="threePt" dir="t">
+              <a:rot lat="0" lon="0" rev="1200000"/>
+            </a:lightRig>
+          </a:scene3d>
+          <a:sp3d>
+            <a:bevelT w="63500" h="25400"/>
+          </a:sp3d>
+        </a:effectStyle>
+      </a:effectStyleLst>
+      <a:bgFillStyleLst>
+        <a:solidFill>
+          <a:schemeClr val="phClr"/>
+        </a:solidFill>
+        <a:gradFill rotWithShape="1">
+          <a:gsLst>
+            <a:gs pos="0">
+              <a:schemeClr val="phClr">
+                <a:tint val="40000"/>
+                <a:satMod val="350000"/>
+              </a:schemeClr>
+            </a:gs>
+            <a:gs pos="40000">
+              <a:schemeClr val="phClr">
+                <a:tint val="45000"/>
+                <a:shade val="99000"/>
+                <a:satMod val="350000"/>
+              </a:schemeClr>
+            </a:gs>
+            <a:gs pos="100000">
+              <a:schemeClr val="phClr">
+                <a:shade val="20000"/>
+                <a:satMod val="255000"/>
+              </a:schemeClr>
+            </a:gs>
+          </a:gsLst>
+          <a:path path="circle">
+            <a:fillToRect l="50000" t="-80000" r="50000" b="180000"/>
+          </a:path>
+        </a:gradFill>
+        <a:gradFill rotWithShape="1">
+          <a:gsLst>
+            <a:gs pos="0">
+              <a:schemeClr val="phClr">
+                <a:tint val="80000"/>
+                <a:satMod val="300000"/>
+              </a:schemeClr>
+            </a:gs>
+            <a:gs pos="100000">
+              <a:schemeClr val="phClr">
+                <a:shade val="30000"/>
+                <a:satMod val="200000"/>
+              </a:schemeClr>
+            </a:gs>
+          </a:gsLst>
+          <a:path path="circle">
+            <a:fillToRect l="50000" t="50000" r="50000" b="50000"/>
+          </a:path>
+        </a:gradFill>
+      </a:bgFillStyleLst>
+    </a:fmtScheme>
+  </a:themeElements>
+  <a:objectDefaults>
+    <a:spDef>
+      <a:spPr/>
+      <a:bodyPr/>
+      <a:lstStyle/>
+      <a:style>
+        <a:lnRef idx="1">
+          <a:schemeClr val="accent1"/>
+        </a:lnRef>
+        <a:fillRef idx="3">
+          <a:schemeClr val="accent1"/>
+        </a:fillRef>
+        <a:effectRef idx="2">
+          <a:schemeClr val="accent1"/>
+        </a:effectRef>
+        <a:fontRef idx="minor">
+          <a:schemeClr val="lt1"/>
+        </a:fontRef>
+      </a:style>
+    </a:spDef>
+    <a:lnDef>
+      <a:spPr/>
+      <a:bodyPr/>
+      <a:lstStyle/>
+      <a:style>
+        <a:lnRef idx="2">
+          <a:schemeClr val="accent1"/>
+        </a:lnRef>
+        <a:fillRef idx="0">
+          <a:schemeClr val="accent1"/>
+        </a:fillRef>
+        <a:effectRef idx="1">
+          <a:schemeClr val="accent1"/>
+        </a:effectRef>
+        <a:fontRef idx="minor">
+          <a:schemeClr val="tx1"/>
+        </a:fontRef>
+      </a:style>
+    </a:lnDef>
+  </a:objectDefaults>
+  <a:extraClrSchemeLst/>
+</a:theme>
+</file>
+
+<file path=ppt/theme/theme3.xml><?xml version="1.0" encoding="utf-8"?>
+<a:theme xmlns:a="http://schemas.openxmlformats.org/drawingml/2006/main" name="Office Theme">
+  <a:themeElements>
+    <a:clrScheme name="Office">
+      <a:dk1>
+        <a:sysClr val="windowText" lastClr="000000"/>
+      </a:dk1>
+      <a:lt1>
+        <a:sysClr val="window" lastClr="FFFFFF"/>
+      </a:lt1>
+      <a:dk2>
+        <a:srgbClr val="1F497D"/>
+      </a:dk2>
+      <a:lt2>
+        <a:srgbClr val="EEECE1"/>
+      </a:lt2>
+      <a:accent1>
+        <a:srgbClr val="4F81BD"/>
+      </a:accent1>
+      <a:accent2>
+        <a:srgbClr val="C0504D"/>
+      </a:accent2>
+      <a:accent3>
+        <a:srgbClr val="9BBB59"/>
+      </a:accent3>
+      <a:accent4>
+        <a:srgbClr val="8064A2"/>
+      </a:accent4>
+      <a:accent5>
+        <a:srgbClr val="4BACC6"/>
+      </a:accent5>
+      <a:accent6>
+        <a:srgbClr val="F79646"/>
+      </a:accent6>
+      <a:hlink>
+        <a:srgbClr val="0000FF"/>
+      </a:hlink>
+      <a:folHlink>
+        <a:srgbClr val="800080"/>
+      </a:folHlink>
+    </a:clrScheme>
+    <a:fontScheme name="Office">
+      <a:majorFont>
+        <a:latin typeface="Calibri"/>
+        <a:ea typeface=""/>
+        <a:cs typeface=""/>
+        <a:font script="Jpan" typeface="ＭＳ Ｐゴシック"/>
+        <a:font script="Hang" typeface="맑은 고딕"/>
+        <a:font script="Hans" typeface="宋体"/>
+        <a:font script="Hant" typeface="新細明體"/>
+        <a:font script="Arab" typeface="Times New Roman"/>
+        <a:font script="Hebr" typeface="Times New Roman"/>
+        <a:font script="Thai" typeface="Angsana New"/>
+        <a:font script="Ethi" typeface="Nyala"/>
+        <a:font script="Beng" typeface="Vrinda"/>
+        <a:font script="Gujr" typeface="Shruti"/>
+        <a:font script="Khmr" typeface="MoolBoran"/>
+        <a:font script="Knda" typeface="Tunga"/>
+        <a:font script="Guru" typeface="Raavi"/>
+        <a:font script="Cans" typeface="Euphemia"/>
+        <a:font script="Cher" typeface="Plantagenet Cherokee"/>
+        <a:font script="Yiii" typeface="Microsoft Yi Baiti"/>
+        <a:font script="Tibt" typeface="Microsoft Himalaya"/>
+        <a:font script="Thaa" typeface="MV Boli"/>
+        <a:font script="Deva" typeface="Mangal"/>
+        <a:font script="Telu" typeface="Gautami"/>
+        <a:font script="Taml" typeface="Latha"/>
+        <a:font script="Syrc" typeface="Estrangelo Edessa"/>
+        <a:font script="Orya" typeface="Kalinga"/>
+        <a:font script="Mlym" typeface="Kartika"/>
+        <a:font script="Laoo" typeface="DokChampa"/>
+        <a:font script="Sinh" typeface="Iskoola Pota"/>
+        <a:font script="Mong" typeface="Mongolian Baiti"/>
+        <a:font script="Viet" typeface="Times New Roman"/>
+        <a:font script="Uigh" typeface="Microsoft Uighur"/>
+        <a:font script="Geor" typeface="Sylfaen"/>
+      </a:majorFont>
+      <a:minorFont>
+        <a:latin typeface="Calibri"/>
+        <a:ea typeface=""/>
+        <a:cs typeface=""/>
+        <a:font script="Jpan" typeface="ＭＳ Ｐゴシック"/>
+        <a:font script="Hang" typeface="맑은 고딕"/>
+        <a:font script="Hans" typeface="宋体"/>
+        <a:font script="Hant" typeface="新細明體"/>
+        <a:font script="Arab" typeface="Arial"/>
+        <a:font script="Hebr" typeface="Arial"/>
+        <a:font script="Thai" typeface="Cordia New"/>
+        <a:font script="Ethi" typeface="Nyala"/>
+        <a:font script="Beng" typeface="Vrinda"/>
+        <a:font script="Gujr" typeface="Shruti"/>
+        <a:font script="Khmr" typeface="DaunPenh"/>
+        <a:font script="Knda" typeface="Tunga"/>
+        <a:font script="Guru" typeface="Raavi"/>
+        <a:font script="Cans" typeface="Euphemia"/>
+        <a:font script="Cher" typeface="Plantagenet Cherokee"/>
+        <a:font script="Yiii" typeface="Microsoft Yi Baiti"/>
+        <a:font script="Tibt" typeface="Microsoft Himalaya"/>
+        <a:font script="Thaa" typeface="MV Boli"/>
+        <a:font script="Deva" typeface="Mangal"/>
+        <a:font script="Telu" typeface="Gautami"/>
+        <a:font script="Taml" typeface="Latha"/>
+        <a:font script="Syrc" typeface="Estrangelo Edessa"/>
+        <a:font script="Orya" typeface="Kalinga"/>
+        <a:font script="Mlym" typeface="Kartika"/>
+        <a:font script="Laoo" typeface="DokChampa"/>
+        <a:font script="Sinh" typeface="Iskoola Pota"/>
+        <a:font script="Mong" typeface="Mongolian Baiti"/>
+        <a:font script="Viet" typeface="Arial"/>
+        <a:font script="Uigh" typeface="Microsoft Uighur"/>
+        <a:font script="Geor" typeface="Sylfaen"/>
+      </a:minorFont>
+    </a:fontScheme>
+    <a:fmtScheme name="Office">
+      <a:fillStyleLst>
+        <a:solidFill>
+          <a:schemeClr val="phClr"/>
+        </a:solidFill>
+        <a:gradFill rotWithShape="1">
+          <a:gsLst>
+            <a:gs pos="0">
+              <a:schemeClr val="phClr">
+                <a:tint val="50000"/>
+                <a:satMod val="300000"/>
+              </a:schemeClr>
+            </a:gs>
+            <a:gs pos="35000">
+              <a:schemeClr val="phClr">
+                <a:tint val="37000"/>
+                <a:satMod val="300000"/>
+              </a:schemeClr>
+            </a:gs>
+            <a:gs pos="100000">
+              <a:schemeClr val="phClr">
+                <a:tint val="15000"/>
+                <a:satMod val="350000"/>
+              </a:schemeClr>
+            </a:gs>
+          </a:gsLst>
+          <a:lin ang="16200000" scaled="1"/>
+        </a:gradFill>
+        <a:gradFill rotWithShape="1">
+          <a:gsLst>
+            <a:gs pos="0">
+              <a:schemeClr val="phClr">
+                <a:tint val="100000"/>
+                <a:shade val="100000"/>
+                <a:satMod val="130000"/>
+              </a:schemeClr>
+            </a:gs>
+            <a:gs pos="100000">
+              <a:schemeClr val="phClr">
+                <a:tint val="50000"/>
+                <a:shade val="100000"/>
+                <a:satMod val="350000"/>
+              </a:schemeClr>
+            </a:gs>
+          </a:gsLst>
+          <a:lin ang="16200000" scaled="0"/>
+        </a:gradFill>
+      </a:fillStyleLst>
+      <a:lnStyleLst>
+        <a:ln w="9525" cap="flat" cmpd="sng" algn="ctr">
+          <a:solidFill>
+            <a:schemeClr val="phClr">
+              <a:shade val="95000"/>
+              <a:satMod val="105000"/>
+            </a:schemeClr>
+          </a:solidFill>
+          <a:prstDash val="solid"/>
+        </a:ln>
+        <a:ln w="25400" cap="flat" cmpd="sng" algn="ctr">
+          <a:solidFill>
+            <a:schemeClr val="phClr"/>
+          </a:solidFill>
+          <a:prstDash val="solid"/>
+        </a:ln>
+        <a:ln w="38100" cap="flat" cmpd="sng" algn="ctr">
+          <a:solidFill>
+            <a:schemeClr val="phClr"/>
+          </a:solidFill>
+          <a:prstDash val="solid"/>
+        </a:ln>
+      </a:lnStyleLst>
+      <a:effectStyleLst>
+        <a:effectStyle>
+          <a:effectLst>
+            <a:outerShdw blurRad="40000" dist="20000" dir="5400000" rotWithShape="0">
+              <a:srgbClr val="000000">
+                <a:alpha val="38000"/>
+              </a:srgbClr>
+            </a:outerShdw>
+          </a:effectLst>
+        </a:effectStyle>
+        <a:effectStyle>
+          <a:effectLst>
+            <a:outerShdw blurRad="40000" dist="23000" dir="5400000" rotWithShape="0">
+              <a:srgbClr val="000000">
+                <a:alpha val="35000"/>
+              </a:srgbClr>
+            </a:outerShdw>
+          </a:effectLst>
+        </a:effectStyle>
+        <a:effectStyle>
+          <a:effectLst>
+            <a:outerShdw blurRad="40000" dist="23000" dir="5400000" rotWithShape="0">
+              <a:srgbClr val="000000">
+                <a:alpha val="35000"/>
+              </a:srgbClr>
+            </a:outerShdw>
+          </a:effectLst>
+          <a:scene3d>
+            <a:camera prst="orthographicFront">
+              <a:rot lat="0" lon="0" rev="0"/>
+            </a:camera>
+            <a:lightRig rig="threePt" dir="t">
+              <a:rot lat="0" lon="0" rev="1200000"/>
+            </a:lightRig>
+          </a:scene3d>
+          <a:sp3d>
+            <a:bevelT w="63500" h="25400"/>
+          </a:sp3d>
+        </a:effectStyle>
+      </a:effectStyleLst>
+      <a:bgFillStyleLst>
+        <a:solidFill>
+          <a:schemeClr val="phClr"/>
+        </a:solidFill>
+        <a:gradFill rotWithShape="1">
+          <a:gsLst>
+            <a:gs pos="0">
+              <a:schemeClr val="phClr">
+                <a:tint val="40000"/>
+                <a:satMod val="350000"/>
+              </a:schemeClr>
+            </a:gs>
+            <a:gs pos="40000">
+              <a:schemeClr val="phClr">
+                <a:tint val="45000"/>
+                <a:shade val="99000"/>
+                <a:satMod val="350000"/>
+              </a:schemeClr>
+            </a:gs>
+            <a:gs pos="100000">
+              <a:schemeClr val="phClr">
+                <a:shade val="20000"/>
+                <a:satMod val="255000"/>
+              </a:schemeClr>
+            </a:gs>
+          </a:gsLst>
+          <a:path path="circle">
+            <a:fillToRect l="50000" t="-80000" r="50000" b="180000"/>
+          </a:path>
+        </a:gradFill>
+        <a:gradFill rotWithShape="1">
+          <a:gsLst>
+            <a:gs pos="0">
+              <a:schemeClr val="phClr">
+                <a:tint val="80000"/>
+                <a:satMod val="300000"/>
+              </a:schemeClr>
+            </a:gs>
+            <a:gs pos="100000">
+              <a:schemeClr val="phClr">
+                <a:shade val="30000"/>
+                <a:satMod val="200000"/>
+              </a:schemeClr>
+            </a:gs>
+          </a:gsLst>
+          <a:path path="circle">
+            <a:fillToRect l="50000" t="50000" r="50000" b="50000"/>
+          </a:path>
+        </a:gradFill>
+      </a:bgFillStyleLst>
+    </a:fmtScheme>
+  </a:themeElements>
+  <a:objectDefaults>
+    <a:spDef>
+      <a:spPr/>
+      <a:bodyPr/>
+      <a:lstStyle/>
+      <a:style>
+        <a:lnRef idx="1">
+          <a:schemeClr val="accent1"/>
+        </a:lnRef>
+        <a:fillRef idx="3">
+          <a:schemeClr val="accent1"/>
+        </a:fillRef>
+        <a:effectRef idx="2">
+          <a:schemeClr val="accent1"/>
+        </a:effectRef>
+        <a:fontRef idx="minor">
+          <a:schemeClr val="lt1"/>
+        </a:fontRef>
+      </a:style>
+    </a:spDef>
+    <a:lnDef>
+      <a:spPr/>
+      <a:bodyPr/>
+      <a:lstStyle/>
+      <a:style>
+        <a:lnRef idx="2">
+          <a:schemeClr val="accent1"/>
+        </a:lnRef>
+        <a:fillRef idx="0">
+          <a:schemeClr val="accent1"/>
+        </a:fillRef>
+        <a:effectRef idx="1">
+          <a:schemeClr val="accent1"/>
+        </a:effectRef>
+        <a:fontRef idx="minor">
+          <a:schemeClr val="tx1"/>
+        </a:fontRef>
+      </a:style>
+    </a:lnDef>
+  </a:objectDefaults>
   <a:extraClrSchemeLst/>
 </a:theme>
 </file>